--- a/docs/ui-design.pptx
+++ b/docs/ui-design.pptx
@@ -5,21 +5,23 @@
     <p:sldMasterId id="2147483648" r:id="rId1"/>
   </p:sldMasterIdLst>
   <p:notesMasterIdLst>
-    <p:notesMasterId r:id="rId14"/>
+    <p:notesMasterId r:id="rId16"/>
   </p:notesMasterIdLst>
   <p:sldIdLst>
     <p:sldId id="256" r:id="rId2"/>
     <p:sldId id="259" r:id="rId3"/>
-    <p:sldId id="257" r:id="rId4"/>
-    <p:sldId id="258" r:id="rId5"/>
-    <p:sldId id="260" r:id="rId6"/>
-    <p:sldId id="261" r:id="rId7"/>
-    <p:sldId id="262" r:id="rId8"/>
-    <p:sldId id="263" r:id="rId9"/>
-    <p:sldId id="264" r:id="rId10"/>
+    <p:sldId id="269" r:id="rId4"/>
+    <p:sldId id="257" r:id="rId5"/>
+    <p:sldId id="258" r:id="rId6"/>
+    <p:sldId id="268" r:id="rId7"/>
+    <p:sldId id="263" r:id="rId8"/>
+    <p:sldId id="264" r:id="rId9"/>
+    <p:sldId id="260" r:id="rId10"/>
     <p:sldId id="265" r:id="rId11"/>
     <p:sldId id="266" r:id="rId12"/>
-    <p:sldId id="267" r:id="rId13"/>
+    <p:sldId id="261" r:id="rId13"/>
+    <p:sldId id="262" r:id="rId14"/>
+    <p:sldId id="267" r:id="rId15"/>
   </p:sldIdLst>
   <p:sldSz cx="12192000" cy="6858000"/>
   <p:notesSz cx="6858000" cy="9144000"/>
@@ -789,7 +791,7 @@
           <a:p>
             <a:fld id="{2B1BAFFC-2069-45AF-BA0A-0818E8870C46}" type="datetimeFigureOut">
               <a:rPr lang="en-US" smtClean="0"/>
-              <a:t>9/23/2026</a:t>
+              <a:t>9/24/2026</a:t>
             </a:fld>
             <a:endParaRPr lang="en-US"/>
           </a:p>
@@ -1121,7 +1123,7 @@
           <a:p>
             <a:fld id="{F1B2B32C-CE91-489F-AE52-446B2C4B8BEC}" type="slidenum">
               <a:rPr lang="en-US" smtClean="0"/>
-              <a:t>3</a:t>
+              <a:t>4</a:t>
             </a:fld>
             <a:endParaRPr lang="en-US"/>
           </a:p>
@@ -1205,7 +1207,7 @@
           <a:p>
             <a:fld id="{F1B2B32C-CE91-489F-AE52-446B2C4B8BEC}" type="slidenum">
               <a:rPr lang="en-US" smtClean="0"/>
-              <a:t>6</a:t>
+              <a:t>12</a:t>
             </a:fld>
             <a:endParaRPr lang="en-US"/>
           </a:p>
@@ -1371,7 +1373,7 @@
           <a:p>
             <a:fld id="{F26C9A43-6345-44EF-9524-1C666F5DBCDD}" type="datetimeFigureOut">
               <a:rPr lang="en-US" smtClean="0"/>
-              <a:t>9/23/2026</a:t>
+              <a:t>9/24/2026</a:t>
             </a:fld>
             <a:endParaRPr lang="en-US"/>
           </a:p>
@@ -1625,7 +1627,7 @@
             <a:fld id="{F26C9A43-6345-44EF-9524-1C666F5DBCDD}" type="datetimeFigureOut">
               <a:rPr lang="en-US" smtClean="0"/>
               <a:pPr/>
-              <a:t>9/23/2026</a:t>
+              <a:t>9/24/2026</a:t>
             </a:fld>
             <a:endParaRPr lang="en-US" sz="800"/>
           </a:p>
@@ -1927,7 +1929,7 @@
           <a:p>
             <a:fld id="{F26C9A43-6345-44EF-9524-1C666F5DBCDD}" type="datetimeFigureOut">
               <a:rPr lang="en-US" smtClean="0"/>
-              <a:t>9/23/2026</a:t>
+              <a:t>9/24/2026</a:t>
             </a:fld>
             <a:endParaRPr lang="en-US"/>
           </a:p>
@@ -2192,7 +2194,7 @@
           <a:p>
             <a:fld id="{F26C9A43-6345-44EF-9524-1C666F5DBCDD}" type="datetimeFigureOut">
               <a:rPr lang="en-US" smtClean="0"/>
-              <a:t>9/23/2026</a:t>
+              <a:t>9/24/2026</a:t>
             </a:fld>
             <a:endParaRPr lang="en-US"/>
           </a:p>
@@ -2604,7 +2606,7 @@
           <a:p>
             <a:fld id="{F26C9A43-6345-44EF-9524-1C666F5DBCDD}" type="datetimeFigureOut">
               <a:rPr lang="en-US" smtClean="0"/>
-              <a:t>9/23/2026</a:t>
+              <a:t>9/24/2026</a:t>
             </a:fld>
             <a:endParaRPr lang="en-US"/>
           </a:p>
@@ -2745,7 +2747,7 @@
           <a:p>
             <a:fld id="{F26C9A43-6345-44EF-9524-1C666F5DBCDD}" type="datetimeFigureOut">
               <a:rPr lang="en-US" smtClean="0"/>
-              <a:t>9/23/2026</a:t>
+              <a:t>9/24/2026</a:t>
             </a:fld>
             <a:endParaRPr lang="en-US"/>
           </a:p>
@@ -2858,7 +2860,7 @@
           <a:p>
             <a:fld id="{F26C9A43-6345-44EF-9524-1C666F5DBCDD}" type="datetimeFigureOut">
               <a:rPr lang="en-US" smtClean="0"/>
-              <a:t>9/23/2026</a:t>
+              <a:t>9/24/2026</a:t>
             </a:fld>
             <a:endParaRPr lang="en-US"/>
           </a:p>
@@ -3102,7 +3104,7 @@
             <a:fld id="{F26C9A43-6345-44EF-9524-1C666F5DBCDD}" type="datetimeFigureOut">
               <a:rPr lang="en-US" smtClean="0"/>
               <a:pPr/>
-              <a:t>9/23/2026</a:t>
+              <a:t>9/24/2026</a:t>
             </a:fld>
             <a:endParaRPr lang="en-US"/>
           </a:p>
@@ -6297,7 +6299,7 @@
           <p:cNvPr id="2" name="Title 1">
             <a:extLst>
               <a:ext uri="{FF2B5EF4-FFF2-40B4-BE49-F238E27FC236}">
-                <a16:creationId xmlns:a16="http://schemas.microsoft.com/office/drawing/2014/main" id="{2D298B34-DD16-7F25-2C93-80614FC9DC2D}"/>
+                <a16:creationId xmlns:a16="http://schemas.microsoft.com/office/drawing/2014/main" id="{12E37519-6D6E-2173-73D0-5BC8AD146FED}"/>
               </a:ext>
             </a:extLst>
           </p:cNvPr>
@@ -6317,7 +6319,7 @@
           <a:p>
             <a:r>
               <a:rPr lang="en-US" dirty="0"/>
-              <a:t>Dialog: Edit User Role Permissions</a:t>
+              <a:t>Dialog: Organization Picker </a:t>
             </a:r>
           </a:p>
         </p:txBody>
@@ -6327,7 +6329,7 @@
           <p:cNvPr id="3" name="Rectangle 2">
             <a:extLst>
               <a:ext uri="{FF2B5EF4-FFF2-40B4-BE49-F238E27FC236}">
-                <a16:creationId xmlns:a16="http://schemas.microsoft.com/office/drawing/2014/main" id="{2A95DD90-4EC0-94DD-98E5-CEF5AF0172E4}"/>
+                <a16:creationId xmlns:a16="http://schemas.microsoft.com/office/drawing/2014/main" id="{85F6A521-DE79-9015-5C20-C57CBD7A4AAC}"/>
               </a:ext>
             </a:extLst>
           </p:cNvPr>
@@ -6337,7 +6339,7 @@
         <p:spPr>
           <a:xfrm>
             <a:off x="405036" y="1264204"/>
-            <a:ext cx="8929208" cy="3553272"/>
+            <a:ext cx="7100408" cy="3553272"/>
           </a:xfrm>
           <a:prstGeom prst="rect">
             <a:avLst/>
@@ -6374,7 +6376,7 @@
           <p:cNvPr id="4" name="Rectangle 3">
             <a:extLst>
               <a:ext uri="{FF2B5EF4-FFF2-40B4-BE49-F238E27FC236}">
-                <a16:creationId xmlns:a16="http://schemas.microsoft.com/office/drawing/2014/main" id="{01233C4F-BDCA-D582-9345-64E34B18EAFF}"/>
+                <a16:creationId xmlns:a16="http://schemas.microsoft.com/office/drawing/2014/main" id="{DC6CEFF7-D488-AB9A-9ADA-ACF8D8EE005B}"/>
               </a:ext>
             </a:extLst>
           </p:cNvPr>
@@ -6412,6 +6414,2830 @@
           <a:p>
             <a:r>
               <a:rPr lang="en-US" dirty="0"/>
+              <a:t>Pick an Organization for {purpose}</a:t>
+            </a:r>
+          </a:p>
+        </p:txBody>
+      </p:sp>
+      <p:pic>
+        <p:nvPicPr>
+          <p:cNvPr id="7" name="Picture 6">
+            <a:extLst>
+              <a:ext uri="{FF2B5EF4-FFF2-40B4-BE49-F238E27FC236}">
+                <a16:creationId xmlns:a16="http://schemas.microsoft.com/office/drawing/2014/main" id="{A1CE7DD3-3F77-8BBD-D3A2-A4B505C8D7D6}"/>
+              </a:ext>
+            </a:extLst>
+          </p:cNvPr>
+          <p:cNvPicPr>
+            <a:picLocks noChangeAspect="1"/>
+          </p:cNvPicPr>
+          <p:nvPr/>
+        </p:nvPicPr>
+        <p:blipFill>
+          <a:blip r:embed="rId4"/>
+          <a:stretch>
+            <a:fillRect/>
+          </a:stretch>
+        </p:blipFill>
+        <p:spPr>
+          <a:xfrm>
+            <a:off x="6890996" y="4215392"/>
+            <a:ext cx="525779" cy="509087"/>
+          </a:xfrm>
+          <a:prstGeom prst="rect">
+            <a:avLst/>
+          </a:prstGeom>
+        </p:spPr>
+      </p:pic>
+      <p:pic>
+        <p:nvPicPr>
+          <p:cNvPr id="13" name="Picture 12">
+            <a:extLst>
+              <a:ext uri="{FF2B5EF4-FFF2-40B4-BE49-F238E27FC236}">
+                <a16:creationId xmlns:a16="http://schemas.microsoft.com/office/drawing/2014/main" id="{D99EED13-75DE-9C06-A788-DB81A1364572}"/>
+              </a:ext>
+            </a:extLst>
+          </p:cNvPr>
+          <p:cNvPicPr>
+            <a:picLocks noChangeAspect="1"/>
+          </p:cNvPicPr>
+          <p:nvPr/>
+        </p:nvPicPr>
+        <p:blipFill>
+          <a:blip r:embed="rId5"/>
+          <a:stretch>
+            <a:fillRect/>
+          </a:stretch>
+        </p:blipFill>
+        <p:spPr>
+          <a:xfrm>
+            <a:off x="6363979" y="4222894"/>
+            <a:ext cx="450668" cy="500742"/>
+          </a:xfrm>
+          <a:prstGeom prst="rect">
+            <a:avLst/>
+          </a:prstGeom>
+        </p:spPr>
+      </p:pic>
+      <p:grpSp>
+        <p:nvGrpSpPr>
+          <p:cNvPr id="51" name="Group 50">
+            <a:extLst>
+              <a:ext uri="{FF2B5EF4-FFF2-40B4-BE49-F238E27FC236}">
+                <a16:creationId xmlns:a16="http://schemas.microsoft.com/office/drawing/2014/main" id="{76A915C4-5E70-3BCE-964E-77A2367D2E00}"/>
+              </a:ext>
+            </a:extLst>
+          </p:cNvPr>
+          <p:cNvGrpSpPr/>
+          <p:nvPr/>
+        </p:nvGrpSpPr>
+        <p:grpSpPr>
+          <a:xfrm>
+            <a:off x="478651" y="1354540"/>
+            <a:ext cx="6938124" cy="2767012"/>
+            <a:chOff x="478651" y="1354540"/>
+            <a:chExt cx="6888619" cy="2767012"/>
+          </a:xfrm>
+        </p:grpSpPr>
+        <p:sp>
+          <p:nvSpPr>
+            <p:cNvPr id="46" name="Rectangle 45">
+              <a:extLst>
+                <a:ext uri="{FF2B5EF4-FFF2-40B4-BE49-F238E27FC236}">
+                  <a16:creationId xmlns:a16="http://schemas.microsoft.com/office/drawing/2014/main" id="{DEC18D26-BFAF-7F7A-9916-5950689BCF8A}"/>
+                </a:ext>
+              </a:extLst>
+            </p:cNvPr>
+            <p:cNvSpPr/>
+            <p:nvPr/>
+          </p:nvSpPr>
+          <p:spPr>
+            <a:xfrm>
+              <a:off x="478651" y="1354540"/>
+              <a:ext cx="6888619" cy="2767012"/>
+            </a:xfrm>
+            <a:prstGeom prst="rect">
+              <a:avLst/>
+            </a:prstGeom>
+            <a:solidFill>
+              <a:srgbClr val="FFFFFF">
+                <a:alpha val="80000"/>
+              </a:srgbClr>
+            </a:solidFill>
+          </p:spPr>
+          <p:style>
+            <a:lnRef idx="2">
+              <a:schemeClr val="accent1">
+                <a:shade val="15000"/>
+              </a:schemeClr>
+            </a:lnRef>
+            <a:fillRef idx="1">
+              <a:schemeClr val="accent1"/>
+            </a:fillRef>
+            <a:effectRef idx="0">
+              <a:schemeClr val="accent1"/>
+            </a:effectRef>
+            <a:fontRef idx="minor">
+              <a:schemeClr val="lt1"/>
+            </a:fontRef>
+          </p:style>
+          <p:txBody>
+            <a:bodyPr rtlCol="0" anchor="t"/>
+            <a:lstStyle/>
+            <a:p>
+              <a:endParaRPr lang="en-US" dirty="0">
+                <a:solidFill>
+                  <a:schemeClr val="tx1"/>
+                </a:solidFill>
+              </a:endParaRPr>
+            </a:p>
+          </p:txBody>
+        </p:sp>
+        <p:sp>
+          <p:nvSpPr>
+            <p:cNvPr id="47" name="Rectangle 46">
+              <a:extLst>
+                <a:ext uri="{FF2B5EF4-FFF2-40B4-BE49-F238E27FC236}">
+                  <a16:creationId xmlns:a16="http://schemas.microsoft.com/office/drawing/2014/main" id="{EC8CCE65-789B-D739-9C83-C8014C8757AF}"/>
+                </a:ext>
+              </a:extLst>
+            </p:cNvPr>
+            <p:cNvSpPr/>
+            <p:nvPr/>
+          </p:nvSpPr>
+          <p:spPr>
+            <a:xfrm>
+              <a:off x="7225211" y="1354540"/>
+              <a:ext cx="121324" cy="2767012"/>
+            </a:xfrm>
+            <a:prstGeom prst="rect">
+              <a:avLst/>
+            </a:prstGeom>
+            <a:solidFill>
+              <a:schemeClr val="bg1">
+                <a:lumMod val="95000"/>
+              </a:schemeClr>
+            </a:solidFill>
+            <a:ln w="3175">
+              <a:solidFill>
+                <a:schemeClr val="tx1"/>
+              </a:solidFill>
+            </a:ln>
+          </p:spPr>
+          <p:style>
+            <a:lnRef idx="2">
+              <a:schemeClr val="accent1">
+                <a:shade val="15000"/>
+              </a:schemeClr>
+            </a:lnRef>
+            <a:fillRef idx="1">
+              <a:schemeClr val="accent1"/>
+            </a:fillRef>
+            <a:effectRef idx="0">
+              <a:schemeClr val="accent1"/>
+            </a:effectRef>
+            <a:fontRef idx="minor">
+              <a:schemeClr val="lt1"/>
+            </a:fontRef>
+          </p:style>
+          <p:txBody>
+            <a:bodyPr rtlCol="0" anchor="ctr"/>
+            <a:lstStyle/>
+            <a:p>
+              <a:pPr algn="ctr"/>
+              <a:endParaRPr lang="en-US"/>
+            </a:p>
+          </p:txBody>
+        </p:sp>
+        <p:sp>
+          <p:nvSpPr>
+            <p:cNvPr id="48" name="Rectangle: Rounded Corners 47">
+              <a:extLst>
+                <a:ext uri="{FF2B5EF4-FFF2-40B4-BE49-F238E27FC236}">
+                  <a16:creationId xmlns:a16="http://schemas.microsoft.com/office/drawing/2014/main" id="{4B1CF00C-37A0-BCDF-960F-A3FE4A332B04}"/>
+                </a:ext>
+              </a:extLst>
+            </p:cNvPr>
+            <p:cNvSpPr/>
+            <p:nvPr/>
+          </p:nvSpPr>
+          <p:spPr>
+            <a:xfrm>
+              <a:off x="7225211" y="1653033"/>
+              <a:ext cx="132353" cy="334583"/>
+            </a:xfrm>
+            <a:prstGeom prst="roundRect">
+              <a:avLst/>
+            </a:prstGeom>
+            <a:solidFill>
+              <a:srgbClr val="FFFFFF">
+                <a:alpha val="80000"/>
+              </a:srgbClr>
+            </a:solidFill>
+          </p:spPr>
+          <p:style>
+            <a:lnRef idx="2">
+              <a:schemeClr val="accent1">
+                <a:shade val="15000"/>
+              </a:schemeClr>
+            </a:lnRef>
+            <a:fillRef idx="1">
+              <a:schemeClr val="accent1"/>
+            </a:fillRef>
+            <a:effectRef idx="0">
+              <a:schemeClr val="accent1"/>
+            </a:effectRef>
+            <a:fontRef idx="minor">
+              <a:schemeClr val="lt1"/>
+            </a:fontRef>
+          </p:style>
+          <p:txBody>
+            <a:bodyPr rtlCol="0" anchor="ctr"/>
+            <a:lstStyle/>
+            <a:p>
+              <a:pPr algn="ctr"/>
+              <a:endParaRPr lang="en-US"/>
+            </a:p>
+          </p:txBody>
+        </p:sp>
+        <p:sp>
+          <p:nvSpPr>
+            <p:cNvPr id="49" name="Isosceles Triangle 48">
+              <a:extLst>
+                <a:ext uri="{FF2B5EF4-FFF2-40B4-BE49-F238E27FC236}">
+                  <a16:creationId xmlns:a16="http://schemas.microsoft.com/office/drawing/2014/main" id="{7EFDBC93-27ED-5B11-F2A7-094E22F94775}"/>
+                </a:ext>
+              </a:extLst>
+            </p:cNvPr>
+            <p:cNvSpPr/>
+            <p:nvPr/>
+          </p:nvSpPr>
+          <p:spPr>
+            <a:xfrm>
+              <a:off x="7223570" y="1368261"/>
+              <a:ext cx="132353" cy="198259"/>
+            </a:xfrm>
+            <a:prstGeom prst="triangle">
+              <a:avLst/>
+            </a:prstGeom>
+            <a:solidFill>
+              <a:srgbClr val="FFFFFF">
+                <a:alpha val="80000"/>
+              </a:srgbClr>
+            </a:solidFill>
+          </p:spPr>
+          <p:style>
+            <a:lnRef idx="2">
+              <a:schemeClr val="accent1">
+                <a:shade val="15000"/>
+              </a:schemeClr>
+            </a:lnRef>
+            <a:fillRef idx="1">
+              <a:schemeClr val="accent1"/>
+            </a:fillRef>
+            <a:effectRef idx="0">
+              <a:schemeClr val="accent1"/>
+            </a:effectRef>
+            <a:fontRef idx="minor">
+              <a:schemeClr val="lt1"/>
+            </a:fontRef>
+          </p:style>
+          <p:txBody>
+            <a:bodyPr rtlCol="0" anchor="ctr"/>
+            <a:lstStyle/>
+            <a:p>
+              <a:pPr algn="ctr"/>
+              <a:endParaRPr lang="en-US"/>
+            </a:p>
+          </p:txBody>
+        </p:sp>
+        <p:sp>
+          <p:nvSpPr>
+            <p:cNvPr id="50" name="Isosceles Triangle 49">
+              <a:extLst>
+                <a:ext uri="{FF2B5EF4-FFF2-40B4-BE49-F238E27FC236}">
+                  <a16:creationId xmlns:a16="http://schemas.microsoft.com/office/drawing/2014/main" id="{E659D3AE-D4E5-E87F-BD6B-854582356853}"/>
+                </a:ext>
+              </a:extLst>
+            </p:cNvPr>
+            <p:cNvSpPr/>
+            <p:nvPr/>
+          </p:nvSpPr>
+          <p:spPr>
+            <a:xfrm flipV="1">
+              <a:off x="7220788" y="3923293"/>
+              <a:ext cx="132353" cy="198259"/>
+            </a:xfrm>
+            <a:prstGeom prst="triangle">
+              <a:avLst/>
+            </a:prstGeom>
+            <a:solidFill>
+              <a:srgbClr val="FFFFFF">
+                <a:alpha val="80000"/>
+              </a:srgbClr>
+            </a:solidFill>
+          </p:spPr>
+          <p:style>
+            <a:lnRef idx="2">
+              <a:schemeClr val="accent1">
+                <a:shade val="15000"/>
+              </a:schemeClr>
+            </a:lnRef>
+            <a:fillRef idx="1">
+              <a:schemeClr val="accent1"/>
+            </a:fillRef>
+            <a:effectRef idx="0">
+              <a:schemeClr val="accent1"/>
+            </a:effectRef>
+            <a:fontRef idx="minor">
+              <a:schemeClr val="lt1"/>
+            </a:fontRef>
+          </p:style>
+          <p:txBody>
+            <a:bodyPr rtlCol="0" anchor="ctr"/>
+            <a:lstStyle/>
+            <a:p>
+              <a:pPr algn="ctr"/>
+              <a:endParaRPr lang="en-US"/>
+            </a:p>
+          </p:txBody>
+        </p:sp>
+      </p:grpSp>
+      <p:sp>
+        <p:nvSpPr>
+          <p:cNvPr id="16" name="Rectangle 15">
+            <a:extLst>
+              <a:ext uri="{FF2B5EF4-FFF2-40B4-BE49-F238E27FC236}">
+                <a16:creationId xmlns:a16="http://schemas.microsoft.com/office/drawing/2014/main" id="{4C39AA02-4C6F-A78C-B328-1B0A7BEA6A7F}"/>
+              </a:ext>
+            </a:extLst>
+          </p:cNvPr>
+          <p:cNvSpPr/>
+          <p:nvPr/>
+        </p:nvSpPr>
+        <p:spPr>
+          <a:xfrm>
+            <a:off x="1797800" y="1427170"/>
+            <a:ext cx="5405619" cy="364000"/>
+          </a:xfrm>
+          <a:prstGeom prst="rect">
+            <a:avLst/>
+          </a:prstGeom>
+          <a:solidFill>
+            <a:schemeClr val="bg1">
+              <a:lumMod val="85000"/>
+            </a:schemeClr>
+          </a:solidFill>
+        </p:spPr>
+        <p:style>
+          <a:lnRef idx="2">
+            <a:schemeClr val="accent1">
+              <a:shade val="15000"/>
+            </a:schemeClr>
+          </a:lnRef>
+          <a:fillRef idx="1">
+            <a:schemeClr val="accent1"/>
+          </a:fillRef>
+          <a:effectRef idx="0">
+            <a:schemeClr val="accent1"/>
+          </a:effectRef>
+          <a:fontRef idx="minor">
+            <a:schemeClr val="lt1"/>
+          </a:fontRef>
+        </p:style>
+        <p:txBody>
+          <a:bodyPr rtlCol="0" anchor="ctr"/>
+          <a:lstStyle/>
+          <a:p>
+            <a:r>
+              <a:rPr lang="en-US" dirty="0">
+                <a:solidFill>
+                  <a:schemeClr val="tx1"/>
+                </a:solidFill>
+              </a:rPr>
+              <a:t>Root Organization</a:t>
+            </a:r>
+          </a:p>
+        </p:txBody>
+      </p:sp>
+      <p:sp>
+        <p:nvSpPr>
+          <p:cNvPr id="20" name="Rectangle 19">
+            <a:extLst>
+              <a:ext uri="{FF2B5EF4-FFF2-40B4-BE49-F238E27FC236}">
+                <a16:creationId xmlns:a16="http://schemas.microsoft.com/office/drawing/2014/main" id="{3F5F25F5-3914-2CA8-EA0F-512B11F1965D}"/>
+              </a:ext>
+            </a:extLst>
+          </p:cNvPr>
+          <p:cNvSpPr/>
+          <p:nvPr/>
+        </p:nvSpPr>
+        <p:spPr>
+          <a:xfrm>
+            <a:off x="1060657" y="1923370"/>
+            <a:ext cx="666800" cy="365733"/>
+          </a:xfrm>
+          <a:prstGeom prst="rect">
+            <a:avLst/>
+          </a:prstGeom>
+          <a:solidFill>
+            <a:schemeClr val="bg1"/>
+          </a:solidFill>
+          <a:ln>
+            <a:solidFill>
+              <a:schemeClr val="bg1">
+                <a:lumMod val="95000"/>
+              </a:schemeClr>
+            </a:solidFill>
+          </a:ln>
+        </p:spPr>
+        <p:style>
+          <a:lnRef idx="2">
+            <a:schemeClr val="accent1">
+              <a:shade val="15000"/>
+            </a:schemeClr>
+          </a:lnRef>
+          <a:fillRef idx="1">
+            <a:schemeClr val="accent1"/>
+          </a:fillRef>
+          <a:effectRef idx="0">
+            <a:schemeClr val="accent1"/>
+          </a:effectRef>
+          <a:fontRef idx="minor">
+            <a:schemeClr val="lt1"/>
+          </a:fontRef>
+        </p:style>
+        <p:txBody>
+          <a:bodyPr rtlCol="0" anchor="ctr"/>
+          <a:lstStyle/>
+          <a:p>
+            <a:pPr algn="r"/>
+            <a:r>
+              <a:rPr lang="en-US" sz="1200" dirty="0">
+                <a:solidFill>
+                  <a:schemeClr val="tx1"/>
+                </a:solidFill>
+                <a:latin typeface="Roboto" panose="02000000000000000000" pitchFamily="2" charset="0"/>
+                <a:ea typeface="Roboto" panose="02000000000000000000" pitchFamily="2" charset="0"/>
+              </a:rPr>
+              <a:t>1</a:t>
+            </a:r>
+          </a:p>
+        </p:txBody>
+      </p:sp>
+      <p:sp>
+        <p:nvSpPr>
+          <p:cNvPr id="52" name="Rectangle 51">
+            <a:extLst>
+              <a:ext uri="{FF2B5EF4-FFF2-40B4-BE49-F238E27FC236}">
+                <a16:creationId xmlns:a16="http://schemas.microsoft.com/office/drawing/2014/main" id="{B15C2939-D092-AC0F-4E47-CD60B768F49C}"/>
+              </a:ext>
+            </a:extLst>
+          </p:cNvPr>
+          <p:cNvSpPr/>
+          <p:nvPr/>
+        </p:nvSpPr>
+        <p:spPr>
+          <a:xfrm>
+            <a:off x="560144" y="1427170"/>
+            <a:ext cx="381650" cy="365733"/>
+          </a:xfrm>
+          <a:prstGeom prst="rect">
+            <a:avLst/>
+          </a:prstGeom>
+          <a:solidFill>
+            <a:schemeClr val="bg1"/>
+          </a:solidFill>
+        </p:spPr>
+        <p:style>
+          <a:lnRef idx="2">
+            <a:schemeClr val="accent1">
+              <a:shade val="15000"/>
+            </a:schemeClr>
+          </a:lnRef>
+          <a:fillRef idx="1">
+            <a:schemeClr val="accent1"/>
+          </a:fillRef>
+          <a:effectRef idx="0">
+            <a:schemeClr val="accent1"/>
+          </a:effectRef>
+          <a:fontRef idx="minor">
+            <a:schemeClr val="lt1"/>
+          </a:fontRef>
+        </p:style>
+        <p:txBody>
+          <a:bodyPr rtlCol="0" anchor="ctr"/>
+          <a:lstStyle/>
+          <a:p>
+            <a:pPr algn="ctr"/>
+            <a:endParaRPr lang="en-US"/>
+          </a:p>
+        </p:txBody>
+      </p:sp>
+      <p:pic>
+        <p:nvPicPr>
+          <p:cNvPr id="9" name="Picture 8">
+            <a:extLst>
+              <a:ext uri="{FF2B5EF4-FFF2-40B4-BE49-F238E27FC236}">
+                <a16:creationId xmlns:a16="http://schemas.microsoft.com/office/drawing/2014/main" id="{465E9DC0-7902-9502-7BC0-01CF47EBC018}"/>
+              </a:ext>
+            </a:extLst>
+          </p:cNvPr>
+          <p:cNvPicPr>
+            <a:picLocks noChangeAspect="1"/>
+          </p:cNvPicPr>
+          <p:nvPr/>
+        </p:nvPicPr>
+        <p:blipFill>
+          <a:blip r:embed="rId6"/>
+          <a:stretch>
+            <a:fillRect/>
+          </a:stretch>
+        </p:blipFill>
+        <p:spPr>
+          <a:xfrm>
+            <a:off x="625290" y="1451490"/>
+            <a:ext cx="279230" cy="316109"/>
+          </a:xfrm>
+          <a:prstGeom prst="rect">
+            <a:avLst/>
+          </a:prstGeom>
+        </p:spPr>
+      </p:pic>
+      <p:sp>
+        <p:nvSpPr>
+          <p:cNvPr id="53" name="Rectangle 52">
+            <a:extLst>
+              <a:ext uri="{FF2B5EF4-FFF2-40B4-BE49-F238E27FC236}">
+                <a16:creationId xmlns:a16="http://schemas.microsoft.com/office/drawing/2014/main" id="{1CC4F04E-BA3F-1FD8-94E6-86EE4BA289BE}"/>
+              </a:ext>
+            </a:extLst>
+          </p:cNvPr>
+          <p:cNvSpPr/>
+          <p:nvPr/>
+        </p:nvSpPr>
+        <p:spPr>
+          <a:xfrm>
+            <a:off x="2183906" y="1913342"/>
+            <a:ext cx="4589382" cy="364000"/>
+          </a:xfrm>
+          <a:prstGeom prst="rect">
+            <a:avLst/>
+          </a:prstGeom>
+          <a:solidFill>
+            <a:schemeClr val="bg1"/>
+          </a:solidFill>
+        </p:spPr>
+        <p:style>
+          <a:lnRef idx="2">
+            <a:schemeClr val="accent1">
+              <a:shade val="15000"/>
+            </a:schemeClr>
+          </a:lnRef>
+          <a:fillRef idx="1">
+            <a:schemeClr val="accent1"/>
+          </a:fillRef>
+          <a:effectRef idx="0">
+            <a:schemeClr val="accent1"/>
+          </a:effectRef>
+          <a:fontRef idx="minor">
+            <a:schemeClr val="lt1"/>
+          </a:fontRef>
+        </p:style>
+        <p:txBody>
+          <a:bodyPr rtlCol="0" anchor="ctr"/>
+          <a:lstStyle/>
+          <a:p>
+            <a:r>
+              <a:rPr lang="en-US" dirty="0">
+                <a:solidFill>
+                  <a:schemeClr val="tx1"/>
+                </a:solidFill>
+              </a:rPr>
+              <a:t>Sub Organization</a:t>
+            </a:r>
+          </a:p>
+        </p:txBody>
+      </p:sp>
+      <p:sp>
+        <p:nvSpPr>
+          <p:cNvPr id="57" name="Rectangle 56">
+            <a:extLst>
+              <a:ext uri="{FF2B5EF4-FFF2-40B4-BE49-F238E27FC236}">
+                <a16:creationId xmlns:a16="http://schemas.microsoft.com/office/drawing/2014/main" id="{5B426F19-32E5-BEC2-CC41-03CEFD1AE820}"/>
+              </a:ext>
+            </a:extLst>
+          </p:cNvPr>
+          <p:cNvSpPr/>
+          <p:nvPr/>
+        </p:nvSpPr>
+        <p:spPr>
+          <a:xfrm>
+            <a:off x="560144" y="1923973"/>
+            <a:ext cx="381650" cy="365733"/>
+          </a:xfrm>
+          <a:prstGeom prst="rect">
+            <a:avLst/>
+          </a:prstGeom>
+          <a:solidFill>
+            <a:schemeClr val="bg1"/>
+          </a:solidFill>
+        </p:spPr>
+        <p:style>
+          <a:lnRef idx="2">
+            <a:schemeClr val="accent1">
+              <a:shade val="15000"/>
+            </a:schemeClr>
+          </a:lnRef>
+          <a:fillRef idx="1">
+            <a:schemeClr val="accent1"/>
+          </a:fillRef>
+          <a:effectRef idx="0">
+            <a:schemeClr val="accent1"/>
+          </a:effectRef>
+          <a:fontRef idx="minor">
+            <a:schemeClr val="lt1"/>
+          </a:fontRef>
+        </p:style>
+        <p:txBody>
+          <a:bodyPr rtlCol="0" anchor="ctr"/>
+          <a:lstStyle/>
+          <a:p>
+            <a:pPr algn="ctr"/>
+            <a:endParaRPr lang="en-US"/>
+          </a:p>
+        </p:txBody>
+      </p:sp>
+      <p:pic>
+        <p:nvPicPr>
+          <p:cNvPr id="58" name="Picture 57">
+            <a:extLst>
+              <a:ext uri="{FF2B5EF4-FFF2-40B4-BE49-F238E27FC236}">
+                <a16:creationId xmlns:a16="http://schemas.microsoft.com/office/drawing/2014/main" id="{74DB9F84-6477-C1D7-323E-6F8402754521}"/>
+              </a:ext>
+            </a:extLst>
+          </p:cNvPr>
+          <p:cNvPicPr>
+            <a:picLocks noChangeAspect="1"/>
+          </p:cNvPicPr>
+          <p:nvPr/>
+        </p:nvPicPr>
+        <p:blipFill>
+          <a:blip r:embed="rId6"/>
+          <a:stretch>
+            <a:fillRect/>
+          </a:stretch>
+        </p:blipFill>
+        <p:spPr>
+          <a:xfrm>
+            <a:off x="625290" y="1948293"/>
+            <a:ext cx="279230" cy="316109"/>
+          </a:xfrm>
+          <a:prstGeom prst="rect">
+            <a:avLst/>
+          </a:prstGeom>
+        </p:spPr>
+      </p:pic>
+      <p:sp>
+        <p:nvSpPr>
+          <p:cNvPr id="61" name="Rectangle 60">
+            <a:extLst>
+              <a:ext uri="{FF2B5EF4-FFF2-40B4-BE49-F238E27FC236}">
+                <a16:creationId xmlns:a16="http://schemas.microsoft.com/office/drawing/2014/main" id="{DD4F41A0-46A3-0639-9AD6-ED834645953F}"/>
+              </a:ext>
+            </a:extLst>
+          </p:cNvPr>
+          <p:cNvSpPr/>
+          <p:nvPr/>
+        </p:nvSpPr>
+        <p:spPr>
+          <a:xfrm>
+            <a:off x="2190669" y="2367678"/>
+            <a:ext cx="4589382" cy="364000"/>
+          </a:xfrm>
+          <a:prstGeom prst="rect">
+            <a:avLst/>
+          </a:prstGeom>
+          <a:solidFill>
+            <a:schemeClr val="bg1"/>
+          </a:solidFill>
+        </p:spPr>
+        <p:style>
+          <a:lnRef idx="2">
+            <a:schemeClr val="accent1">
+              <a:shade val="15000"/>
+            </a:schemeClr>
+          </a:lnRef>
+          <a:fillRef idx="1">
+            <a:schemeClr val="accent1"/>
+          </a:fillRef>
+          <a:effectRef idx="0">
+            <a:schemeClr val="accent1"/>
+          </a:effectRef>
+          <a:fontRef idx="minor">
+            <a:schemeClr val="lt1"/>
+          </a:fontRef>
+        </p:style>
+        <p:txBody>
+          <a:bodyPr rtlCol="0" anchor="ctr"/>
+          <a:lstStyle/>
+          <a:p>
+            <a:r>
+              <a:rPr lang="en-US" dirty="0">
+                <a:solidFill>
+                  <a:schemeClr val="tx1"/>
+                </a:solidFill>
+              </a:rPr>
+              <a:t>Sub Organization</a:t>
+            </a:r>
+          </a:p>
+        </p:txBody>
+      </p:sp>
+      <p:sp>
+        <p:nvSpPr>
+          <p:cNvPr id="64" name="Rectangle 63">
+            <a:extLst>
+              <a:ext uri="{FF2B5EF4-FFF2-40B4-BE49-F238E27FC236}">
+                <a16:creationId xmlns:a16="http://schemas.microsoft.com/office/drawing/2014/main" id="{9809C3A7-ED7A-36BA-9B7C-EB39F67575AA}"/>
+              </a:ext>
+            </a:extLst>
+          </p:cNvPr>
+          <p:cNvSpPr/>
+          <p:nvPr/>
+        </p:nvSpPr>
+        <p:spPr>
+          <a:xfrm>
+            <a:off x="560144" y="2395472"/>
+            <a:ext cx="381650" cy="365733"/>
+          </a:xfrm>
+          <a:prstGeom prst="rect">
+            <a:avLst/>
+          </a:prstGeom>
+          <a:solidFill>
+            <a:schemeClr val="bg1"/>
+          </a:solidFill>
+        </p:spPr>
+        <p:style>
+          <a:lnRef idx="2">
+            <a:schemeClr val="accent1">
+              <a:shade val="15000"/>
+            </a:schemeClr>
+          </a:lnRef>
+          <a:fillRef idx="1">
+            <a:schemeClr val="accent1"/>
+          </a:fillRef>
+          <a:effectRef idx="0">
+            <a:schemeClr val="accent1"/>
+          </a:effectRef>
+          <a:fontRef idx="minor">
+            <a:schemeClr val="lt1"/>
+          </a:fontRef>
+        </p:style>
+        <p:txBody>
+          <a:bodyPr rtlCol="0" anchor="ctr"/>
+          <a:lstStyle/>
+          <a:p>
+            <a:pPr algn="ctr"/>
+            <a:endParaRPr lang="en-US"/>
+          </a:p>
+        </p:txBody>
+      </p:sp>
+      <p:pic>
+        <p:nvPicPr>
+          <p:cNvPr id="65" name="Picture 64">
+            <a:extLst>
+              <a:ext uri="{FF2B5EF4-FFF2-40B4-BE49-F238E27FC236}">
+                <a16:creationId xmlns:a16="http://schemas.microsoft.com/office/drawing/2014/main" id="{D06824D8-876B-80AA-329A-616C3310B3D4}"/>
+              </a:ext>
+            </a:extLst>
+          </p:cNvPr>
+          <p:cNvPicPr>
+            <a:picLocks noChangeAspect="1"/>
+          </p:cNvPicPr>
+          <p:nvPr/>
+        </p:nvPicPr>
+        <p:blipFill>
+          <a:blip r:embed="rId6"/>
+          <a:stretch>
+            <a:fillRect/>
+          </a:stretch>
+        </p:blipFill>
+        <p:spPr>
+          <a:xfrm>
+            <a:off x="625290" y="2419792"/>
+            <a:ext cx="279230" cy="316109"/>
+          </a:xfrm>
+          <a:prstGeom prst="rect">
+            <a:avLst/>
+          </a:prstGeom>
+        </p:spPr>
+      </p:pic>
+      <p:sp>
+        <p:nvSpPr>
+          <p:cNvPr id="73" name="Rectangle 72">
+            <a:extLst>
+              <a:ext uri="{FF2B5EF4-FFF2-40B4-BE49-F238E27FC236}">
+                <a16:creationId xmlns:a16="http://schemas.microsoft.com/office/drawing/2014/main" id="{22A9D9EB-1EE7-3E68-8955-CBCD95FD1B89}"/>
+              </a:ext>
+            </a:extLst>
+          </p:cNvPr>
+          <p:cNvSpPr/>
+          <p:nvPr/>
+        </p:nvSpPr>
+        <p:spPr>
+          <a:xfrm>
+            <a:off x="1060656" y="2379439"/>
+            <a:ext cx="666800" cy="365733"/>
+          </a:xfrm>
+          <a:prstGeom prst="rect">
+            <a:avLst/>
+          </a:prstGeom>
+          <a:solidFill>
+            <a:schemeClr val="bg1"/>
+          </a:solidFill>
+          <a:ln>
+            <a:solidFill>
+              <a:schemeClr val="bg1">
+                <a:lumMod val="95000"/>
+              </a:schemeClr>
+            </a:solidFill>
+          </a:ln>
+        </p:spPr>
+        <p:style>
+          <a:lnRef idx="2">
+            <a:schemeClr val="accent1">
+              <a:shade val="15000"/>
+            </a:schemeClr>
+          </a:lnRef>
+          <a:fillRef idx="1">
+            <a:schemeClr val="accent1"/>
+          </a:fillRef>
+          <a:effectRef idx="0">
+            <a:schemeClr val="accent1"/>
+          </a:effectRef>
+          <a:fontRef idx="minor">
+            <a:schemeClr val="lt1"/>
+          </a:fontRef>
+        </p:style>
+        <p:txBody>
+          <a:bodyPr rtlCol="0" anchor="ctr"/>
+          <a:lstStyle/>
+          <a:p>
+            <a:pPr algn="r"/>
+            <a:r>
+              <a:rPr lang="en-US" sz="1200" dirty="0">
+                <a:solidFill>
+                  <a:schemeClr val="tx1"/>
+                </a:solidFill>
+                <a:latin typeface="Roboto" panose="02000000000000000000" pitchFamily="2" charset="0"/>
+                <a:ea typeface="Roboto" panose="02000000000000000000" pitchFamily="2" charset="0"/>
+              </a:rPr>
+              <a:t>7</a:t>
+            </a:r>
+          </a:p>
+        </p:txBody>
+      </p:sp>
+      <p:grpSp>
+        <p:nvGrpSpPr>
+          <p:cNvPr id="76" name="Group 75">
+            <a:extLst>
+              <a:ext uri="{FF2B5EF4-FFF2-40B4-BE49-F238E27FC236}">
+                <a16:creationId xmlns:a16="http://schemas.microsoft.com/office/drawing/2014/main" id="{D25FFDCE-36EC-B022-BD34-ED9C5F643AF6}"/>
+              </a:ext>
+            </a:extLst>
+          </p:cNvPr>
+          <p:cNvGrpSpPr/>
+          <p:nvPr/>
+        </p:nvGrpSpPr>
+        <p:grpSpPr>
+          <a:xfrm>
+            <a:off x="6833858" y="1914137"/>
+            <a:ext cx="381650" cy="334297"/>
+            <a:chOff x="6832420" y="1433302"/>
+            <a:chExt cx="381650" cy="334297"/>
+          </a:xfrm>
+        </p:grpSpPr>
+        <p:sp>
+          <p:nvSpPr>
+            <p:cNvPr id="77" name="Rectangle 76">
+              <a:extLst>
+                <a:ext uri="{FF2B5EF4-FFF2-40B4-BE49-F238E27FC236}">
+                  <a16:creationId xmlns:a16="http://schemas.microsoft.com/office/drawing/2014/main" id="{B73571CF-F505-8511-D59C-0CB0997804D4}"/>
+                </a:ext>
+              </a:extLst>
+            </p:cNvPr>
+            <p:cNvSpPr/>
+            <p:nvPr/>
+          </p:nvSpPr>
+          <p:spPr>
+            <a:xfrm>
+              <a:off x="6832420" y="1433302"/>
+              <a:ext cx="381650" cy="334297"/>
+            </a:xfrm>
+            <a:prstGeom prst="rect">
+              <a:avLst/>
+            </a:prstGeom>
+            <a:solidFill>
+              <a:schemeClr val="tx2">
+                <a:lumMod val="10000"/>
+                <a:lumOff val="90000"/>
+              </a:schemeClr>
+            </a:solidFill>
+          </p:spPr>
+          <p:style>
+            <a:lnRef idx="2">
+              <a:schemeClr val="accent1">
+                <a:shade val="15000"/>
+              </a:schemeClr>
+            </a:lnRef>
+            <a:fillRef idx="1">
+              <a:schemeClr val="accent1"/>
+            </a:fillRef>
+            <a:effectRef idx="0">
+              <a:schemeClr val="accent1"/>
+            </a:effectRef>
+            <a:fontRef idx="minor">
+              <a:schemeClr val="lt1"/>
+            </a:fontRef>
+          </p:style>
+          <p:txBody>
+            <a:bodyPr rtlCol="0" anchor="ctr"/>
+            <a:lstStyle/>
+            <a:p>
+              <a:pPr algn="ctr"/>
+              <a:endParaRPr lang="en-US"/>
+            </a:p>
+          </p:txBody>
+        </p:sp>
+        <p:pic>
+          <p:nvPicPr>
+            <p:cNvPr id="78" name="Picture 77">
+              <a:extLst>
+                <a:ext uri="{FF2B5EF4-FFF2-40B4-BE49-F238E27FC236}">
+                  <a16:creationId xmlns:a16="http://schemas.microsoft.com/office/drawing/2014/main" id="{7EAC0796-DF63-17F9-C4C0-611AB874325C}"/>
+                </a:ext>
+              </a:extLst>
+            </p:cNvPr>
+            <p:cNvPicPr>
+              <a:picLocks noChangeAspect="1"/>
+            </p:cNvPicPr>
+            <p:nvPr/>
+          </p:nvPicPr>
+          <p:blipFill>
+            <a:blip r:embed="rId7"/>
+            <a:stretch>
+              <a:fillRect/>
+            </a:stretch>
+          </p:blipFill>
+          <p:spPr>
+            <a:xfrm>
+              <a:off x="6881730" y="1461218"/>
+              <a:ext cx="283030" cy="278465"/>
+            </a:xfrm>
+            <a:prstGeom prst="rect">
+              <a:avLst/>
+            </a:prstGeom>
+          </p:spPr>
+        </p:pic>
+      </p:grpSp>
+      <p:grpSp>
+        <p:nvGrpSpPr>
+          <p:cNvPr id="79" name="Group 78">
+            <a:extLst>
+              <a:ext uri="{FF2B5EF4-FFF2-40B4-BE49-F238E27FC236}">
+                <a16:creationId xmlns:a16="http://schemas.microsoft.com/office/drawing/2014/main" id="{872D65A5-ECBB-C222-A989-E5E935BBA2BA}"/>
+              </a:ext>
+            </a:extLst>
+          </p:cNvPr>
+          <p:cNvGrpSpPr/>
+          <p:nvPr/>
+        </p:nvGrpSpPr>
+        <p:grpSpPr>
+          <a:xfrm>
+            <a:off x="6835296" y="2394972"/>
+            <a:ext cx="381650" cy="334297"/>
+            <a:chOff x="6832420" y="1433302"/>
+            <a:chExt cx="381650" cy="334297"/>
+          </a:xfrm>
+        </p:grpSpPr>
+        <p:sp>
+          <p:nvSpPr>
+            <p:cNvPr id="80" name="Rectangle 79">
+              <a:extLst>
+                <a:ext uri="{FF2B5EF4-FFF2-40B4-BE49-F238E27FC236}">
+                  <a16:creationId xmlns:a16="http://schemas.microsoft.com/office/drawing/2014/main" id="{57D4D87A-0B49-EC4A-F6E3-B7429A8D0407}"/>
+                </a:ext>
+              </a:extLst>
+            </p:cNvPr>
+            <p:cNvSpPr/>
+            <p:nvPr/>
+          </p:nvSpPr>
+          <p:spPr>
+            <a:xfrm>
+              <a:off x="6832420" y="1433302"/>
+              <a:ext cx="381650" cy="334297"/>
+            </a:xfrm>
+            <a:prstGeom prst="rect">
+              <a:avLst/>
+            </a:prstGeom>
+            <a:solidFill>
+              <a:schemeClr val="tx2">
+                <a:lumMod val="10000"/>
+                <a:lumOff val="90000"/>
+              </a:schemeClr>
+            </a:solidFill>
+          </p:spPr>
+          <p:style>
+            <a:lnRef idx="2">
+              <a:schemeClr val="accent1">
+                <a:shade val="15000"/>
+              </a:schemeClr>
+            </a:lnRef>
+            <a:fillRef idx="1">
+              <a:schemeClr val="accent1"/>
+            </a:fillRef>
+            <a:effectRef idx="0">
+              <a:schemeClr val="accent1"/>
+            </a:effectRef>
+            <a:fontRef idx="minor">
+              <a:schemeClr val="lt1"/>
+            </a:fontRef>
+          </p:style>
+          <p:txBody>
+            <a:bodyPr rtlCol="0" anchor="ctr"/>
+            <a:lstStyle/>
+            <a:p>
+              <a:pPr algn="ctr"/>
+              <a:endParaRPr lang="en-US"/>
+            </a:p>
+          </p:txBody>
+        </p:sp>
+        <p:pic>
+          <p:nvPicPr>
+            <p:cNvPr id="81" name="Picture 80">
+              <a:extLst>
+                <a:ext uri="{FF2B5EF4-FFF2-40B4-BE49-F238E27FC236}">
+                  <a16:creationId xmlns:a16="http://schemas.microsoft.com/office/drawing/2014/main" id="{F05A1EFD-D116-E291-0182-D29B98E0B35E}"/>
+                </a:ext>
+              </a:extLst>
+            </p:cNvPr>
+            <p:cNvPicPr>
+              <a:picLocks noChangeAspect="1"/>
+            </p:cNvPicPr>
+            <p:nvPr/>
+          </p:nvPicPr>
+          <p:blipFill>
+            <a:blip r:embed="rId7"/>
+            <a:stretch>
+              <a:fillRect/>
+            </a:stretch>
+          </p:blipFill>
+          <p:spPr>
+            <a:xfrm>
+              <a:off x="6881730" y="1461218"/>
+              <a:ext cx="283030" cy="278465"/>
+            </a:xfrm>
+            <a:prstGeom prst="rect">
+              <a:avLst/>
+            </a:prstGeom>
+          </p:spPr>
+        </p:pic>
+      </p:grpSp>
+      <p:sp>
+        <p:nvSpPr>
+          <p:cNvPr id="82" name="Rectangle 81">
+            <a:extLst>
+              <a:ext uri="{FF2B5EF4-FFF2-40B4-BE49-F238E27FC236}">
+                <a16:creationId xmlns:a16="http://schemas.microsoft.com/office/drawing/2014/main" id="{9CB991CD-08F0-517B-72C5-8E01B5A22FB6}"/>
+              </a:ext>
+            </a:extLst>
+          </p:cNvPr>
+          <p:cNvSpPr/>
+          <p:nvPr/>
+        </p:nvSpPr>
+        <p:spPr>
+          <a:xfrm>
+            <a:off x="2183906" y="2833020"/>
+            <a:ext cx="4589382" cy="364000"/>
+          </a:xfrm>
+          <a:prstGeom prst="rect">
+            <a:avLst/>
+          </a:prstGeom>
+          <a:solidFill>
+            <a:schemeClr val="bg1"/>
+          </a:solidFill>
+        </p:spPr>
+        <p:style>
+          <a:lnRef idx="2">
+            <a:schemeClr val="accent1">
+              <a:shade val="15000"/>
+            </a:schemeClr>
+          </a:lnRef>
+          <a:fillRef idx="1">
+            <a:schemeClr val="accent1"/>
+          </a:fillRef>
+          <a:effectRef idx="0">
+            <a:schemeClr val="accent1"/>
+          </a:effectRef>
+          <a:fontRef idx="minor">
+            <a:schemeClr val="lt1"/>
+          </a:fontRef>
+        </p:style>
+        <p:txBody>
+          <a:bodyPr rtlCol="0" anchor="ctr"/>
+          <a:lstStyle/>
+          <a:p>
+            <a:r>
+              <a:rPr lang="en-US" dirty="0">
+                <a:solidFill>
+                  <a:schemeClr val="tx1"/>
+                </a:solidFill>
+              </a:rPr>
+              <a:t>&gt; Sub-Sub Organization</a:t>
+            </a:r>
+          </a:p>
+        </p:txBody>
+      </p:sp>
+      <p:sp>
+        <p:nvSpPr>
+          <p:cNvPr id="83" name="Rectangle 82">
+            <a:extLst>
+              <a:ext uri="{FF2B5EF4-FFF2-40B4-BE49-F238E27FC236}">
+                <a16:creationId xmlns:a16="http://schemas.microsoft.com/office/drawing/2014/main" id="{5A345CDA-03D3-E312-0049-6B5BA927F28F}"/>
+              </a:ext>
+            </a:extLst>
+          </p:cNvPr>
+          <p:cNvSpPr/>
+          <p:nvPr/>
+        </p:nvSpPr>
+        <p:spPr>
+          <a:xfrm>
+            <a:off x="553381" y="2860814"/>
+            <a:ext cx="381650" cy="365733"/>
+          </a:xfrm>
+          <a:prstGeom prst="rect">
+            <a:avLst/>
+          </a:prstGeom>
+          <a:solidFill>
+            <a:schemeClr val="bg1"/>
+          </a:solidFill>
+        </p:spPr>
+        <p:style>
+          <a:lnRef idx="2">
+            <a:schemeClr val="accent1">
+              <a:shade val="15000"/>
+            </a:schemeClr>
+          </a:lnRef>
+          <a:fillRef idx="1">
+            <a:schemeClr val="accent1"/>
+          </a:fillRef>
+          <a:effectRef idx="0">
+            <a:schemeClr val="accent1"/>
+          </a:effectRef>
+          <a:fontRef idx="minor">
+            <a:schemeClr val="lt1"/>
+          </a:fontRef>
+        </p:style>
+        <p:txBody>
+          <a:bodyPr rtlCol="0" anchor="ctr"/>
+          <a:lstStyle/>
+          <a:p>
+            <a:pPr algn="ctr"/>
+            <a:endParaRPr lang="en-US"/>
+          </a:p>
+        </p:txBody>
+      </p:sp>
+      <p:pic>
+        <p:nvPicPr>
+          <p:cNvPr id="84" name="Picture 83">
+            <a:extLst>
+              <a:ext uri="{FF2B5EF4-FFF2-40B4-BE49-F238E27FC236}">
+                <a16:creationId xmlns:a16="http://schemas.microsoft.com/office/drawing/2014/main" id="{3F3FCFE3-7F3A-6F91-4608-4BCB6097A5B9}"/>
+              </a:ext>
+            </a:extLst>
+          </p:cNvPr>
+          <p:cNvPicPr>
+            <a:picLocks noChangeAspect="1"/>
+          </p:cNvPicPr>
+          <p:nvPr/>
+        </p:nvPicPr>
+        <p:blipFill>
+          <a:blip r:embed="rId6"/>
+          <a:stretch>
+            <a:fillRect/>
+          </a:stretch>
+        </p:blipFill>
+        <p:spPr>
+          <a:xfrm>
+            <a:off x="618527" y="2885134"/>
+            <a:ext cx="279230" cy="316109"/>
+          </a:xfrm>
+          <a:prstGeom prst="rect">
+            <a:avLst/>
+          </a:prstGeom>
+        </p:spPr>
+      </p:pic>
+      <p:sp>
+        <p:nvSpPr>
+          <p:cNvPr id="85" name="Rectangle 84">
+            <a:extLst>
+              <a:ext uri="{FF2B5EF4-FFF2-40B4-BE49-F238E27FC236}">
+                <a16:creationId xmlns:a16="http://schemas.microsoft.com/office/drawing/2014/main" id="{CD60B319-CC44-A96A-191E-B80B9054ED9B}"/>
+              </a:ext>
+            </a:extLst>
+          </p:cNvPr>
+          <p:cNvSpPr/>
+          <p:nvPr/>
+        </p:nvSpPr>
+        <p:spPr>
+          <a:xfrm>
+            <a:off x="1053893" y="2844781"/>
+            <a:ext cx="666800" cy="365733"/>
+          </a:xfrm>
+          <a:prstGeom prst="rect">
+            <a:avLst/>
+          </a:prstGeom>
+          <a:solidFill>
+            <a:schemeClr val="bg1"/>
+          </a:solidFill>
+          <a:ln>
+            <a:solidFill>
+              <a:schemeClr val="bg1">
+                <a:lumMod val="95000"/>
+              </a:schemeClr>
+            </a:solidFill>
+          </a:ln>
+        </p:spPr>
+        <p:style>
+          <a:lnRef idx="2">
+            <a:schemeClr val="accent1">
+              <a:shade val="15000"/>
+            </a:schemeClr>
+          </a:lnRef>
+          <a:fillRef idx="1">
+            <a:schemeClr val="accent1"/>
+          </a:fillRef>
+          <a:effectRef idx="0">
+            <a:schemeClr val="accent1"/>
+          </a:effectRef>
+          <a:fontRef idx="minor">
+            <a:schemeClr val="lt1"/>
+          </a:fontRef>
+        </p:style>
+        <p:txBody>
+          <a:bodyPr rtlCol="0" anchor="ctr"/>
+          <a:lstStyle/>
+          <a:p>
+            <a:pPr algn="r"/>
+            <a:r>
+              <a:rPr lang="en-US" sz="1200" dirty="0">
+                <a:solidFill>
+                  <a:schemeClr val="tx1"/>
+                </a:solidFill>
+                <a:latin typeface="Roboto" panose="02000000000000000000" pitchFamily="2" charset="0"/>
+                <a:ea typeface="Roboto" panose="02000000000000000000" pitchFamily="2" charset="0"/>
+              </a:rPr>
+              <a:t>9</a:t>
+            </a:r>
+          </a:p>
+        </p:txBody>
+      </p:sp>
+      <p:grpSp>
+        <p:nvGrpSpPr>
+          <p:cNvPr id="86" name="Group 85">
+            <a:extLst>
+              <a:ext uri="{FF2B5EF4-FFF2-40B4-BE49-F238E27FC236}">
+                <a16:creationId xmlns:a16="http://schemas.microsoft.com/office/drawing/2014/main" id="{A1647A91-262A-14D5-8C33-8BCFE19A9935}"/>
+              </a:ext>
+            </a:extLst>
+          </p:cNvPr>
+          <p:cNvGrpSpPr/>
+          <p:nvPr/>
+        </p:nvGrpSpPr>
+        <p:grpSpPr>
+          <a:xfrm>
+            <a:off x="6828533" y="2860314"/>
+            <a:ext cx="381650" cy="334297"/>
+            <a:chOff x="6832420" y="1433302"/>
+            <a:chExt cx="381650" cy="334297"/>
+          </a:xfrm>
+        </p:grpSpPr>
+        <p:sp>
+          <p:nvSpPr>
+            <p:cNvPr id="87" name="Rectangle 86">
+              <a:extLst>
+                <a:ext uri="{FF2B5EF4-FFF2-40B4-BE49-F238E27FC236}">
+                  <a16:creationId xmlns:a16="http://schemas.microsoft.com/office/drawing/2014/main" id="{BF54F370-828B-4524-6B7C-7CC5D1D2EAEB}"/>
+                </a:ext>
+              </a:extLst>
+            </p:cNvPr>
+            <p:cNvSpPr/>
+            <p:nvPr/>
+          </p:nvSpPr>
+          <p:spPr>
+            <a:xfrm>
+              <a:off x="6832420" y="1433302"/>
+              <a:ext cx="381650" cy="334297"/>
+            </a:xfrm>
+            <a:prstGeom prst="rect">
+              <a:avLst/>
+            </a:prstGeom>
+            <a:solidFill>
+              <a:schemeClr val="tx2">
+                <a:lumMod val="10000"/>
+                <a:lumOff val="90000"/>
+              </a:schemeClr>
+            </a:solidFill>
+          </p:spPr>
+          <p:style>
+            <a:lnRef idx="2">
+              <a:schemeClr val="accent1">
+                <a:shade val="15000"/>
+              </a:schemeClr>
+            </a:lnRef>
+            <a:fillRef idx="1">
+              <a:schemeClr val="accent1"/>
+            </a:fillRef>
+            <a:effectRef idx="0">
+              <a:schemeClr val="accent1"/>
+            </a:effectRef>
+            <a:fontRef idx="minor">
+              <a:schemeClr val="lt1"/>
+            </a:fontRef>
+          </p:style>
+          <p:txBody>
+            <a:bodyPr rtlCol="0" anchor="ctr"/>
+            <a:lstStyle/>
+            <a:p>
+              <a:pPr algn="ctr"/>
+              <a:endParaRPr lang="en-US"/>
+            </a:p>
+          </p:txBody>
+        </p:sp>
+        <p:pic>
+          <p:nvPicPr>
+            <p:cNvPr id="88" name="Picture 87">
+              <a:extLst>
+                <a:ext uri="{FF2B5EF4-FFF2-40B4-BE49-F238E27FC236}">
+                  <a16:creationId xmlns:a16="http://schemas.microsoft.com/office/drawing/2014/main" id="{3140FBCE-5AE4-F895-3506-216C60525E7A}"/>
+                </a:ext>
+              </a:extLst>
+            </p:cNvPr>
+            <p:cNvPicPr>
+              <a:picLocks noChangeAspect="1"/>
+            </p:cNvPicPr>
+            <p:nvPr/>
+          </p:nvPicPr>
+          <p:blipFill>
+            <a:blip r:embed="rId7"/>
+            <a:stretch>
+              <a:fillRect/>
+            </a:stretch>
+          </p:blipFill>
+          <p:spPr>
+            <a:xfrm>
+              <a:off x="6881730" y="1461218"/>
+              <a:ext cx="283030" cy="278465"/>
+            </a:xfrm>
+            <a:prstGeom prst="rect">
+              <a:avLst/>
+            </a:prstGeom>
+          </p:spPr>
+        </p:pic>
+      </p:grpSp>
+      <p:sp>
+        <p:nvSpPr>
+          <p:cNvPr id="89" name="Rectangle 88">
+            <a:extLst>
+              <a:ext uri="{FF2B5EF4-FFF2-40B4-BE49-F238E27FC236}">
+                <a16:creationId xmlns:a16="http://schemas.microsoft.com/office/drawing/2014/main" id="{A07917C5-987F-2664-275A-86757DCE3AB4}"/>
+              </a:ext>
+            </a:extLst>
+          </p:cNvPr>
+          <p:cNvSpPr/>
+          <p:nvPr/>
+        </p:nvSpPr>
+        <p:spPr>
+          <a:xfrm>
+            <a:off x="2177143" y="3298362"/>
+            <a:ext cx="4589382" cy="364000"/>
+          </a:xfrm>
+          <a:prstGeom prst="rect">
+            <a:avLst/>
+          </a:prstGeom>
+          <a:solidFill>
+            <a:schemeClr val="bg1"/>
+          </a:solidFill>
+        </p:spPr>
+        <p:style>
+          <a:lnRef idx="2">
+            <a:schemeClr val="accent1">
+              <a:shade val="15000"/>
+            </a:schemeClr>
+          </a:lnRef>
+          <a:fillRef idx="1">
+            <a:schemeClr val="accent1"/>
+          </a:fillRef>
+          <a:effectRef idx="0">
+            <a:schemeClr val="accent1"/>
+          </a:effectRef>
+          <a:fontRef idx="minor">
+            <a:schemeClr val="lt1"/>
+          </a:fontRef>
+        </p:style>
+        <p:txBody>
+          <a:bodyPr rtlCol="0" anchor="ctr"/>
+          <a:lstStyle/>
+          <a:p>
+            <a:r>
+              <a:rPr lang="en-US" dirty="0">
+                <a:solidFill>
+                  <a:schemeClr val="tx1"/>
+                </a:solidFill>
+              </a:rPr>
+              <a:t>&gt; Sub-Sub Organization</a:t>
+            </a:r>
+          </a:p>
+        </p:txBody>
+      </p:sp>
+      <p:sp>
+        <p:nvSpPr>
+          <p:cNvPr id="90" name="Rectangle 89">
+            <a:extLst>
+              <a:ext uri="{FF2B5EF4-FFF2-40B4-BE49-F238E27FC236}">
+                <a16:creationId xmlns:a16="http://schemas.microsoft.com/office/drawing/2014/main" id="{0FC3FF28-3AD1-3C36-7F21-30FA475D6C88}"/>
+              </a:ext>
+            </a:extLst>
+          </p:cNvPr>
+          <p:cNvSpPr/>
+          <p:nvPr/>
+        </p:nvSpPr>
+        <p:spPr>
+          <a:xfrm>
+            <a:off x="546618" y="3326156"/>
+            <a:ext cx="381650" cy="365733"/>
+          </a:xfrm>
+          <a:prstGeom prst="rect">
+            <a:avLst/>
+          </a:prstGeom>
+          <a:solidFill>
+            <a:schemeClr val="bg1"/>
+          </a:solidFill>
+        </p:spPr>
+        <p:style>
+          <a:lnRef idx="2">
+            <a:schemeClr val="accent1">
+              <a:shade val="15000"/>
+            </a:schemeClr>
+          </a:lnRef>
+          <a:fillRef idx="1">
+            <a:schemeClr val="accent1"/>
+          </a:fillRef>
+          <a:effectRef idx="0">
+            <a:schemeClr val="accent1"/>
+          </a:effectRef>
+          <a:fontRef idx="minor">
+            <a:schemeClr val="lt1"/>
+          </a:fontRef>
+        </p:style>
+        <p:txBody>
+          <a:bodyPr rtlCol="0" anchor="ctr"/>
+          <a:lstStyle/>
+          <a:p>
+            <a:pPr algn="ctr"/>
+            <a:endParaRPr lang="en-US"/>
+          </a:p>
+        </p:txBody>
+      </p:sp>
+      <p:pic>
+        <p:nvPicPr>
+          <p:cNvPr id="91" name="Picture 90">
+            <a:extLst>
+              <a:ext uri="{FF2B5EF4-FFF2-40B4-BE49-F238E27FC236}">
+                <a16:creationId xmlns:a16="http://schemas.microsoft.com/office/drawing/2014/main" id="{04057864-FBCF-0CDF-1290-FFB4AB67D1B5}"/>
+              </a:ext>
+            </a:extLst>
+          </p:cNvPr>
+          <p:cNvPicPr>
+            <a:picLocks noChangeAspect="1"/>
+          </p:cNvPicPr>
+          <p:nvPr/>
+        </p:nvPicPr>
+        <p:blipFill>
+          <a:blip r:embed="rId6"/>
+          <a:stretch>
+            <a:fillRect/>
+          </a:stretch>
+        </p:blipFill>
+        <p:spPr>
+          <a:xfrm>
+            <a:off x="611764" y="3350476"/>
+            <a:ext cx="279230" cy="316109"/>
+          </a:xfrm>
+          <a:prstGeom prst="rect">
+            <a:avLst/>
+          </a:prstGeom>
+        </p:spPr>
+      </p:pic>
+      <p:sp>
+        <p:nvSpPr>
+          <p:cNvPr id="92" name="Rectangle 91">
+            <a:extLst>
+              <a:ext uri="{FF2B5EF4-FFF2-40B4-BE49-F238E27FC236}">
+                <a16:creationId xmlns:a16="http://schemas.microsoft.com/office/drawing/2014/main" id="{465551D6-6E1C-95B3-D603-FF5BDBC77E32}"/>
+              </a:ext>
+            </a:extLst>
+          </p:cNvPr>
+          <p:cNvSpPr/>
+          <p:nvPr/>
+        </p:nvSpPr>
+        <p:spPr>
+          <a:xfrm>
+            <a:off x="1047130" y="3310123"/>
+            <a:ext cx="666800" cy="365733"/>
+          </a:xfrm>
+          <a:prstGeom prst="rect">
+            <a:avLst/>
+          </a:prstGeom>
+          <a:solidFill>
+            <a:schemeClr val="bg1"/>
+          </a:solidFill>
+          <a:ln>
+            <a:solidFill>
+              <a:schemeClr val="bg1">
+                <a:lumMod val="95000"/>
+              </a:schemeClr>
+            </a:solidFill>
+          </a:ln>
+        </p:spPr>
+        <p:style>
+          <a:lnRef idx="2">
+            <a:schemeClr val="accent1">
+              <a:shade val="15000"/>
+            </a:schemeClr>
+          </a:lnRef>
+          <a:fillRef idx="1">
+            <a:schemeClr val="accent1"/>
+          </a:fillRef>
+          <a:effectRef idx="0">
+            <a:schemeClr val="accent1"/>
+          </a:effectRef>
+          <a:fontRef idx="minor">
+            <a:schemeClr val="lt1"/>
+          </a:fontRef>
+        </p:style>
+        <p:txBody>
+          <a:bodyPr rtlCol="0" anchor="ctr"/>
+          <a:lstStyle/>
+          <a:p>
+            <a:pPr algn="r"/>
+            <a:r>
+              <a:rPr lang="en-US" sz="1200" dirty="0">
+                <a:solidFill>
+                  <a:schemeClr val="tx1"/>
+                </a:solidFill>
+                <a:latin typeface="Roboto" panose="02000000000000000000" pitchFamily="2" charset="0"/>
+                <a:ea typeface="Roboto" panose="02000000000000000000" pitchFamily="2" charset="0"/>
+              </a:rPr>
+              <a:t>10</a:t>
+            </a:r>
+          </a:p>
+        </p:txBody>
+      </p:sp>
+      <p:grpSp>
+        <p:nvGrpSpPr>
+          <p:cNvPr id="93" name="Group 92">
+            <a:extLst>
+              <a:ext uri="{FF2B5EF4-FFF2-40B4-BE49-F238E27FC236}">
+                <a16:creationId xmlns:a16="http://schemas.microsoft.com/office/drawing/2014/main" id="{C5DCC1DD-14F0-212A-B1C0-F2266CDF6FAA}"/>
+              </a:ext>
+            </a:extLst>
+          </p:cNvPr>
+          <p:cNvGrpSpPr/>
+          <p:nvPr/>
+        </p:nvGrpSpPr>
+        <p:grpSpPr>
+          <a:xfrm>
+            <a:off x="6821770" y="3325656"/>
+            <a:ext cx="381650" cy="334297"/>
+            <a:chOff x="6832420" y="1433302"/>
+            <a:chExt cx="381650" cy="334297"/>
+          </a:xfrm>
+        </p:grpSpPr>
+        <p:sp>
+          <p:nvSpPr>
+            <p:cNvPr id="94" name="Rectangle 93">
+              <a:extLst>
+                <a:ext uri="{FF2B5EF4-FFF2-40B4-BE49-F238E27FC236}">
+                  <a16:creationId xmlns:a16="http://schemas.microsoft.com/office/drawing/2014/main" id="{988F08B2-9514-7353-EE37-3253BD703F2A}"/>
+                </a:ext>
+              </a:extLst>
+            </p:cNvPr>
+            <p:cNvSpPr/>
+            <p:nvPr/>
+          </p:nvSpPr>
+          <p:spPr>
+            <a:xfrm>
+              <a:off x="6832420" y="1433302"/>
+              <a:ext cx="381650" cy="334297"/>
+            </a:xfrm>
+            <a:prstGeom prst="rect">
+              <a:avLst/>
+            </a:prstGeom>
+            <a:solidFill>
+              <a:schemeClr val="tx2">
+                <a:lumMod val="10000"/>
+                <a:lumOff val="90000"/>
+              </a:schemeClr>
+            </a:solidFill>
+          </p:spPr>
+          <p:style>
+            <a:lnRef idx="2">
+              <a:schemeClr val="accent1">
+                <a:shade val="15000"/>
+              </a:schemeClr>
+            </a:lnRef>
+            <a:fillRef idx="1">
+              <a:schemeClr val="accent1"/>
+            </a:fillRef>
+            <a:effectRef idx="0">
+              <a:schemeClr val="accent1"/>
+            </a:effectRef>
+            <a:fontRef idx="minor">
+              <a:schemeClr val="lt1"/>
+            </a:fontRef>
+          </p:style>
+          <p:txBody>
+            <a:bodyPr rtlCol="0" anchor="ctr"/>
+            <a:lstStyle/>
+            <a:p>
+              <a:pPr algn="ctr"/>
+              <a:endParaRPr lang="en-US"/>
+            </a:p>
+          </p:txBody>
+        </p:sp>
+        <p:pic>
+          <p:nvPicPr>
+            <p:cNvPr id="95" name="Picture 94">
+              <a:extLst>
+                <a:ext uri="{FF2B5EF4-FFF2-40B4-BE49-F238E27FC236}">
+                  <a16:creationId xmlns:a16="http://schemas.microsoft.com/office/drawing/2014/main" id="{5EA25F02-4003-10A0-21B4-C347F7B841A0}"/>
+                </a:ext>
+              </a:extLst>
+            </p:cNvPr>
+            <p:cNvPicPr>
+              <a:picLocks noChangeAspect="1"/>
+            </p:cNvPicPr>
+            <p:nvPr/>
+          </p:nvPicPr>
+          <p:blipFill>
+            <a:blip r:embed="rId7"/>
+            <a:stretch>
+              <a:fillRect/>
+            </a:stretch>
+          </p:blipFill>
+          <p:spPr>
+            <a:xfrm>
+              <a:off x="6881730" y="1461218"/>
+              <a:ext cx="283030" cy="278465"/>
+            </a:xfrm>
+            <a:prstGeom prst="rect">
+              <a:avLst/>
+            </a:prstGeom>
+          </p:spPr>
+        </p:pic>
+      </p:grpSp>
+      <p:sp>
+        <p:nvSpPr>
+          <p:cNvPr id="96" name="Rectangle 95">
+            <a:extLst>
+              <a:ext uri="{FF2B5EF4-FFF2-40B4-BE49-F238E27FC236}">
+                <a16:creationId xmlns:a16="http://schemas.microsoft.com/office/drawing/2014/main" id="{01350E1A-0539-2851-F239-DC496094A406}"/>
+              </a:ext>
+            </a:extLst>
+          </p:cNvPr>
+          <p:cNvSpPr/>
+          <p:nvPr/>
+        </p:nvSpPr>
+        <p:spPr>
+          <a:xfrm>
+            <a:off x="1816126" y="1923370"/>
+            <a:ext cx="325233" cy="365733"/>
+          </a:xfrm>
+          <a:prstGeom prst="rect">
+            <a:avLst/>
+          </a:prstGeom>
+          <a:solidFill>
+            <a:schemeClr val="bg1"/>
+          </a:solidFill>
+          <a:ln>
+            <a:solidFill>
+              <a:schemeClr val="bg1">
+                <a:lumMod val="95000"/>
+              </a:schemeClr>
+            </a:solidFill>
+          </a:ln>
+        </p:spPr>
+        <p:style>
+          <a:lnRef idx="2">
+            <a:schemeClr val="accent1">
+              <a:shade val="15000"/>
+            </a:schemeClr>
+          </a:lnRef>
+          <a:fillRef idx="1">
+            <a:schemeClr val="accent1"/>
+          </a:fillRef>
+          <a:effectRef idx="0">
+            <a:schemeClr val="accent1"/>
+          </a:effectRef>
+          <a:fontRef idx="minor">
+            <a:schemeClr val="lt1"/>
+          </a:fontRef>
+        </p:style>
+        <p:txBody>
+          <a:bodyPr rtlCol="0" anchor="ctr"/>
+          <a:lstStyle/>
+          <a:p>
+            <a:pPr algn="ctr"/>
+            <a:endParaRPr lang="en-US" sz="1200">
+              <a:solidFill>
+                <a:schemeClr val="tx1"/>
+              </a:solidFill>
+              <a:latin typeface="Roboto" panose="02000000000000000000" pitchFamily="2" charset="0"/>
+              <a:ea typeface="Roboto" panose="02000000000000000000" pitchFamily="2" charset="0"/>
+            </a:endParaRPr>
+          </a:p>
+        </p:txBody>
+      </p:sp>
+      <p:sp>
+        <p:nvSpPr>
+          <p:cNvPr id="97" name="Rectangle 96">
+            <a:extLst>
+              <a:ext uri="{FF2B5EF4-FFF2-40B4-BE49-F238E27FC236}">
+                <a16:creationId xmlns:a16="http://schemas.microsoft.com/office/drawing/2014/main" id="{242515BA-F448-7E4D-8674-BD87DB778BD5}"/>
+              </a:ext>
+            </a:extLst>
+          </p:cNvPr>
+          <p:cNvSpPr/>
+          <p:nvPr/>
+        </p:nvSpPr>
+        <p:spPr>
+          <a:xfrm>
+            <a:off x="1816125" y="2379439"/>
+            <a:ext cx="325233" cy="365733"/>
+          </a:xfrm>
+          <a:prstGeom prst="rect">
+            <a:avLst/>
+          </a:prstGeom>
+          <a:solidFill>
+            <a:schemeClr val="bg1"/>
+          </a:solidFill>
+          <a:ln>
+            <a:solidFill>
+              <a:schemeClr val="bg1">
+                <a:lumMod val="95000"/>
+              </a:schemeClr>
+            </a:solidFill>
+          </a:ln>
+        </p:spPr>
+        <p:style>
+          <a:lnRef idx="2">
+            <a:schemeClr val="accent1">
+              <a:shade val="15000"/>
+            </a:schemeClr>
+          </a:lnRef>
+          <a:fillRef idx="1">
+            <a:schemeClr val="accent1"/>
+          </a:fillRef>
+          <a:effectRef idx="0">
+            <a:schemeClr val="accent1"/>
+          </a:effectRef>
+          <a:fontRef idx="minor">
+            <a:schemeClr val="lt1"/>
+          </a:fontRef>
+        </p:style>
+        <p:txBody>
+          <a:bodyPr rtlCol="0" anchor="ctr"/>
+          <a:lstStyle/>
+          <a:p>
+            <a:pPr algn="ctr"/>
+            <a:endParaRPr lang="en-US" sz="1200">
+              <a:solidFill>
+                <a:schemeClr val="tx1"/>
+              </a:solidFill>
+              <a:latin typeface="Roboto" panose="02000000000000000000" pitchFamily="2" charset="0"/>
+              <a:ea typeface="Roboto" panose="02000000000000000000" pitchFamily="2" charset="0"/>
+            </a:endParaRPr>
+          </a:p>
+        </p:txBody>
+      </p:sp>
+      <p:sp>
+        <p:nvSpPr>
+          <p:cNvPr id="98" name="Rectangle 97">
+            <a:extLst>
+              <a:ext uri="{FF2B5EF4-FFF2-40B4-BE49-F238E27FC236}">
+                <a16:creationId xmlns:a16="http://schemas.microsoft.com/office/drawing/2014/main" id="{5314DC5C-3A71-7E82-EA68-B90F3EDB3E7B}"/>
+              </a:ext>
+            </a:extLst>
+          </p:cNvPr>
+          <p:cNvSpPr/>
+          <p:nvPr/>
+        </p:nvSpPr>
+        <p:spPr>
+          <a:xfrm>
+            <a:off x="1809362" y="2844781"/>
+            <a:ext cx="325233" cy="365733"/>
+          </a:xfrm>
+          <a:prstGeom prst="rect">
+            <a:avLst/>
+          </a:prstGeom>
+          <a:solidFill>
+            <a:schemeClr val="bg1"/>
+          </a:solidFill>
+          <a:ln>
+            <a:solidFill>
+              <a:schemeClr val="bg1">
+                <a:lumMod val="95000"/>
+              </a:schemeClr>
+            </a:solidFill>
+          </a:ln>
+        </p:spPr>
+        <p:style>
+          <a:lnRef idx="2">
+            <a:schemeClr val="accent1">
+              <a:shade val="15000"/>
+            </a:schemeClr>
+          </a:lnRef>
+          <a:fillRef idx="1">
+            <a:schemeClr val="accent1"/>
+          </a:fillRef>
+          <a:effectRef idx="0">
+            <a:schemeClr val="accent1"/>
+          </a:effectRef>
+          <a:fontRef idx="minor">
+            <a:schemeClr val="lt1"/>
+          </a:fontRef>
+        </p:style>
+        <p:txBody>
+          <a:bodyPr rtlCol="0" anchor="ctr"/>
+          <a:lstStyle/>
+          <a:p>
+            <a:pPr algn="ctr"/>
+            <a:endParaRPr lang="en-US" sz="1200">
+              <a:solidFill>
+                <a:schemeClr val="tx1"/>
+              </a:solidFill>
+              <a:latin typeface="Roboto" panose="02000000000000000000" pitchFamily="2" charset="0"/>
+              <a:ea typeface="Roboto" panose="02000000000000000000" pitchFamily="2" charset="0"/>
+            </a:endParaRPr>
+          </a:p>
+        </p:txBody>
+      </p:sp>
+      <p:sp>
+        <p:nvSpPr>
+          <p:cNvPr id="99" name="Rectangle 98">
+            <a:extLst>
+              <a:ext uri="{FF2B5EF4-FFF2-40B4-BE49-F238E27FC236}">
+                <a16:creationId xmlns:a16="http://schemas.microsoft.com/office/drawing/2014/main" id="{5B3178E2-5EC6-3927-0E0D-97193121D4D3}"/>
+              </a:ext>
+            </a:extLst>
+          </p:cNvPr>
+          <p:cNvSpPr/>
+          <p:nvPr/>
+        </p:nvSpPr>
+        <p:spPr>
+          <a:xfrm>
+            <a:off x="1802599" y="3310123"/>
+            <a:ext cx="325233" cy="365733"/>
+          </a:xfrm>
+          <a:prstGeom prst="rect">
+            <a:avLst/>
+          </a:prstGeom>
+          <a:solidFill>
+            <a:schemeClr val="bg1"/>
+          </a:solidFill>
+          <a:ln>
+            <a:solidFill>
+              <a:schemeClr val="bg1">
+                <a:lumMod val="95000"/>
+              </a:schemeClr>
+            </a:solidFill>
+          </a:ln>
+        </p:spPr>
+        <p:style>
+          <a:lnRef idx="2">
+            <a:schemeClr val="accent1">
+              <a:shade val="15000"/>
+            </a:schemeClr>
+          </a:lnRef>
+          <a:fillRef idx="1">
+            <a:schemeClr val="accent1"/>
+          </a:fillRef>
+          <a:effectRef idx="0">
+            <a:schemeClr val="accent1"/>
+          </a:effectRef>
+          <a:fontRef idx="minor">
+            <a:schemeClr val="lt1"/>
+          </a:fontRef>
+        </p:style>
+        <p:txBody>
+          <a:bodyPr rtlCol="0" anchor="ctr"/>
+          <a:lstStyle/>
+          <a:p>
+            <a:pPr algn="ctr"/>
+            <a:endParaRPr lang="en-US" sz="1200">
+              <a:solidFill>
+                <a:schemeClr val="tx1"/>
+              </a:solidFill>
+              <a:latin typeface="Roboto" panose="02000000000000000000" pitchFamily="2" charset="0"/>
+              <a:ea typeface="Roboto" panose="02000000000000000000" pitchFamily="2" charset="0"/>
+            </a:endParaRPr>
+          </a:p>
+        </p:txBody>
+      </p:sp>
+      <p:sp>
+        <p:nvSpPr>
+          <p:cNvPr id="100" name="Rectangle 99">
+            <a:extLst>
+              <a:ext uri="{FF2B5EF4-FFF2-40B4-BE49-F238E27FC236}">
+                <a16:creationId xmlns:a16="http://schemas.microsoft.com/office/drawing/2014/main" id="{01E738AF-75AB-0F48-5481-7F1B33F05D87}"/>
+              </a:ext>
+            </a:extLst>
+          </p:cNvPr>
+          <p:cNvSpPr/>
+          <p:nvPr/>
+        </p:nvSpPr>
+        <p:spPr>
+          <a:xfrm>
+            <a:off x="1055578" y="1404054"/>
+            <a:ext cx="666800" cy="365733"/>
+          </a:xfrm>
+          <a:prstGeom prst="rect">
+            <a:avLst/>
+          </a:prstGeom>
+          <a:solidFill>
+            <a:schemeClr val="bg1"/>
+          </a:solidFill>
+          <a:ln>
+            <a:solidFill>
+              <a:schemeClr val="bg1">
+                <a:lumMod val="95000"/>
+              </a:schemeClr>
+            </a:solidFill>
+          </a:ln>
+        </p:spPr>
+        <p:style>
+          <a:lnRef idx="2">
+            <a:schemeClr val="accent1">
+              <a:shade val="15000"/>
+            </a:schemeClr>
+          </a:lnRef>
+          <a:fillRef idx="1">
+            <a:schemeClr val="accent1"/>
+          </a:fillRef>
+          <a:effectRef idx="0">
+            <a:schemeClr val="accent1"/>
+          </a:effectRef>
+          <a:fontRef idx="minor">
+            <a:schemeClr val="lt1"/>
+          </a:fontRef>
+        </p:style>
+        <p:txBody>
+          <a:bodyPr rtlCol="0" anchor="ctr"/>
+          <a:lstStyle/>
+          <a:p>
+            <a:pPr algn="r"/>
+            <a:r>
+              <a:rPr lang="en-US" sz="1200" dirty="0">
+                <a:solidFill>
+                  <a:schemeClr val="tx1"/>
+                </a:solidFill>
+                <a:latin typeface="Roboto" panose="02000000000000000000" pitchFamily="2" charset="0"/>
+                <a:ea typeface="Roboto" panose="02000000000000000000" pitchFamily="2" charset="0"/>
+              </a:rPr>
+              <a:t>0</a:t>
+            </a:r>
+          </a:p>
+        </p:txBody>
+      </p:sp>
+    </p:spTree>
+    <p:extLst>
+      <p:ext uri="{BB962C8B-B14F-4D97-AF65-F5344CB8AC3E}">
+        <p14:creationId xmlns:p14="http://schemas.microsoft.com/office/powerpoint/2010/main" val="3285375089"/>
+      </p:ext>
+    </p:extLst>
+  </p:cSld>
+  <p:clrMapOvr>
+    <a:masterClrMapping/>
+  </p:clrMapOvr>
+  <p:extLst>
+    <p:ext uri="{6950BFC3-D8DA-4A85-94F7-54DA5524770B}">
+      <p188:commentRel xmlns:p188="http://schemas.microsoft.com/office/powerpoint/2018/8/main" r:id="rId3"/>
+    </p:ext>
+  </p:extLst>
+</p:sld>
+</file>
+
+<file path=ppt/slides/slide13.xml><?xml version="1.0" encoding="utf-8"?>
+<p:sld xmlns:a="http://schemas.openxmlformats.org/drawingml/2006/main" xmlns:r="http://schemas.openxmlformats.org/officeDocument/2006/relationships" xmlns:p="http://schemas.openxmlformats.org/presentationml/2006/main">
+  <p:cSld>
+    <p:spTree>
+      <p:nvGrpSpPr>
+        <p:cNvPr id="1" name=""/>
+        <p:cNvGrpSpPr/>
+        <p:nvPr/>
+      </p:nvGrpSpPr>
+      <p:grpSpPr>
+        <a:xfrm>
+          <a:off x="0" y="0"/>
+          <a:ext cx="0" cy="0"/>
+          <a:chOff x="0" y="0"/>
+          <a:chExt cx="0" cy="0"/>
+        </a:xfrm>
+      </p:grpSpPr>
+      <p:sp>
+        <p:nvSpPr>
+          <p:cNvPr id="2" name="Title 1">
+            <a:extLst>
+              <a:ext uri="{FF2B5EF4-FFF2-40B4-BE49-F238E27FC236}">
+                <a16:creationId xmlns:a16="http://schemas.microsoft.com/office/drawing/2014/main" id="{FF04ECDB-D629-C300-A796-57DC1C685598}"/>
+              </a:ext>
+            </a:extLst>
+          </p:cNvPr>
+          <p:cNvSpPr>
+            <a:spLocks noGrp="1"/>
+          </p:cNvSpPr>
+          <p:nvPr>
+            <p:ph type="title"/>
+          </p:nvPr>
+        </p:nvSpPr>
+        <p:spPr/>
+        <p:txBody>
+          <a:bodyPr>
+            <a:normAutofit fontScale="90000"/>
+          </a:bodyPr>
+          <a:lstStyle/>
+          <a:p>
+            <a:r>
+              <a:rPr lang="en-US" dirty="0"/>
+              <a:t>Dialog: Organization Editor</a:t>
+            </a:r>
+          </a:p>
+        </p:txBody>
+      </p:sp>
+      <p:sp>
+        <p:nvSpPr>
+          <p:cNvPr id="8" name="Rectangle 7">
+            <a:extLst>
+              <a:ext uri="{FF2B5EF4-FFF2-40B4-BE49-F238E27FC236}">
+                <a16:creationId xmlns:a16="http://schemas.microsoft.com/office/drawing/2014/main" id="{F035B886-7C14-5238-2AFF-4BCF64D2AD2D}"/>
+              </a:ext>
+            </a:extLst>
+          </p:cNvPr>
+          <p:cNvSpPr/>
+          <p:nvPr/>
+        </p:nvSpPr>
+        <p:spPr>
+          <a:xfrm>
+            <a:off x="515524" y="1360498"/>
+            <a:ext cx="490930" cy="365733"/>
+          </a:xfrm>
+          <a:prstGeom prst="rect">
+            <a:avLst/>
+          </a:prstGeom>
+          <a:solidFill>
+            <a:schemeClr val="bg1">
+              <a:lumMod val="95000"/>
+            </a:schemeClr>
+          </a:solidFill>
+        </p:spPr>
+        <p:style>
+          <a:lnRef idx="2">
+            <a:schemeClr val="accent1">
+              <a:shade val="15000"/>
+            </a:schemeClr>
+          </a:lnRef>
+          <a:fillRef idx="1">
+            <a:schemeClr val="accent1"/>
+          </a:fillRef>
+          <a:effectRef idx="0">
+            <a:schemeClr val="accent1"/>
+          </a:effectRef>
+          <a:fontRef idx="minor">
+            <a:schemeClr val="lt1"/>
+          </a:fontRef>
+        </p:style>
+        <p:txBody>
+          <a:bodyPr rtlCol="0" anchor="ctr"/>
+          <a:lstStyle/>
+          <a:p>
+            <a:pPr algn="r"/>
+            <a:r>
+              <a:rPr lang="en-US" dirty="0">
+                <a:solidFill>
+                  <a:schemeClr val="tx1"/>
+                </a:solidFill>
+              </a:rPr>
+              <a:t>10</a:t>
+            </a:r>
+          </a:p>
+        </p:txBody>
+      </p:sp>
+      <p:sp>
+        <p:nvSpPr>
+          <p:cNvPr id="14" name="Rectangle 13">
+            <a:extLst>
+              <a:ext uri="{FF2B5EF4-FFF2-40B4-BE49-F238E27FC236}">
+                <a16:creationId xmlns:a16="http://schemas.microsoft.com/office/drawing/2014/main" id="{34EDFF8C-602D-82C1-F9B8-A1EFE64BAF46}"/>
+              </a:ext>
+            </a:extLst>
+          </p:cNvPr>
+          <p:cNvSpPr/>
+          <p:nvPr/>
+        </p:nvSpPr>
+        <p:spPr>
+          <a:xfrm>
+            <a:off x="1071924" y="1360497"/>
+            <a:ext cx="5856650" cy="365733"/>
+          </a:xfrm>
+          <a:prstGeom prst="rect">
+            <a:avLst/>
+          </a:prstGeom>
+          <a:solidFill>
+            <a:schemeClr val="bg1"/>
+          </a:solidFill>
+        </p:spPr>
+        <p:style>
+          <a:lnRef idx="2">
+            <a:schemeClr val="accent1">
+              <a:shade val="15000"/>
+            </a:schemeClr>
+          </a:lnRef>
+          <a:fillRef idx="1">
+            <a:schemeClr val="accent1"/>
+          </a:fillRef>
+          <a:effectRef idx="0">
+            <a:schemeClr val="accent1"/>
+          </a:effectRef>
+          <a:fontRef idx="minor">
+            <a:schemeClr val="lt1"/>
+          </a:fontRef>
+        </p:style>
+        <p:txBody>
+          <a:bodyPr rtlCol="0" anchor="ctr"/>
+          <a:lstStyle/>
+          <a:p>
+            <a:pPr algn="ctr"/>
+            <a:endParaRPr lang="en-US"/>
+          </a:p>
+        </p:txBody>
+      </p:sp>
+      <p:pic>
+        <p:nvPicPr>
+          <p:cNvPr id="16" name="Picture 15">
+            <a:extLst>
+              <a:ext uri="{FF2B5EF4-FFF2-40B4-BE49-F238E27FC236}">
+                <a16:creationId xmlns:a16="http://schemas.microsoft.com/office/drawing/2014/main" id="{E184119F-C982-A2A2-6D0E-6FFC7396FA6B}"/>
+              </a:ext>
+            </a:extLst>
+          </p:cNvPr>
+          <p:cNvPicPr>
+            <a:picLocks noChangeAspect="1"/>
+          </p:cNvPicPr>
+          <p:nvPr/>
+        </p:nvPicPr>
+        <p:blipFill>
+          <a:blip r:embed="rId2"/>
+          <a:stretch>
+            <a:fillRect/>
+          </a:stretch>
+        </p:blipFill>
+        <p:spPr>
+          <a:xfrm>
+            <a:off x="570745" y="2666821"/>
+            <a:ext cx="501179" cy="556865"/>
+          </a:xfrm>
+          <a:prstGeom prst="rect">
+            <a:avLst/>
+          </a:prstGeom>
+        </p:spPr>
+      </p:pic>
+      <p:pic>
+        <p:nvPicPr>
+          <p:cNvPr id="18" name="Picture 17">
+            <a:extLst>
+              <a:ext uri="{FF2B5EF4-FFF2-40B4-BE49-F238E27FC236}">
+                <a16:creationId xmlns:a16="http://schemas.microsoft.com/office/drawing/2014/main" id="{441023A6-5328-224A-4E6C-D90F722D5679}"/>
+              </a:ext>
+            </a:extLst>
+          </p:cNvPr>
+          <p:cNvPicPr>
+            <a:picLocks noChangeAspect="1"/>
+          </p:cNvPicPr>
+          <p:nvPr/>
+        </p:nvPicPr>
+        <p:blipFill>
+          <a:blip r:embed="rId3"/>
+          <a:stretch>
+            <a:fillRect/>
+          </a:stretch>
+        </p:blipFill>
+        <p:spPr>
+          <a:xfrm>
+            <a:off x="570745" y="3440686"/>
+            <a:ext cx="501179" cy="537628"/>
+          </a:xfrm>
+          <a:prstGeom prst="rect">
+            <a:avLst/>
+          </a:prstGeom>
+        </p:spPr>
+      </p:pic>
+      <p:pic>
+        <p:nvPicPr>
+          <p:cNvPr id="20" name="Picture 19">
+            <a:extLst>
+              <a:ext uri="{FF2B5EF4-FFF2-40B4-BE49-F238E27FC236}">
+                <a16:creationId xmlns:a16="http://schemas.microsoft.com/office/drawing/2014/main" id="{CF5FBCE3-F5D2-A9F0-5841-82D58FB10D16}"/>
+              </a:ext>
+            </a:extLst>
+          </p:cNvPr>
+          <p:cNvPicPr>
+            <a:picLocks noChangeAspect="1"/>
+          </p:cNvPicPr>
+          <p:nvPr/>
+        </p:nvPicPr>
+        <p:blipFill>
+          <a:blip r:embed="rId4"/>
+          <a:stretch>
+            <a:fillRect/>
+          </a:stretch>
+        </p:blipFill>
+        <p:spPr>
+          <a:xfrm>
+            <a:off x="7020452" y="1360497"/>
+            <a:ext cx="375680" cy="375680"/>
+          </a:xfrm>
+          <a:prstGeom prst="rect">
+            <a:avLst/>
+          </a:prstGeom>
+        </p:spPr>
+      </p:pic>
+      <p:sp>
+        <p:nvSpPr>
+          <p:cNvPr id="22" name="Rectangle 21">
+            <a:extLst>
+              <a:ext uri="{FF2B5EF4-FFF2-40B4-BE49-F238E27FC236}">
+                <a16:creationId xmlns:a16="http://schemas.microsoft.com/office/drawing/2014/main" id="{13E68C9A-E5C5-838C-D002-4EAA13290946}"/>
+              </a:ext>
+            </a:extLst>
+          </p:cNvPr>
+          <p:cNvSpPr/>
+          <p:nvPr/>
+        </p:nvSpPr>
+        <p:spPr>
+          <a:xfrm>
+            <a:off x="405036" y="1264204"/>
+            <a:ext cx="7100408" cy="2890486"/>
+          </a:xfrm>
+          <a:prstGeom prst="rect">
+            <a:avLst/>
+          </a:prstGeom>
+          <a:noFill/>
+        </p:spPr>
+        <p:style>
+          <a:lnRef idx="2">
+            <a:schemeClr val="accent1">
+              <a:shade val="15000"/>
+            </a:schemeClr>
+          </a:lnRef>
+          <a:fillRef idx="1">
+            <a:schemeClr val="accent1"/>
+          </a:fillRef>
+          <a:effectRef idx="0">
+            <a:schemeClr val="accent1"/>
+          </a:effectRef>
+          <a:fontRef idx="minor">
+            <a:schemeClr val="lt1"/>
+          </a:fontRef>
+        </p:style>
+        <p:txBody>
+          <a:bodyPr rtlCol="0" anchor="ctr"/>
+          <a:lstStyle/>
+          <a:p>
+            <a:pPr algn="ctr"/>
+            <a:endParaRPr lang="en-US"/>
+          </a:p>
+        </p:txBody>
+      </p:sp>
+      <p:sp>
+        <p:nvSpPr>
+          <p:cNvPr id="24" name="Rectangle 23">
+            <a:extLst>
+              <a:ext uri="{FF2B5EF4-FFF2-40B4-BE49-F238E27FC236}">
+                <a16:creationId xmlns:a16="http://schemas.microsoft.com/office/drawing/2014/main" id="{240D8721-B603-687C-96AD-E49C79C83CB9}"/>
+              </a:ext>
+            </a:extLst>
+          </p:cNvPr>
+          <p:cNvSpPr/>
+          <p:nvPr/>
+        </p:nvSpPr>
+        <p:spPr>
+          <a:xfrm>
+            <a:off x="405036" y="949137"/>
+            <a:ext cx="7100408" cy="315067"/>
+          </a:xfrm>
+          <a:prstGeom prst="rect">
+            <a:avLst/>
+          </a:prstGeom>
+        </p:spPr>
+        <p:style>
+          <a:lnRef idx="2">
+            <a:schemeClr val="accent1">
+              <a:shade val="15000"/>
+            </a:schemeClr>
+          </a:lnRef>
+          <a:fillRef idx="1">
+            <a:schemeClr val="accent1"/>
+          </a:fillRef>
+          <a:effectRef idx="0">
+            <a:schemeClr val="accent1"/>
+          </a:effectRef>
+          <a:fontRef idx="minor">
+            <a:schemeClr val="lt1"/>
+          </a:fontRef>
+        </p:style>
+        <p:txBody>
+          <a:bodyPr rtlCol="0" anchor="ctr"/>
+          <a:lstStyle/>
+          <a:p>
+            <a:r>
+              <a:rPr lang="en-US" dirty="0"/>
+              <a:t>Organization: {purpose}</a:t>
+            </a:r>
+          </a:p>
+        </p:txBody>
+      </p:sp>
+      <p:pic>
+        <p:nvPicPr>
+          <p:cNvPr id="26" name="Picture 25">
+            <a:extLst>
+              <a:ext uri="{FF2B5EF4-FFF2-40B4-BE49-F238E27FC236}">
+                <a16:creationId xmlns:a16="http://schemas.microsoft.com/office/drawing/2014/main" id="{EE3EE67D-DB54-D085-4E49-285948845567}"/>
+              </a:ext>
+            </a:extLst>
+          </p:cNvPr>
+          <p:cNvPicPr>
+            <a:picLocks noChangeAspect="1"/>
+          </p:cNvPicPr>
+          <p:nvPr/>
+        </p:nvPicPr>
+        <p:blipFill>
+          <a:blip r:embed="rId5"/>
+          <a:stretch>
+            <a:fillRect/>
+          </a:stretch>
+        </p:blipFill>
+        <p:spPr>
+          <a:xfrm>
+            <a:off x="515524" y="1892955"/>
+            <a:ext cx="570905" cy="556866"/>
+          </a:xfrm>
+          <a:prstGeom prst="rect">
+            <a:avLst/>
+          </a:prstGeom>
+        </p:spPr>
+      </p:pic>
+      <p:sp>
+        <p:nvSpPr>
+          <p:cNvPr id="30" name="TextBox 29">
+            <a:extLst>
+              <a:ext uri="{FF2B5EF4-FFF2-40B4-BE49-F238E27FC236}">
+                <a16:creationId xmlns:a16="http://schemas.microsoft.com/office/drawing/2014/main" id="{4A3316CC-D0CA-990B-7DC3-9545B85E5D99}"/>
+              </a:ext>
+            </a:extLst>
+          </p:cNvPr>
+          <p:cNvSpPr txBox="1"/>
+          <p:nvPr/>
+        </p:nvSpPr>
+        <p:spPr>
+          <a:xfrm>
+            <a:off x="1196917" y="1958101"/>
+            <a:ext cx="3089435" cy="369332"/>
+          </a:xfrm>
+          <a:prstGeom prst="rect">
+            <a:avLst/>
+          </a:prstGeom>
+          <a:noFill/>
+        </p:spPr>
+        <p:txBody>
+          <a:bodyPr wrap="none" rtlCol="0">
+            <a:spAutoFit/>
+          </a:bodyPr>
+          <a:lstStyle/>
+          <a:p>
+            <a:r>
+              <a:rPr lang="en-US" dirty="0"/>
+              <a:t>Move this under a new parent</a:t>
+            </a:r>
+          </a:p>
+        </p:txBody>
+      </p:sp>
+      <p:sp>
+        <p:nvSpPr>
+          <p:cNvPr id="31" name="TextBox 30">
+            <a:extLst>
+              <a:ext uri="{FF2B5EF4-FFF2-40B4-BE49-F238E27FC236}">
+                <a16:creationId xmlns:a16="http://schemas.microsoft.com/office/drawing/2014/main" id="{99D91920-A1AA-D419-1B34-8164CC81620E}"/>
+              </a:ext>
+            </a:extLst>
+          </p:cNvPr>
+          <p:cNvSpPr txBox="1"/>
+          <p:nvPr/>
+        </p:nvSpPr>
+        <p:spPr>
+          <a:xfrm>
+            <a:off x="1196917" y="2755794"/>
+            <a:ext cx="2751779" cy="369332"/>
+          </a:xfrm>
+          <a:prstGeom prst="rect">
+            <a:avLst/>
+          </a:prstGeom>
+          <a:noFill/>
+        </p:spPr>
+        <p:txBody>
+          <a:bodyPr wrap="none" rtlCol="0">
+            <a:spAutoFit/>
+          </a:bodyPr>
+          <a:lstStyle/>
+          <a:p>
+            <a:r>
+              <a:rPr lang="en-US" dirty="0"/>
+              <a:t>Add a child organization…</a:t>
+            </a:r>
+          </a:p>
+        </p:txBody>
+      </p:sp>
+      <p:sp>
+        <p:nvSpPr>
+          <p:cNvPr id="32" name="TextBox 31">
+            <a:extLst>
+              <a:ext uri="{FF2B5EF4-FFF2-40B4-BE49-F238E27FC236}">
+                <a16:creationId xmlns:a16="http://schemas.microsoft.com/office/drawing/2014/main" id="{7D10DEA5-32A5-A749-D423-32935DE4086B}"/>
+              </a:ext>
+            </a:extLst>
+          </p:cNvPr>
+          <p:cNvSpPr txBox="1"/>
+          <p:nvPr/>
+        </p:nvSpPr>
+        <p:spPr>
+          <a:xfrm>
+            <a:off x="1196917" y="3213530"/>
+            <a:ext cx="4375400" cy="923330"/>
+          </a:xfrm>
+          <a:prstGeom prst="rect">
+            <a:avLst/>
+          </a:prstGeom>
+          <a:noFill/>
+        </p:spPr>
+        <p:txBody>
+          <a:bodyPr wrap="square" rtlCol="0">
+            <a:spAutoFit/>
+          </a:bodyPr>
+          <a:lstStyle/>
+          <a:p>
+            <a:r>
+              <a:rPr lang="en-US" dirty="0"/>
+              <a:t>Remove organization and all its children, reassign all to parent, be SURE, check the box to confirm…</a:t>
+            </a:r>
+          </a:p>
+        </p:txBody>
+      </p:sp>
+      <p:sp>
+        <p:nvSpPr>
+          <p:cNvPr id="33" name="Rectangle 32">
+            <a:extLst>
+              <a:ext uri="{FF2B5EF4-FFF2-40B4-BE49-F238E27FC236}">
+                <a16:creationId xmlns:a16="http://schemas.microsoft.com/office/drawing/2014/main" id="{93378CCC-0213-3EF6-2F1D-0C45158BECD3}"/>
+              </a:ext>
+            </a:extLst>
+          </p:cNvPr>
+          <p:cNvSpPr/>
+          <p:nvPr/>
+        </p:nvSpPr>
+        <p:spPr>
+          <a:xfrm>
+            <a:off x="5940532" y="1989659"/>
+            <a:ext cx="943024" cy="365733"/>
+          </a:xfrm>
+          <a:prstGeom prst="rect">
+            <a:avLst/>
+          </a:prstGeom>
+          <a:solidFill>
+            <a:schemeClr val="bg1"/>
+          </a:solidFill>
+        </p:spPr>
+        <p:style>
+          <a:lnRef idx="2">
+            <a:schemeClr val="accent1">
+              <a:shade val="15000"/>
+            </a:schemeClr>
+          </a:lnRef>
+          <a:fillRef idx="1">
+            <a:schemeClr val="accent1"/>
+          </a:fillRef>
+          <a:effectRef idx="0">
+            <a:schemeClr val="accent1"/>
+          </a:effectRef>
+          <a:fontRef idx="minor">
+            <a:schemeClr val="lt1"/>
+          </a:fontRef>
+        </p:style>
+        <p:txBody>
+          <a:bodyPr rtlCol="0" anchor="ctr"/>
+          <a:lstStyle/>
+          <a:p>
+            <a:pPr algn="r"/>
+            <a:r>
+              <a:rPr lang="en-US" dirty="0">
+                <a:solidFill>
+                  <a:schemeClr val="tx1"/>
+                </a:solidFill>
+              </a:rPr>
+              <a:t>14</a:t>
+            </a:r>
+          </a:p>
+        </p:txBody>
+      </p:sp>
+      <p:pic>
+        <p:nvPicPr>
+          <p:cNvPr id="35" name="Picture 34">
+            <a:extLst>
+              <a:ext uri="{FF2B5EF4-FFF2-40B4-BE49-F238E27FC236}">
+                <a16:creationId xmlns:a16="http://schemas.microsoft.com/office/drawing/2014/main" id="{5F4F88FF-618F-D718-75CC-23883ACB0F6D}"/>
+              </a:ext>
+            </a:extLst>
+          </p:cNvPr>
+          <p:cNvPicPr>
+            <a:picLocks noChangeAspect="1"/>
+          </p:cNvPicPr>
+          <p:nvPr/>
+        </p:nvPicPr>
+        <p:blipFill>
+          <a:blip r:embed="rId6"/>
+          <a:stretch>
+            <a:fillRect/>
+          </a:stretch>
+        </p:blipFill>
+        <p:spPr>
+          <a:xfrm>
+            <a:off x="6994044" y="1985299"/>
+            <a:ext cx="402088" cy="402088"/>
+          </a:xfrm>
+          <a:prstGeom prst="rect">
+            <a:avLst/>
+          </a:prstGeom>
+        </p:spPr>
+      </p:pic>
+      <p:pic>
+        <p:nvPicPr>
+          <p:cNvPr id="37" name="Picture 36">
+            <a:extLst>
+              <a:ext uri="{FF2B5EF4-FFF2-40B4-BE49-F238E27FC236}">
+                <a16:creationId xmlns:a16="http://schemas.microsoft.com/office/drawing/2014/main" id="{BD7D631C-7219-C335-63AD-40DD17EB9D36}"/>
+              </a:ext>
+            </a:extLst>
+          </p:cNvPr>
+          <p:cNvPicPr>
+            <a:picLocks noChangeAspect="1"/>
+          </p:cNvPicPr>
+          <p:nvPr/>
+        </p:nvPicPr>
+        <p:blipFill>
+          <a:blip r:embed="rId7"/>
+          <a:stretch>
+            <a:fillRect/>
+          </a:stretch>
+        </p:blipFill>
+        <p:spPr>
+          <a:xfrm>
+            <a:off x="7020452" y="2734553"/>
+            <a:ext cx="371828" cy="365733"/>
+          </a:xfrm>
+          <a:prstGeom prst="rect">
+            <a:avLst/>
+          </a:prstGeom>
+        </p:spPr>
+      </p:pic>
+      <p:pic>
+        <p:nvPicPr>
+          <p:cNvPr id="39" name="Picture 38">
+            <a:extLst>
+              <a:ext uri="{FF2B5EF4-FFF2-40B4-BE49-F238E27FC236}">
+                <a16:creationId xmlns:a16="http://schemas.microsoft.com/office/drawing/2014/main" id="{B98A9E89-5C21-BF87-F6BC-354AEAA6A296}"/>
+              </a:ext>
+            </a:extLst>
+          </p:cNvPr>
+          <p:cNvPicPr>
+            <a:picLocks noChangeAspect="1"/>
+          </p:cNvPicPr>
+          <p:nvPr/>
+        </p:nvPicPr>
+        <p:blipFill>
+          <a:blip r:embed="rId8"/>
+          <a:stretch>
+            <a:fillRect/>
+          </a:stretch>
+        </p:blipFill>
+        <p:spPr>
+          <a:xfrm>
+            <a:off x="6559653" y="3440687"/>
+            <a:ext cx="323903" cy="317674"/>
+          </a:xfrm>
+          <a:prstGeom prst="rect">
+            <a:avLst/>
+          </a:prstGeom>
+        </p:spPr>
+      </p:pic>
+      <p:pic>
+        <p:nvPicPr>
+          <p:cNvPr id="41" name="Picture 40">
+            <a:extLst>
+              <a:ext uri="{FF2B5EF4-FFF2-40B4-BE49-F238E27FC236}">
+                <a16:creationId xmlns:a16="http://schemas.microsoft.com/office/drawing/2014/main" id="{A0164334-1060-349D-4566-71717A160B10}"/>
+              </a:ext>
+            </a:extLst>
+          </p:cNvPr>
+          <p:cNvPicPr>
+            <a:picLocks noChangeAspect="1"/>
+          </p:cNvPicPr>
+          <p:nvPr/>
+        </p:nvPicPr>
+        <p:blipFill>
+          <a:blip r:embed="rId9"/>
+          <a:stretch>
+            <a:fillRect/>
+          </a:stretch>
+        </p:blipFill>
+        <p:spPr>
+          <a:xfrm>
+            <a:off x="7037725" y="3440686"/>
+            <a:ext cx="358407" cy="347029"/>
+          </a:xfrm>
+          <a:prstGeom prst="rect">
+            <a:avLst/>
+          </a:prstGeom>
+        </p:spPr>
+      </p:pic>
+    </p:spTree>
+    <p:extLst>
+      <p:ext uri="{BB962C8B-B14F-4D97-AF65-F5344CB8AC3E}">
+        <p14:creationId xmlns:p14="http://schemas.microsoft.com/office/powerpoint/2010/main" val="2782122737"/>
+      </p:ext>
+    </p:extLst>
+  </p:cSld>
+  <p:clrMapOvr>
+    <a:masterClrMapping/>
+  </p:clrMapOvr>
+</p:sld>
+</file>
+
+<file path=ppt/slides/slide14.xml><?xml version="1.0" encoding="utf-8"?>
+<p:sld xmlns:a="http://schemas.openxmlformats.org/drawingml/2006/main" xmlns:r="http://schemas.openxmlformats.org/officeDocument/2006/relationships" xmlns:p="http://schemas.openxmlformats.org/presentationml/2006/main">
+  <p:cSld>
+    <p:spTree>
+      <p:nvGrpSpPr>
+        <p:cNvPr id="1" name=""/>
+        <p:cNvGrpSpPr/>
+        <p:nvPr/>
+      </p:nvGrpSpPr>
+      <p:grpSpPr>
+        <a:xfrm>
+          <a:off x="0" y="0"/>
+          <a:ext cx="0" cy="0"/>
+          <a:chOff x="0" y="0"/>
+          <a:chExt cx="0" cy="0"/>
+        </a:xfrm>
+      </p:grpSpPr>
+      <p:sp>
+        <p:nvSpPr>
+          <p:cNvPr id="2" name="Title 1">
+            <a:extLst>
+              <a:ext uri="{FF2B5EF4-FFF2-40B4-BE49-F238E27FC236}">
+                <a16:creationId xmlns:a16="http://schemas.microsoft.com/office/drawing/2014/main" id="{2D298B34-DD16-7F25-2C93-80614FC9DC2D}"/>
+              </a:ext>
+            </a:extLst>
+          </p:cNvPr>
+          <p:cNvSpPr>
+            <a:spLocks noGrp="1"/>
+          </p:cNvSpPr>
+          <p:nvPr>
+            <p:ph type="title"/>
+          </p:nvPr>
+        </p:nvSpPr>
+        <p:spPr/>
+        <p:txBody>
+          <a:bodyPr>
+            <a:normAutofit fontScale="90000"/>
+          </a:bodyPr>
+          <a:lstStyle/>
+          <a:p>
+            <a:r>
+              <a:rPr lang="en-US" dirty="0"/>
+              <a:t>Dialog: Edit User Org Membership and Role Permissions</a:t>
+            </a:r>
+          </a:p>
+        </p:txBody>
+      </p:sp>
+      <p:sp>
+        <p:nvSpPr>
+          <p:cNvPr id="3" name="Rectangle 2">
+            <a:extLst>
+              <a:ext uri="{FF2B5EF4-FFF2-40B4-BE49-F238E27FC236}">
+                <a16:creationId xmlns:a16="http://schemas.microsoft.com/office/drawing/2014/main" id="{2A95DD90-4EC0-94DD-98E5-CEF5AF0172E4}"/>
+              </a:ext>
+            </a:extLst>
+          </p:cNvPr>
+          <p:cNvSpPr/>
+          <p:nvPr/>
+        </p:nvSpPr>
+        <p:spPr>
+          <a:xfrm>
+            <a:off x="405036" y="1264204"/>
+            <a:ext cx="11156908" cy="3553272"/>
+          </a:xfrm>
+          <a:prstGeom prst="rect">
+            <a:avLst/>
+          </a:prstGeom>
+          <a:noFill/>
+        </p:spPr>
+        <p:style>
+          <a:lnRef idx="2">
+            <a:schemeClr val="accent1">
+              <a:shade val="15000"/>
+            </a:schemeClr>
+          </a:lnRef>
+          <a:fillRef idx="1">
+            <a:schemeClr val="accent1"/>
+          </a:fillRef>
+          <a:effectRef idx="0">
+            <a:schemeClr val="accent1"/>
+          </a:effectRef>
+          <a:fontRef idx="minor">
+            <a:schemeClr val="lt1"/>
+          </a:fontRef>
+        </p:style>
+        <p:txBody>
+          <a:bodyPr rtlCol="0" anchor="ctr"/>
+          <a:lstStyle/>
+          <a:p>
+            <a:pPr algn="ctr"/>
+            <a:endParaRPr lang="en-US"/>
+          </a:p>
+        </p:txBody>
+      </p:sp>
+      <p:sp>
+        <p:nvSpPr>
+          <p:cNvPr id="4" name="Rectangle 3">
+            <a:extLst>
+              <a:ext uri="{FF2B5EF4-FFF2-40B4-BE49-F238E27FC236}">
+                <a16:creationId xmlns:a16="http://schemas.microsoft.com/office/drawing/2014/main" id="{01233C4F-BDCA-D582-9345-64E34B18EAFF}"/>
+              </a:ext>
+            </a:extLst>
+          </p:cNvPr>
+          <p:cNvSpPr/>
+          <p:nvPr/>
+        </p:nvSpPr>
+        <p:spPr>
+          <a:xfrm>
+            <a:off x="405036" y="949137"/>
+            <a:ext cx="7100408" cy="315067"/>
+          </a:xfrm>
+          <a:prstGeom prst="rect">
+            <a:avLst/>
+          </a:prstGeom>
+        </p:spPr>
+        <p:style>
+          <a:lnRef idx="2">
+            <a:schemeClr val="accent1">
+              <a:shade val="15000"/>
+            </a:schemeClr>
+          </a:lnRef>
+          <a:fillRef idx="1">
+            <a:schemeClr val="accent1"/>
+          </a:fillRef>
+          <a:effectRef idx="0">
+            <a:schemeClr val="accent1"/>
+          </a:effectRef>
+          <a:fontRef idx="minor">
+            <a:schemeClr val="lt1"/>
+          </a:fontRef>
+        </p:style>
+        <p:txBody>
+          <a:bodyPr rtlCol="0" anchor="ctr"/>
+          <a:lstStyle/>
+          <a:p>
+            <a:r>
+              <a:rPr lang="en-US" dirty="0"/>
               <a:t>Organization Permissions</a:t>
             </a:r>
           </a:p>
@@ -6432,7 +9258,7 @@
         <p:grpSpPr>
           <a:xfrm>
             <a:off x="478651" y="1354540"/>
-            <a:ext cx="8773742" cy="2767012"/>
+            <a:ext cx="11009650" cy="2767012"/>
             <a:chOff x="478651" y="1354540"/>
             <a:chExt cx="6888619" cy="2767012"/>
           </a:xfrm>
@@ -6715,8 +9541,8 @@
         </p:nvSpPr>
         <p:spPr>
           <a:xfrm>
-            <a:off x="3111099" y="1473009"/>
-            <a:ext cx="5802645" cy="364000"/>
+            <a:off x="4068459" y="1473009"/>
+            <a:ext cx="7051627" cy="364000"/>
           </a:xfrm>
           <a:prstGeom prst="rect">
             <a:avLst/>
@@ -6772,8 +9598,8 @@
         </p:nvSpPr>
         <p:spPr>
           <a:xfrm>
-            <a:off x="3505652" y="1933440"/>
-            <a:ext cx="5408091" cy="364000"/>
+            <a:off x="4463012" y="1906967"/>
+            <a:ext cx="6271074" cy="364000"/>
           </a:xfrm>
           <a:prstGeom prst="rect">
             <a:avLst/>
@@ -6827,7 +9653,7 @@
         </p:nvSpPr>
         <p:spPr>
           <a:xfrm>
-            <a:off x="2375640" y="1945201"/>
+            <a:off x="3333000" y="1906967"/>
             <a:ext cx="666800" cy="365733"/>
           </a:xfrm>
           <a:prstGeom prst="rect">
@@ -6892,8 +9718,8 @@
         </p:nvSpPr>
         <p:spPr>
           <a:xfrm>
-            <a:off x="3498889" y="2398782"/>
-            <a:ext cx="5408091" cy="364000"/>
+            <a:off x="4456249" y="2365772"/>
+            <a:ext cx="6271074" cy="364000"/>
           </a:xfrm>
           <a:prstGeom prst="rect">
             <a:avLst/>
@@ -6947,7 +9773,7 @@
         </p:nvSpPr>
         <p:spPr>
           <a:xfrm>
-            <a:off x="2368877" y="2410543"/>
+            <a:off x="3326237" y="2365772"/>
             <a:ext cx="666800" cy="365733"/>
           </a:xfrm>
           <a:prstGeom prst="rect">
@@ -7012,7 +9838,7 @@
         </p:nvSpPr>
         <p:spPr>
           <a:xfrm>
-            <a:off x="3131109" y="1945201"/>
+            <a:off x="4076195" y="1920653"/>
             <a:ext cx="325233" cy="365733"/>
           </a:xfrm>
           <a:prstGeom prst="rect">
@@ -7074,7 +9900,7 @@
         </p:nvSpPr>
         <p:spPr>
           <a:xfrm>
-            <a:off x="3124346" y="2410543"/>
+            <a:off x="4069432" y="2385995"/>
             <a:ext cx="325233" cy="365733"/>
           </a:xfrm>
           <a:prstGeom prst="rect">
@@ -7136,7 +9962,7 @@
         </p:nvSpPr>
         <p:spPr>
           <a:xfrm>
-            <a:off x="2368877" y="1449893"/>
+            <a:off x="3326237" y="1449893"/>
             <a:ext cx="666800" cy="365733"/>
           </a:xfrm>
           <a:prstGeom prst="rect">
@@ -7209,7 +10035,7 @@
         </p:blipFill>
         <p:spPr>
           <a:xfrm>
-            <a:off x="8751651" y="4243933"/>
+            <a:off x="11048684" y="4214970"/>
             <a:ext cx="500742" cy="500742"/>
           </a:xfrm>
           <a:prstGeom prst="rect">
@@ -7239,7 +10065,7 @@
         </p:blipFill>
         <p:spPr>
           <a:xfrm>
-            <a:off x="8149523" y="4243933"/>
+            <a:off x="10446556" y="4214970"/>
             <a:ext cx="525779" cy="509087"/>
           </a:xfrm>
           <a:prstGeom prst="rect">
@@ -7322,7 +10148,7 @@
         <p:spPr>
           <a:xfrm>
             <a:off x="1018891" y="4307241"/>
-            <a:ext cx="2112217" cy="364000"/>
+            <a:ext cx="2607498" cy="364000"/>
           </a:xfrm>
           <a:prstGeom prst="rect">
             <a:avLst/>
@@ -7380,7 +10206,7 @@
         </p:nvSpPr>
         <p:spPr>
           <a:xfrm>
-            <a:off x="3207457" y="4307241"/>
+            <a:off x="3702738" y="4307241"/>
             <a:ext cx="3303397" cy="364000"/>
           </a:xfrm>
           <a:prstGeom prst="rect">
@@ -7439,8 +10265,8 @@
         </p:nvGrpSpPr>
         <p:grpSpPr>
           <a:xfrm>
-            <a:off x="553372" y="1906967"/>
-            <a:ext cx="1733654" cy="372274"/>
+            <a:off x="553371" y="1906967"/>
+            <a:ext cx="2654085" cy="372274"/>
             <a:chOff x="7855248" y="2029450"/>
             <a:chExt cx="1438780" cy="372274"/>
           </a:xfrm>
@@ -7673,8 +10499,8 @@
         </p:nvGrpSpPr>
         <p:grpSpPr>
           <a:xfrm>
-            <a:off x="553372" y="1426029"/>
-            <a:ext cx="1733654" cy="372274"/>
+            <a:off x="553371" y="1426029"/>
+            <a:ext cx="2654085" cy="372274"/>
             <a:chOff x="7855248" y="2029450"/>
             <a:chExt cx="1438780" cy="372274"/>
           </a:xfrm>
@@ -7907,10 +10733,10 @@
         </p:nvGrpSpPr>
         <p:grpSpPr>
           <a:xfrm>
-            <a:off x="553372" y="2365772"/>
-            <a:ext cx="1733654" cy="372274"/>
+            <a:off x="553371" y="2365772"/>
+            <a:ext cx="2654085" cy="646331"/>
             <a:chOff x="7855248" y="2029450"/>
-            <a:chExt cx="1438780" cy="372274"/>
+            <a:chExt cx="1438780" cy="646331"/>
           </a:xfrm>
         </p:grpSpPr>
         <p:sp>
@@ -8087,7 +10913,7 @@
           <p:spPr>
             <a:xfrm>
               <a:off x="7855248" y="2029450"/>
-              <a:ext cx="812691" cy="369332"/>
+              <a:ext cx="812691" cy="646331"/>
             </a:xfrm>
             <a:prstGeom prst="rect">
               <a:avLst/>
@@ -8100,32 +10926,265 @@
             </a:bodyPr>
             <a:lstStyle/>
             <a:p>
-              <a:pPr>
-                <a:lnSpc>
-                  <a:spcPct val="100000"/>
-                </a:lnSpc>
-                <a:buNone/>
-              </a:pPr>
               <a:r>
-                <a:rPr lang="en-US" sz="1800" b="0" dirty="0">
-                  <a:solidFill>
-                    <a:schemeClr val="tx1"/>
-                  </a:solidFill>
-                  <a:effectLst/>
-                  <a:latin typeface="+mn-lt"/>
-                </a:rPr>
-                <a:t>editor</a:t>
+                <a:rPr lang="en-US" dirty="0"/>
+                <a:t>commenter</a:t>
               </a:r>
-              <a:endParaRPr lang="en-US" sz="1050" b="0" dirty="0">
+            </a:p>
+          </p:txBody>
+        </p:sp>
+      </p:grpSp>
+      <p:pic>
+        <p:nvPicPr>
+          <p:cNvPr id="6" name="Picture 5">
+            <a:extLst>
+              <a:ext uri="{FF2B5EF4-FFF2-40B4-BE49-F238E27FC236}">
+                <a16:creationId xmlns:a16="http://schemas.microsoft.com/office/drawing/2014/main" id="{78AE25F9-981A-6D6F-E508-726C8581C8DE}"/>
+              </a:ext>
+            </a:extLst>
+          </p:cNvPr>
+          <p:cNvPicPr>
+            <a:picLocks noChangeAspect="1"/>
+          </p:cNvPicPr>
+          <p:nvPr/>
+        </p:nvPicPr>
+        <p:blipFill>
+          <a:blip r:embed="rId4"/>
+          <a:stretch>
+            <a:fillRect/>
+          </a:stretch>
+        </p:blipFill>
+        <p:spPr>
+          <a:xfrm>
+            <a:off x="9739293" y="4211888"/>
+            <a:ext cx="501179" cy="556865"/>
+          </a:xfrm>
+          <a:prstGeom prst="rect">
+            <a:avLst/>
+          </a:prstGeom>
+        </p:spPr>
+      </p:pic>
+      <p:grpSp>
+        <p:nvGrpSpPr>
+          <p:cNvPr id="17" name="Group 16">
+            <a:extLst>
+              <a:ext uri="{FF2B5EF4-FFF2-40B4-BE49-F238E27FC236}">
+                <a16:creationId xmlns:a16="http://schemas.microsoft.com/office/drawing/2014/main" id="{8EE9409D-CC3E-7392-36F5-E921EB9E8D10}"/>
+              </a:ext>
+            </a:extLst>
+          </p:cNvPr>
+          <p:cNvGrpSpPr/>
+          <p:nvPr/>
+        </p:nvGrpSpPr>
+        <p:grpSpPr>
+          <a:xfrm>
+            <a:off x="10809718" y="1920652"/>
+            <a:ext cx="325233" cy="365733"/>
+            <a:chOff x="7623732" y="5228063"/>
+            <a:chExt cx="325233" cy="365733"/>
+          </a:xfrm>
+        </p:grpSpPr>
+        <p:sp>
+          <p:nvSpPr>
+            <p:cNvPr id="16" name="Rectangle 15">
+              <a:extLst>
+                <a:ext uri="{FF2B5EF4-FFF2-40B4-BE49-F238E27FC236}">
+                  <a16:creationId xmlns:a16="http://schemas.microsoft.com/office/drawing/2014/main" id="{2C1A81CB-D1E5-9DFF-DC6C-5EEEF7F8EE5D}"/>
+                </a:ext>
+              </a:extLst>
+            </p:cNvPr>
+            <p:cNvSpPr/>
+            <p:nvPr/>
+          </p:nvSpPr>
+          <p:spPr>
+            <a:xfrm>
+              <a:off x="7623732" y="5228063"/>
+              <a:ext cx="325233" cy="365733"/>
+            </a:xfrm>
+            <a:prstGeom prst="rect">
+              <a:avLst/>
+            </a:prstGeom>
+            <a:solidFill>
+              <a:schemeClr val="bg1"/>
+            </a:solidFill>
+            <a:ln>
+              <a:solidFill>
+                <a:schemeClr val="tx1"/>
+              </a:solidFill>
+            </a:ln>
+          </p:spPr>
+          <p:style>
+            <a:lnRef idx="2">
+              <a:schemeClr val="accent1">
+                <a:shade val="15000"/>
+              </a:schemeClr>
+            </a:lnRef>
+            <a:fillRef idx="1">
+              <a:schemeClr val="accent1"/>
+            </a:fillRef>
+            <a:effectRef idx="0">
+              <a:schemeClr val="accent1"/>
+            </a:effectRef>
+            <a:fontRef idx="minor">
+              <a:schemeClr val="lt1"/>
+            </a:fontRef>
+          </p:style>
+          <p:txBody>
+            <a:bodyPr rtlCol="0" anchor="ctr"/>
+            <a:lstStyle/>
+            <a:p>
+              <a:pPr algn="ctr"/>
+              <a:endParaRPr lang="en-US" sz="1200">
                 <a:solidFill>
-                  <a:srgbClr val="BBBEBF"/>
+                  <a:schemeClr val="tx1"/>
                 </a:solidFill>
-                <a:effectLst/>
-                <a:latin typeface="Consolas" panose="020B0609020204030204" pitchFamily="49" charset="0"/>
+                <a:latin typeface="Roboto" panose="02000000000000000000" pitchFamily="2" charset="0"/>
+                <a:ea typeface="Roboto" panose="02000000000000000000" pitchFamily="2" charset="0"/>
               </a:endParaRPr>
             </a:p>
           </p:txBody>
         </p:sp>
+        <p:pic>
+          <p:nvPicPr>
+            <p:cNvPr id="15" name="Picture 14">
+              <a:extLst>
+                <a:ext uri="{FF2B5EF4-FFF2-40B4-BE49-F238E27FC236}">
+                  <a16:creationId xmlns:a16="http://schemas.microsoft.com/office/drawing/2014/main" id="{2ABD278F-305C-C059-60E7-3154CE1BF7BF}"/>
+                </a:ext>
+              </a:extLst>
+            </p:cNvPr>
+            <p:cNvPicPr>
+              <a:picLocks noChangeAspect="1"/>
+            </p:cNvPicPr>
+            <p:nvPr/>
+          </p:nvPicPr>
+          <p:blipFill>
+            <a:blip r:embed="rId5"/>
+            <a:stretch>
+              <a:fillRect/>
+            </a:stretch>
+          </p:blipFill>
+          <p:spPr>
+            <a:xfrm>
+              <a:off x="7652503" y="5267350"/>
+              <a:ext cx="267690" cy="287158"/>
+            </a:xfrm>
+            <a:prstGeom prst="rect">
+              <a:avLst/>
+            </a:prstGeom>
+          </p:spPr>
+        </p:pic>
+      </p:grpSp>
+      <p:grpSp>
+        <p:nvGrpSpPr>
+          <p:cNvPr id="18" name="Group 17">
+            <a:extLst>
+              <a:ext uri="{FF2B5EF4-FFF2-40B4-BE49-F238E27FC236}">
+                <a16:creationId xmlns:a16="http://schemas.microsoft.com/office/drawing/2014/main" id="{27E7C5BF-C288-F554-E3CC-00626BD71C20}"/>
+              </a:ext>
+            </a:extLst>
+          </p:cNvPr>
+          <p:cNvGrpSpPr/>
+          <p:nvPr/>
+        </p:nvGrpSpPr>
+        <p:grpSpPr>
+          <a:xfrm>
+            <a:off x="10810396" y="2364039"/>
+            <a:ext cx="325233" cy="365733"/>
+            <a:chOff x="7623732" y="5228063"/>
+            <a:chExt cx="325233" cy="365733"/>
+          </a:xfrm>
+        </p:grpSpPr>
+        <p:sp>
+          <p:nvSpPr>
+            <p:cNvPr id="19" name="Rectangle 18">
+              <a:extLst>
+                <a:ext uri="{FF2B5EF4-FFF2-40B4-BE49-F238E27FC236}">
+                  <a16:creationId xmlns:a16="http://schemas.microsoft.com/office/drawing/2014/main" id="{44DD9047-EDCC-0767-91A9-BFE5C5556361}"/>
+                </a:ext>
+              </a:extLst>
+            </p:cNvPr>
+            <p:cNvSpPr/>
+            <p:nvPr/>
+          </p:nvSpPr>
+          <p:spPr>
+            <a:xfrm>
+              <a:off x="7623732" y="5228063"/>
+              <a:ext cx="325233" cy="365733"/>
+            </a:xfrm>
+            <a:prstGeom prst="rect">
+              <a:avLst/>
+            </a:prstGeom>
+            <a:solidFill>
+              <a:schemeClr val="bg1"/>
+            </a:solidFill>
+            <a:ln>
+              <a:solidFill>
+                <a:schemeClr val="tx1"/>
+              </a:solidFill>
+            </a:ln>
+          </p:spPr>
+          <p:style>
+            <a:lnRef idx="2">
+              <a:schemeClr val="accent1">
+                <a:shade val="15000"/>
+              </a:schemeClr>
+            </a:lnRef>
+            <a:fillRef idx="1">
+              <a:schemeClr val="accent1"/>
+            </a:fillRef>
+            <a:effectRef idx="0">
+              <a:schemeClr val="accent1"/>
+            </a:effectRef>
+            <a:fontRef idx="minor">
+              <a:schemeClr val="lt1"/>
+            </a:fontRef>
+          </p:style>
+          <p:txBody>
+            <a:bodyPr rtlCol="0" anchor="ctr"/>
+            <a:lstStyle/>
+            <a:p>
+              <a:pPr algn="ctr"/>
+              <a:endParaRPr lang="en-US" sz="1200">
+                <a:solidFill>
+                  <a:schemeClr val="tx1"/>
+                </a:solidFill>
+                <a:latin typeface="Roboto" panose="02000000000000000000" pitchFamily="2" charset="0"/>
+                <a:ea typeface="Roboto" panose="02000000000000000000" pitchFamily="2" charset="0"/>
+              </a:endParaRPr>
+            </a:p>
+          </p:txBody>
+        </p:sp>
+        <p:pic>
+          <p:nvPicPr>
+            <p:cNvPr id="21" name="Picture 20">
+              <a:extLst>
+                <a:ext uri="{FF2B5EF4-FFF2-40B4-BE49-F238E27FC236}">
+                  <a16:creationId xmlns:a16="http://schemas.microsoft.com/office/drawing/2014/main" id="{EC91DE13-097B-446A-5BEE-AAF405690A5C}"/>
+                </a:ext>
+              </a:extLst>
+            </p:cNvPr>
+            <p:cNvPicPr>
+              <a:picLocks noChangeAspect="1"/>
+            </p:cNvPicPr>
+            <p:nvPr/>
+          </p:nvPicPr>
+          <p:blipFill>
+            <a:blip r:embed="rId5"/>
+            <a:stretch>
+              <a:fillRect/>
+            </a:stretch>
+          </p:blipFill>
+          <p:spPr>
+            <a:xfrm>
+              <a:off x="7652503" y="5267350"/>
+              <a:ext cx="267690" cy="287158"/>
+            </a:xfrm>
+            <a:prstGeom prst="rect">
+              <a:avLst/>
+            </a:prstGeom>
+          </p:spPr>
+        </p:pic>
       </p:grpSp>
     </p:spTree>
     <p:extLst>
@@ -10111,7 +13170,7 @@
         </p:blipFill>
         <p:spPr>
           <a:xfrm>
-            <a:off x="8662904" y="2091781"/>
+            <a:off x="8130590" y="2099691"/>
             <a:ext cx="495369" cy="485843"/>
           </a:xfrm>
           <a:prstGeom prst="rect">
@@ -10141,7 +13200,7 @@
         </p:blipFill>
         <p:spPr>
           <a:xfrm>
-            <a:off x="9289360" y="2093306"/>
+            <a:off x="8757046" y="2101216"/>
             <a:ext cx="495369" cy="485843"/>
           </a:xfrm>
           <a:prstGeom prst="rect">
@@ -10163,7 +13222,7 @@
         </p:nvSpPr>
         <p:spPr>
           <a:xfrm>
-            <a:off x="8524531" y="1732034"/>
+            <a:off x="7992217" y="1739944"/>
             <a:ext cx="1593906" cy="369332"/>
           </a:xfrm>
           <a:prstGeom prst="rect">
@@ -10257,6 +13316,446 @@
           <a:chExt cx="0" cy="0"/>
         </a:xfrm>
       </p:grpSpPr>
+      <p:sp>
+        <p:nvSpPr>
+          <p:cNvPr id="2" name="Title 1">
+            <a:extLst>
+              <a:ext uri="{FF2B5EF4-FFF2-40B4-BE49-F238E27FC236}">
+                <a16:creationId xmlns:a16="http://schemas.microsoft.com/office/drawing/2014/main" id="{03B6D56C-EF10-258D-0348-47D975C3C2FF}"/>
+              </a:ext>
+            </a:extLst>
+          </p:cNvPr>
+          <p:cNvSpPr>
+            <a:spLocks noGrp="1"/>
+          </p:cNvSpPr>
+          <p:nvPr>
+            <p:ph type="title"/>
+          </p:nvPr>
+        </p:nvSpPr>
+        <p:spPr/>
+        <p:txBody>
+          <a:bodyPr>
+            <a:normAutofit fontScale="90000"/>
+          </a:bodyPr>
+          <a:lstStyle/>
+          <a:p>
+            <a:r>
+              <a:rPr lang="en-US" dirty="0"/>
+              <a:t>Page Frame</a:t>
+            </a:r>
+          </a:p>
+        </p:txBody>
+      </p:sp>
+      <p:pic>
+        <p:nvPicPr>
+          <p:cNvPr id="6" name="Picture 5">
+            <a:extLst>
+              <a:ext uri="{FF2B5EF4-FFF2-40B4-BE49-F238E27FC236}">
+                <a16:creationId xmlns:a16="http://schemas.microsoft.com/office/drawing/2014/main" id="{F10BFC1C-4919-5640-6628-CD64A78006E7}"/>
+              </a:ext>
+            </a:extLst>
+          </p:cNvPr>
+          <p:cNvPicPr>
+            <a:picLocks noChangeAspect="1"/>
+          </p:cNvPicPr>
+          <p:nvPr/>
+        </p:nvPicPr>
+        <p:blipFill>
+          <a:blip r:embed="rId2"/>
+          <a:stretch>
+            <a:fillRect/>
+          </a:stretch>
+        </p:blipFill>
+        <p:spPr>
+          <a:xfrm>
+            <a:off x="301187" y="697524"/>
+            <a:ext cx="11003005" cy="5946261"/>
+          </a:xfrm>
+          <a:prstGeom prst="rect">
+            <a:avLst/>
+          </a:prstGeom>
+        </p:spPr>
+      </p:pic>
+      <p:sp>
+        <p:nvSpPr>
+          <p:cNvPr id="7" name="TextBox 6">
+            <a:extLst>
+              <a:ext uri="{FF2B5EF4-FFF2-40B4-BE49-F238E27FC236}">
+                <a16:creationId xmlns:a16="http://schemas.microsoft.com/office/drawing/2014/main" id="{BAC96B27-81FE-5408-5214-26A7E6681722}"/>
+              </a:ext>
+            </a:extLst>
+          </p:cNvPr>
+          <p:cNvSpPr txBox="1"/>
+          <p:nvPr/>
+        </p:nvSpPr>
+        <p:spPr>
+          <a:xfrm>
+            <a:off x="1742883" y="1028793"/>
+            <a:ext cx="846707" cy="215444"/>
+          </a:xfrm>
+          <a:prstGeom prst="rect">
+            <a:avLst/>
+          </a:prstGeom>
+          <a:noFill/>
+        </p:spPr>
+        <p:txBody>
+          <a:bodyPr wrap="none" rtlCol="0">
+            <a:spAutoFit/>
+          </a:bodyPr>
+          <a:lstStyle/>
+          <a:p>
+            <a:r>
+              <a:rPr lang="en-US" sz="800" dirty="0">
+                <a:latin typeface="Roboto" panose="02000000000000000000" pitchFamily="2" charset="0"/>
+                <a:ea typeface="Roboto" panose="02000000000000000000" pitchFamily="2" charset="0"/>
+              </a:rPr>
+              <a:t>Item organizer</a:t>
+            </a:r>
+          </a:p>
+        </p:txBody>
+      </p:sp>
+      <p:pic>
+        <p:nvPicPr>
+          <p:cNvPr id="9" name="Picture 8">
+            <a:extLst>
+              <a:ext uri="{FF2B5EF4-FFF2-40B4-BE49-F238E27FC236}">
+                <a16:creationId xmlns:a16="http://schemas.microsoft.com/office/drawing/2014/main" id="{4E1E742F-994E-8D86-254D-16D9CA651751}"/>
+              </a:ext>
+            </a:extLst>
+          </p:cNvPr>
+          <p:cNvPicPr>
+            <a:picLocks noChangeAspect="1"/>
+          </p:cNvPicPr>
+          <p:nvPr/>
+        </p:nvPicPr>
+        <p:blipFill>
+          <a:blip r:embed="rId3">
+            <a:extLst>
+              <a:ext uri="{28A0092B-C50C-407E-A947-70E740481C1C}">
+                <a14:useLocalDpi xmlns:a14="http://schemas.microsoft.com/office/drawing/2010/main" val="0"/>
+              </a:ext>
+            </a:extLst>
+          </a:blip>
+          <a:stretch>
+            <a:fillRect/>
+          </a:stretch>
+        </p:blipFill>
+        <p:spPr>
+          <a:xfrm>
+            <a:off x="1590182" y="1063340"/>
+            <a:ext cx="152701" cy="152701"/>
+          </a:xfrm>
+          <a:prstGeom prst="rect">
+            <a:avLst/>
+          </a:prstGeom>
+        </p:spPr>
+      </p:pic>
+      <p:sp>
+        <p:nvSpPr>
+          <p:cNvPr id="10" name="Rectangle 9">
+            <a:extLst>
+              <a:ext uri="{FF2B5EF4-FFF2-40B4-BE49-F238E27FC236}">
+                <a16:creationId xmlns:a16="http://schemas.microsoft.com/office/drawing/2014/main" id="{0A51A946-D776-3CE5-39B9-6FC4F0976427}"/>
+              </a:ext>
+            </a:extLst>
+          </p:cNvPr>
+          <p:cNvSpPr/>
+          <p:nvPr/>
+        </p:nvSpPr>
+        <p:spPr>
+          <a:xfrm>
+            <a:off x="301187" y="1322480"/>
+            <a:ext cx="11003004" cy="346759"/>
+          </a:xfrm>
+          <a:prstGeom prst="rect">
+            <a:avLst/>
+          </a:prstGeom>
+          <a:solidFill>
+            <a:srgbClr val="FFFF00"/>
+          </a:solidFill>
+          <a:ln w="9525">
+            <a:solidFill>
+              <a:schemeClr val="tx1"/>
+            </a:solidFill>
+          </a:ln>
+        </p:spPr>
+        <p:style>
+          <a:lnRef idx="2">
+            <a:schemeClr val="accent1">
+              <a:shade val="15000"/>
+            </a:schemeClr>
+          </a:lnRef>
+          <a:fillRef idx="1">
+            <a:schemeClr val="accent1"/>
+          </a:fillRef>
+          <a:effectRef idx="0">
+            <a:schemeClr val="accent1"/>
+          </a:effectRef>
+          <a:fontRef idx="minor">
+            <a:schemeClr val="lt1"/>
+          </a:fontRef>
+        </p:style>
+        <p:txBody>
+          <a:bodyPr rtlCol="0" anchor="ctr"/>
+          <a:lstStyle/>
+          <a:p>
+            <a:r>
+              <a:rPr lang="en-US" sz="1400" dirty="0">
+                <a:solidFill>
+                  <a:schemeClr val="tx1"/>
+                </a:solidFill>
+                <a:latin typeface="Roboto" panose="02000000000000000000" pitchFamily="2" charset="0"/>
+                <a:ea typeface="Roboto" panose="02000000000000000000" pitchFamily="2" charset="0"/>
+              </a:rPr>
+              <a:t>Stuart Williams (1), Root Organization (0)</a:t>
+            </a:r>
+          </a:p>
+        </p:txBody>
+      </p:sp>
+      <p:sp>
+        <p:nvSpPr>
+          <p:cNvPr id="11" name="TextBox 10">
+            <a:extLst>
+              <a:ext uri="{FF2B5EF4-FFF2-40B4-BE49-F238E27FC236}">
+                <a16:creationId xmlns:a16="http://schemas.microsoft.com/office/drawing/2014/main" id="{E8B34CC2-8BC6-0C0C-E1B5-9152B8E62A0C}"/>
+              </a:ext>
+            </a:extLst>
+          </p:cNvPr>
+          <p:cNvSpPr txBox="1"/>
+          <p:nvPr/>
+        </p:nvSpPr>
+        <p:spPr>
+          <a:xfrm>
+            <a:off x="4685673" y="3608504"/>
+            <a:ext cx="2178802" cy="584775"/>
+          </a:xfrm>
+          <a:prstGeom prst="rect">
+            <a:avLst/>
+          </a:prstGeom>
+          <a:noFill/>
+        </p:spPr>
+        <p:txBody>
+          <a:bodyPr wrap="none" rtlCol="0">
+            <a:spAutoFit/>
+          </a:bodyPr>
+          <a:lstStyle/>
+          <a:p>
+            <a:r>
+              <a:rPr lang="en-US" sz="3200" dirty="0">
+                <a:latin typeface="Roboto" panose="02000000000000000000" pitchFamily="2" charset="0"/>
+                <a:ea typeface="Roboto" panose="02000000000000000000" pitchFamily="2" charset="0"/>
+              </a:rPr>
+              <a:t>Client Area</a:t>
+            </a:r>
+          </a:p>
+        </p:txBody>
+      </p:sp>
+      <p:pic>
+        <p:nvPicPr>
+          <p:cNvPr id="4" name="Picture 3">
+            <a:extLst>
+              <a:ext uri="{FF2B5EF4-FFF2-40B4-BE49-F238E27FC236}">
+                <a16:creationId xmlns:a16="http://schemas.microsoft.com/office/drawing/2014/main" id="{63E383BD-EE73-3DE9-A8ED-D4E08F11D18D}"/>
+              </a:ext>
+            </a:extLst>
+          </p:cNvPr>
+          <p:cNvPicPr>
+            <a:picLocks noChangeAspect="1"/>
+          </p:cNvPicPr>
+          <p:nvPr/>
+        </p:nvPicPr>
+        <p:blipFill>
+          <a:blip r:embed="rId4"/>
+          <a:stretch>
+            <a:fillRect/>
+          </a:stretch>
+        </p:blipFill>
+        <p:spPr>
+          <a:xfrm>
+            <a:off x="10576670" y="1330490"/>
+            <a:ext cx="328622" cy="328622"/>
+          </a:xfrm>
+          <a:prstGeom prst="rect">
+            <a:avLst/>
+          </a:prstGeom>
+        </p:spPr>
+      </p:pic>
+      <p:pic>
+        <p:nvPicPr>
+          <p:cNvPr id="15" name="Picture 14">
+            <a:extLst>
+              <a:ext uri="{FF2B5EF4-FFF2-40B4-BE49-F238E27FC236}">
+                <a16:creationId xmlns:a16="http://schemas.microsoft.com/office/drawing/2014/main" id="{209B2CD5-94E3-F224-1832-5FFA89F13A50}"/>
+              </a:ext>
+            </a:extLst>
+          </p:cNvPr>
+          <p:cNvPicPr>
+            <a:picLocks noChangeAspect="1"/>
+          </p:cNvPicPr>
+          <p:nvPr/>
+        </p:nvPicPr>
+        <p:blipFill>
+          <a:blip r:embed="rId5"/>
+          <a:stretch>
+            <a:fillRect/>
+          </a:stretch>
+        </p:blipFill>
+        <p:spPr>
+          <a:xfrm>
+            <a:off x="10991882" y="1330489"/>
+            <a:ext cx="275941" cy="328622"/>
+          </a:xfrm>
+          <a:prstGeom prst="rect">
+            <a:avLst/>
+          </a:prstGeom>
+        </p:spPr>
+      </p:pic>
+      <p:sp>
+        <p:nvSpPr>
+          <p:cNvPr id="16" name="Speech Bubble: Rectangle 15">
+            <a:extLst>
+              <a:ext uri="{FF2B5EF4-FFF2-40B4-BE49-F238E27FC236}">
+                <a16:creationId xmlns:a16="http://schemas.microsoft.com/office/drawing/2014/main" id="{D6D42177-49E1-F11C-F9D9-D8E17726FF15}"/>
+              </a:ext>
+            </a:extLst>
+          </p:cNvPr>
+          <p:cNvSpPr/>
+          <p:nvPr/>
+        </p:nvSpPr>
+        <p:spPr>
+          <a:xfrm>
+            <a:off x="1939264" y="5943600"/>
+            <a:ext cx="2215426" cy="438789"/>
+          </a:xfrm>
+          <a:prstGeom prst="wedgeRectCallout">
+            <a:avLst>
+              <a:gd name="adj1" fmla="val -35791"/>
+              <a:gd name="adj2" fmla="val 111451"/>
+            </a:avLst>
+          </a:prstGeom>
+          <a:solidFill>
+            <a:srgbClr val="FFFFCC"/>
+          </a:solidFill>
+        </p:spPr>
+        <p:style>
+          <a:lnRef idx="2">
+            <a:schemeClr val="accent1">
+              <a:shade val="15000"/>
+            </a:schemeClr>
+          </a:lnRef>
+          <a:fillRef idx="1">
+            <a:schemeClr val="accent1"/>
+          </a:fillRef>
+          <a:effectRef idx="0">
+            <a:schemeClr val="accent1"/>
+          </a:effectRef>
+          <a:fontRef idx="minor">
+            <a:schemeClr val="lt1"/>
+          </a:fontRef>
+        </p:style>
+        <p:txBody>
+          <a:bodyPr rtlCol="0" anchor="t"/>
+          <a:lstStyle/>
+          <a:p>
+            <a:r>
+              <a:rPr lang="en-US" dirty="0">
+                <a:solidFill>
+                  <a:schemeClr val="tx1"/>
+                </a:solidFill>
+              </a:rPr>
+              <a:t>No Footer!</a:t>
+            </a:r>
+          </a:p>
+        </p:txBody>
+      </p:sp>
+      <p:sp>
+        <p:nvSpPr>
+          <p:cNvPr id="17" name="Speech Bubble: Rectangle 16">
+            <a:extLst>
+              <a:ext uri="{FF2B5EF4-FFF2-40B4-BE49-F238E27FC236}">
+                <a16:creationId xmlns:a16="http://schemas.microsoft.com/office/drawing/2014/main" id="{38616746-495E-DD29-3848-0130995ABD68}"/>
+              </a:ext>
+            </a:extLst>
+          </p:cNvPr>
+          <p:cNvSpPr/>
+          <p:nvPr/>
+        </p:nvSpPr>
+        <p:spPr>
+          <a:xfrm>
+            <a:off x="7510558" y="1980688"/>
+            <a:ext cx="2215426" cy="438789"/>
+          </a:xfrm>
+          <a:prstGeom prst="wedgeRectCallout">
+            <a:avLst>
+              <a:gd name="adj1" fmla="val -38561"/>
+              <a:gd name="adj2" fmla="val -119319"/>
+            </a:avLst>
+          </a:prstGeom>
+          <a:solidFill>
+            <a:srgbClr val="FFFFCC"/>
+          </a:solidFill>
+        </p:spPr>
+        <p:style>
+          <a:lnRef idx="2">
+            <a:schemeClr val="accent1">
+              <a:shade val="15000"/>
+            </a:schemeClr>
+          </a:lnRef>
+          <a:fillRef idx="1">
+            <a:schemeClr val="accent1"/>
+          </a:fillRef>
+          <a:effectRef idx="0">
+            <a:schemeClr val="accent1"/>
+          </a:effectRef>
+          <a:fontRef idx="minor">
+            <a:schemeClr val="lt1"/>
+          </a:fontRef>
+        </p:style>
+        <p:txBody>
+          <a:bodyPr rtlCol="0" anchor="t"/>
+          <a:lstStyle/>
+          <a:p>
+            <a:r>
+              <a:rPr lang="en-US" dirty="0">
+                <a:solidFill>
+                  <a:schemeClr val="tx1"/>
+                </a:solidFill>
+              </a:rPr>
+              <a:t>Minimal Header</a:t>
+            </a:r>
+          </a:p>
+        </p:txBody>
+      </p:sp>
+    </p:spTree>
+    <p:extLst>
+      <p:ext uri="{BB962C8B-B14F-4D97-AF65-F5344CB8AC3E}">
+        <p14:creationId xmlns:p14="http://schemas.microsoft.com/office/powerpoint/2010/main" val="1528489037"/>
+      </p:ext>
+    </p:extLst>
+  </p:cSld>
+  <p:clrMapOvr>
+    <a:masterClrMapping/>
+  </p:clrMapOvr>
+</p:sld>
+</file>
+
+<file path=ppt/slides/slide4.xml><?xml version="1.0" encoding="utf-8"?>
+<p:sld xmlns:a="http://schemas.openxmlformats.org/drawingml/2006/main" xmlns:r="http://schemas.openxmlformats.org/officeDocument/2006/relationships" xmlns:p="http://schemas.openxmlformats.org/presentationml/2006/main">
+  <p:cSld>
+    <p:spTree>
+      <p:nvGrpSpPr>
+        <p:cNvPr id="1" name=""/>
+        <p:cNvGrpSpPr/>
+        <p:nvPr/>
+      </p:nvGrpSpPr>
+      <p:grpSpPr>
+        <a:xfrm>
+          <a:off x="0" y="0"/>
+          <a:ext cx="0" cy="0"/>
+          <a:chOff x="0" y="0"/>
+          <a:chExt cx="0" cy="0"/>
+        </a:xfrm>
+      </p:grpSpPr>
       <p:pic>
         <p:nvPicPr>
           <p:cNvPr id="48" name="Picture 47">
@@ -10521,7 +14020,7 @@
         </p:blipFill>
         <p:spPr>
           <a:xfrm>
-            <a:off x="10941800" y="931089"/>
+            <a:off x="10900351" y="931089"/>
             <a:ext cx="432873" cy="412894"/>
           </a:xfrm>
           <a:prstGeom prst="rect">
@@ -10561,10 +14060,10 @@
       </p:pic>
       <p:pic>
         <p:nvPicPr>
-          <p:cNvPr id="17" name="Picture 16">
-            <a:extLst>
-              <a:ext uri="{FF2B5EF4-FFF2-40B4-BE49-F238E27FC236}">
-                <a16:creationId xmlns:a16="http://schemas.microsoft.com/office/drawing/2014/main" id="{42D0C4AB-8681-2AFA-9A89-FF4FF537FC8D}"/>
+          <p:cNvPr id="20" name="Picture 19">
+            <a:extLst>
+              <a:ext uri="{FF2B5EF4-FFF2-40B4-BE49-F238E27FC236}">
+                <a16:creationId xmlns:a16="http://schemas.microsoft.com/office/drawing/2014/main" id="{93F930DD-2271-A06B-32F7-2A41C9DCE666}"/>
               </a:ext>
             </a:extLst>
           </p:cNvPr>
@@ -10581,8 +14080,8 @@
         </p:blipFill>
         <p:spPr>
           <a:xfrm>
-            <a:off x="11472873" y="957727"/>
-            <a:ext cx="352958" cy="386256"/>
+            <a:off x="7943217" y="1514210"/>
+            <a:ext cx="312760" cy="372959"/>
           </a:xfrm>
           <a:prstGeom prst="rect">
             <a:avLst/>
@@ -10591,10 +14090,10 @@
       </p:pic>
       <p:pic>
         <p:nvPicPr>
-          <p:cNvPr id="20" name="Picture 19">
-            <a:extLst>
-              <a:ext uri="{FF2B5EF4-FFF2-40B4-BE49-F238E27FC236}">
-                <a16:creationId xmlns:a16="http://schemas.microsoft.com/office/drawing/2014/main" id="{93F930DD-2271-A06B-32F7-2A41C9DCE666}"/>
+          <p:cNvPr id="22" name="Picture 21">
+            <a:extLst>
+              <a:ext uri="{FF2B5EF4-FFF2-40B4-BE49-F238E27FC236}">
+                <a16:creationId xmlns:a16="http://schemas.microsoft.com/office/drawing/2014/main" id="{EE154681-839F-4922-5A86-40DBE3E8EE9F}"/>
               </a:ext>
             </a:extLst>
           </p:cNvPr>
@@ -10611,8 +14110,8 @@
         </p:blipFill>
         <p:spPr>
           <a:xfrm>
-            <a:off x="7943217" y="1514210"/>
-            <a:ext cx="312760" cy="372959"/>
+            <a:off x="344914" y="1495103"/>
+            <a:ext cx="376533" cy="476429"/>
           </a:xfrm>
           <a:prstGeom prst="rect">
             <a:avLst/>
@@ -10621,10 +14120,10 @@
       </p:pic>
       <p:pic>
         <p:nvPicPr>
-          <p:cNvPr id="22" name="Picture 21">
-            <a:extLst>
-              <a:ext uri="{FF2B5EF4-FFF2-40B4-BE49-F238E27FC236}">
-                <a16:creationId xmlns:a16="http://schemas.microsoft.com/office/drawing/2014/main" id="{EE154681-839F-4922-5A86-40DBE3E8EE9F}"/>
+          <p:cNvPr id="24" name="Picture 23">
+            <a:extLst>
+              <a:ext uri="{FF2B5EF4-FFF2-40B4-BE49-F238E27FC236}">
+                <a16:creationId xmlns:a16="http://schemas.microsoft.com/office/drawing/2014/main" id="{7B23E843-3DC1-A74A-4008-4D8AB6A5B856}"/>
               </a:ext>
             </a:extLst>
           </p:cNvPr>
@@ -10641,8 +14140,8 @@
         </p:blipFill>
         <p:spPr>
           <a:xfrm>
-            <a:off x="344914" y="1495103"/>
-            <a:ext cx="376533" cy="476429"/>
+            <a:off x="5176152" y="1526059"/>
+            <a:ext cx="311287" cy="367319"/>
           </a:xfrm>
           <a:prstGeom prst="rect">
             <a:avLst/>
@@ -10651,10 +14150,10 @@
       </p:pic>
       <p:pic>
         <p:nvPicPr>
-          <p:cNvPr id="24" name="Picture 23">
-            <a:extLst>
-              <a:ext uri="{FF2B5EF4-FFF2-40B4-BE49-F238E27FC236}">
-                <a16:creationId xmlns:a16="http://schemas.microsoft.com/office/drawing/2014/main" id="{7B23E843-3DC1-A74A-4008-4D8AB6A5B856}"/>
+          <p:cNvPr id="26" name="Picture 25">
+            <a:extLst>
+              <a:ext uri="{FF2B5EF4-FFF2-40B4-BE49-F238E27FC236}">
+                <a16:creationId xmlns:a16="http://schemas.microsoft.com/office/drawing/2014/main" id="{09120546-5877-32DE-1189-A9F5F6A4B907}"/>
               </a:ext>
             </a:extLst>
           </p:cNvPr>
@@ -10671,8 +14170,8 @@
         </p:blipFill>
         <p:spPr>
           <a:xfrm>
-            <a:off x="5176152" y="1526059"/>
-            <a:ext cx="311287" cy="367319"/>
+            <a:off x="3790781" y="2108986"/>
+            <a:ext cx="311962" cy="386625"/>
           </a:xfrm>
           <a:prstGeom prst="rect">
             <a:avLst/>
@@ -10681,10 +14180,10 @@
       </p:pic>
       <p:pic>
         <p:nvPicPr>
-          <p:cNvPr id="26" name="Picture 25">
-            <a:extLst>
-              <a:ext uri="{FF2B5EF4-FFF2-40B4-BE49-F238E27FC236}">
-                <a16:creationId xmlns:a16="http://schemas.microsoft.com/office/drawing/2014/main" id="{09120546-5877-32DE-1189-A9F5F6A4B907}"/>
+          <p:cNvPr id="28" name="Picture 27">
+            <a:extLst>
+              <a:ext uri="{FF2B5EF4-FFF2-40B4-BE49-F238E27FC236}">
+                <a16:creationId xmlns:a16="http://schemas.microsoft.com/office/drawing/2014/main" id="{1516910F-90AE-6951-E560-127F40377F5A}"/>
               </a:ext>
             </a:extLst>
           </p:cNvPr>
@@ -10701,8 +14200,8 @@
         </p:blipFill>
         <p:spPr>
           <a:xfrm>
-            <a:off x="3790781" y="2108986"/>
-            <a:ext cx="311962" cy="386625"/>
+            <a:off x="9838527" y="2075454"/>
+            <a:ext cx="312759" cy="420157"/>
           </a:xfrm>
           <a:prstGeom prst="rect">
             <a:avLst/>
@@ -10711,10 +14210,10 @@
       </p:pic>
       <p:pic>
         <p:nvPicPr>
-          <p:cNvPr id="28" name="Picture 27">
-            <a:extLst>
-              <a:ext uri="{FF2B5EF4-FFF2-40B4-BE49-F238E27FC236}">
-                <a16:creationId xmlns:a16="http://schemas.microsoft.com/office/drawing/2014/main" id="{1516910F-90AE-6951-E560-127F40377F5A}"/>
+          <p:cNvPr id="30" name="Picture 29">
+            <a:extLst>
+              <a:ext uri="{FF2B5EF4-FFF2-40B4-BE49-F238E27FC236}">
+                <a16:creationId xmlns:a16="http://schemas.microsoft.com/office/drawing/2014/main" id="{87965938-B259-23CE-1367-CB1523DD9E01}"/>
               </a:ext>
             </a:extLst>
           </p:cNvPr>
@@ -10731,8 +14230,8 @@
         </p:blipFill>
         <p:spPr>
           <a:xfrm>
-            <a:off x="9838527" y="2075454"/>
-            <a:ext cx="312759" cy="420157"/>
+            <a:off x="344914" y="2108986"/>
+            <a:ext cx="321274" cy="438927"/>
           </a:xfrm>
           <a:prstGeom prst="rect">
             <a:avLst/>
@@ -10741,10 +14240,10 @@
       </p:pic>
       <p:pic>
         <p:nvPicPr>
-          <p:cNvPr id="30" name="Picture 29">
-            <a:extLst>
-              <a:ext uri="{FF2B5EF4-FFF2-40B4-BE49-F238E27FC236}">
-                <a16:creationId xmlns:a16="http://schemas.microsoft.com/office/drawing/2014/main" id="{87965938-B259-23CE-1367-CB1523DD9E01}"/>
+          <p:cNvPr id="32" name="Picture 31">
+            <a:extLst>
+              <a:ext uri="{FF2B5EF4-FFF2-40B4-BE49-F238E27FC236}">
+                <a16:creationId xmlns:a16="http://schemas.microsoft.com/office/drawing/2014/main" id="{BFADF11E-85DD-534D-6D8B-12FA31C751A1}"/>
               </a:ext>
             </a:extLst>
           </p:cNvPr>
@@ -10761,36 +14260,6 @@
         </p:blipFill>
         <p:spPr>
           <a:xfrm>
-            <a:off x="344914" y="2108986"/>
-            <a:ext cx="321274" cy="438927"/>
-          </a:xfrm>
-          <a:prstGeom prst="rect">
-            <a:avLst/>
-          </a:prstGeom>
-        </p:spPr>
-      </p:pic>
-      <p:pic>
-        <p:nvPicPr>
-          <p:cNvPr id="32" name="Picture 31">
-            <a:extLst>
-              <a:ext uri="{FF2B5EF4-FFF2-40B4-BE49-F238E27FC236}">
-                <a16:creationId xmlns:a16="http://schemas.microsoft.com/office/drawing/2014/main" id="{BFADF11E-85DD-534D-6D8B-12FA31C751A1}"/>
-              </a:ext>
-            </a:extLst>
-          </p:cNvPr>
-          <p:cNvPicPr>
-            <a:picLocks noChangeAspect="1"/>
-          </p:cNvPicPr>
-          <p:nvPr/>
-        </p:nvPicPr>
-        <p:blipFill>
-          <a:blip r:embed="rId14"/>
-          <a:stretch>
-            <a:fillRect/>
-          </a:stretch>
-        </p:blipFill>
-        <p:spPr>
-          <a:xfrm>
             <a:off x="6096000" y="2108986"/>
             <a:ext cx="334286" cy="386625"/>
           </a:xfrm>
@@ -10814,7 +14283,7 @@
           <p:nvPr/>
         </p:nvPicPr>
         <p:blipFill>
-          <a:blip r:embed="rId15"/>
+          <a:blip r:embed="rId14"/>
           <a:stretch>
             <a:fillRect/>
           </a:stretch>
@@ -11751,6 +15220,36 @@
           <p:nvPr/>
         </p:nvPicPr>
         <p:blipFill>
+          <a:blip r:embed="rId15"/>
+          <a:stretch>
+            <a:fillRect/>
+          </a:stretch>
+        </p:blipFill>
+        <p:spPr>
+          <a:xfrm>
+            <a:off x="344914" y="4242867"/>
+            <a:ext cx="255204" cy="412297"/>
+          </a:xfrm>
+          <a:prstGeom prst="rect">
+            <a:avLst/>
+          </a:prstGeom>
+        </p:spPr>
+      </p:pic>
+      <p:pic>
+        <p:nvPicPr>
+          <p:cNvPr id="58" name="Picture 57">
+            <a:extLst>
+              <a:ext uri="{FF2B5EF4-FFF2-40B4-BE49-F238E27FC236}">
+                <a16:creationId xmlns:a16="http://schemas.microsoft.com/office/drawing/2014/main" id="{9D585C2E-E144-6789-E9E8-FE00183AA1E9}"/>
+              </a:ext>
+            </a:extLst>
+          </p:cNvPr>
+          <p:cNvPicPr>
+            <a:picLocks noChangeAspect="1"/>
+          </p:cNvPicPr>
+          <p:nvPr/>
+        </p:nvPicPr>
+        <p:blipFill>
           <a:blip r:embed="rId16"/>
           <a:stretch>
             <a:fillRect/>
@@ -11758,8 +15257,8 @@
         </p:blipFill>
         <p:spPr>
           <a:xfrm>
-            <a:off x="344914" y="4242867"/>
-            <a:ext cx="255204" cy="412297"/>
+            <a:off x="370107" y="6152082"/>
+            <a:ext cx="204816" cy="428685"/>
           </a:xfrm>
           <a:prstGeom prst="rect">
             <a:avLst/>
@@ -11768,10 +15267,10 @@
       </p:pic>
       <p:pic>
         <p:nvPicPr>
-          <p:cNvPr id="58" name="Picture 57">
-            <a:extLst>
-              <a:ext uri="{FF2B5EF4-FFF2-40B4-BE49-F238E27FC236}">
-                <a16:creationId xmlns:a16="http://schemas.microsoft.com/office/drawing/2014/main" id="{9D585C2E-E144-6789-E9E8-FE00183AA1E9}"/>
+          <p:cNvPr id="60" name="Picture 59">
+            <a:extLst>
+              <a:ext uri="{FF2B5EF4-FFF2-40B4-BE49-F238E27FC236}">
+                <a16:creationId xmlns:a16="http://schemas.microsoft.com/office/drawing/2014/main" id="{0343FB4C-8DCD-7B66-4EC8-CAEC1B2FBFEA}"/>
               </a:ext>
             </a:extLst>
           </p:cNvPr>
@@ -11788,36 +15287,6 @@
         </p:blipFill>
         <p:spPr>
           <a:xfrm>
-            <a:off x="370107" y="6152082"/>
-            <a:ext cx="204816" cy="428685"/>
-          </a:xfrm>
-          <a:prstGeom prst="rect">
-            <a:avLst/>
-          </a:prstGeom>
-        </p:spPr>
-      </p:pic>
-      <p:pic>
-        <p:nvPicPr>
-          <p:cNvPr id="60" name="Picture 59">
-            <a:extLst>
-              <a:ext uri="{FF2B5EF4-FFF2-40B4-BE49-F238E27FC236}">
-                <a16:creationId xmlns:a16="http://schemas.microsoft.com/office/drawing/2014/main" id="{0343FB4C-8DCD-7B66-4EC8-CAEC1B2FBFEA}"/>
-              </a:ext>
-            </a:extLst>
-          </p:cNvPr>
-          <p:cNvPicPr>
-            <a:picLocks noChangeAspect="1"/>
-          </p:cNvPicPr>
-          <p:nvPr/>
-        </p:nvPicPr>
-        <p:blipFill>
-          <a:blip r:embed="rId18"/>
-          <a:stretch>
-            <a:fillRect/>
-          </a:stretch>
-        </p:blipFill>
-        <p:spPr>
-          <a:xfrm>
             <a:off x="360480" y="4699974"/>
             <a:ext cx="224071" cy="393546"/>
           </a:xfrm>
@@ -11841,7 +15310,7 @@
           <p:nvPr/>
         </p:nvPicPr>
         <p:blipFill>
-          <a:blip r:embed="rId19"/>
+          <a:blip r:embed="rId18"/>
           <a:stretch>
             <a:fillRect/>
           </a:stretch>
@@ -11927,6 +15396,36 @@
           <p:nvPr/>
         </p:nvPicPr>
         <p:blipFill>
+          <a:blip r:embed="rId19"/>
+          <a:stretch>
+            <a:fillRect/>
+          </a:stretch>
+        </p:blipFill>
+        <p:spPr>
+          <a:xfrm>
+            <a:off x="268273" y="5656333"/>
+            <a:ext cx="373770" cy="420492"/>
+          </a:xfrm>
+          <a:prstGeom prst="rect">
+            <a:avLst/>
+          </a:prstGeom>
+        </p:spPr>
+      </p:pic>
+      <p:pic>
+        <p:nvPicPr>
+          <p:cNvPr id="71" name="Picture 70">
+            <a:extLst>
+              <a:ext uri="{FF2B5EF4-FFF2-40B4-BE49-F238E27FC236}">
+                <a16:creationId xmlns:a16="http://schemas.microsoft.com/office/drawing/2014/main" id="{D1106F7C-51C1-E253-EF03-040518FEEB45}"/>
+              </a:ext>
+            </a:extLst>
+          </p:cNvPr>
+          <p:cNvPicPr>
+            <a:picLocks noChangeAspect="1"/>
+          </p:cNvPicPr>
+          <p:nvPr/>
+        </p:nvPicPr>
+        <p:blipFill>
           <a:blip r:embed="rId20"/>
           <a:stretch>
             <a:fillRect/>
@@ -11934,8 +15433,8 @@
         </p:blipFill>
         <p:spPr>
           <a:xfrm>
-            <a:off x="268273" y="5656333"/>
-            <a:ext cx="373770" cy="420492"/>
+            <a:off x="335272" y="3139832"/>
+            <a:ext cx="368790" cy="374936"/>
           </a:xfrm>
           <a:prstGeom prst="rect">
             <a:avLst/>
@@ -11944,10 +15443,10 @@
       </p:pic>
       <p:pic>
         <p:nvPicPr>
-          <p:cNvPr id="71" name="Picture 70">
-            <a:extLst>
-              <a:ext uri="{FF2B5EF4-FFF2-40B4-BE49-F238E27FC236}">
-                <a16:creationId xmlns:a16="http://schemas.microsoft.com/office/drawing/2014/main" id="{D1106F7C-51C1-E253-EF03-040518FEEB45}"/>
+          <p:cNvPr id="73" name="Picture 72">
+            <a:extLst>
+              <a:ext uri="{FF2B5EF4-FFF2-40B4-BE49-F238E27FC236}">
+                <a16:creationId xmlns:a16="http://schemas.microsoft.com/office/drawing/2014/main" id="{0733A074-1291-BDF2-32EF-995FE4336EF8}"/>
               </a:ext>
             </a:extLst>
           </p:cNvPr>
@@ -11964,8 +15463,8 @@
         </p:blipFill>
         <p:spPr>
           <a:xfrm>
-            <a:off x="335272" y="3139832"/>
-            <a:ext cx="368790" cy="374936"/>
+            <a:off x="326167" y="3619955"/>
+            <a:ext cx="340021" cy="275533"/>
           </a:xfrm>
           <a:prstGeom prst="rect">
             <a:avLst/>
@@ -11974,10 +15473,10 @@
       </p:pic>
       <p:pic>
         <p:nvPicPr>
-          <p:cNvPr id="73" name="Picture 72">
-            <a:extLst>
-              <a:ext uri="{FF2B5EF4-FFF2-40B4-BE49-F238E27FC236}">
-                <a16:creationId xmlns:a16="http://schemas.microsoft.com/office/drawing/2014/main" id="{0733A074-1291-BDF2-32EF-995FE4336EF8}"/>
+          <p:cNvPr id="9" name="Picture 8">
+            <a:extLst>
+              <a:ext uri="{FF2B5EF4-FFF2-40B4-BE49-F238E27FC236}">
+                <a16:creationId xmlns:a16="http://schemas.microsoft.com/office/drawing/2014/main" id="{246D5757-385B-7632-9BA3-0FB717FBFF37}"/>
               </a:ext>
             </a:extLst>
           </p:cNvPr>
@@ -11994,8 +15493,8 @@
         </p:blipFill>
         <p:spPr>
           <a:xfrm>
-            <a:off x="326167" y="3619955"/>
-            <a:ext cx="340021" cy="275533"/>
+            <a:off x="11366352" y="957358"/>
+            <a:ext cx="478043" cy="365695"/>
           </a:xfrm>
           <a:prstGeom prst="rect">
             <a:avLst/>
@@ -12020,7 +15519,7 @@
 </p:sld>
 </file>
 
-<file path=ppt/slides/slide4.xml><?xml version="1.0" encoding="utf-8"?>
+<file path=ppt/slides/slide5.xml><?xml version="1.0" encoding="utf-8"?>
 <p:sld xmlns:a="http://schemas.openxmlformats.org/drawingml/2006/main" xmlns:r="http://schemas.openxmlformats.org/officeDocument/2006/relationships" xmlns:p="http://schemas.openxmlformats.org/presentationml/2006/main">
   <p:cSld>
     <p:spTree>
@@ -13731,103 +17230,82 @@
           </a:prstGeom>
         </p:spPr>
       </p:pic>
-      <p:grpSp>
-        <p:nvGrpSpPr>
-          <p:cNvPr id="98" name="Group 97">
-            <a:extLst>
-              <a:ext uri="{FF2B5EF4-FFF2-40B4-BE49-F238E27FC236}">
-                <a16:creationId xmlns:a16="http://schemas.microsoft.com/office/drawing/2014/main" id="{F00B784A-EF09-7A10-9F09-C3553C95AFBA}"/>
-              </a:ext>
-            </a:extLst>
-          </p:cNvPr>
-          <p:cNvGrpSpPr/>
-          <p:nvPr/>
-        </p:nvGrpSpPr>
-        <p:grpSpPr>
+      <p:sp>
+        <p:nvSpPr>
+          <p:cNvPr id="82" name="Rectangle: Beveled 81">
+            <a:extLst>
+              <a:ext uri="{FF2B5EF4-FFF2-40B4-BE49-F238E27FC236}">
+                <a16:creationId xmlns:a16="http://schemas.microsoft.com/office/drawing/2014/main" id="{377B78F0-48CB-A012-2B37-A0E0410D732D}"/>
+              </a:ext>
+            </a:extLst>
+          </p:cNvPr>
+          <p:cNvSpPr/>
+          <p:nvPr/>
+        </p:nvSpPr>
+        <p:spPr>
           <a:xfrm>
             <a:off x="10080895" y="1900592"/>
             <a:ext cx="1900958" cy="275085"/>
-            <a:chOff x="188440" y="1890168"/>
-            <a:chExt cx="600102" cy="275085"/>
-          </a:xfrm>
-        </p:grpSpPr>
-        <p:sp>
-          <p:nvSpPr>
-            <p:cNvPr id="82" name="Rectangle: Beveled 81">
-              <a:extLst>
-                <a:ext uri="{FF2B5EF4-FFF2-40B4-BE49-F238E27FC236}">
-                  <a16:creationId xmlns:a16="http://schemas.microsoft.com/office/drawing/2014/main" id="{377B78F0-48CB-A012-2B37-A0E0410D732D}"/>
-                </a:ext>
-              </a:extLst>
-            </p:cNvPr>
-            <p:cNvSpPr/>
-            <p:nvPr/>
-          </p:nvSpPr>
-          <p:spPr>
-            <a:xfrm>
-              <a:off x="188440" y="1890168"/>
-              <a:ext cx="600102" cy="275085"/>
-            </a:xfrm>
-            <a:prstGeom prst="bevel">
-              <a:avLst>
-                <a:gd name="adj" fmla="val 11293"/>
-              </a:avLst>
-            </a:prstGeom>
-          </p:spPr>
-          <p:style>
-            <a:lnRef idx="1">
-              <a:schemeClr val="accent6"/>
-            </a:lnRef>
-            <a:fillRef idx="2">
-              <a:schemeClr val="accent6"/>
-            </a:fillRef>
-            <a:effectRef idx="1">
-              <a:schemeClr val="accent6"/>
-            </a:effectRef>
-            <a:fontRef idx="minor">
-              <a:schemeClr val="dk1"/>
-            </a:fontRef>
-          </p:style>
-          <p:txBody>
-            <a:bodyPr rtlCol="0" anchor="ctr"/>
-            <a:lstStyle/>
-            <a:p>
-              <a:pPr algn="ctr"/>
-              <a:endParaRPr lang="en-US"/>
-            </a:p>
-          </p:txBody>
-        </p:sp>
-        <p:pic>
-          <p:nvPicPr>
-            <p:cNvPr id="84" name="Picture 83">
-              <a:extLst>
-                <a:ext uri="{FF2B5EF4-FFF2-40B4-BE49-F238E27FC236}">
-                  <a16:creationId xmlns:a16="http://schemas.microsoft.com/office/drawing/2014/main" id="{11BED6DF-4162-B75D-9CDE-FAABDC97EA41}"/>
-                </a:ext>
-              </a:extLst>
-            </p:cNvPr>
-            <p:cNvPicPr>
-              <a:picLocks noChangeAspect="1"/>
-            </p:cNvPicPr>
-            <p:nvPr/>
-          </p:nvPicPr>
-          <p:blipFill>
-            <a:blip r:embed="rId20"/>
-            <a:stretch>
-              <a:fillRect/>
-            </a:stretch>
-          </p:blipFill>
-          <p:spPr>
-            <a:xfrm>
-              <a:off x="376968" y="1918744"/>
-              <a:ext cx="223047" cy="219450"/>
-            </a:xfrm>
-            <a:prstGeom prst="rect">
-              <a:avLst/>
-            </a:prstGeom>
-          </p:spPr>
-        </p:pic>
-      </p:grpSp>
+          </a:xfrm>
+          <a:prstGeom prst="bevel">
+            <a:avLst>
+              <a:gd name="adj" fmla="val 11293"/>
+            </a:avLst>
+          </a:prstGeom>
+        </p:spPr>
+        <p:style>
+          <a:lnRef idx="1">
+            <a:schemeClr val="accent6"/>
+          </a:lnRef>
+          <a:fillRef idx="2">
+            <a:schemeClr val="accent6"/>
+          </a:fillRef>
+          <a:effectRef idx="1">
+            <a:schemeClr val="accent6"/>
+          </a:effectRef>
+          <a:fontRef idx="minor">
+            <a:schemeClr val="dk1"/>
+          </a:fontRef>
+        </p:style>
+        <p:txBody>
+          <a:bodyPr rtlCol="0" anchor="ctr"/>
+          <a:lstStyle/>
+          <a:p>
+            <a:pPr algn="ctr"/>
+            <a:endParaRPr lang="en-US"/>
+          </a:p>
+        </p:txBody>
+      </p:sp>
+      <p:pic>
+        <p:nvPicPr>
+          <p:cNvPr id="84" name="Picture 83">
+            <a:extLst>
+              <a:ext uri="{FF2B5EF4-FFF2-40B4-BE49-F238E27FC236}">
+                <a16:creationId xmlns:a16="http://schemas.microsoft.com/office/drawing/2014/main" id="{11BED6DF-4162-B75D-9CDE-FAABDC97EA41}"/>
+              </a:ext>
+            </a:extLst>
+          </p:cNvPr>
+          <p:cNvPicPr>
+            <a:picLocks noChangeAspect="1"/>
+          </p:cNvPicPr>
+          <p:nvPr/>
+        </p:nvPicPr>
+        <p:blipFill>
+          <a:blip r:embed="rId20"/>
+          <a:stretch>
+            <a:fillRect/>
+          </a:stretch>
+        </p:blipFill>
+        <p:spPr>
+          <a:xfrm>
+            <a:off x="10678100" y="1929168"/>
+            <a:ext cx="706552" cy="219450"/>
+          </a:xfrm>
+          <a:prstGeom prst="rect">
+            <a:avLst/>
+          </a:prstGeom>
+        </p:spPr>
+      </p:pic>
       <p:grpSp>
         <p:nvGrpSpPr>
           <p:cNvPr id="99" name="Group 98">
@@ -13939,7 +17417,7 @@
         </p:nvGrpSpPr>
         <p:grpSpPr>
           <a:xfrm>
-            <a:off x="188438" y="1816036"/>
+            <a:off x="3533358" y="1782703"/>
             <a:ext cx="3445025" cy="461665"/>
             <a:chOff x="188438" y="1816036"/>
             <a:chExt cx="3445025" cy="461665"/>
@@ -14287,6 +17765,108 @@
           </a:prstGeom>
         </p:spPr>
       </p:pic>
+      <p:pic>
+        <p:nvPicPr>
+          <p:cNvPr id="5" name="Picture 4">
+            <a:extLst>
+              <a:ext uri="{FF2B5EF4-FFF2-40B4-BE49-F238E27FC236}">
+                <a16:creationId xmlns:a16="http://schemas.microsoft.com/office/drawing/2014/main" id="{BD95CEAF-6377-908A-FC05-02E9D34F4BD7}"/>
+              </a:ext>
+            </a:extLst>
+          </p:cNvPr>
+          <p:cNvPicPr>
+            <a:picLocks noChangeAspect="1"/>
+          </p:cNvPicPr>
+          <p:nvPr/>
+        </p:nvPicPr>
+        <p:blipFill>
+          <a:blip r:embed="rId25"/>
+          <a:stretch>
+            <a:fillRect/>
+          </a:stretch>
+        </p:blipFill>
+        <p:spPr>
+          <a:xfrm>
+            <a:off x="210147" y="1927828"/>
+            <a:ext cx="269502" cy="267693"/>
+          </a:xfrm>
+          <a:prstGeom prst="rect">
+            <a:avLst/>
+          </a:prstGeom>
+        </p:spPr>
+      </p:pic>
+      <p:sp>
+        <p:nvSpPr>
+          <p:cNvPr id="11" name="TextBox 10">
+            <a:extLst>
+              <a:ext uri="{FF2B5EF4-FFF2-40B4-BE49-F238E27FC236}">
+                <a16:creationId xmlns:a16="http://schemas.microsoft.com/office/drawing/2014/main" id="{1BABE725-2323-7500-C94A-FEC3932335B5}"/>
+              </a:ext>
+            </a:extLst>
+          </p:cNvPr>
+          <p:cNvSpPr txBox="1"/>
+          <p:nvPr/>
+        </p:nvSpPr>
+        <p:spPr>
+          <a:xfrm>
+            <a:off x="431961" y="1831852"/>
+            <a:ext cx="303288" cy="461665"/>
+          </a:xfrm>
+          <a:prstGeom prst="rect">
+            <a:avLst/>
+          </a:prstGeom>
+          <a:noFill/>
+        </p:spPr>
+        <p:txBody>
+          <a:bodyPr wrap="none" rtlCol="0">
+            <a:spAutoFit/>
+          </a:bodyPr>
+          <a:lstStyle/>
+          <a:p>
+            <a:r>
+              <a:rPr lang="en-US" sz="2400" b="1" dirty="0">
+                <a:solidFill>
+                  <a:schemeClr val="tx2">
+                    <a:lumMod val="50000"/>
+                    <a:lumOff val="50000"/>
+                  </a:schemeClr>
+                </a:solidFill>
+              </a:rPr>
+              <a:t>/</a:t>
+            </a:r>
+          </a:p>
+        </p:txBody>
+      </p:sp>
+      <p:pic>
+        <p:nvPicPr>
+          <p:cNvPr id="15" name="Picture 14">
+            <a:extLst>
+              <a:ext uri="{FF2B5EF4-FFF2-40B4-BE49-F238E27FC236}">
+                <a16:creationId xmlns:a16="http://schemas.microsoft.com/office/drawing/2014/main" id="{0ABBA617-AA78-EECC-B2C5-D7B2A472DC3A}"/>
+              </a:ext>
+            </a:extLst>
+          </p:cNvPr>
+          <p:cNvPicPr>
+            <a:picLocks noChangeAspect="1"/>
+          </p:cNvPicPr>
+          <p:nvPr/>
+        </p:nvPicPr>
+        <p:blipFill>
+          <a:blip r:embed="rId26"/>
+          <a:stretch>
+            <a:fillRect/>
+          </a:stretch>
+        </p:blipFill>
+        <p:spPr>
+          <a:xfrm>
+            <a:off x="678959" y="1944016"/>
+            <a:ext cx="226785" cy="227607"/>
+          </a:xfrm>
+          <a:prstGeom prst="rect">
+            <a:avLst/>
+          </a:prstGeom>
+        </p:spPr>
+      </p:pic>
     </p:spTree>
     <p:extLst>
       <p:ext uri="{BB962C8B-B14F-4D97-AF65-F5344CB8AC3E}">
@@ -14302,580 +17882,6 @@
       <p188:commentRel xmlns:p188="http://schemas.microsoft.com/office/powerpoint/2018/8/main" r:id="rId2"/>
     </p:ext>
   </p:extLst>
-</p:sld>
-</file>
-
-<file path=ppt/slides/slide5.xml><?xml version="1.0" encoding="utf-8"?>
-<p:sld xmlns:a="http://schemas.openxmlformats.org/drawingml/2006/main" xmlns:r="http://schemas.openxmlformats.org/officeDocument/2006/relationships" xmlns:p="http://schemas.openxmlformats.org/presentationml/2006/main">
-  <p:cSld>
-    <p:spTree>
-      <p:nvGrpSpPr>
-        <p:cNvPr id="1" name=""/>
-        <p:cNvGrpSpPr/>
-        <p:nvPr/>
-      </p:nvGrpSpPr>
-      <p:grpSpPr>
-        <a:xfrm>
-          <a:off x="0" y="0"/>
-          <a:ext cx="0" cy="0"/>
-          <a:chOff x="0" y="0"/>
-          <a:chExt cx="0" cy="0"/>
-        </a:xfrm>
-      </p:grpSpPr>
-      <p:sp>
-        <p:nvSpPr>
-          <p:cNvPr id="2" name="Title 1">
-            <a:extLst>
-              <a:ext uri="{FF2B5EF4-FFF2-40B4-BE49-F238E27FC236}">
-                <a16:creationId xmlns:a16="http://schemas.microsoft.com/office/drawing/2014/main" id="{A316EA6C-51A0-1744-3A85-7D21FD14DF37}"/>
-              </a:ext>
-            </a:extLst>
-          </p:cNvPr>
-          <p:cNvSpPr>
-            <a:spLocks noGrp="1"/>
-          </p:cNvSpPr>
-          <p:nvPr>
-            <p:ph type="title"/>
-          </p:nvPr>
-        </p:nvSpPr>
-        <p:spPr/>
-        <p:txBody>
-          <a:bodyPr>
-            <a:normAutofit fontScale="90000"/>
-          </a:bodyPr>
-          <a:lstStyle/>
-          <a:p>
-            <a:r>
-              <a:rPr lang="en-US" dirty="0"/>
-              <a:t>Dialog: Date Picker</a:t>
-            </a:r>
-          </a:p>
-        </p:txBody>
-      </p:sp>
-      <p:sp>
-        <p:nvSpPr>
-          <p:cNvPr id="3" name="Rectangle 2">
-            <a:extLst>
-              <a:ext uri="{FF2B5EF4-FFF2-40B4-BE49-F238E27FC236}">
-                <a16:creationId xmlns:a16="http://schemas.microsoft.com/office/drawing/2014/main" id="{D35E6BE1-FD5A-8ED4-637C-223A702C828C}"/>
-              </a:ext>
-            </a:extLst>
-          </p:cNvPr>
-          <p:cNvSpPr/>
-          <p:nvPr/>
-        </p:nvSpPr>
-        <p:spPr>
-          <a:xfrm>
-            <a:off x="699608" y="1417627"/>
-            <a:ext cx="4436988" cy="3553272"/>
-          </a:xfrm>
-          <a:prstGeom prst="rect">
-            <a:avLst/>
-          </a:prstGeom>
-          <a:noFill/>
-        </p:spPr>
-        <p:style>
-          <a:lnRef idx="2">
-            <a:schemeClr val="accent1">
-              <a:shade val="15000"/>
-            </a:schemeClr>
-          </a:lnRef>
-          <a:fillRef idx="1">
-            <a:schemeClr val="accent1"/>
-          </a:fillRef>
-          <a:effectRef idx="0">
-            <a:schemeClr val="accent1"/>
-          </a:effectRef>
-          <a:fontRef idx="minor">
-            <a:schemeClr val="lt1"/>
-          </a:fontRef>
-        </p:style>
-        <p:txBody>
-          <a:bodyPr rtlCol="0" anchor="ctr"/>
-          <a:lstStyle/>
-          <a:p>
-            <a:pPr algn="ctr"/>
-            <a:endParaRPr lang="en-US"/>
-          </a:p>
-        </p:txBody>
-      </p:sp>
-      <p:sp>
-        <p:nvSpPr>
-          <p:cNvPr id="4" name="Rectangle 3">
-            <a:extLst>
-              <a:ext uri="{FF2B5EF4-FFF2-40B4-BE49-F238E27FC236}">
-                <a16:creationId xmlns:a16="http://schemas.microsoft.com/office/drawing/2014/main" id="{95A93375-65DF-2484-AC64-43FF85E6777F}"/>
-              </a:ext>
-            </a:extLst>
-          </p:cNvPr>
-          <p:cNvSpPr/>
-          <p:nvPr/>
-        </p:nvSpPr>
-        <p:spPr>
-          <a:xfrm>
-            <a:off x="699608" y="1102560"/>
-            <a:ext cx="4436988" cy="315067"/>
-          </a:xfrm>
-          <a:prstGeom prst="rect">
-            <a:avLst/>
-          </a:prstGeom>
-        </p:spPr>
-        <p:style>
-          <a:lnRef idx="2">
-            <a:schemeClr val="accent1">
-              <a:shade val="15000"/>
-            </a:schemeClr>
-          </a:lnRef>
-          <a:fillRef idx="1">
-            <a:schemeClr val="accent1"/>
-          </a:fillRef>
-          <a:effectRef idx="0">
-            <a:schemeClr val="accent1"/>
-          </a:effectRef>
-          <a:fontRef idx="minor">
-            <a:schemeClr val="lt1"/>
-          </a:fontRef>
-        </p:style>
-        <p:txBody>
-          <a:bodyPr rtlCol="0" anchor="ctr"/>
-          <a:lstStyle/>
-          <a:p>
-            <a:r>
-              <a:rPr lang="en-US" dirty="0"/>
-              <a:t>Pick a date for: {my purpose}</a:t>
-            </a:r>
-          </a:p>
-        </p:txBody>
-      </p:sp>
-      <p:pic>
-        <p:nvPicPr>
-          <p:cNvPr id="6" name="Picture 5">
-            <a:extLst>
-              <a:ext uri="{FF2B5EF4-FFF2-40B4-BE49-F238E27FC236}">
-                <a16:creationId xmlns:a16="http://schemas.microsoft.com/office/drawing/2014/main" id="{CF08CC1D-F1A0-AC4B-35EE-6C587266D641}"/>
-              </a:ext>
-            </a:extLst>
-          </p:cNvPr>
-          <p:cNvPicPr>
-            <a:picLocks noChangeAspect="1"/>
-          </p:cNvPicPr>
-          <p:nvPr/>
-        </p:nvPicPr>
-        <p:blipFill>
-          <a:blip r:embed="rId2"/>
-          <a:stretch>
-            <a:fillRect/>
-          </a:stretch>
-        </p:blipFill>
-        <p:spPr>
-          <a:xfrm>
-            <a:off x="4105368" y="1501727"/>
-            <a:ext cx="310991" cy="461934"/>
-          </a:xfrm>
-          <a:prstGeom prst="rect">
-            <a:avLst/>
-          </a:prstGeom>
-        </p:spPr>
-      </p:pic>
-      <p:pic>
-        <p:nvPicPr>
-          <p:cNvPr id="8" name="Picture 7">
-            <a:extLst>
-              <a:ext uri="{FF2B5EF4-FFF2-40B4-BE49-F238E27FC236}">
-                <a16:creationId xmlns:a16="http://schemas.microsoft.com/office/drawing/2014/main" id="{08D4F8B8-B8CD-9166-F0A6-1CE026EF5C81}"/>
-              </a:ext>
-            </a:extLst>
-          </p:cNvPr>
-          <p:cNvPicPr>
-            <a:picLocks noChangeAspect="1"/>
-          </p:cNvPicPr>
-          <p:nvPr/>
-        </p:nvPicPr>
-        <p:blipFill>
-          <a:blip r:embed="rId3"/>
-          <a:stretch>
-            <a:fillRect/>
-          </a:stretch>
-        </p:blipFill>
-        <p:spPr>
-          <a:xfrm>
-            <a:off x="4600961" y="1523374"/>
-            <a:ext cx="430088" cy="418639"/>
-          </a:xfrm>
-          <a:prstGeom prst="rect">
-            <a:avLst/>
-          </a:prstGeom>
-        </p:spPr>
-      </p:pic>
-      <p:pic>
-        <p:nvPicPr>
-          <p:cNvPr id="13" name="Picture 12">
-            <a:extLst>
-              <a:ext uri="{FF2B5EF4-FFF2-40B4-BE49-F238E27FC236}">
-                <a16:creationId xmlns:a16="http://schemas.microsoft.com/office/drawing/2014/main" id="{7949CD48-777A-085B-9670-5D3D25D86EC3}"/>
-              </a:ext>
-            </a:extLst>
-          </p:cNvPr>
-          <p:cNvPicPr>
-            <a:picLocks noChangeAspect="1"/>
-          </p:cNvPicPr>
-          <p:nvPr/>
-        </p:nvPicPr>
-        <p:blipFill>
-          <a:blip r:embed="rId4"/>
-          <a:stretch>
-            <a:fillRect/>
-          </a:stretch>
-        </p:blipFill>
-        <p:spPr>
-          <a:xfrm>
-            <a:off x="4563601" y="4430184"/>
-            <a:ext cx="500742" cy="500742"/>
-          </a:xfrm>
-          <a:prstGeom prst="rect">
-            <a:avLst/>
-          </a:prstGeom>
-        </p:spPr>
-      </p:pic>
-      <p:pic>
-        <p:nvPicPr>
-          <p:cNvPr id="15" name="Picture 14">
-            <a:extLst>
-              <a:ext uri="{FF2B5EF4-FFF2-40B4-BE49-F238E27FC236}">
-                <a16:creationId xmlns:a16="http://schemas.microsoft.com/office/drawing/2014/main" id="{2AC53F18-2EE9-2167-7DDD-31ECB68C89D2}"/>
-              </a:ext>
-            </a:extLst>
-          </p:cNvPr>
-          <p:cNvPicPr>
-            <a:picLocks noChangeAspect="1"/>
-          </p:cNvPicPr>
-          <p:nvPr/>
-        </p:nvPicPr>
-        <p:blipFill>
-          <a:blip r:embed="rId5"/>
-          <a:stretch>
-            <a:fillRect/>
-          </a:stretch>
-        </p:blipFill>
-        <p:spPr>
-          <a:xfrm>
-            <a:off x="3961473" y="4430184"/>
-            <a:ext cx="525779" cy="509087"/>
-          </a:xfrm>
-          <a:prstGeom prst="rect">
-            <a:avLst/>
-          </a:prstGeom>
-        </p:spPr>
-      </p:pic>
-      <p:pic>
-        <p:nvPicPr>
-          <p:cNvPr id="18" name="Picture 17">
-            <a:extLst>
-              <a:ext uri="{FF2B5EF4-FFF2-40B4-BE49-F238E27FC236}">
-                <a16:creationId xmlns:a16="http://schemas.microsoft.com/office/drawing/2014/main" id="{B2B91FBE-6824-5FEA-9314-596F6416C03A}"/>
-              </a:ext>
-            </a:extLst>
-          </p:cNvPr>
-          <p:cNvPicPr>
-            <a:picLocks noChangeAspect="1"/>
-          </p:cNvPicPr>
-          <p:nvPr/>
-        </p:nvPicPr>
-        <p:blipFill>
-          <a:blip r:embed="rId6"/>
-          <a:stretch>
-            <a:fillRect/>
-          </a:stretch>
-        </p:blipFill>
-        <p:spPr>
-          <a:xfrm>
-            <a:off x="3780017" y="2151109"/>
-            <a:ext cx="416917" cy="416917"/>
-          </a:xfrm>
-          <a:prstGeom prst="rect">
-            <a:avLst/>
-          </a:prstGeom>
-        </p:spPr>
-      </p:pic>
-      <p:pic>
-        <p:nvPicPr>
-          <p:cNvPr id="20" name="Picture 19">
-            <a:extLst>
-              <a:ext uri="{FF2B5EF4-FFF2-40B4-BE49-F238E27FC236}">
-                <a16:creationId xmlns:a16="http://schemas.microsoft.com/office/drawing/2014/main" id="{0ADA24FF-7872-D7A6-045C-A5E04213722A}"/>
-              </a:ext>
-            </a:extLst>
-          </p:cNvPr>
-          <p:cNvPicPr>
-            <a:picLocks noChangeAspect="1"/>
-          </p:cNvPicPr>
-          <p:nvPr/>
-        </p:nvPicPr>
-        <p:blipFill>
-          <a:blip r:embed="rId7"/>
-          <a:stretch>
-            <a:fillRect/>
-          </a:stretch>
-        </p:blipFill>
-        <p:spPr>
-          <a:xfrm>
-            <a:off x="3821250" y="2670738"/>
-            <a:ext cx="403437" cy="403437"/>
-          </a:xfrm>
-          <a:prstGeom prst="rect">
-            <a:avLst/>
-          </a:prstGeom>
-        </p:spPr>
-      </p:pic>
-      <p:pic>
-        <p:nvPicPr>
-          <p:cNvPr id="24" name="Picture 23">
-            <a:extLst>
-              <a:ext uri="{FF2B5EF4-FFF2-40B4-BE49-F238E27FC236}">
-                <a16:creationId xmlns:a16="http://schemas.microsoft.com/office/drawing/2014/main" id="{DF299BD7-7DEC-371B-4B94-4EA1B935C107}"/>
-              </a:ext>
-            </a:extLst>
-          </p:cNvPr>
-          <p:cNvPicPr>
-            <a:picLocks noChangeAspect="1"/>
-          </p:cNvPicPr>
-          <p:nvPr/>
-        </p:nvPicPr>
-        <p:blipFill>
-          <a:blip r:embed="rId8"/>
-          <a:stretch>
-            <a:fillRect/>
-          </a:stretch>
-        </p:blipFill>
-        <p:spPr>
-          <a:xfrm>
-            <a:off x="3806668" y="3176887"/>
-            <a:ext cx="403437" cy="416917"/>
-          </a:xfrm>
-          <a:prstGeom prst="rect">
-            <a:avLst/>
-          </a:prstGeom>
-        </p:spPr>
-      </p:pic>
-      <p:pic>
-        <p:nvPicPr>
-          <p:cNvPr id="26" name="Picture 25">
-            <a:extLst>
-              <a:ext uri="{FF2B5EF4-FFF2-40B4-BE49-F238E27FC236}">
-                <a16:creationId xmlns:a16="http://schemas.microsoft.com/office/drawing/2014/main" id="{8B39EE2E-06A8-90B4-FC26-A66D934B1718}"/>
-              </a:ext>
-            </a:extLst>
-          </p:cNvPr>
-          <p:cNvPicPr>
-            <a:picLocks noChangeAspect="1"/>
-          </p:cNvPicPr>
-          <p:nvPr/>
-        </p:nvPicPr>
-        <p:blipFill>
-          <a:blip r:embed="rId9"/>
-          <a:stretch>
-            <a:fillRect/>
-          </a:stretch>
-        </p:blipFill>
-        <p:spPr>
-          <a:xfrm>
-            <a:off x="817190" y="1507232"/>
-            <a:ext cx="2886478" cy="3391373"/>
-          </a:xfrm>
-          <a:prstGeom prst="rect">
-            <a:avLst/>
-          </a:prstGeom>
-        </p:spPr>
-      </p:pic>
-      <p:sp>
-        <p:nvSpPr>
-          <p:cNvPr id="27" name="Rectangle 26">
-            <a:extLst>
-              <a:ext uri="{FF2B5EF4-FFF2-40B4-BE49-F238E27FC236}">
-                <a16:creationId xmlns:a16="http://schemas.microsoft.com/office/drawing/2014/main" id="{A055B79C-4C58-B221-2E22-D295056FF405}"/>
-              </a:ext>
-            </a:extLst>
-          </p:cNvPr>
-          <p:cNvSpPr/>
-          <p:nvPr/>
-        </p:nvSpPr>
-        <p:spPr>
-          <a:xfrm>
-            <a:off x="4240603" y="2155793"/>
-            <a:ext cx="793653" cy="416917"/>
-          </a:xfrm>
-          <a:prstGeom prst="rect">
-            <a:avLst/>
-          </a:prstGeom>
-          <a:solidFill>
-            <a:schemeClr val="bg1"/>
-          </a:solidFill>
-          <a:ln w="12700"/>
-        </p:spPr>
-        <p:style>
-          <a:lnRef idx="2">
-            <a:schemeClr val="accent1">
-              <a:shade val="15000"/>
-            </a:schemeClr>
-          </a:lnRef>
-          <a:fillRef idx="1">
-            <a:schemeClr val="accent1"/>
-          </a:fillRef>
-          <a:effectRef idx="0">
-            <a:schemeClr val="accent1"/>
-          </a:effectRef>
-          <a:fontRef idx="minor">
-            <a:schemeClr val="lt1"/>
-          </a:fontRef>
-        </p:style>
-        <p:txBody>
-          <a:bodyPr rtlCol="0" anchor="ctr"/>
-          <a:lstStyle/>
-          <a:p>
-            <a:pPr algn="r"/>
-            <a:r>
-              <a:rPr lang="en-US" b="1" dirty="0">
-                <a:solidFill>
-                  <a:srgbClr val="7030A0"/>
-                </a:solidFill>
-                <a:latin typeface="Roboto" panose="02000000000000000000" pitchFamily="2" charset="0"/>
-                <a:ea typeface="Roboto" panose="02000000000000000000" pitchFamily="2" charset="0"/>
-              </a:rPr>
-              <a:t>2021</a:t>
-            </a:r>
-          </a:p>
-        </p:txBody>
-      </p:sp>
-      <p:sp>
-        <p:nvSpPr>
-          <p:cNvPr id="28" name="Rectangle 27">
-            <a:extLst>
-              <a:ext uri="{FF2B5EF4-FFF2-40B4-BE49-F238E27FC236}">
-                <a16:creationId xmlns:a16="http://schemas.microsoft.com/office/drawing/2014/main" id="{DA7A34F9-5104-069C-E990-E7E9A1E70951}"/>
-              </a:ext>
-            </a:extLst>
-          </p:cNvPr>
-          <p:cNvSpPr/>
-          <p:nvPr/>
-        </p:nvSpPr>
-        <p:spPr>
-          <a:xfrm>
-            <a:off x="4240603" y="2679393"/>
-            <a:ext cx="793653" cy="416917"/>
-          </a:xfrm>
-          <a:prstGeom prst="rect">
-            <a:avLst/>
-          </a:prstGeom>
-          <a:solidFill>
-            <a:schemeClr val="bg1"/>
-          </a:solidFill>
-          <a:ln w="12700"/>
-        </p:spPr>
-        <p:style>
-          <a:lnRef idx="2">
-            <a:schemeClr val="accent1">
-              <a:shade val="15000"/>
-            </a:schemeClr>
-          </a:lnRef>
-          <a:fillRef idx="1">
-            <a:schemeClr val="accent1"/>
-          </a:fillRef>
-          <a:effectRef idx="0">
-            <a:schemeClr val="accent1"/>
-          </a:effectRef>
-          <a:fontRef idx="minor">
-            <a:schemeClr val="lt1"/>
-          </a:fontRef>
-        </p:style>
-        <p:txBody>
-          <a:bodyPr rtlCol="0" anchor="ctr"/>
-          <a:lstStyle/>
-          <a:p>
-            <a:pPr algn="r"/>
-            <a:r>
-              <a:rPr lang="en-US" b="1" dirty="0">
-                <a:solidFill>
-                  <a:srgbClr val="0070C0"/>
-                </a:solidFill>
-                <a:latin typeface="Roboto" panose="02000000000000000000" pitchFamily="2" charset="0"/>
-                <a:ea typeface="Roboto" panose="02000000000000000000" pitchFamily="2" charset="0"/>
-              </a:rPr>
-              <a:t>06</a:t>
-            </a:r>
-          </a:p>
-        </p:txBody>
-      </p:sp>
-      <p:sp>
-        <p:nvSpPr>
-          <p:cNvPr id="29" name="Rectangle 28">
-            <a:extLst>
-              <a:ext uri="{FF2B5EF4-FFF2-40B4-BE49-F238E27FC236}">
-                <a16:creationId xmlns:a16="http://schemas.microsoft.com/office/drawing/2014/main" id="{45B43532-8ADD-2FB1-7BF3-A0FFF12CE2D0}"/>
-              </a:ext>
-            </a:extLst>
-          </p:cNvPr>
-          <p:cNvSpPr/>
-          <p:nvPr/>
-        </p:nvSpPr>
-        <p:spPr>
-          <a:xfrm>
-            <a:off x="4240603" y="3202918"/>
-            <a:ext cx="793653" cy="416917"/>
-          </a:xfrm>
-          <a:prstGeom prst="rect">
-            <a:avLst/>
-          </a:prstGeom>
-          <a:solidFill>
-            <a:schemeClr val="bg1"/>
-          </a:solidFill>
-          <a:ln w="12700"/>
-        </p:spPr>
-        <p:style>
-          <a:lnRef idx="2">
-            <a:schemeClr val="accent1">
-              <a:shade val="15000"/>
-            </a:schemeClr>
-          </a:lnRef>
-          <a:fillRef idx="1">
-            <a:schemeClr val="accent1"/>
-          </a:fillRef>
-          <a:effectRef idx="0">
-            <a:schemeClr val="accent1"/>
-          </a:effectRef>
-          <a:fontRef idx="minor">
-            <a:schemeClr val="lt1"/>
-          </a:fontRef>
-        </p:style>
-        <p:txBody>
-          <a:bodyPr rtlCol="0" anchor="ctr"/>
-          <a:lstStyle/>
-          <a:p>
-            <a:pPr algn="r"/>
-            <a:r>
-              <a:rPr lang="en-US" b="1" dirty="0">
-                <a:solidFill>
-                  <a:schemeClr val="accent6">
-                    <a:lumMod val="75000"/>
-                  </a:schemeClr>
-                </a:solidFill>
-                <a:latin typeface="Roboto" panose="02000000000000000000" pitchFamily="2" charset="0"/>
-                <a:ea typeface="Roboto" panose="02000000000000000000" pitchFamily="2" charset="0"/>
-              </a:rPr>
-              <a:t>22</a:t>
-            </a:r>
-          </a:p>
-        </p:txBody>
-      </p:sp>
-    </p:spTree>
-    <p:extLst>
-      <p:ext uri="{BB962C8B-B14F-4D97-AF65-F5344CB8AC3E}">
-        <p14:creationId xmlns:p14="http://schemas.microsoft.com/office/powerpoint/2010/main" val="1286558178"/>
-      </p:ext>
-    </p:extLst>
-  </p:cSld>
-  <p:clrMapOvr>
-    <a:masterClrMapping/>
-  </p:clrMapOvr>
 </p:sld>
 </file>
 
@@ -14901,7 +17907,7 @@
           <p:cNvPr id="2" name="Title 1">
             <a:extLst>
               <a:ext uri="{FF2B5EF4-FFF2-40B4-BE49-F238E27FC236}">
-                <a16:creationId xmlns:a16="http://schemas.microsoft.com/office/drawing/2014/main" id="{12E37519-6D6E-2173-73D0-5BC8AD146FED}"/>
+                <a16:creationId xmlns:a16="http://schemas.microsoft.com/office/drawing/2014/main" id="{228EC25F-4304-10AC-B768-13AC1F0F0802}"/>
               </a:ext>
             </a:extLst>
           </p:cNvPr>
@@ -14921,7 +17927,7 @@
           <a:p>
             <a:r>
               <a:rPr lang="en-US" dirty="0"/>
-              <a:t>Dialog: Organization Picker </a:t>
+              <a:t>Dialog: Reorder</a:t>
             </a:r>
           </a:p>
         </p:txBody>
@@ -14931,7 +17937,7 @@
           <p:cNvPr id="3" name="Rectangle 2">
             <a:extLst>
               <a:ext uri="{FF2B5EF4-FFF2-40B4-BE49-F238E27FC236}">
-                <a16:creationId xmlns:a16="http://schemas.microsoft.com/office/drawing/2014/main" id="{85F6A521-DE79-9015-5C20-C57CBD7A4AAC}"/>
+                <a16:creationId xmlns:a16="http://schemas.microsoft.com/office/drawing/2014/main" id="{AD974CC0-9642-1646-E30E-FE052294B396}"/>
               </a:ext>
             </a:extLst>
           </p:cNvPr>
@@ -14940,8 +17946,8 @@
         </p:nvSpPr>
         <p:spPr>
           <a:xfrm>
-            <a:off x="405036" y="1264204"/>
-            <a:ext cx="7100408" cy="3553272"/>
+            <a:off x="699608" y="1417627"/>
+            <a:ext cx="2687968" cy="1957675"/>
           </a:xfrm>
           <a:prstGeom prst="rect">
             <a:avLst/>
@@ -14978,7 +17984,7 @@
           <p:cNvPr id="4" name="Rectangle 3">
             <a:extLst>
               <a:ext uri="{FF2B5EF4-FFF2-40B4-BE49-F238E27FC236}">
-                <a16:creationId xmlns:a16="http://schemas.microsoft.com/office/drawing/2014/main" id="{DC6CEFF7-D488-AB9A-9ADA-ACF8D8EE005B}"/>
+                <a16:creationId xmlns:a16="http://schemas.microsoft.com/office/drawing/2014/main" id="{F81AD7A1-2021-250B-48CD-8B2A834F105B}"/>
               </a:ext>
             </a:extLst>
           </p:cNvPr>
@@ -14987,8 +17993,8 @@
         </p:nvSpPr>
         <p:spPr>
           <a:xfrm>
-            <a:off x="405036" y="949137"/>
-            <a:ext cx="7100408" cy="315067"/>
+            <a:off x="699608" y="1102560"/>
+            <a:ext cx="2687968" cy="315067"/>
           </a:xfrm>
           <a:prstGeom prst="rect">
             <a:avLst/>
@@ -15016,17 +18022,118 @@
           <a:p>
             <a:r>
               <a:rPr lang="en-US" dirty="0"/>
-              <a:t>Pick an Organization for {purpose}</a:t>
+              <a:t>Re-Order List by Rank</a:t>
             </a:r>
           </a:p>
         </p:txBody>
       </p:sp>
       <p:pic>
         <p:nvPicPr>
-          <p:cNvPr id="7" name="Picture 6">
-            <a:extLst>
-              <a:ext uri="{FF2B5EF4-FFF2-40B4-BE49-F238E27FC236}">
-                <a16:creationId xmlns:a16="http://schemas.microsoft.com/office/drawing/2014/main" id="{A1CE7DD3-3F77-8BBD-D3A2-A4B505C8D7D6}"/>
+          <p:cNvPr id="5" name="Picture 4">
+            <a:extLst>
+              <a:ext uri="{FF2B5EF4-FFF2-40B4-BE49-F238E27FC236}">
+                <a16:creationId xmlns:a16="http://schemas.microsoft.com/office/drawing/2014/main" id="{FB558D18-D9B9-172D-A4E4-3FFA73B5B4CC}"/>
+              </a:ext>
+            </a:extLst>
+          </p:cNvPr>
+          <p:cNvPicPr>
+            <a:picLocks noChangeAspect="1"/>
+          </p:cNvPicPr>
+          <p:nvPr/>
+        </p:nvPicPr>
+        <p:blipFill>
+          <a:blip r:embed="rId2"/>
+          <a:stretch>
+            <a:fillRect/>
+          </a:stretch>
+        </p:blipFill>
+        <p:spPr>
+          <a:xfrm>
+            <a:off x="2814581" y="2779354"/>
+            <a:ext cx="500742" cy="500742"/>
+          </a:xfrm>
+          <a:prstGeom prst="rect">
+            <a:avLst/>
+          </a:prstGeom>
+        </p:spPr>
+      </p:pic>
+      <p:pic>
+        <p:nvPicPr>
+          <p:cNvPr id="6" name="Picture 5">
+            <a:extLst>
+              <a:ext uri="{FF2B5EF4-FFF2-40B4-BE49-F238E27FC236}">
+                <a16:creationId xmlns:a16="http://schemas.microsoft.com/office/drawing/2014/main" id="{62FAC2C8-D8D2-1851-B7C8-30177B9FCC2A}"/>
+              </a:ext>
+            </a:extLst>
+          </p:cNvPr>
+          <p:cNvPicPr>
+            <a:picLocks noChangeAspect="1"/>
+          </p:cNvPicPr>
+          <p:nvPr/>
+        </p:nvPicPr>
+        <p:blipFill>
+          <a:blip r:embed="rId3"/>
+          <a:stretch>
+            <a:fillRect/>
+          </a:stretch>
+        </p:blipFill>
+        <p:spPr>
+          <a:xfrm>
+            <a:off x="2212453" y="2779354"/>
+            <a:ext cx="525779" cy="509087"/>
+          </a:xfrm>
+          <a:prstGeom prst="rect">
+            <a:avLst/>
+          </a:prstGeom>
+        </p:spPr>
+      </p:pic>
+      <p:sp>
+        <p:nvSpPr>
+          <p:cNvPr id="25" name="TextBox 24">
+            <a:extLst>
+              <a:ext uri="{FF2B5EF4-FFF2-40B4-BE49-F238E27FC236}">
+                <a16:creationId xmlns:a16="http://schemas.microsoft.com/office/drawing/2014/main" id="{72FB0946-0022-8C73-BEF4-BB0BF21B4855}"/>
+              </a:ext>
+            </a:extLst>
+          </p:cNvPr>
+          <p:cNvSpPr txBox="1"/>
+          <p:nvPr/>
+        </p:nvSpPr>
+        <p:spPr>
+          <a:xfrm>
+            <a:off x="1718431" y="1594179"/>
+            <a:ext cx="1552639" cy="369332"/>
+          </a:xfrm>
+          <a:prstGeom prst="rect">
+            <a:avLst/>
+          </a:prstGeom>
+          <a:noFill/>
+          <a:ln>
+            <a:solidFill>
+              <a:schemeClr val="tx1"/>
+            </a:solidFill>
+          </a:ln>
+        </p:spPr>
+        <p:txBody>
+          <a:bodyPr wrap="square" rtlCol="0">
+            <a:spAutoFit/>
+          </a:bodyPr>
+          <a:lstStyle/>
+          <a:p>
+            <a:pPr algn="r"/>
+            <a:r>
+              <a:rPr lang="en-US" dirty="0"/>
+              <a:t>100</a:t>
+            </a:r>
+          </a:p>
+        </p:txBody>
+      </p:sp>
+      <p:pic>
+        <p:nvPicPr>
+          <p:cNvPr id="27" name="Picture 26">
+            <a:extLst>
+              <a:ext uri="{FF2B5EF4-FFF2-40B4-BE49-F238E27FC236}">
+                <a16:creationId xmlns:a16="http://schemas.microsoft.com/office/drawing/2014/main" id="{D23C320F-8FF5-99CD-EB9A-ECEF35ADA0B1}"/>
               </a:ext>
             </a:extLst>
           </p:cNvPr>
@@ -15043,8 +18150,8 @@
         </p:blipFill>
         <p:spPr>
           <a:xfrm>
-            <a:off x="6890996" y="4215392"/>
-            <a:ext cx="525779" cy="509087"/>
+            <a:off x="924458" y="1506980"/>
+            <a:ext cx="615907" cy="543730"/>
           </a:xfrm>
           <a:prstGeom prst="rect">
             <a:avLst/>
@@ -15053,10 +18160,10 @@
       </p:pic>
       <p:pic>
         <p:nvPicPr>
-          <p:cNvPr id="13" name="Picture 12">
-            <a:extLst>
-              <a:ext uri="{FF2B5EF4-FFF2-40B4-BE49-F238E27FC236}">
-                <a16:creationId xmlns:a16="http://schemas.microsoft.com/office/drawing/2014/main" id="{D99EED13-75DE-9C06-A788-DB81A1364572}"/>
+          <p:cNvPr id="29" name="Picture 28">
+            <a:extLst>
+              <a:ext uri="{FF2B5EF4-FFF2-40B4-BE49-F238E27FC236}">
+                <a16:creationId xmlns:a16="http://schemas.microsoft.com/office/drawing/2014/main" id="{8681BE7F-0A91-A3B7-7737-FCD3F5AB743C}"/>
               </a:ext>
             </a:extLst>
           </p:cNvPr>
@@ -15073,1951 +18180,51 @@
         </p:blipFill>
         <p:spPr>
           <a:xfrm>
-            <a:off x="6363979" y="4222894"/>
-            <a:ext cx="450668" cy="500742"/>
+            <a:off x="924458" y="2227262"/>
+            <a:ext cx="619301" cy="387063"/>
           </a:xfrm>
           <a:prstGeom prst="rect">
             <a:avLst/>
           </a:prstGeom>
         </p:spPr>
       </p:pic>
-      <p:grpSp>
-        <p:nvGrpSpPr>
-          <p:cNvPr id="51" name="Group 50">
-            <a:extLst>
-              <a:ext uri="{FF2B5EF4-FFF2-40B4-BE49-F238E27FC236}">
-                <a16:creationId xmlns:a16="http://schemas.microsoft.com/office/drawing/2014/main" id="{76A915C4-5E70-3BCE-964E-77A2367D2E00}"/>
-              </a:ext>
-            </a:extLst>
-          </p:cNvPr>
-          <p:cNvGrpSpPr/>
-          <p:nvPr/>
-        </p:nvGrpSpPr>
-        <p:grpSpPr>
-          <a:xfrm>
-            <a:off x="478651" y="1354540"/>
-            <a:ext cx="6938124" cy="2767012"/>
-            <a:chOff x="478651" y="1354540"/>
-            <a:chExt cx="6888619" cy="2767012"/>
-          </a:xfrm>
-        </p:grpSpPr>
-        <p:sp>
-          <p:nvSpPr>
-            <p:cNvPr id="46" name="Rectangle 45">
-              <a:extLst>
-                <a:ext uri="{FF2B5EF4-FFF2-40B4-BE49-F238E27FC236}">
-                  <a16:creationId xmlns:a16="http://schemas.microsoft.com/office/drawing/2014/main" id="{DEC18D26-BFAF-7F7A-9916-5950689BCF8A}"/>
-                </a:ext>
-              </a:extLst>
-            </p:cNvPr>
-            <p:cNvSpPr/>
-            <p:nvPr/>
-          </p:nvSpPr>
-          <p:spPr>
-            <a:xfrm>
-              <a:off x="478651" y="1354540"/>
-              <a:ext cx="6888619" cy="2767012"/>
-            </a:xfrm>
-            <a:prstGeom prst="rect">
-              <a:avLst/>
-            </a:prstGeom>
-            <a:solidFill>
-              <a:srgbClr val="FFFFFF">
-                <a:alpha val="80000"/>
-              </a:srgbClr>
-            </a:solidFill>
-          </p:spPr>
-          <p:style>
-            <a:lnRef idx="2">
-              <a:schemeClr val="accent1">
-                <a:shade val="15000"/>
-              </a:schemeClr>
-            </a:lnRef>
-            <a:fillRef idx="1">
-              <a:schemeClr val="accent1"/>
-            </a:fillRef>
-            <a:effectRef idx="0">
-              <a:schemeClr val="accent1"/>
-            </a:effectRef>
-            <a:fontRef idx="minor">
-              <a:schemeClr val="lt1"/>
-            </a:fontRef>
-          </p:style>
-          <p:txBody>
-            <a:bodyPr rtlCol="0" anchor="t"/>
-            <a:lstStyle/>
-            <a:p>
-              <a:endParaRPr lang="en-US" dirty="0">
-                <a:solidFill>
-                  <a:schemeClr val="tx1"/>
-                </a:solidFill>
-              </a:endParaRPr>
-            </a:p>
-          </p:txBody>
-        </p:sp>
-        <p:sp>
-          <p:nvSpPr>
-            <p:cNvPr id="47" name="Rectangle 46">
-              <a:extLst>
-                <a:ext uri="{FF2B5EF4-FFF2-40B4-BE49-F238E27FC236}">
-                  <a16:creationId xmlns:a16="http://schemas.microsoft.com/office/drawing/2014/main" id="{EC8CCE65-789B-D739-9C83-C8014C8757AF}"/>
-                </a:ext>
-              </a:extLst>
-            </p:cNvPr>
-            <p:cNvSpPr/>
-            <p:nvPr/>
-          </p:nvSpPr>
-          <p:spPr>
-            <a:xfrm>
-              <a:off x="7225211" y="1354540"/>
-              <a:ext cx="121324" cy="2767012"/>
-            </a:xfrm>
-            <a:prstGeom prst="rect">
-              <a:avLst/>
-            </a:prstGeom>
-            <a:solidFill>
-              <a:schemeClr val="bg1">
-                <a:lumMod val="95000"/>
-              </a:schemeClr>
-            </a:solidFill>
-            <a:ln w="3175">
-              <a:solidFill>
-                <a:schemeClr val="tx1"/>
-              </a:solidFill>
-            </a:ln>
-          </p:spPr>
-          <p:style>
-            <a:lnRef idx="2">
-              <a:schemeClr val="accent1">
-                <a:shade val="15000"/>
-              </a:schemeClr>
-            </a:lnRef>
-            <a:fillRef idx="1">
-              <a:schemeClr val="accent1"/>
-            </a:fillRef>
-            <a:effectRef idx="0">
-              <a:schemeClr val="accent1"/>
-            </a:effectRef>
-            <a:fontRef idx="minor">
-              <a:schemeClr val="lt1"/>
-            </a:fontRef>
-          </p:style>
-          <p:txBody>
-            <a:bodyPr rtlCol="0" anchor="ctr"/>
-            <a:lstStyle/>
-            <a:p>
-              <a:pPr algn="ctr"/>
-              <a:endParaRPr lang="en-US"/>
-            </a:p>
-          </p:txBody>
-        </p:sp>
-        <p:sp>
-          <p:nvSpPr>
-            <p:cNvPr id="48" name="Rectangle: Rounded Corners 47">
-              <a:extLst>
-                <a:ext uri="{FF2B5EF4-FFF2-40B4-BE49-F238E27FC236}">
-                  <a16:creationId xmlns:a16="http://schemas.microsoft.com/office/drawing/2014/main" id="{4B1CF00C-37A0-BCDF-960F-A3FE4A332B04}"/>
-                </a:ext>
-              </a:extLst>
-            </p:cNvPr>
-            <p:cNvSpPr/>
-            <p:nvPr/>
-          </p:nvSpPr>
-          <p:spPr>
-            <a:xfrm>
-              <a:off x="7225211" y="1653033"/>
-              <a:ext cx="132353" cy="334583"/>
-            </a:xfrm>
-            <a:prstGeom prst="roundRect">
-              <a:avLst/>
-            </a:prstGeom>
-            <a:solidFill>
-              <a:srgbClr val="FFFFFF">
-                <a:alpha val="80000"/>
-              </a:srgbClr>
-            </a:solidFill>
-          </p:spPr>
-          <p:style>
-            <a:lnRef idx="2">
-              <a:schemeClr val="accent1">
-                <a:shade val="15000"/>
-              </a:schemeClr>
-            </a:lnRef>
-            <a:fillRef idx="1">
-              <a:schemeClr val="accent1"/>
-            </a:fillRef>
-            <a:effectRef idx="0">
-              <a:schemeClr val="accent1"/>
-            </a:effectRef>
-            <a:fontRef idx="minor">
-              <a:schemeClr val="lt1"/>
-            </a:fontRef>
-          </p:style>
-          <p:txBody>
-            <a:bodyPr rtlCol="0" anchor="ctr"/>
-            <a:lstStyle/>
-            <a:p>
-              <a:pPr algn="ctr"/>
-              <a:endParaRPr lang="en-US"/>
-            </a:p>
-          </p:txBody>
-        </p:sp>
-        <p:sp>
-          <p:nvSpPr>
-            <p:cNvPr id="49" name="Isosceles Triangle 48">
-              <a:extLst>
-                <a:ext uri="{FF2B5EF4-FFF2-40B4-BE49-F238E27FC236}">
-                  <a16:creationId xmlns:a16="http://schemas.microsoft.com/office/drawing/2014/main" id="{7EFDBC93-27ED-5B11-F2A7-094E22F94775}"/>
-                </a:ext>
-              </a:extLst>
-            </p:cNvPr>
-            <p:cNvSpPr/>
-            <p:nvPr/>
-          </p:nvSpPr>
-          <p:spPr>
-            <a:xfrm>
-              <a:off x="7223570" y="1368261"/>
-              <a:ext cx="132353" cy="198259"/>
-            </a:xfrm>
-            <a:prstGeom prst="triangle">
-              <a:avLst/>
-            </a:prstGeom>
-            <a:solidFill>
-              <a:srgbClr val="FFFFFF">
-                <a:alpha val="80000"/>
-              </a:srgbClr>
-            </a:solidFill>
-          </p:spPr>
-          <p:style>
-            <a:lnRef idx="2">
-              <a:schemeClr val="accent1">
-                <a:shade val="15000"/>
-              </a:schemeClr>
-            </a:lnRef>
-            <a:fillRef idx="1">
-              <a:schemeClr val="accent1"/>
-            </a:fillRef>
-            <a:effectRef idx="0">
-              <a:schemeClr val="accent1"/>
-            </a:effectRef>
-            <a:fontRef idx="minor">
-              <a:schemeClr val="lt1"/>
-            </a:fontRef>
-          </p:style>
-          <p:txBody>
-            <a:bodyPr rtlCol="0" anchor="ctr"/>
-            <a:lstStyle/>
-            <a:p>
-              <a:pPr algn="ctr"/>
-              <a:endParaRPr lang="en-US"/>
-            </a:p>
-          </p:txBody>
-        </p:sp>
-        <p:sp>
-          <p:nvSpPr>
-            <p:cNvPr id="50" name="Isosceles Triangle 49">
-              <a:extLst>
-                <a:ext uri="{FF2B5EF4-FFF2-40B4-BE49-F238E27FC236}">
-                  <a16:creationId xmlns:a16="http://schemas.microsoft.com/office/drawing/2014/main" id="{E659D3AE-D4E5-E87F-BD6B-854582356853}"/>
-                </a:ext>
-              </a:extLst>
-            </p:cNvPr>
-            <p:cNvSpPr/>
-            <p:nvPr/>
-          </p:nvSpPr>
-          <p:spPr>
-            <a:xfrm flipV="1">
-              <a:off x="7220788" y="3923293"/>
-              <a:ext cx="132353" cy="198259"/>
-            </a:xfrm>
-            <a:prstGeom prst="triangle">
-              <a:avLst/>
-            </a:prstGeom>
-            <a:solidFill>
-              <a:srgbClr val="FFFFFF">
-                <a:alpha val="80000"/>
-              </a:srgbClr>
-            </a:solidFill>
-          </p:spPr>
-          <p:style>
-            <a:lnRef idx="2">
-              <a:schemeClr val="accent1">
-                <a:shade val="15000"/>
-              </a:schemeClr>
-            </a:lnRef>
-            <a:fillRef idx="1">
-              <a:schemeClr val="accent1"/>
-            </a:fillRef>
-            <a:effectRef idx="0">
-              <a:schemeClr val="accent1"/>
-            </a:effectRef>
-            <a:fontRef idx="minor">
-              <a:schemeClr val="lt1"/>
-            </a:fontRef>
-          </p:style>
-          <p:txBody>
-            <a:bodyPr rtlCol="0" anchor="ctr"/>
-            <a:lstStyle/>
-            <a:p>
-              <a:pPr algn="ctr"/>
-              <a:endParaRPr lang="en-US"/>
-            </a:p>
-          </p:txBody>
-        </p:sp>
-      </p:grpSp>
-      <p:sp>
-        <p:nvSpPr>
-          <p:cNvPr id="16" name="Rectangle 15">
-            <a:extLst>
-              <a:ext uri="{FF2B5EF4-FFF2-40B4-BE49-F238E27FC236}">
-                <a16:creationId xmlns:a16="http://schemas.microsoft.com/office/drawing/2014/main" id="{4C39AA02-4C6F-A78C-B328-1B0A7BEA6A7F}"/>
-              </a:ext>
-            </a:extLst>
-          </p:cNvPr>
-          <p:cNvSpPr/>
-          <p:nvPr/>
-        </p:nvSpPr>
-        <p:spPr>
-          <a:xfrm>
-            <a:off x="1797800" y="1427170"/>
-            <a:ext cx="5405619" cy="364000"/>
-          </a:xfrm>
-          <a:prstGeom prst="rect">
-            <a:avLst/>
-          </a:prstGeom>
-          <a:solidFill>
-            <a:schemeClr val="bg1">
-              <a:lumMod val="85000"/>
-            </a:schemeClr>
-          </a:solidFill>
-        </p:spPr>
-        <p:style>
-          <a:lnRef idx="2">
-            <a:schemeClr val="accent1">
-              <a:shade val="15000"/>
-            </a:schemeClr>
-          </a:lnRef>
-          <a:fillRef idx="1">
-            <a:schemeClr val="accent1"/>
-          </a:fillRef>
-          <a:effectRef idx="0">
-            <a:schemeClr val="accent1"/>
-          </a:effectRef>
-          <a:fontRef idx="minor">
-            <a:schemeClr val="lt1"/>
-          </a:fontRef>
-        </p:style>
-        <p:txBody>
-          <a:bodyPr rtlCol="0" anchor="ctr"/>
-          <a:lstStyle/>
-          <a:p>
-            <a:r>
-              <a:rPr lang="en-US" dirty="0">
-                <a:solidFill>
-                  <a:schemeClr val="tx1"/>
-                </a:solidFill>
-              </a:rPr>
-              <a:t>Root Organization</a:t>
-            </a:r>
-          </a:p>
-        </p:txBody>
-      </p:sp>
-      <p:sp>
-        <p:nvSpPr>
-          <p:cNvPr id="20" name="Rectangle 19">
-            <a:extLst>
-              <a:ext uri="{FF2B5EF4-FFF2-40B4-BE49-F238E27FC236}">
-                <a16:creationId xmlns:a16="http://schemas.microsoft.com/office/drawing/2014/main" id="{3F5F25F5-3914-2CA8-EA0F-512B11F1965D}"/>
-              </a:ext>
-            </a:extLst>
-          </p:cNvPr>
-          <p:cNvSpPr/>
-          <p:nvPr/>
-        </p:nvSpPr>
-        <p:spPr>
-          <a:xfrm>
-            <a:off x="1060657" y="1923370"/>
-            <a:ext cx="666800" cy="365733"/>
-          </a:xfrm>
-          <a:prstGeom prst="rect">
-            <a:avLst/>
-          </a:prstGeom>
-          <a:solidFill>
-            <a:schemeClr val="bg1"/>
-          </a:solidFill>
+      <p:sp>
+        <p:nvSpPr>
+          <p:cNvPr id="30" name="TextBox 29">
+            <a:extLst>
+              <a:ext uri="{FF2B5EF4-FFF2-40B4-BE49-F238E27FC236}">
+                <a16:creationId xmlns:a16="http://schemas.microsoft.com/office/drawing/2014/main" id="{A8065A76-F0FD-D9A2-83CB-BD55EB35B09F}"/>
+              </a:ext>
+            </a:extLst>
+          </p:cNvPr>
+          <p:cNvSpPr txBox="1"/>
+          <p:nvPr/>
+        </p:nvSpPr>
+        <p:spPr>
+          <a:xfrm>
+            <a:off x="1718431" y="2227262"/>
+            <a:ext cx="1552639" cy="369332"/>
+          </a:xfrm>
+          <a:prstGeom prst="rect">
+            <a:avLst/>
+          </a:prstGeom>
+          <a:noFill/>
           <a:ln>
             <a:solidFill>
-              <a:schemeClr val="bg1">
-                <a:lumMod val="95000"/>
-              </a:schemeClr>
+              <a:schemeClr val="tx1"/>
             </a:solidFill>
           </a:ln>
         </p:spPr>
-        <p:style>
-          <a:lnRef idx="2">
-            <a:schemeClr val="accent1">
-              <a:shade val="15000"/>
-            </a:schemeClr>
-          </a:lnRef>
-          <a:fillRef idx="1">
-            <a:schemeClr val="accent1"/>
-          </a:fillRef>
-          <a:effectRef idx="0">
-            <a:schemeClr val="accent1"/>
-          </a:effectRef>
-          <a:fontRef idx="minor">
-            <a:schemeClr val="lt1"/>
-          </a:fontRef>
-        </p:style>
-        <p:txBody>
-          <a:bodyPr rtlCol="0" anchor="ctr"/>
+        <p:txBody>
+          <a:bodyPr wrap="square" rtlCol="0">
+            <a:spAutoFit/>
+          </a:bodyPr>
           <a:lstStyle/>
           <a:p>
             <a:pPr algn="r"/>
             <a:r>
-              <a:rPr lang="en-US" sz="1200" dirty="0">
-                <a:solidFill>
-                  <a:schemeClr val="tx1"/>
-                </a:solidFill>
-                <a:latin typeface="Roboto" panose="02000000000000000000" pitchFamily="2" charset="0"/>
-                <a:ea typeface="Roboto" panose="02000000000000000000" pitchFamily="2" charset="0"/>
-              </a:rPr>
-              <a:t>1</a:t>
-            </a:r>
-          </a:p>
-        </p:txBody>
-      </p:sp>
-      <p:sp>
-        <p:nvSpPr>
-          <p:cNvPr id="52" name="Rectangle 51">
-            <a:extLst>
-              <a:ext uri="{FF2B5EF4-FFF2-40B4-BE49-F238E27FC236}">
-                <a16:creationId xmlns:a16="http://schemas.microsoft.com/office/drawing/2014/main" id="{B15C2939-D092-AC0F-4E47-CD60B768F49C}"/>
-              </a:ext>
-            </a:extLst>
-          </p:cNvPr>
-          <p:cNvSpPr/>
-          <p:nvPr/>
-        </p:nvSpPr>
-        <p:spPr>
-          <a:xfrm>
-            <a:off x="560144" y="1427170"/>
-            <a:ext cx="381650" cy="365733"/>
-          </a:xfrm>
-          <a:prstGeom prst="rect">
-            <a:avLst/>
-          </a:prstGeom>
-          <a:solidFill>
-            <a:schemeClr val="bg1"/>
-          </a:solidFill>
-        </p:spPr>
-        <p:style>
-          <a:lnRef idx="2">
-            <a:schemeClr val="accent1">
-              <a:shade val="15000"/>
-            </a:schemeClr>
-          </a:lnRef>
-          <a:fillRef idx="1">
-            <a:schemeClr val="accent1"/>
-          </a:fillRef>
-          <a:effectRef idx="0">
-            <a:schemeClr val="accent1"/>
-          </a:effectRef>
-          <a:fontRef idx="minor">
-            <a:schemeClr val="lt1"/>
-          </a:fontRef>
-        </p:style>
-        <p:txBody>
-          <a:bodyPr rtlCol="0" anchor="ctr"/>
-          <a:lstStyle/>
-          <a:p>
-            <a:pPr algn="ctr"/>
-            <a:endParaRPr lang="en-US"/>
-          </a:p>
-        </p:txBody>
-      </p:sp>
-      <p:pic>
-        <p:nvPicPr>
-          <p:cNvPr id="9" name="Picture 8">
-            <a:extLst>
-              <a:ext uri="{FF2B5EF4-FFF2-40B4-BE49-F238E27FC236}">
-                <a16:creationId xmlns:a16="http://schemas.microsoft.com/office/drawing/2014/main" id="{465E9DC0-7902-9502-7BC0-01CF47EBC018}"/>
-              </a:ext>
-            </a:extLst>
-          </p:cNvPr>
-          <p:cNvPicPr>
-            <a:picLocks noChangeAspect="1"/>
-          </p:cNvPicPr>
-          <p:nvPr/>
-        </p:nvPicPr>
-        <p:blipFill>
-          <a:blip r:embed="rId6"/>
-          <a:stretch>
-            <a:fillRect/>
-          </a:stretch>
-        </p:blipFill>
-        <p:spPr>
-          <a:xfrm>
-            <a:off x="625290" y="1451490"/>
-            <a:ext cx="279230" cy="316109"/>
-          </a:xfrm>
-          <a:prstGeom prst="rect">
-            <a:avLst/>
-          </a:prstGeom>
-        </p:spPr>
-      </p:pic>
-      <p:sp>
-        <p:nvSpPr>
-          <p:cNvPr id="53" name="Rectangle 52">
-            <a:extLst>
-              <a:ext uri="{FF2B5EF4-FFF2-40B4-BE49-F238E27FC236}">
-                <a16:creationId xmlns:a16="http://schemas.microsoft.com/office/drawing/2014/main" id="{1CC4F04E-BA3F-1FD8-94E6-86EE4BA289BE}"/>
-              </a:ext>
-            </a:extLst>
-          </p:cNvPr>
-          <p:cNvSpPr/>
-          <p:nvPr/>
-        </p:nvSpPr>
-        <p:spPr>
-          <a:xfrm>
-            <a:off x="2183906" y="1913342"/>
-            <a:ext cx="4589382" cy="364000"/>
-          </a:xfrm>
-          <a:prstGeom prst="rect">
-            <a:avLst/>
-          </a:prstGeom>
-          <a:solidFill>
-            <a:schemeClr val="bg1"/>
-          </a:solidFill>
-        </p:spPr>
-        <p:style>
-          <a:lnRef idx="2">
-            <a:schemeClr val="accent1">
-              <a:shade val="15000"/>
-            </a:schemeClr>
-          </a:lnRef>
-          <a:fillRef idx="1">
-            <a:schemeClr val="accent1"/>
-          </a:fillRef>
-          <a:effectRef idx="0">
-            <a:schemeClr val="accent1"/>
-          </a:effectRef>
-          <a:fontRef idx="minor">
-            <a:schemeClr val="lt1"/>
-          </a:fontRef>
-        </p:style>
-        <p:txBody>
-          <a:bodyPr rtlCol="0" anchor="ctr"/>
-          <a:lstStyle/>
-          <a:p>
-            <a:r>
-              <a:rPr lang="en-US" dirty="0">
-                <a:solidFill>
-                  <a:schemeClr val="tx1"/>
-                </a:solidFill>
-              </a:rPr>
-              <a:t>Sub Organization</a:t>
-            </a:r>
-          </a:p>
-        </p:txBody>
-      </p:sp>
-      <p:sp>
-        <p:nvSpPr>
-          <p:cNvPr id="57" name="Rectangle 56">
-            <a:extLst>
-              <a:ext uri="{FF2B5EF4-FFF2-40B4-BE49-F238E27FC236}">
-                <a16:creationId xmlns:a16="http://schemas.microsoft.com/office/drawing/2014/main" id="{5B426F19-32E5-BEC2-CC41-03CEFD1AE820}"/>
-              </a:ext>
-            </a:extLst>
-          </p:cNvPr>
-          <p:cNvSpPr/>
-          <p:nvPr/>
-        </p:nvSpPr>
-        <p:spPr>
-          <a:xfrm>
-            <a:off x="560144" y="1923973"/>
-            <a:ext cx="381650" cy="365733"/>
-          </a:xfrm>
-          <a:prstGeom prst="rect">
-            <a:avLst/>
-          </a:prstGeom>
-          <a:solidFill>
-            <a:schemeClr val="bg1"/>
-          </a:solidFill>
-        </p:spPr>
-        <p:style>
-          <a:lnRef idx="2">
-            <a:schemeClr val="accent1">
-              <a:shade val="15000"/>
-            </a:schemeClr>
-          </a:lnRef>
-          <a:fillRef idx="1">
-            <a:schemeClr val="accent1"/>
-          </a:fillRef>
-          <a:effectRef idx="0">
-            <a:schemeClr val="accent1"/>
-          </a:effectRef>
-          <a:fontRef idx="minor">
-            <a:schemeClr val="lt1"/>
-          </a:fontRef>
-        </p:style>
-        <p:txBody>
-          <a:bodyPr rtlCol="0" anchor="ctr"/>
-          <a:lstStyle/>
-          <a:p>
-            <a:pPr algn="ctr"/>
-            <a:endParaRPr lang="en-US"/>
-          </a:p>
-        </p:txBody>
-      </p:sp>
-      <p:pic>
-        <p:nvPicPr>
-          <p:cNvPr id="58" name="Picture 57">
-            <a:extLst>
-              <a:ext uri="{FF2B5EF4-FFF2-40B4-BE49-F238E27FC236}">
-                <a16:creationId xmlns:a16="http://schemas.microsoft.com/office/drawing/2014/main" id="{74DB9F84-6477-C1D7-323E-6F8402754521}"/>
-              </a:ext>
-            </a:extLst>
-          </p:cNvPr>
-          <p:cNvPicPr>
-            <a:picLocks noChangeAspect="1"/>
-          </p:cNvPicPr>
-          <p:nvPr/>
-        </p:nvPicPr>
-        <p:blipFill>
-          <a:blip r:embed="rId6"/>
-          <a:stretch>
-            <a:fillRect/>
-          </a:stretch>
-        </p:blipFill>
-        <p:spPr>
-          <a:xfrm>
-            <a:off x="625290" y="1948293"/>
-            <a:ext cx="279230" cy="316109"/>
-          </a:xfrm>
-          <a:prstGeom prst="rect">
-            <a:avLst/>
-          </a:prstGeom>
-        </p:spPr>
-      </p:pic>
-      <p:sp>
-        <p:nvSpPr>
-          <p:cNvPr id="61" name="Rectangle 60">
-            <a:extLst>
-              <a:ext uri="{FF2B5EF4-FFF2-40B4-BE49-F238E27FC236}">
-                <a16:creationId xmlns:a16="http://schemas.microsoft.com/office/drawing/2014/main" id="{DD4F41A0-46A3-0639-9AD6-ED834645953F}"/>
-              </a:ext>
-            </a:extLst>
-          </p:cNvPr>
-          <p:cNvSpPr/>
-          <p:nvPr/>
-        </p:nvSpPr>
-        <p:spPr>
-          <a:xfrm>
-            <a:off x="2190669" y="2367678"/>
-            <a:ext cx="4589382" cy="364000"/>
-          </a:xfrm>
-          <a:prstGeom prst="rect">
-            <a:avLst/>
-          </a:prstGeom>
-          <a:solidFill>
-            <a:schemeClr val="bg1"/>
-          </a:solidFill>
-        </p:spPr>
-        <p:style>
-          <a:lnRef idx="2">
-            <a:schemeClr val="accent1">
-              <a:shade val="15000"/>
-            </a:schemeClr>
-          </a:lnRef>
-          <a:fillRef idx="1">
-            <a:schemeClr val="accent1"/>
-          </a:fillRef>
-          <a:effectRef idx="0">
-            <a:schemeClr val="accent1"/>
-          </a:effectRef>
-          <a:fontRef idx="minor">
-            <a:schemeClr val="lt1"/>
-          </a:fontRef>
-        </p:style>
-        <p:txBody>
-          <a:bodyPr rtlCol="0" anchor="ctr"/>
-          <a:lstStyle/>
-          <a:p>
-            <a:r>
-              <a:rPr lang="en-US" dirty="0">
-                <a:solidFill>
-                  <a:schemeClr val="tx1"/>
-                </a:solidFill>
-              </a:rPr>
-              <a:t>Sub Organization</a:t>
-            </a:r>
-          </a:p>
-        </p:txBody>
-      </p:sp>
-      <p:sp>
-        <p:nvSpPr>
-          <p:cNvPr id="64" name="Rectangle 63">
-            <a:extLst>
-              <a:ext uri="{FF2B5EF4-FFF2-40B4-BE49-F238E27FC236}">
-                <a16:creationId xmlns:a16="http://schemas.microsoft.com/office/drawing/2014/main" id="{9809C3A7-ED7A-36BA-9B7C-EB39F67575AA}"/>
-              </a:ext>
-            </a:extLst>
-          </p:cNvPr>
-          <p:cNvSpPr/>
-          <p:nvPr/>
-        </p:nvSpPr>
-        <p:spPr>
-          <a:xfrm>
-            <a:off x="560144" y="2395472"/>
-            <a:ext cx="381650" cy="365733"/>
-          </a:xfrm>
-          <a:prstGeom prst="rect">
-            <a:avLst/>
-          </a:prstGeom>
-          <a:solidFill>
-            <a:schemeClr val="bg1"/>
-          </a:solidFill>
-        </p:spPr>
-        <p:style>
-          <a:lnRef idx="2">
-            <a:schemeClr val="accent1">
-              <a:shade val="15000"/>
-            </a:schemeClr>
-          </a:lnRef>
-          <a:fillRef idx="1">
-            <a:schemeClr val="accent1"/>
-          </a:fillRef>
-          <a:effectRef idx="0">
-            <a:schemeClr val="accent1"/>
-          </a:effectRef>
-          <a:fontRef idx="minor">
-            <a:schemeClr val="lt1"/>
-          </a:fontRef>
-        </p:style>
-        <p:txBody>
-          <a:bodyPr rtlCol="0" anchor="ctr"/>
-          <a:lstStyle/>
-          <a:p>
-            <a:pPr algn="ctr"/>
-            <a:endParaRPr lang="en-US"/>
-          </a:p>
-        </p:txBody>
-      </p:sp>
-      <p:pic>
-        <p:nvPicPr>
-          <p:cNvPr id="65" name="Picture 64">
-            <a:extLst>
-              <a:ext uri="{FF2B5EF4-FFF2-40B4-BE49-F238E27FC236}">
-                <a16:creationId xmlns:a16="http://schemas.microsoft.com/office/drawing/2014/main" id="{D06824D8-876B-80AA-329A-616C3310B3D4}"/>
-              </a:ext>
-            </a:extLst>
-          </p:cNvPr>
-          <p:cNvPicPr>
-            <a:picLocks noChangeAspect="1"/>
-          </p:cNvPicPr>
-          <p:nvPr/>
-        </p:nvPicPr>
-        <p:blipFill>
-          <a:blip r:embed="rId6"/>
-          <a:stretch>
-            <a:fillRect/>
-          </a:stretch>
-        </p:blipFill>
-        <p:spPr>
-          <a:xfrm>
-            <a:off x="625290" y="2419792"/>
-            <a:ext cx="279230" cy="316109"/>
-          </a:xfrm>
-          <a:prstGeom prst="rect">
-            <a:avLst/>
-          </a:prstGeom>
-        </p:spPr>
-      </p:pic>
-      <p:sp>
-        <p:nvSpPr>
-          <p:cNvPr id="73" name="Rectangle 72">
-            <a:extLst>
-              <a:ext uri="{FF2B5EF4-FFF2-40B4-BE49-F238E27FC236}">
-                <a16:creationId xmlns:a16="http://schemas.microsoft.com/office/drawing/2014/main" id="{22A9D9EB-1EE7-3E68-8955-CBCD95FD1B89}"/>
-              </a:ext>
-            </a:extLst>
-          </p:cNvPr>
-          <p:cNvSpPr/>
-          <p:nvPr/>
-        </p:nvSpPr>
-        <p:spPr>
-          <a:xfrm>
-            <a:off x="1060656" y="2379439"/>
-            <a:ext cx="666800" cy="365733"/>
-          </a:xfrm>
-          <a:prstGeom prst="rect">
-            <a:avLst/>
-          </a:prstGeom>
-          <a:solidFill>
-            <a:schemeClr val="bg1"/>
-          </a:solidFill>
-          <a:ln>
-            <a:solidFill>
-              <a:schemeClr val="bg1">
-                <a:lumMod val="95000"/>
-              </a:schemeClr>
-            </a:solidFill>
-          </a:ln>
-        </p:spPr>
-        <p:style>
-          <a:lnRef idx="2">
-            <a:schemeClr val="accent1">
-              <a:shade val="15000"/>
-            </a:schemeClr>
-          </a:lnRef>
-          <a:fillRef idx="1">
-            <a:schemeClr val="accent1"/>
-          </a:fillRef>
-          <a:effectRef idx="0">
-            <a:schemeClr val="accent1"/>
-          </a:effectRef>
-          <a:fontRef idx="minor">
-            <a:schemeClr val="lt1"/>
-          </a:fontRef>
-        </p:style>
-        <p:txBody>
-          <a:bodyPr rtlCol="0" anchor="ctr"/>
-          <a:lstStyle/>
-          <a:p>
-            <a:pPr algn="r"/>
-            <a:r>
-              <a:rPr lang="en-US" sz="1200" dirty="0">
-                <a:solidFill>
-                  <a:schemeClr val="tx1"/>
-                </a:solidFill>
-                <a:latin typeface="Roboto" panose="02000000000000000000" pitchFamily="2" charset="0"/>
-                <a:ea typeface="Roboto" panose="02000000000000000000" pitchFamily="2" charset="0"/>
-              </a:rPr>
-              <a:t>7</a:t>
-            </a:r>
-          </a:p>
-        </p:txBody>
-      </p:sp>
-      <p:grpSp>
-        <p:nvGrpSpPr>
-          <p:cNvPr id="76" name="Group 75">
-            <a:extLst>
-              <a:ext uri="{FF2B5EF4-FFF2-40B4-BE49-F238E27FC236}">
-                <a16:creationId xmlns:a16="http://schemas.microsoft.com/office/drawing/2014/main" id="{D25FFDCE-36EC-B022-BD34-ED9C5F643AF6}"/>
-              </a:ext>
-            </a:extLst>
-          </p:cNvPr>
-          <p:cNvGrpSpPr/>
-          <p:nvPr/>
-        </p:nvGrpSpPr>
-        <p:grpSpPr>
-          <a:xfrm>
-            <a:off x="6833858" y="1914137"/>
-            <a:ext cx="381650" cy="334297"/>
-            <a:chOff x="6832420" y="1433302"/>
-            <a:chExt cx="381650" cy="334297"/>
-          </a:xfrm>
-        </p:grpSpPr>
-        <p:sp>
-          <p:nvSpPr>
-            <p:cNvPr id="77" name="Rectangle 76">
-              <a:extLst>
-                <a:ext uri="{FF2B5EF4-FFF2-40B4-BE49-F238E27FC236}">
-                  <a16:creationId xmlns:a16="http://schemas.microsoft.com/office/drawing/2014/main" id="{B73571CF-F505-8511-D59C-0CB0997804D4}"/>
-                </a:ext>
-              </a:extLst>
-            </p:cNvPr>
-            <p:cNvSpPr/>
-            <p:nvPr/>
-          </p:nvSpPr>
-          <p:spPr>
-            <a:xfrm>
-              <a:off x="6832420" y="1433302"/>
-              <a:ext cx="381650" cy="334297"/>
-            </a:xfrm>
-            <a:prstGeom prst="rect">
-              <a:avLst/>
-            </a:prstGeom>
-            <a:solidFill>
-              <a:schemeClr val="tx2">
-                <a:lumMod val="10000"/>
-                <a:lumOff val="90000"/>
-              </a:schemeClr>
-            </a:solidFill>
-          </p:spPr>
-          <p:style>
-            <a:lnRef idx="2">
-              <a:schemeClr val="accent1">
-                <a:shade val="15000"/>
-              </a:schemeClr>
-            </a:lnRef>
-            <a:fillRef idx="1">
-              <a:schemeClr val="accent1"/>
-            </a:fillRef>
-            <a:effectRef idx="0">
-              <a:schemeClr val="accent1"/>
-            </a:effectRef>
-            <a:fontRef idx="minor">
-              <a:schemeClr val="lt1"/>
-            </a:fontRef>
-          </p:style>
-          <p:txBody>
-            <a:bodyPr rtlCol="0" anchor="ctr"/>
-            <a:lstStyle/>
-            <a:p>
-              <a:pPr algn="ctr"/>
-              <a:endParaRPr lang="en-US"/>
-            </a:p>
-          </p:txBody>
-        </p:sp>
-        <p:pic>
-          <p:nvPicPr>
-            <p:cNvPr id="78" name="Picture 77">
-              <a:extLst>
-                <a:ext uri="{FF2B5EF4-FFF2-40B4-BE49-F238E27FC236}">
-                  <a16:creationId xmlns:a16="http://schemas.microsoft.com/office/drawing/2014/main" id="{7EAC0796-DF63-17F9-C4C0-611AB874325C}"/>
-                </a:ext>
-              </a:extLst>
-            </p:cNvPr>
-            <p:cNvPicPr>
-              <a:picLocks noChangeAspect="1"/>
-            </p:cNvPicPr>
-            <p:nvPr/>
-          </p:nvPicPr>
-          <p:blipFill>
-            <a:blip r:embed="rId7"/>
-            <a:stretch>
-              <a:fillRect/>
-            </a:stretch>
-          </p:blipFill>
-          <p:spPr>
-            <a:xfrm>
-              <a:off x="6881730" y="1461218"/>
-              <a:ext cx="283030" cy="278465"/>
-            </a:xfrm>
-            <a:prstGeom prst="rect">
-              <a:avLst/>
-            </a:prstGeom>
-          </p:spPr>
-        </p:pic>
-      </p:grpSp>
-      <p:grpSp>
-        <p:nvGrpSpPr>
-          <p:cNvPr id="79" name="Group 78">
-            <a:extLst>
-              <a:ext uri="{FF2B5EF4-FFF2-40B4-BE49-F238E27FC236}">
-                <a16:creationId xmlns:a16="http://schemas.microsoft.com/office/drawing/2014/main" id="{872D65A5-ECBB-C222-A989-E5E935BBA2BA}"/>
-              </a:ext>
-            </a:extLst>
-          </p:cNvPr>
-          <p:cNvGrpSpPr/>
-          <p:nvPr/>
-        </p:nvGrpSpPr>
-        <p:grpSpPr>
-          <a:xfrm>
-            <a:off x="6835296" y="2394972"/>
-            <a:ext cx="381650" cy="334297"/>
-            <a:chOff x="6832420" y="1433302"/>
-            <a:chExt cx="381650" cy="334297"/>
-          </a:xfrm>
-        </p:grpSpPr>
-        <p:sp>
-          <p:nvSpPr>
-            <p:cNvPr id="80" name="Rectangle 79">
-              <a:extLst>
-                <a:ext uri="{FF2B5EF4-FFF2-40B4-BE49-F238E27FC236}">
-                  <a16:creationId xmlns:a16="http://schemas.microsoft.com/office/drawing/2014/main" id="{57D4D87A-0B49-EC4A-F6E3-B7429A8D0407}"/>
-                </a:ext>
-              </a:extLst>
-            </p:cNvPr>
-            <p:cNvSpPr/>
-            <p:nvPr/>
-          </p:nvSpPr>
-          <p:spPr>
-            <a:xfrm>
-              <a:off x="6832420" y="1433302"/>
-              <a:ext cx="381650" cy="334297"/>
-            </a:xfrm>
-            <a:prstGeom prst="rect">
-              <a:avLst/>
-            </a:prstGeom>
-            <a:solidFill>
-              <a:schemeClr val="tx2">
-                <a:lumMod val="10000"/>
-                <a:lumOff val="90000"/>
-              </a:schemeClr>
-            </a:solidFill>
-          </p:spPr>
-          <p:style>
-            <a:lnRef idx="2">
-              <a:schemeClr val="accent1">
-                <a:shade val="15000"/>
-              </a:schemeClr>
-            </a:lnRef>
-            <a:fillRef idx="1">
-              <a:schemeClr val="accent1"/>
-            </a:fillRef>
-            <a:effectRef idx="0">
-              <a:schemeClr val="accent1"/>
-            </a:effectRef>
-            <a:fontRef idx="minor">
-              <a:schemeClr val="lt1"/>
-            </a:fontRef>
-          </p:style>
-          <p:txBody>
-            <a:bodyPr rtlCol="0" anchor="ctr"/>
-            <a:lstStyle/>
-            <a:p>
-              <a:pPr algn="ctr"/>
-              <a:endParaRPr lang="en-US"/>
-            </a:p>
-          </p:txBody>
-        </p:sp>
-        <p:pic>
-          <p:nvPicPr>
-            <p:cNvPr id="81" name="Picture 80">
-              <a:extLst>
-                <a:ext uri="{FF2B5EF4-FFF2-40B4-BE49-F238E27FC236}">
-                  <a16:creationId xmlns:a16="http://schemas.microsoft.com/office/drawing/2014/main" id="{F05A1EFD-D116-E291-0182-D29B98E0B35E}"/>
-                </a:ext>
-              </a:extLst>
-            </p:cNvPr>
-            <p:cNvPicPr>
-              <a:picLocks noChangeAspect="1"/>
-            </p:cNvPicPr>
-            <p:nvPr/>
-          </p:nvPicPr>
-          <p:blipFill>
-            <a:blip r:embed="rId7"/>
-            <a:stretch>
-              <a:fillRect/>
-            </a:stretch>
-          </p:blipFill>
-          <p:spPr>
-            <a:xfrm>
-              <a:off x="6881730" y="1461218"/>
-              <a:ext cx="283030" cy="278465"/>
-            </a:xfrm>
-            <a:prstGeom prst="rect">
-              <a:avLst/>
-            </a:prstGeom>
-          </p:spPr>
-        </p:pic>
-      </p:grpSp>
-      <p:sp>
-        <p:nvSpPr>
-          <p:cNvPr id="82" name="Rectangle 81">
-            <a:extLst>
-              <a:ext uri="{FF2B5EF4-FFF2-40B4-BE49-F238E27FC236}">
-                <a16:creationId xmlns:a16="http://schemas.microsoft.com/office/drawing/2014/main" id="{9CB991CD-08F0-517B-72C5-8E01B5A22FB6}"/>
-              </a:ext>
-            </a:extLst>
-          </p:cNvPr>
-          <p:cNvSpPr/>
-          <p:nvPr/>
-        </p:nvSpPr>
-        <p:spPr>
-          <a:xfrm>
-            <a:off x="2183906" y="2833020"/>
-            <a:ext cx="4589382" cy="364000"/>
-          </a:xfrm>
-          <a:prstGeom prst="rect">
-            <a:avLst/>
-          </a:prstGeom>
-          <a:solidFill>
-            <a:schemeClr val="bg1"/>
-          </a:solidFill>
-        </p:spPr>
-        <p:style>
-          <a:lnRef idx="2">
-            <a:schemeClr val="accent1">
-              <a:shade val="15000"/>
-            </a:schemeClr>
-          </a:lnRef>
-          <a:fillRef idx="1">
-            <a:schemeClr val="accent1"/>
-          </a:fillRef>
-          <a:effectRef idx="0">
-            <a:schemeClr val="accent1"/>
-          </a:effectRef>
-          <a:fontRef idx="minor">
-            <a:schemeClr val="lt1"/>
-          </a:fontRef>
-        </p:style>
-        <p:txBody>
-          <a:bodyPr rtlCol="0" anchor="ctr"/>
-          <a:lstStyle/>
-          <a:p>
-            <a:r>
-              <a:rPr lang="en-US" dirty="0">
-                <a:solidFill>
-                  <a:schemeClr val="tx1"/>
-                </a:solidFill>
-              </a:rPr>
-              <a:t>&gt; Sub-Sub Organization</a:t>
-            </a:r>
-          </a:p>
-        </p:txBody>
-      </p:sp>
-      <p:sp>
-        <p:nvSpPr>
-          <p:cNvPr id="83" name="Rectangle 82">
-            <a:extLst>
-              <a:ext uri="{FF2B5EF4-FFF2-40B4-BE49-F238E27FC236}">
-                <a16:creationId xmlns:a16="http://schemas.microsoft.com/office/drawing/2014/main" id="{5A345CDA-03D3-E312-0049-6B5BA927F28F}"/>
-              </a:ext>
-            </a:extLst>
-          </p:cNvPr>
-          <p:cNvSpPr/>
-          <p:nvPr/>
-        </p:nvSpPr>
-        <p:spPr>
-          <a:xfrm>
-            <a:off x="553381" y="2860814"/>
-            <a:ext cx="381650" cy="365733"/>
-          </a:xfrm>
-          <a:prstGeom prst="rect">
-            <a:avLst/>
-          </a:prstGeom>
-          <a:solidFill>
-            <a:schemeClr val="bg1"/>
-          </a:solidFill>
-        </p:spPr>
-        <p:style>
-          <a:lnRef idx="2">
-            <a:schemeClr val="accent1">
-              <a:shade val="15000"/>
-            </a:schemeClr>
-          </a:lnRef>
-          <a:fillRef idx="1">
-            <a:schemeClr val="accent1"/>
-          </a:fillRef>
-          <a:effectRef idx="0">
-            <a:schemeClr val="accent1"/>
-          </a:effectRef>
-          <a:fontRef idx="minor">
-            <a:schemeClr val="lt1"/>
-          </a:fontRef>
-        </p:style>
-        <p:txBody>
-          <a:bodyPr rtlCol="0" anchor="ctr"/>
-          <a:lstStyle/>
-          <a:p>
-            <a:pPr algn="ctr"/>
-            <a:endParaRPr lang="en-US"/>
-          </a:p>
-        </p:txBody>
-      </p:sp>
-      <p:pic>
-        <p:nvPicPr>
-          <p:cNvPr id="84" name="Picture 83">
-            <a:extLst>
-              <a:ext uri="{FF2B5EF4-FFF2-40B4-BE49-F238E27FC236}">
-                <a16:creationId xmlns:a16="http://schemas.microsoft.com/office/drawing/2014/main" id="{3F3FCFE3-7F3A-6F91-4608-4BCB6097A5B9}"/>
-              </a:ext>
-            </a:extLst>
-          </p:cNvPr>
-          <p:cNvPicPr>
-            <a:picLocks noChangeAspect="1"/>
-          </p:cNvPicPr>
-          <p:nvPr/>
-        </p:nvPicPr>
-        <p:blipFill>
-          <a:blip r:embed="rId6"/>
-          <a:stretch>
-            <a:fillRect/>
-          </a:stretch>
-        </p:blipFill>
-        <p:spPr>
-          <a:xfrm>
-            <a:off x="618527" y="2885134"/>
-            <a:ext cx="279230" cy="316109"/>
-          </a:xfrm>
-          <a:prstGeom prst="rect">
-            <a:avLst/>
-          </a:prstGeom>
-        </p:spPr>
-      </p:pic>
-      <p:sp>
-        <p:nvSpPr>
-          <p:cNvPr id="85" name="Rectangle 84">
-            <a:extLst>
-              <a:ext uri="{FF2B5EF4-FFF2-40B4-BE49-F238E27FC236}">
-                <a16:creationId xmlns:a16="http://schemas.microsoft.com/office/drawing/2014/main" id="{CD60B319-CC44-A96A-191E-B80B9054ED9B}"/>
-              </a:ext>
-            </a:extLst>
-          </p:cNvPr>
-          <p:cNvSpPr/>
-          <p:nvPr/>
-        </p:nvSpPr>
-        <p:spPr>
-          <a:xfrm>
-            <a:off x="1053893" y="2844781"/>
-            <a:ext cx="666800" cy="365733"/>
-          </a:xfrm>
-          <a:prstGeom prst="rect">
-            <a:avLst/>
-          </a:prstGeom>
-          <a:solidFill>
-            <a:schemeClr val="bg1"/>
-          </a:solidFill>
-          <a:ln>
-            <a:solidFill>
-              <a:schemeClr val="bg1">
-                <a:lumMod val="95000"/>
-              </a:schemeClr>
-            </a:solidFill>
-          </a:ln>
-        </p:spPr>
-        <p:style>
-          <a:lnRef idx="2">
-            <a:schemeClr val="accent1">
-              <a:shade val="15000"/>
-            </a:schemeClr>
-          </a:lnRef>
-          <a:fillRef idx="1">
-            <a:schemeClr val="accent1"/>
-          </a:fillRef>
-          <a:effectRef idx="0">
-            <a:schemeClr val="accent1"/>
-          </a:effectRef>
-          <a:fontRef idx="minor">
-            <a:schemeClr val="lt1"/>
-          </a:fontRef>
-        </p:style>
-        <p:txBody>
-          <a:bodyPr rtlCol="0" anchor="ctr"/>
-          <a:lstStyle/>
-          <a:p>
-            <a:pPr algn="r"/>
-            <a:r>
-              <a:rPr lang="en-US" sz="1200" dirty="0">
-                <a:solidFill>
-                  <a:schemeClr val="tx1"/>
-                </a:solidFill>
-                <a:latin typeface="Roboto" panose="02000000000000000000" pitchFamily="2" charset="0"/>
-                <a:ea typeface="Roboto" panose="02000000000000000000" pitchFamily="2" charset="0"/>
-              </a:rPr>
-              <a:t>9</a:t>
-            </a:r>
-          </a:p>
-        </p:txBody>
-      </p:sp>
-      <p:grpSp>
-        <p:nvGrpSpPr>
-          <p:cNvPr id="86" name="Group 85">
-            <a:extLst>
-              <a:ext uri="{FF2B5EF4-FFF2-40B4-BE49-F238E27FC236}">
-                <a16:creationId xmlns:a16="http://schemas.microsoft.com/office/drawing/2014/main" id="{A1647A91-262A-14D5-8C33-8BCFE19A9935}"/>
-              </a:ext>
-            </a:extLst>
-          </p:cNvPr>
-          <p:cNvGrpSpPr/>
-          <p:nvPr/>
-        </p:nvGrpSpPr>
-        <p:grpSpPr>
-          <a:xfrm>
-            <a:off x="6828533" y="2860314"/>
-            <a:ext cx="381650" cy="334297"/>
-            <a:chOff x="6832420" y="1433302"/>
-            <a:chExt cx="381650" cy="334297"/>
-          </a:xfrm>
-        </p:grpSpPr>
-        <p:sp>
-          <p:nvSpPr>
-            <p:cNvPr id="87" name="Rectangle 86">
-              <a:extLst>
-                <a:ext uri="{FF2B5EF4-FFF2-40B4-BE49-F238E27FC236}">
-                  <a16:creationId xmlns:a16="http://schemas.microsoft.com/office/drawing/2014/main" id="{BF54F370-828B-4524-6B7C-7CC5D1D2EAEB}"/>
-                </a:ext>
-              </a:extLst>
-            </p:cNvPr>
-            <p:cNvSpPr/>
-            <p:nvPr/>
-          </p:nvSpPr>
-          <p:spPr>
-            <a:xfrm>
-              <a:off x="6832420" y="1433302"/>
-              <a:ext cx="381650" cy="334297"/>
-            </a:xfrm>
-            <a:prstGeom prst="rect">
-              <a:avLst/>
-            </a:prstGeom>
-            <a:solidFill>
-              <a:schemeClr val="tx2">
-                <a:lumMod val="10000"/>
-                <a:lumOff val="90000"/>
-              </a:schemeClr>
-            </a:solidFill>
-          </p:spPr>
-          <p:style>
-            <a:lnRef idx="2">
-              <a:schemeClr val="accent1">
-                <a:shade val="15000"/>
-              </a:schemeClr>
-            </a:lnRef>
-            <a:fillRef idx="1">
-              <a:schemeClr val="accent1"/>
-            </a:fillRef>
-            <a:effectRef idx="0">
-              <a:schemeClr val="accent1"/>
-            </a:effectRef>
-            <a:fontRef idx="minor">
-              <a:schemeClr val="lt1"/>
-            </a:fontRef>
-          </p:style>
-          <p:txBody>
-            <a:bodyPr rtlCol="0" anchor="ctr"/>
-            <a:lstStyle/>
-            <a:p>
-              <a:pPr algn="ctr"/>
-              <a:endParaRPr lang="en-US"/>
-            </a:p>
-          </p:txBody>
-        </p:sp>
-        <p:pic>
-          <p:nvPicPr>
-            <p:cNvPr id="88" name="Picture 87">
-              <a:extLst>
-                <a:ext uri="{FF2B5EF4-FFF2-40B4-BE49-F238E27FC236}">
-                  <a16:creationId xmlns:a16="http://schemas.microsoft.com/office/drawing/2014/main" id="{3140FBCE-5AE4-F895-3506-216C60525E7A}"/>
-                </a:ext>
-              </a:extLst>
-            </p:cNvPr>
-            <p:cNvPicPr>
-              <a:picLocks noChangeAspect="1"/>
-            </p:cNvPicPr>
-            <p:nvPr/>
-          </p:nvPicPr>
-          <p:blipFill>
-            <a:blip r:embed="rId7"/>
-            <a:stretch>
-              <a:fillRect/>
-            </a:stretch>
-          </p:blipFill>
-          <p:spPr>
-            <a:xfrm>
-              <a:off x="6881730" y="1461218"/>
-              <a:ext cx="283030" cy="278465"/>
-            </a:xfrm>
-            <a:prstGeom prst="rect">
-              <a:avLst/>
-            </a:prstGeom>
-          </p:spPr>
-        </p:pic>
-      </p:grpSp>
-      <p:sp>
-        <p:nvSpPr>
-          <p:cNvPr id="89" name="Rectangle 88">
-            <a:extLst>
-              <a:ext uri="{FF2B5EF4-FFF2-40B4-BE49-F238E27FC236}">
-                <a16:creationId xmlns:a16="http://schemas.microsoft.com/office/drawing/2014/main" id="{A07917C5-987F-2664-275A-86757DCE3AB4}"/>
-              </a:ext>
-            </a:extLst>
-          </p:cNvPr>
-          <p:cNvSpPr/>
-          <p:nvPr/>
-        </p:nvSpPr>
-        <p:spPr>
-          <a:xfrm>
-            <a:off x="2177143" y="3298362"/>
-            <a:ext cx="4589382" cy="364000"/>
-          </a:xfrm>
-          <a:prstGeom prst="rect">
-            <a:avLst/>
-          </a:prstGeom>
-          <a:solidFill>
-            <a:schemeClr val="bg1"/>
-          </a:solidFill>
-        </p:spPr>
-        <p:style>
-          <a:lnRef idx="2">
-            <a:schemeClr val="accent1">
-              <a:shade val="15000"/>
-            </a:schemeClr>
-          </a:lnRef>
-          <a:fillRef idx="1">
-            <a:schemeClr val="accent1"/>
-          </a:fillRef>
-          <a:effectRef idx="0">
-            <a:schemeClr val="accent1"/>
-          </a:effectRef>
-          <a:fontRef idx="minor">
-            <a:schemeClr val="lt1"/>
-          </a:fontRef>
-        </p:style>
-        <p:txBody>
-          <a:bodyPr rtlCol="0" anchor="ctr"/>
-          <a:lstStyle/>
-          <a:p>
-            <a:r>
-              <a:rPr lang="en-US" dirty="0">
-                <a:solidFill>
-                  <a:schemeClr val="tx1"/>
-                </a:solidFill>
-              </a:rPr>
-              <a:t>&gt; Sub-Sub Organization</a:t>
-            </a:r>
-          </a:p>
-        </p:txBody>
-      </p:sp>
-      <p:sp>
-        <p:nvSpPr>
-          <p:cNvPr id="90" name="Rectangle 89">
-            <a:extLst>
-              <a:ext uri="{FF2B5EF4-FFF2-40B4-BE49-F238E27FC236}">
-                <a16:creationId xmlns:a16="http://schemas.microsoft.com/office/drawing/2014/main" id="{0FC3FF28-3AD1-3C36-7F21-30FA475D6C88}"/>
-              </a:ext>
-            </a:extLst>
-          </p:cNvPr>
-          <p:cNvSpPr/>
-          <p:nvPr/>
-        </p:nvSpPr>
-        <p:spPr>
-          <a:xfrm>
-            <a:off x="546618" y="3326156"/>
-            <a:ext cx="381650" cy="365733"/>
-          </a:xfrm>
-          <a:prstGeom prst="rect">
-            <a:avLst/>
-          </a:prstGeom>
-          <a:solidFill>
-            <a:schemeClr val="bg1"/>
-          </a:solidFill>
-        </p:spPr>
-        <p:style>
-          <a:lnRef idx="2">
-            <a:schemeClr val="accent1">
-              <a:shade val="15000"/>
-            </a:schemeClr>
-          </a:lnRef>
-          <a:fillRef idx="1">
-            <a:schemeClr val="accent1"/>
-          </a:fillRef>
-          <a:effectRef idx="0">
-            <a:schemeClr val="accent1"/>
-          </a:effectRef>
-          <a:fontRef idx="minor">
-            <a:schemeClr val="lt1"/>
-          </a:fontRef>
-        </p:style>
-        <p:txBody>
-          <a:bodyPr rtlCol="0" anchor="ctr"/>
-          <a:lstStyle/>
-          <a:p>
-            <a:pPr algn="ctr"/>
-            <a:endParaRPr lang="en-US"/>
-          </a:p>
-        </p:txBody>
-      </p:sp>
-      <p:pic>
-        <p:nvPicPr>
-          <p:cNvPr id="91" name="Picture 90">
-            <a:extLst>
-              <a:ext uri="{FF2B5EF4-FFF2-40B4-BE49-F238E27FC236}">
-                <a16:creationId xmlns:a16="http://schemas.microsoft.com/office/drawing/2014/main" id="{04057864-FBCF-0CDF-1290-FFB4AB67D1B5}"/>
-              </a:ext>
-            </a:extLst>
-          </p:cNvPr>
-          <p:cNvPicPr>
-            <a:picLocks noChangeAspect="1"/>
-          </p:cNvPicPr>
-          <p:nvPr/>
-        </p:nvPicPr>
-        <p:blipFill>
-          <a:blip r:embed="rId6"/>
-          <a:stretch>
-            <a:fillRect/>
-          </a:stretch>
-        </p:blipFill>
-        <p:spPr>
-          <a:xfrm>
-            <a:off x="611764" y="3350476"/>
-            <a:ext cx="279230" cy="316109"/>
-          </a:xfrm>
-          <a:prstGeom prst="rect">
-            <a:avLst/>
-          </a:prstGeom>
-        </p:spPr>
-      </p:pic>
-      <p:sp>
-        <p:nvSpPr>
-          <p:cNvPr id="92" name="Rectangle 91">
-            <a:extLst>
-              <a:ext uri="{FF2B5EF4-FFF2-40B4-BE49-F238E27FC236}">
-                <a16:creationId xmlns:a16="http://schemas.microsoft.com/office/drawing/2014/main" id="{465551D6-6E1C-95B3-D603-FF5BDBC77E32}"/>
-              </a:ext>
-            </a:extLst>
-          </p:cNvPr>
-          <p:cNvSpPr/>
-          <p:nvPr/>
-        </p:nvSpPr>
-        <p:spPr>
-          <a:xfrm>
-            <a:off x="1047130" y="3310123"/>
-            <a:ext cx="666800" cy="365733"/>
-          </a:xfrm>
-          <a:prstGeom prst="rect">
-            <a:avLst/>
-          </a:prstGeom>
-          <a:solidFill>
-            <a:schemeClr val="bg1"/>
-          </a:solidFill>
-          <a:ln>
-            <a:solidFill>
-              <a:schemeClr val="bg1">
-                <a:lumMod val="95000"/>
-              </a:schemeClr>
-            </a:solidFill>
-          </a:ln>
-        </p:spPr>
-        <p:style>
-          <a:lnRef idx="2">
-            <a:schemeClr val="accent1">
-              <a:shade val="15000"/>
-            </a:schemeClr>
-          </a:lnRef>
-          <a:fillRef idx="1">
-            <a:schemeClr val="accent1"/>
-          </a:fillRef>
-          <a:effectRef idx="0">
-            <a:schemeClr val="accent1"/>
-          </a:effectRef>
-          <a:fontRef idx="minor">
-            <a:schemeClr val="lt1"/>
-          </a:fontRef>
-        </p:style>
-        <p:txBody>
-          <a:bodyPr rtlCol="0" anchor="ctr"/>
-          <a:lstStyle/>
-          <a:p>
-            <a:pPr algn="r"/>
-            <a:r>
-              <a:rPr lang="en-US" sz="1200" dirty="0">
-                <a:solidFill>
-                  <a:schemeClr val="tx1"/>
-                </a:solidFill>
-                <a:latin typeface="Roboto" panose="02000000000000000000" pitchFamily="2" charset="0"/>
-                <a:ea typeface="Roboto" panose="02000000000000000000" pitchFamily="2" charset="0"/>
-              </a:rPr>
+              <a:rPr lang="en-US" dirty="0"/>
               <a:t>10</a:t>
-            </a:r>
-          </a:p>
-        </p:txBody>
-      </p:sp>
-      <p:grpSp>
-        <p:nvGrpSpPr>
-          <p:cNvPr id="93" name="Group 92">
-            <a:extLst>
-              <a:ext uri="{FF2B5EF4-FFF2-40B4-BE49-F238E27FC236}">
-                <a16:creationId xmlns:a16="http://schemas.microsoft.com/office/drawing/2014/main" id="{C5DCC1DD-14F0-212A-B1C0-F2266CDF6FAA}"/>
-              </a:ext>
-            </a:extLst>
-          </p:cNvPr>
-          <p:cNvGrpSpPr/>
-          <p:nvPr/>
-        </p:nvGrpSpPr>
-        <p:grpSpPr>
-          <a:xfrm>
-            <a:off x="6821770" y="3325656"/>
-            <a:ext cx="381650" cy="334297"/>
-            <a:chOff x="6832420" y="1433302"/>
-            <a:chExt cx="381650" cy="334297"/>
-          </a:xfrm>
-        </p:grpSpPr>
-        <p:sp>
-          <p:nvSpPr>
-            <p:cNvPr id="94" name="Rectangle 93">
-              <a:extLst>
-                <a:ext uri="{FF2B5EF4-FFF2-40B4-BE49-F238E27FC236}">
-                  <a16:creationId xmlns:a16="http://schemas.microsoft.com/office/drawing/2014/main" id="{988F08B2-9514-7353-EE37-3253BD703F2A}"/>
-                </a:ext>
-              </a:extLst>
-            </p:cNvPr>
-            <p:cNvSpPr/>
-            <p:nvPr/>
-          </p:nvSpPr>
-          <p:spPr>
-            <a:xfrm>
-              <a:off x="6832420" y="1433302"/>
-              <a:ext cx="381650" cy="334297"/>
-            </a:xfrm>
-            <a:prstGeom prst="rect">
-              <a:avLst/>
-            </a:prstGeom>
-            <a:solidFill>
-              <a:schemeClr val="tx2">
-                <a:lumMod val="10000"/>
-                <a:lumOff val="90000"/>
-              </a:schemeClr>
-            </a:solidFill>
-          </p:spPr>
-          <p:style>
-            <a:lnRef idx="2">
-              <a:schemeClr val="accent1">
-                <a:shade val="15000"/>
-              </a:schemeClr>
-            </a:lnRef>
-            <a:fillRef idx="1">
-              <a:schemeClr val="accent1"/>
-            </a:fillRef>
-            <a:effectRef idx="0">
-              <a:schemeClr val="accent1"/>
-            </a:effectRef>
-            <a:fontRef idx="minor">
-              <a:schemeClr val="lt1"/>
-            </a:fontRef>
-          </p:style>
-          <p:txBody>
-            <a:bodyPr rtlCol="0" anchor="ctr"/>
-            <a:lstStyle/>
-            <a:p>
-              <a:pPr algn="ctr"/>
-              <a:endParaRPr lang="en-US"/>
-            </a:p>
-          </p:txBody>
-        </p:sp>
-        <p:pic>
-          <p:nvPicPr>
-            <p:cNvPr id="95" name="Picture 94">
-              <a:extLst>
-                <a:ext uri="{FF2B5EF4-FFF2-40B4-BE49-F238E27FC236}">
-                  <a16:creationId xmlns:a16="http://schemas.microsoft.com/office/drawing/2014/main" id="{5EA25F02-4003-10A0-21B4-C347F7B841A0}"/>
-                </a:ext>
-              </a:extLst>
-            </p:cNvPr>
-            <p:cNvPicPr>
-              <a:picLocks noChangeAspect="1"/>
-            </p:cNvPicPr>
-            <p:nvPr/>
-          </p:nvPicPr>
-          <p:blipFill>
-            <a:blip r:embed="rId7"/>
-            <a:stretch>
-              <a:fillRect/>
-            </a:stretch>
-          </p:blipFill>
-          <p:spPr>
-            <a:xfrm>
-              <a:off x="6881730" y="1461218"/>
-              <a:ext cx="283030" cy="278465"/>
-            </a:xfrm>
-            <a:prstGeom prst="rect">
-              <a:avLst/>
-            </a:prstGeom>
-          </p:spPr>
-        </p:pic>
-      </p:grpSp>
-      <p:sp>
-        <p:nvSpPr>
-          <p:cNvPr id="96" name="Rectangle 95">
-            <a:extLst>
-              <a:ext uri="{FF2B5EF4-FFF2-40B4-BE49-F238E27FC236}">
-                <a16:creationId xmlns:a16="http://schemas.microsoft.com/office/drawing/2014/main" id="{01350E1A-0539-2851-F239-DC496094A406}"/>
-              </a:ext>
-            </a:extLst>
-          </p:cNvPr>
-          <p:cNvSpPr/>
-          <p:nvPr/>
-        </p:nvSpPr>
-        <p:spPr>
-          <a:xfrm>
-            <a:off x="1816126" y="1923370"/>
-            <a:ext cx="325233" cy="365733"/>
-          </a:xfrm>
-          <a:prstGeom prst="rect">
-            <a:avLst/>
-          </a:prstGeom>
-          <a:solidFill>
-            <a:schemeClr val="bg1"/>
-          </a:solidFill>
-          <a:ln>
-            <a:solidFill>
-              <a:schemeClr val="bg1">
-                <a:lumMod val="95000"/>
-              </a:schemeClr>
-            </a:solidFill>
-          </a:ln>
-        </p:spPr>
-        <p:style>
-          <a:lnRef idx="2">
-            <a:schemeClr val="accent1">
-              <a:shade val="15000"/>
-            </a:schemeClr>
-          </a:lnRef>
-          <a:fillRef idx="1">
-            <a:schemeClr val="accent1"/>
-          </a:fillRef>
-          <a:effectRef idx="0">
-            <a:schemeClr val="accent1"/>
-          </a:effectRef>
-          <a:fontRef idx="minor">
-            <a:schemeClr val="lt1"/>
-          </a:fontRef>
-        </p:style>
-        <p:txBody>
-          <a:bodyPr rtlCol="0" anchor="ctr"/>
-          <a:lstStyle/>
-          <a:p>
-            <a:pPr algn="ctr"/>
-            <a:endParaRPr lang="en-US" sz="1200">
-              <a:solidFill>
-                <a:schemeClr val="tx1"/>
-              </a:solidFill>
-              <a:latin typeface="Roboto" panose="02000000000000000000" pitchFamily="2" charset="0"/>
-              <a:ea typeface="Roboto" panose="02000000000000000000" pitchFamily="2" charset="0"/>
-            </a:endParaRPr>
-          </a:p>
-        </p:txBody>
-      </p:sp>
-      <p:sp>
-        <p:nvSpPr>
-          <p:cNvPr id="97" name="Rectangle 96">
-            <a:extLst>
-              <a:ext uri="{FF2B5EF4-FFF2-40B4-BE49-F238E27FC236}">
-                <a16:creationId xmlns:a16="http://schemas.microsoft.com/office/drawing/2014/main" id="{242515BA-F448-7E4D-8674-BD87DB778BD5}"/>
-              </a:ext>
-            </a:extLst>
-          </p:cNvPr>
-          <p:cNvSpPr/>
-          <p:nvPr/>
-        </p:nvSpPr>
-        <p:spPr>
-          <a:xfrm>
-            <a:off x="1816125" y="2379439"/>
-            <a:ext cx="325233" cy="365733"/>
-          </a:xfrm>
-          <a:prstGeom prst="rect">
-            <a:avLst/>
-          </a:prstGeom>
-          <a:solidFill>
-            <a:schemeClr val="bg1"/>
-          </a:solidFill>
-          <a:ln>
-            <a:solidFill>
-              <a:schemeClr val="bg1">
-                <a:lumMod val="95000"/>
-              </a:schemeClr>
-            </a:solidFill>
-          </a:ln>
-        </p:spPr>
-        <p:style>
-          <a:lnRef idx="2">
-            <a:schemeClr val="accent1">
-              <a:shade val="15000"/>
-            </a:schemeClr>
-          </a:lnRef>
-          <a:fillRef idx="1">
-            <a:schemeClr val="accent1"/>
-          </a:fillRef>
-          <a:effectRef idx="0">
-            <a:schemeClr val="accent1"/>
-          </a:effectRef>
-          <a:fontRef idx="minor">
-            <a:schemeClr val="lt1"/>
-          </a:fontRef>
-        </p:style>
-        <p:txBody>
-          <a:bodyPr rtlCol="0" anchor="ctr"/>
-          <a:lstStyle/>
-          <a:p>
-            <a:pPr algn="ctr"/>
-            <a:endParaRPr lang="en-US" sz="1200">
-              <a:solidFill>
-                <a:schemeClr val="tx1"/>
-              </a:solidFill>
-              <a:latin typeface="Roboto" panose="02000000000000000000" pitchFamily="2" charset="0"/>
-              <a:ea typeface="Roboto" panose="02000000000000000000" pitchFamily="2" charset="0"/>
-            </a:endParaRPr>
-          </a:p>
-        </p:txBody>
-      </p:sp>
-      <p:sp>
-        <p:nvSpPr>
-          <p:cNvPr id="98" name="Rectangle 97">
-            <a:extLst>
-              <a:ext uri="{FF2B5EF4-FFF2-40B4-BE49-F238E27FC236}">
-                <a16:creationId xmlns:a16="http://schemas.microsoft.com/office/drawing/2014/main" id="{5314DC5C-3A71-7E82-EA68-B90F3EDB3E7B}"/>
-              </a:ext>
-            </a:extLst>
-          </p:cNvPr>
-          <p:cNvSpPr/>
-          <p:nvPr/>
-        </p:nvSpPr>
-        <p:spPr>
-          <a:xfrm>
-            <a:off x="1809362" y="2844781"/>
-            <a:ext cx="325233" cy="365733"/>
-          </a:xfrm>
-          <a:prstGeom prst="rect">
-            <a:avLst/>
-          </a:prstGeom>
-          <a:solidFill>
-            <a:schemeClr val="bg1"/>
-          </a:solidFill>
-          <a:ln>
-            <a:solidFill>
-              <a:schemeClr val="bg1">
-                <a:lumMod val="95000"/>
-              </a:schemeClr>
-            </a:solidFill>
-          </a:ln>
-        </p:spPr>
-        <p:style>
-          <a:lnRef idx="2">
-            <a:schemeClr val="accent1">
-              <a:shade val="15000"/>
-            </a:schemeClr>
-          </a:lnRef>
-          <a:fillRef idx="1">
-            <a:schemeClr val="accent1"/>
-          </a:fillRef>
-          <a:effectRef idx="0">
-            <a:schemeClr val="accent1"/>
-          </a:effectRef>
-          <a:fontRef idx="minor">
-            <a:schemeClr val="lt1"/>
-          </a:fontRef>
-        </p:style>
-        <p:txBody>
-          <a:bodyPr rtlCol="0" anchor="ctr"/>
-          <a:lstStyle/>
-          <a:p>
-            <a:pPr algn="ctr"/>
-            <a:endParaRPr lang="en-US" sz="1200">
-              <a:solidFill>
-                <a:schemeClr val="tx1"/>
-              </a:solidFill>
-              <a:latin typeface="Roboto" panose="02000000000000000000" pitchFamily="2" charset="0"/>
-              <a:ea typeface="Roboto" panose="02000000000000000000" pitchFamily="2" charset="0"/>
-            </a:endParaRPr>
-          </a:p>
-        </p:txBody>
-      </p:sp>
-      <p:sp>
-        <p:nvSpPr>
-          <p:cNvPr id="99" name="Rectangle 98">
-            <a:extLst>
-              <a:ext uri="{FF2B5EF4-FFF2-40B4-BE49-F238E27FC236}">
-                <a16:creationId xmlns:a16="http://schemas.microsoft.com/office/drawing/2014/main" id="{5B3178E2-5EC6-3927-0E0D-97193121D4D3}"/>
-              </a:ext>
-            </a:extLst>
-          </p:cNvPr>
-          <p:cNvSpPr/>
-          <p:nvPr/>
-        </p:nvSpPr>
-        <p:spPr>
-          <a:xfrm>
-            <a:off x="1802599" y="3310123"/>
-            <a:ext cx="325233" cy="365733"/>
-          </a:xfrm>
-          <a:prstGeom prst="rect">
-            <a:avLst/>
-          </a:prstGeom>
-          <a:solidFill>
-            <a:schemeClr val="bg1"/>
-          </a:solidFill>
-          <a:ln>
-            <a:solidFill>
-              <a:schemeClr val="bg1">
-                <a:lumMod val="95000"/>
-              </a:schemeClr>
-            </a:solidFill>
-          </a:ln>
-        </p:spPr>
-        <p:style>
-          <a:lnRef idx="2">
-            <a:schemeClr val="accent1">
-              <a:shade val="15000"/>
-            </a:schemeClr>
-          </a:lnRef>
-          <a:fillRef idx="1">
-            <a:schemeClr val="accent1"/>
-          </a:fillRef>
-          <a:effectRef idx="0">
-            <a:schemeClr val="accent1"/>
-          </a:effectRef>
-          <a:fontRef idx="minor">
-            <a:schemeClr val="lt1"/>
-          </a:fontRef>
-        </p:style>
-        <p:txBody>
-          <a:bodyPr rtlCol="0" anchor="ctr"/>
-          <a:lstStyle/>
-          <a:p>
-            <a:pPr algn="ctr"/>
-            <a:endParaRPr lang="en-US" sz="1200">
-              <a:solidFill>
-                <a:schemeClr val="tx1"/>
-              </a:solidFill>
-              <a:latin typeface="Roboto" panose="02000000000000000000" pitchFamily="2" charset="0"/>
-              <a:ea typeface="Roboto" panose="02000000000000000000" pitchFamily="2" charset="0"/>
-            </a:endParaRPr>
-          </a:p>
-        </p:txBody>
-      </p:sp>
-      <p:sp>
-        <p:nvSpPr>
-          <p:cNvPr id="100" name="Rectangle 99">
-            <a:extLst>
-              <a:ext uri="{FF2B5EF4-FFF2-40B4-BE49-F238E27FC236}">
-                <a16:creationId xmlns:a16="http://schemas.microsoft.com/office/drawing/2014/main" id="{01E738AF-75AB-0F48-5481-7F1B33F05D87}"/>
-              </a:ext>
-            </a:extLst>
-          </p:cNvPr>
-          <p:cNvSpPr/>
-          <p:nvPr/>
-        </p:nvSpPr>
-        <p:spPr>
-          <a:xfrm>
-            <a:off x="1055578" y="1404054"/>
-            <a:ext cx="666800" cy="365733"/>
-          </a:xfrm>
-          <a:prstGeom prst="rect">
-            <a:avLst/>
-          </a:prstGeom>
-          <a:solidFill>
-            <a:schemeClr val="bg1"/>
-          </a:solidFill>
-          <a:ln>
-            <a:solidFill>
-              <a:schemeClr val="bg1">
-                <a:lumMod val="95000"/>
-              </a:schemeClr>
-            </a:solidFill>
-          </a:ln>
-        </p:spPr>
-        <p:style>
-          <a:lnRef idx="2">
-            <a:schemeClr val="accent1">
-              <a:shade val="15000"/>
-            </a:schemeClr>
-          </a:lnRef>
-          <a:fillRef idx="1">
-            <a:schemeClr val="accent1"/>
-          </a:fillRef>
-          <a:effectRef idx="0">
-            <a:schemeClr val="accent1"/>
-          </a:effectRef>
-          <a:fontRef idx="minor">
-            <a:schemeClr val="lt1"/>
-          </a:fontRef>
-        </p:style>
-        <p:txBody>
-          <a:bodyPr rtlCol="0" anchor="ctr"/>
-          <a:lstStyle/>
-          <a:p>
-            <a:pPr algn="r"/>
-            <a:r>
-              <a:rPr lang="en-US" sz="1200" dirty="0">
-                <a:solidFill>
-                  <a:schemeClr val="tx1"/>
-                </a:solidFill>
-                <a:latin typeface="Roboto" panose="02000000000000000000" pitchFamily="2" charset="0"/>
-                <a:ea typeface="Roboto" panose="02000000000000000000" pitchFamily="2" charset="0"/>
-              </a:rPr>
-              <a:t>0</a:t>
             </a:r>
           </a:p>
         </p:txBody>
@@ -17025,675 +18232,7 @@
     </p:spTree>
     <p:extLst>
       <p:ext uri="{BB962C8B-B14F-4D97-AF65-F5344CB8AC3E}">
-        <p14:creationId xmlns:p14="http://schemas.microsoft.com/office/powerpoint/2010/main" val="3285375089"/>
-      </p:ext>
-    </p:extLst>
-  </p:cSld>
-  <p:clrMapOvr>
-    <a:masterClrMapping/>
-  </p:clrMapOvr>
-  <p:extLst>
-    <p:ext uri="{6950BFC3-D8DA-4A85-94F7-54DA5524770B}">
-      <p188:commentRel xmlns:p188="http://schemas.microsoft.com/office/powerpoint/2018/8/main" r:id="rId3"/>
-    </p:ext>
-  </p:extLst>
-</p:sld>
-</file>
-
-<file path=ppt/slides/slide7.xml><?xml version="1.0" encoding="utf-8"?>
-<p:sld xmlns:a="http://schemas.openxmlformats.org/drawingml/2006/main" xmlns:r="http://schemas.openxmlformats.org/officeDocument/2006/relationships" xmlns:p="http://schemas.openxmlformats.org/presentationml/2006/main">
-  <p:cSld>
-    <p:spTree>
-      <p:nvGrpSpPr>
-        <p:cNvPr id="1" name=""/>
-        <p:cNvGrpSpPr/>
-        <p:nvPr/>
-      </p:nvGrpSpPr>
-      <p:grpSpPr>
-        <a:xfrm>
-          <a:off x="0" y="0"/>
-          <a:ext cx="0" cy="0"/>
-          <a:chOff x="0" y="0"/>
-          <a:chExt cx="0" cy="0"/>
-        </a:xfrm>
-      </p:grpSpPr>
-      <p:sp>
-        <p:nvSpPr>
-          <p:cNvPr id="2" name="Title 1">
-            <a:extLst>
-              <a:ext uri="{FF2B5EF4-FFF2-40B4-BE49-F238E27FC236}">
-                <a16:creationId xmlns:a16="http://schemas.microsoft.com/office/drawing/2014/main" id="{FF04ECDB-D629-C300-A796-57DC1C685598}"/>
-              </a:ext>
-            </a:extLst>
-          </p:cNvPr>
-          <p:cNvSpPr>
-            <a:spLocks noGrp="1"/>
-          </p:cNvSpPr>
-          <p:nvPr>
-            <p:ph type="title"/>
-          </p:nvPr>
-        </p:nvSpPr>
-        <p:spPr/>
-        <p:txBody>
-          <a:bodyPr>
-            <a:normAutofit fontScale="90000"/>
-          </a:bodyPr>
-          <a:lstStyle/>
-          <a:p>
-            <a:r>
-              <a:rPr lang="en-US" dirty="0"/>
-              <a:t>Dialog: Organization Editor</a:t>
-            </a:r>
-          </a:p>
-        </p:txBody>
-      </p:sp>
-      <p:sp>
-        <p:nvSpPr>
-          <p:cNvPr id="8" name="Rectangle 7">
-            <a:extLst>
-              <a:ext uri="{FF2B5EF4-FFF2-40B4-BE49-F238E27FC236}">
-                <a16:creationId xmlns:a16="http://schemas.microsoft.com/office/drawing/2014/main" id="{F035B886-7C14-5238-2AFF-4BCF64D2AD2D}"/>
-              </a:ext>
-            </a:extLst>
-          </p:cNvPr>
-          <p:cNvSpPr/>
-          <p:nvPr/>
-        </p:nvSpPr>
-        <p:spPr>
-          <a:xfrm>
-            <a:off x="515524" y="1360498"/>
-            <a:ext cx="490930" cy="365733"/>
-          </a:xfrm>
-          <a:prstGeom prst="rect">
-            <a:avLst/>
-          </a:prstGeom>
-          <a:solidFill>
-            <a:schemeClr val="bg1">
-              <a:lumMod val="95000"/>
-            </a:schemeClr>
-          </a:solidFill>
-        </p:spPr>
-        <p:style>
-          <a:lnRef idx="2">
-            <a:schemeClr val="accent1">
-              <a:shade val="15000"/>
-            </a:schemeClr>
-          </a:lnRef>
-          <a:fillRef idx="1">
-            <a:schemeClr val="accent1"/>
-          </a:fillRef>
-          <a:effectRef idx="0">
-            <a:schemeClr val="accent1"/>
-          </a:effectRef>
-          <a:fontRef idx="minor">
-            <a:schemeClr val="lt1"/>
-          </a:fontRef>
-        </p:style>
-        <p:txBody>
-          <a:bodyPr rtlCol="0" anchor="ctr"/>
-          <a:lstStyle/>
-          <a:p>
-            <a:pPr algn="r"/>
-            <a:r>
-              <a:rPr lang="en-US" dirty="0">
-                <a:solidFill>
-                  <a:schemeClr val="tx1"/>
-                </a:solidFill>
-              </a:rPr>
-              <a:t>10</a:t>
-            </a:r>
-          </a:p>
-        </p:txBody>
-      </p:sp>
-      <p:sp>
-        <p:nvSpPr>
-          <p:cNvPr id="14" name="Rectangle 13">
-            <a:extLst>
-              <a:ext uri="{FF2B5EF4-FFF2-40B4-BE49-F238E27FC236}">
-                <a16:creationId xmlns:a16="http://schemas.microsoft.com/office/drawing/2014/main" id="{34EDFF8C-602D-82C1-F9B8-A1EFE64BAF46}"/>
-              </a:ext>
-            </a:extLst>
-          </p:cNvPr>
-          <p:cNvSpPr/>
-          <p:nvPr/>
-        </p:nvSpPr>
-        <p:spPr>
-          <a:xfrm>
-            <a:off x="1071924" y="1360497"/>
-            <a:ext cx="5856650" cy="365733"/>
-          </a:xfrm>
-          <a:prstGeom prst="rect">
-            <a:avLst/>
-          </a:prstGeom>
-          <a:solidFill>
-            <a:schemeClr val="bg1"/>
-          </a:solidFill>
-        </p:spPr>
-        <p:style>
-          <a:lnRef idx="2">
-            <a:schemeClr val="accent1">
-              <a:shade val="15000"/>
-            </a:schemeClr>
-          </a:lnRef>
-          <a:fillRef idx="1">
-            <a:schemeClr val="accent1"/>
-          </a:fillRef>
-          <a:effectRef idx="0">
-            <a:schemeClr val="accent1"/>
-          </a:effectRef>
-          <a:fontRef idx="minor">
-            <a:schemeClr val="lt1"/>
-          </a:fontRef>
-        </p:style>
-        <p:txBody>
-          <a:bodyPr rtlCol="0" anchor="ctr"/>
-          <a:lstStyle/>
-          <a:p>
-            <a:pPr algn="ctr"/>
-            <a:endParaRPr lang="en-US"/>
-          </a:p>
-        </p:txBody>
-      </p:sp>
-      <p:pic>
-        <p:nvPicPr>
-          <p:cNvPr id="16" name="Picture 15">
-            <a:extLst>
-              <a:ext uri="{FF2B5EF4-FFF2-40B4-BE49-F238E27FC236}">
-                <a16:creationId xmlns:a16="http://schemas.microsoft.com/office/drawing/2014/main" id="{E184119F-C982-A2A2-6D0E-6FFC7396FA6B}"/>
-              </a:ext>
-            </a:extLst>
-          </p:cNvPr>
-          <p:cNvPicPr>
-            <a:picLocks noChangeAspect="1"/>
-          </p:cNvPicPr>
-          <p:nvPr/>
-        </p:nvPicPr>
-        <p:blipFill>
-          <a:blip r:embed="rId2"/>
-          <a:stretch>
-            <a:fillRect/>
-          </a:stretch>
-        </p:blipFill>
-        <p:spPr>
-          <a:xfrm>
-            <a:off x="570745" y="2666821"/>
-            <a:ext cx="501179" cy="556865"/>
-          </a:xfrm>
-          <a:prstGeom prst="rect">
-            <a:avLst/>
-          </a:prstGeom>
-        </p:spPr>
-      </p:pic>
-      <p:pic>
-        <p:nvPicPr>
-          <p:cNvPr id="18" name="Picture 17">
-            <a:extLst>
-              <a:ext uri="{FF2B5EF4-FFF2-40B4-BE49-F238E27FC236}">
-                <a16:creationId xmlns:a16="http://schemas.microsoft.com/office/drawing/2014/main" id="{441023A6-5328-224A-4E6C-D90F722D5679}"/>
-              </a:ext>
-            </a:extLst>
-          </p:cNvPr>
-          <p:cNvPicPr>
-            <a:picLocks noChangeAspect="1"/>
-          </p:cNvPicPr>
-          <p:nvPr/>
-        </p:nvPicPr>
-        <p:blipFill>
-          <a:blip r:embed="rId3"/>
-          <a:stretch>
-            <a:fillRect/>
-          </a:stretch>
-        </p:blipFill>
-        <p:spPr>
-          <a:xfrm>
-            <a:off x="570745" y="3440686"/>
-            <a:ext cx="501179" cy="537628"/>
-          </a:xfrm>
-          <a:prstGeom prst="rect">
-            <a:avLst/>
-          </a:prstGeom>
-        </p:spPr>
-      </p:pic>
-      <p:pic>
-        <p:nvPicPr>
-          <p:cNvPr id="20" name="Picture 19">
-            <a:extLst>
-              <a:ext uri="{FF2B5EF4-FFF2-40B4-BE49-F238E27FC236}">
-                <a16:creationId xmlns:a16="http://schemas.microsoft.com/office/drawing/2014/main" id="{CF5FBCE3-F5D2-A9F0-5841-82D58FB10D16}"/>
-              </a:ext>
-            </a:extLst>
-          </p:cNvPr>
-          <p:cNvPicPr>
-            <a:picLocks noChangeAspect="1"/>
-          </p:cNvPicPr>
-          <p:nvPr/>
-        </p:nvPicPr>
-        <p:blipFill>
-          <a:blip r:embed="rId4"/>
-          <a:stretch>
-            <a:fillRect/>
-          </a:stretch>
-        </p:blipFill>
-        <p:spPr>
-          <a:xfrm>
-            <a:off x="7020452" y="1360497"/>
-            <a:ext cx="375680" cy="375680"/>
-          </a:xfrm>
-          <a:prstGeom prst="rect">
-            <a:avLst/>
-          </a:prstGeom>
-        </p:spPr>
-      </p:pic>
-      <p:sp>
-        <p:nvSpPr>
-          <p:cNvPr id="22" name="Rectangle 21">
-            <a:extLst>
-              <a:ext uri="{FF2B5EF4-FFF2-40B4-BE49-F238E27FC236}">
-                <a16:creationId xmlns:a16="http://schemas.microsoft.com/office/drawing/2014/main" id="{13E68C9A-E5C5-838C-D002-4EAA13290946}"/>
-              </a:ext>
-            </a:extLst>
-          </p:cNvPr>
-          <p:cNvSpPr/>
-          <p:nvPr/>
-        </p:nvSpPr>
-        <p:spPr>
-          <a:xfrm>
-            <a:off x="405036" y="1264204"/>
-            <a:ext cx="7100408" cy="2890486"/>
-          </a:xfrm>
-          <a:prstGeom prst="rect">
-            <a:avLst/>
-          </a:prstGeom>
-          <a:noFill/>
-        </p:spPr>
-        <p:style>
-          <a:lnRef idx="2">
-            <a:schemeClr val="accent1">
-              <a:shade val="15000"/>
-            </a:schemeClr>
-          </a:lnRef>
-          <a:fillRef idx="1">
-            <a:schemeClr val="accent1"/>
-          </a:fillRef>
-          <a:effectRef idx="0">
-            <a:schemeClr val="accent1"/>
-          </a:effectRef>
-          <a:fontRef idx="minor">
-            <a:schemeClr val="lt1"/>
-          </a:fontRef>
-        </p:style>
-        <p:txBody>
-          <a:bodyPr rtlCol="0" anchor="ctr"/>
-          <a:lstStyle/>
-          <a:p>
-            <a:pPr algn="ctr"/>
-            <a:endParaRPr lang="en-US"/>
-          </a:p>
-        </p:txBody>
-      </p:sp>
-      <p:sp>
-        <p:nvSpPr>
-          <p:cNvPr id="24" name="Rectangle 23">
-            <a:extLst>
-              <a:ext uri="{FF2B5EF4-FFF2-40B4-BE49-F238E27FC236}">
-                <a16:creationId xmlns:a16="http://schemas.microsoft.com/office/drawing/2014/main" id="{240D8721-B603-687C-96AD-E49C79C83CB9}"/>
-              </a:ext>
-            </a:extLst>
-          </p:cNvPr>
-          <p:cNvSpPr/>
-          <p:nvPr/>
-        </p:nvSpPr>
-        <p:spPr>
-          <a:xfrm>
-            <a:off x="405036" y="949137"/>
-            <a:ext cx="7100408" cy="315067"/>
-          </a:xfrm>
-          <a:prstGeom prst="rect">
-            <a:avLst/>
-          </a:prstGeom>
-        </p:spPr>
-        <p:style>
-          <a:lnRef idx="2">
-            <a:schemeClr val="accent1">
-              <a:shade val="15000"/>
-            </a:schemeClr>
-          </a:lnRef>
-          <a:fillRef idx="1">
-            <a:schemeClr val="accent1"/>
-          </a:fillRef>
-          <a:effectRef idx="0">
-            <a:schemeClr val="accent1"/>
-          </a:effectRef>
-          <a:fontRef idx="minor">
-            <a:schemeClr val="lt1"/>
-          </a:fontRef>
-        </p:style>
-        <p:txBody>
-          <a:bodyPr rtlCol="0" anchor="ctr"/>
-          <a:lstStyle/>
-          <a:p>
-            <a:r>
-              <a:rPr lang="en-US" dirty="0"/>
-              <a:t>Organization: {purpose}</a:t>
-            </a:r>
-          </a:p>
-        </p:txBody>
-      </p:sp>
-      <p:pic>
-        <p:nvPicPr>
-          <p:cNvPr id="26" name="Picture 25">
-            <a:extLst>
-              <a:ext uri="{FF2B5EF4-FFF2-40B4-BE49-F238E27FC236}">
-                <a16:creationId xmlns:a16="http://schemas.microsoft.com/office/drawing/2014/main" id="{EE3EE67D-DB54-D085-4E49-285948845567}"/>
-              </a:ext>
-            </a:extLst>
-          </p:cNvPr>
-          <p:cNvPicPr>
-            <a:picLocks noChangeAspect="1"/>
-          </p:cNvPicPr>
-          <p:nvPr/>
-        </p:nvPicPr>
-        <p:blipFill>
-          <a:blip r:embed="rId5"/>
-          <a:stretch>
-            <a:fillRect/>
-          </a:stretch>
-        </p:blipFill>
-        <p:spPr>
-          <a:xfrm>
-            <a:off x="515524" y="1892955"/>
-            <a:ext cx="570905" cy="556866"/>
-          </a:xfrm>
-          <a:prstGeom prst="rect">
-            <a:avLst/>
-          </a:prstGeom>
-        </p:spPr>
-      </p:pic>
-      <p:sp>
-        <p:nvSpPr>
-          <p:cNvPr id="30" name="TextBox 29">
-            <a:extLst>
-              <a:ext uri="{FF2B5EF4-FFF2-40B4-BE49-F238E27FC236}">
-                <a16:creationId xmlns:a16="http://schemas.microsoft.com/office/drawing/2014/main" id="{4A3316CC-D0CA-990B-7DC3-9545B85E5D99}"/>
-              </a:ext>
-            </a:extLst>
-          </p:cNvPr>
-          <p:cNvSpPr txBox="1"/>
-          <p:nvPr/>
-        </p:nvSpPr>
-        <p:spPr>
-          <a:xfrm>
-            <a:off x="1196917" y="1958101"/>
-            <a:ext cx="3089435" cy="369332"/>
-          </a:xfrm>
-          <a:prstGeom prst="rect">
-            <a:avLst/>
-          </a:prstGeom>
-          <a:noFill/>
-        </p:spPr>
-        <p:txBody>
-          <a:bodyPr wrap="none" rtlCol="0">
-            <a:spAutoFit/>
-          </a:bodyPr>
-          <a:lstStyle/>
-          <a:p>
-            <a:r>
-              <a:rPr lang="en-US" dirty="0"/>
-              <a:t>Move this under a new parent</a:t>
-            </a:r>
-          </a:p>
-        </p:txBody>
-      </p:sp>
-      <p:sp>
-        <p:nvSpPr>
-          <p:cNvPr id="31" name="TextBox 30">
-            <a:extLst>
-              <a:ext uri="{FF2B5EF4-FFF2-40B4-BE49-F238E27FC236}">
-                <a16:creationId xmlns:a16="http://schemas.microsoft.com/office/drawing/2014/main" id="{99D91920-A1AA-D419-1B34-8164CC81620E}"/>
-              </a:ext>
-            </a:extLst>
-          </p:cNvPr>
-          <p:cNvSpPr txBox="1"/>
-          <p:nvPr/>
-        </p:nvSpPr>
-        <p:spPr>
-          <a:xfrm>
-            <a:off x="1196917" y="2755794"/>
-            <a:ext cx="2751779" cy="369332"/>
-          </a:xfrm>
-          <a:prstGeom prst="rect">
-            <a:avLst/>
-          </a:prstGeom>
-          <a:noFill/>
-        </p:spPr>
-        <p:txBody>
-          <a:bodyPr wrap="none" rtlCol="0">
-            <a:spAutoFit/>
-          </a:bodyPr>
-          <a:lstStyle/>
-          <a:p>
-            <a:r>
-              <a:rPr lang="en-US" dirty="0"/>
-              <a:t>Add a child organization…</a:t>
-            </a:r>
-          </a:p>
-        </p:txBody>
-      </p:sp>
-      <p:sp>
-        <p:nvSpPr>
-          <p:cNvPr id="32" name="TextBox 31">
-            <a:extLst>
-              <a:ext uri="{FF2B5EF4-FFF2-40B4-BE49-F238E27FC236}">
-                <a16:creationId xmlns:a16="http://schemas.microsoft.com/office/drawing/2014/main" id="{7D10DEA5-32A5-A749-D423-32935DE4086B}"/>
-              </a:ext>
-            </a:extLst>
-          </p:cNvPr>
-          <p:cNvSpPr txBox="1"/>
-          <p:nvPr/>
-        </p:nvSpPr>
-        <p:spPr>
-          <a:xfrm>
-            <a:off x="1196917" y="3213530"/>
-            <a:ext cx="4375400" cy="923330"/>
-          </a:xfrm>
-          <a:prstGeom prst="rect">
-            <a:avLst/>
-          </a:prstGeom>
-          <a:noFill/>
-        </p:spPr>
-        <p:txBody>
-          <a:bodyPr wrap="square" rtlCol="0">
-            <a:spAutoFit/>
-          </a:bodyPr>
-          <a:lstStyle/>
-          <a:p>
-            <a:r>
-              <a:rPr lang="en-US" dirty="0"/>
-              <a:t>Remove organization and all its children, reassign all to parent, be SURE, check the box to confirm…</a:t>
-            </a:r>
-          </a:p>
-        </p:txBody>
-      </p:sp>
-      <p:sp>
-        <p:nvSpPr>
-          <p:cNvPr id="33" name="Rectangle 32">
-            <a:extLst>
-              <a:ext uri="{FF2B5EF4-FFF2-40B4-BE49-F238E27FC236}">
-                <a16:creationId xmlns:a16="http://schemas.microsoft.com/office/drawing/2014/main" id="{93378CCC-0213-3EF6-2F1D-0C45158BECD3}"/>
-              </a:ext>
-            </a:extLst>
-          </p:cNvPr>
-          <p:cNvSpPr/>
-          <p:nvPr/>
-        </p:nvSpPr>
-        <p:spPr>
-          <a:xfrm>
-            <a:off x="5940532" y="1989659"/>
-            <a:ext cx="943024" cy="365733"/>
-          </a:xfrm>
-          <a:prstGeom prst="rect">
-            <a:avLst/>
-          </a:prstGeom>
-          <a:solidFill>
-            <a:schemeClr val="bg1"/>
-          </a:solidFill>
-        </p:spPr>
-        <p:style>
-          <a:lnRef idx="2">
-            <a:schemeClr val="accent1">
-              <a:shade val="15000"/>
-            </a:schemeClr>
-          </a:lnRef>
-          <a:fillRef idx="1">
-            <a:schemeClr val="accent1"/>
-          </a:fillRef>
-          <a:effectRef idx="0">
-            <a:schemeClr val="accent1"/>
-          </a:effectRef>
-          <a:fontRef idx="minor">
-            <a:schemeClr val="lt1"/>
-          </a:fontRef>
-        </p:style>
-        <p:txBody>
-          <a:bodyPr rtlCol="0" anchor="ctr"/>
-          <a:lstStyle/>
-          <a:p>
-            <a:pPr algn="r"/>
-            <a:r>
-              <a:rPr lang="en-US" dirty="0">
-                <a:solidFill>
-                  <a:schemeClr val="tx1"/>
-                </a:solidFill>
-              </a:rPr>
-              <a:t>14</a:t>
-            </a:r>
-          </a:p>
-        </p:txBody>
-      </p:sp>
-      <p:pic>
-        <p:nvPicPr>
-          <p:cNvPr id="35" name="Picture 34">
-            <a:extLst>
-              <a:ext uri="{FF2B5EF4-FFF2-40B4-BE49-F238E27FC236}">
-                <a16:creationId xmlns:a16="http://schemas.microsoft.com/office/drawing/2014/main" id="{5F4F88FF-618F-D718-75CC-23883ACB0F6D}"/>
-              </a:ext>
-            </a:extLst>
-          </p:cNvPr>
-          <p:cNvPicPr>
-            <a:picLocks noChangeAspect="1"/>
-          </p:cNvPicPr>
-          <p:nvPr/>
-        </p:nvPicPr>
-        <p:blipFill>
-          <a:blip r:embed="rId6"/>
-          <a:stretch>
-            <a:fillRect/>
-          </a:stretch>
-        </p:blipFill>
-        <p:spPr>
-          <a:xfrm>
-            <a:off x="6994044" y="1985299"/>
-            <a:ext cx="402088" cy="402088"/>
-          </a:xfrm>
-          <a:prstGeom prst="rect">
-            <a:avLst/>
-          </a:prstGeom>
-        </p:spPr>
-      </p:pic>
-      <p:pic>
-        <p:nvPicPr>
-          <p:cNvPr id="37" name="Picture 36">
-            <a:extLst>
-              <a:ext uri="{FF2B5EF4-FFF2-40B4-BE49-F238E27FC236}">
-                <a16:creationId xmlns:a16="http://schemas.microsoft.com/office/drawing/2014/main" id="{BD7D631C-7219-C335-63AD-40DD17EB9D36}"/>
-              </a:ext>
-            </a:extLst>
-          </p:cNvPr>
-          <p:cNvPicPr>
-            <a:picLocks noChangeAspect="1"/>
-          </p:cNvPicPr>
-          <p:nvPr/>
-        </p:nvPicPr>
-        <p:blipFill>
-          <a:blip r:embed="rId7"/>
-          <a:stretch>
-            <a:fillRect/>
-          </a:stretch>
-        </p:blipFill>
-        <p:spPr>
-          <a:xfrm>
-            <a:off x="7020452" y="2734553"/>
-            <a:ext cx="371828" cy="365733"/>
-          </a:xfrm>
-          <a:prstGeom prst="rect">
-            <a:avLst/>
-          </a:prstGeom>
-        </p:spPr>
-      </p:pic>
-      <p:pic>
-        <p:nvPicPr>
-          <p:cNvPr id="39" name="Picture 38">
-            <a:extLst>
-              <a:ext uri="{FF2B5EF4-FFF2-40B4-BE49-F238E27FC236}">
-                <a16:creationId xmlns:a16="http://schemas.microsoft.com/office/drawing/2014/main" id="{B98A9E89-5C21-BF87-F6BC-354AEAA6A296}"/>
-              </a:ext>
-            </a:extLst>
-          </p:cNvPr>
-          <p:cNvPicPr>
-            <a:picLocks noChangeAspect="1"/>
-          </p:cNvPicPr>
-          <p:nvPr/>
-        </p:nvPicPr>
-        <p:blipFill>
-          <a:blip r:embed="rId8"/>
-          <a:stretch>
-            <a:fillRect/>
-          </a:stretch>
-        </p:blipFill>
-        <p:spPr>
-          <a:xfrm>
-            <a:off x="6559653" y="3440687"/>
-            <a:ext cx="323903" cy="317674"/>
-          </a:xfrm>
-          <a:prstGeom prst="rect">
-            <a:avLst/>
-          </a:prstGeom>
-        </p:spPr>
-      </p:pic>
-      <p:pic>
-        <p:nvPicPr>
-          <p:cNvPr id="41" name="Picture 40">
-            <a:extLst>
-              <a:ext uri="{FF2B5EF4-FFF2-40B4-BE49-F238E27FC236}">
-                <a16:creationId xmlns:a16="http://schemas.microsoft.com/office/drawing/2014/main" id="{A0164334-1060-349D-4566-71717A160B10}"/>
-              </a:ext>
-            </a:extLst>
-          </p:cNvPr>
-          <p:cNvPicPr>
-            <a:picLocks noChangeAspect="1"/>
-          </p:cNvPicPr>
-          <p:nvPr/>
-        </p:nvPicPr>
-        <p:blipFill>
-          <a:blip r:embed="rId9"/>
-          <a:stretch>
-            <a:fillRect/>
-          </a:stretch>
-        </p:blipFill>
-        <p:spPr>
-          <a:xfrm>
-            <a:off x="7037725" y="3440686"/>
-            <a:ext cx="358407" cy="347029"/>
-          </a:xfrm>
-          <a:prstGeom prst="rect">
-            <a:avLst/>
-          </a:prstGeom>
-        </p:spPr>
-      </p:pic>
-    </p:spTree>
-    <p:extLst>
-      <p:ext uri="{BB962C8B-B14F-4D97-AF65-F5344CB8AC3E}">
-        <p14:creationId xmlns:p14="http://schemas.microsoft.com/office/powerpoint/2010/main" val="2782122737"/>
+        <p14:creationId xmlns:p14="http://schemas.microsoft.com/office/powerpoint/2010/main" val="2823439315"/>
       </p:ext>
     </p:extLst>
   </p:cSld>
@@ -17703,7 +18242,7 @@
 </p:sld>
 </file>
 
-<file path=ppt/slides/slide8.xml><?xml version="1.0" encoding="utf-8"?>
+<file path=ppt/slides/slide7.xml><?xml version="1.0" encoding="utf-8"?>
 <p:sld xmlns:a="http://schemas.openxmlformats.org/drawingml/2006/main" xmlns:r="http://schemas.openxmlformats.org/officeDocument/2006/relationships" xmlns:p="http://schemas.openxmlformats.org/presentationml/2006/main">
   <p:cSld>
     <p:spTree>
@@ -18721,7 +19260,7 @@
 </p:sld>
 </file>
 
-<file path=ppt/slides/slide9.xml><?xml version="1.0" encoding="utf-8"?>
+<file path=ppt/slides/slide8.xml><?xml version="1.0" encoding="utf-8"?>
 <p:sld xmlns:a="http://schemas.openxmlformats.org/drawingml/2006/main" xmlns:r="http://schemas.openxmlformats.org/officeDocument/2006/relationships" xmlns:p="http://schemas.openxmlformats.org/presentationml/2006/main">
   <p:cSld>
     <p:spTree>
@@ -19733,6 +20272,580 @@
     <p:extLst>
       <p:ext uri="{BB962C8B-B14F-4D97-AF65-F5344CB8AC3E}">
         <p14:creationId xmlns:p14="http://schemas.microsoft.com/office/powerpoint/2010/main" val="453666891"/>
+      </p:ext>
+    </p:extLst>
+  </p:cSld>
+  <p:clrMapOvr>
+    <a:masterClrMapping/>
+  </p:clrMapOvr>
+</p:sld>
+</file>
+
+<file path=ppt/slides/slide9.xml><?xml version="1.0" encoding="utf-8"?>
+<p:sld xmlns:a="http://schemas.openxmlformats.org/drawingml/2006/main" xmlns:r="http://schemas.openxmlformats.org/officeDocument/2006/relationships" xmlns:p="http://schemas.openxmlformats.org/presentationml/2006/main">
+  <p:cSld>
+    <p:spTree>
+      <p:nvGrpSpPr>
+        <p:cNvPr id="1" name=""/>
+        <p:cNvGrpSpPr/>
+        <p:nvPr/>
+      </p:nvGrpSpPr>
+      <p:grpSpPr>
+        <a:xfrm>
+          <a:off x="0" y="0"/>
+          <a:ext cx="0" cy="0"/>
+          <a:chOff x="0" y="0"/>
+          <a:chExt cx="0" cy="0"/>
+        </a:xfrm>
+      </p:grpSpPr>
+      <p:sp>
+        <p:nvSpPr>
+          <p:cNvPr id="2" name="Title 1">
+            <a:extLst>
+              <a:ext uri="{FF2B5EF4-FFF2-40B4-BE49-F238E27FC236}">
+                <a16:creationId xmlns:a16="http://schemas.microsoft.com/office/drawing/2014/main" id="{A316EA6C-51A0-1744-3A85-7D21FD14DF37}"/>
+              </a:ext>
+            </a:extLst>
+          </p:cNvPr>
+          <p:cNvSpPr>
+            <a:spLocks noGrp="1"/>
+          </p:cNvSpPr>
+          <p:nvPr>
+            <p:ph type="title"/>
+          </p:nvPr>
+        </p:nvSpPr>
+        <p:spPr/>
+        <p:txBody>
+          <a:bodyPr>
+            <a:normAutofit fontScale="90000"/>
+          </a:bodyPr>
+          <a:lstStyle/>
+          <a:p>
+            <a:r>
+              <a:rPr lang="en-US" dirty="0"/>
+              <a:t>Dialog: Date Picker</a:t>
+            </a:r>
+          </a:p>
+        </p:txBody>
+      </p:sp>
+      <p:sp>
+        <p:nvSpPr>
+          <p:cNvPr id="3" name="Rectangle 2">
+            <a:extLst>
+              <a:ext uri="{FF2B5EF4-FFF2-40B4-BE49-F238E27FC236}">
+                <a16:creationId xmlns:a16="http://schemas.microsoft.com/office/drawing/2014/main" id="{D35E6BE1-FD5A-8ED4-637C-223A702C828C}"/>
+              </a:ext>
+            </a:extLst>
+          </p:cNvPr>
+          <p:cNvSpPr/>
+          <p:nvPr/>
+        </p:nvSpPr>
+        <p:spPr>
+          <a:xfrm>
+            <a:off x="699608" y="1417627"/>
+            <a:ext cx="4436988" cy="3553272"/>
+          </a:xfrm>
+          <a:prstGeom prst="rect">
+            <a:avLst/>
+          </a:prstGeom>
+          <a:noFill/>
+        </p:spPr>
+        <p:style>
+          <a:lnRef idx="2">
+            <a:schemeClr val="accent1">
+              <a:shade val="15000"/>
+            </a:schemeClr>
+          </a:lnRef>
+          <a:fillRef idx="1">
+            <a:schemeClr val="accent1"/>
+          </a:fillRef>
+          <a:effectRef idx="0">
+            <a:schemeClr val="accent1"/>
+          </a:effectRef>
+          <a:fontRef idx="minor">
+            <a:schemeClr val="lt1"/>
+          </a:fontRef>
+        </p:style>
+        <p:txBody>
+          <a:bodyPr rtlCol="0" anchor="ctr"/>
+          <a:lstStyle/>
+          <a:p>
+            <a:pPr algn="ctr"/>
+            <a:endParaRPr lang="en-US"/>
+          </a:p>
+        </p:txBody>
+      </p:sp>
+      <p:sp>
+        <p:nvSpPr>
+          <p:cNvPr id="4" name="Rectangle 3">
+            <a:extLst>
+              <a:ext uri="{FF2B5EF4-FFF2-40B4-BE49-F238E27FC236}">
+                <a16:creationId xmlns:a16="http://schemas.microsoft.com/office/drawing/2014/main" id="{95A93375-65DF-2484-AC64-43FF85E6777F}"/>
+              </a:ext>
+            </a:extLst>
+          </p:cNvPr>
+          <p:cNvSpPr/>
+          <p:nvPr/>
+        </p:nvSpPr>
+        <p:spPr>
+          <a:xfrm>
+            <a:off x="699608" y="1102560"/>
+            <a:ext cx="4436988" cy="315067"/>
+          </a:xfrm>
+          <a:prstGeom prst="rect">
+            <a:avLst/>
+          </a:prstGeom>
+        </p:spPr>
+        <p:style>
+          <a:lnRef idx="2">
+            <a:schemeClr val="accent1">
+              <a:shade val="15000"/>
+            </a:schemeClr>
+          </a:lnRef>
+          <a:fillRef idx="1">
+            <a:schemeClr val="accent1"/>
+          </a:fillRef>
+          <a:effectRef idx="0">
+            <a:schemeClr val="accent1"/>
+          </a:effectRef>
+          <a:fontRef idx="minor">
+            <a:schemeClr val="lt1"/>
+          </a:fontRef>
+        </p:style>
+        <p:txBody>
+          <a:bodyPr rtlCol="0" anchor="ctr"/>
+          <a:lstStyle/>
+          <a:p>
+            <a:r>
+              <a:rPr lang="en-US" dirty="0"/>
+              <a:t>Pick a date for: {my purpose}</a:t>
+            </a:r>
+          </a:p>
+        </p:txBody>
+      </p:sp>
+      <p:pic>
+        <p:nvPicPr>
+          <p:cNvPr id="6" name="Picture 5">
+            <a:extLst>
+              <a:ext uri="{FF2B5EF4-FFF2-40B4-BE49-F238E27FC236}">
+                <a16:creationId xmlns:a16="http://schemas.microsoft.com/office/drawing/2014/main" id="{CF08CC1D-F1A0-AC4B-35EE-6C587266D641}"/>
+              </a:ext>
+            </a:extLst>
+          </p:cNvPr>
+          <p:cNvPicPr>
+            <a:picLocks noChangeAspect="1"/>
+          </p:cNvPicPr>
+          <p:nvPr/>
+        </p:nvPicPr>
+        <p:blipFill>
+          <a:blip r:embed="rId2"/>
+          <a:stretch>
+            <a:fillRect/>
+          </a:stretch>
+        </p:blipFill>
+        <p:spPr>
+          <a:xfrm>
+            <a:off x="4105368" y="1501727"/>
+            <a:ext cx="310991" cy="461934"/>
+          </a:xfrm>
+          <a:prstGeom prst="rect">
+            <a:avLst/>
+          </a:prstGeom>
+        </p:spPr>
+      </p:pic>
+      <p:pic>
+        <p:nvPicPr>
+          <p:cNvPr id="8" name="Picture 7">
+            <a:extLst>
+              <a:ext uri="{FF2B5EF4-FFF2-40B4-BE49-F238E27FC236}">
+                <a16:creationId xmlns:a16="http://schemas.microsoft.com/office/drawing/2014/main" id="{08D4F8B8-B8CD-9166-F0A6-1CE026EF5C81}"/>
+              </a:ext>
+            </a:extLst>
+          </p:cNvPr>
+          <p:cNvPicPr>
+            <a:picLocks noChangeAspect="1"/>
+          </p:cNvPicPr>
+          <p:nvPr/>
+        </p:nvPicPr>
+        <p:blipFill>
+          <a:blip r:embed="rId3"/>
+          <a:stretch>
+            <a:fillRect/>
+          </a:stretch>
+        </p:blipFill>
+        <p:spPr>
+          <a:xfrm>
+            <a:off x="4600961" y="1523374"/>
+            <a:ext cx="430088" cy="418639"/>
+          </a:xfrm>
+          <a:prstGeom prst="rect">
+            <a:avLst/>
+          </a:prstGeom>
+        </p:spPr>
+      </p:pic>
+      <p:pic>
+        <p:nvPicPr>
+          <p:cNvPr id="13" name="Picture 12">
+            <a:extLst>
+              <a:ext uri="{FF2B5EF4-FFF2-40B4-BE49-F238E27FC236}">
+                <a16:creationId xmlns:a16="http://schemas.microsoft.com/office/drawing/2014/main" id="{7949CD48-777A-085B-9670-5D3D25D86EC3}"/>
+              </a:ext>
+            </a:extLst>
+          </p:cNvPr>
+          <p:cNvPicPr>
+            <a:picLocks noChangeAspect="1"/>
+          </p:cNvPicPr>
+          <p:nvPr/>
+        </p:nvPicPr>
+        <p:blipFill>
+          <a:blip r:embed="rId4"/>
+          <a:stretch>
+            <a:fillRect/>
+          </a:stretch>
+        </p:blipFill>
+        <p:spPr>
+          <a:xfrm>
+            <a:off x="4563601" y="4430184"/>
+            <a:ext cx="500742" cy="500742"/>
+          </a:xfrm>
+          <a:prstGeom prst="rect">
+            <a:avLst/>
+          </a:prstGeom>
+        </p:spPr>
+      </p:pic>
+      <p:pic>
+        <p:nvPicPr>
+          <p:cNvPr id="15" name="Picture 14">
+            <a:extLst>
+              <a:ext uri="{FF2B5EF4-FFF2-40B4-BE49-F238E27FC236}">
+                <a16:creationId xmlns:a16="http://schemas.microsoft.com/office/drawing/2014/main" id="{2AC53F18-2EE9-2167-7DDD-31ECB68C89D2}"/>
+              </a:ext>
+            </a:extLst>
+          </p:cNvPr>
+          <p:cNvPicPr>
+            <a:picLocks noChangeAspect="1"/>
+          </p:cNvPicPr>
+          <p:nvPr/>
+        </p:nvPicPr>
+        <p:blipFill>
+          <a:blip r:embed="rId5"/>
+          <a:stretch>
+            <a:fillRect/>
+          </a:stretch>
+        </p:blipFill>
+        <p:spPr>
+          <a:xfrm>
+            <a:off x="3961473" y="4430184"/>
+            <a:ext cx="525779" cy="509087"/>
+          </a:xfrm>
+          <a:prstGeom prst="rect">
+            <a:avLst/>
+          </a:prstGeom>
+        </p:spPr>
+      </p:pic>
+      <p:pic>
+        <p:nvPicPr>
+          <p:cNvPr id="18" name="Picture 17">
+            <a:extLst>
+              <a:ext uri="{FF2B5EF4-FFF2-40B4-BE49-F238E27FC236}">
+                <a16:creationId xmlns:a16="http://schemas.microsoft.com/office/drawing/2014/main" id="{B2B91FBE-6824-5FEA-9314-596F6416C03A}"/>
+              </a:ext>
+            </a:extLst>
+          </p:cNvPr>
+          <p:cNvPicPr>
+            <a:picLocks noChangeAspect="1"/>
+          </p:cNvPicPr>
+          <p:nvPr/>
+        </p:nvPicPr>
+        <p:blipFill>
+          <a:blip r:embed="rId6"/>
+          <a:stretch>
+            <a:fillRect/>
+          </a:stretch>
+        </p:blipFill>
+        <p:spPr>
+          <a:xfrm>
+            <a:off x="3780017" y="2151109"/>
+            <a:ext cx="416917" cy="416917"/>
+          </a:xfrm>
+          <a:prstGeom prst="rect">
+            <a:avLst/>
+          </a:prstGeom>
+        </p:spPr>
+      </p:pic>
+      <p:pic>
+        <p:nvPicPr>
+          <p:cNvPr id="20" name="Picture 19">
+            <a:extLst>
+              <a:ext uri="{FF2B5EF4-FFF2-40B4-BE49-F238E27FC236}">
+                <a16:creationId xmlns:a16="http://schemas.microsoft.com/office/drawing/2014/main" id="{0ADA24FF-7872-D7A6-045C-A5E04213722A}"/>
+              </a:ext>
+            </a:extLst>
+          </p:cNvPr>
+          <p:cNvPicPr>
+            <a:picLocks noChangeAspect="1"/>
+          </p:cNvPicPr>
+          <p:nvPr/>
+        </p:nvPicPr>
+        <p:blipFill>
+          <a:blip r:embed="rId7"/>
+          <a:stretch>
+            <a:fillRect/>
+          </a:stretch>
+        </p:blipFill>
+        <p:spPr>
+          <a:xfrm>
+            <a:off x="3821250" y="2670738"/>
+            <a:ext cx="403437" cy="403437"/>
+          </a:xfrm>
+          <a:prstGeom prst="rect">
+            <a:avLst/>
+          </a:prstGeom>
+        </p:spPr>
+      </p:pic>
+      <p:pic>
+        <p:nvPicPr>
+          <p:cNvPr id="24" name="Picture 23">
+            <a:extLst>
+              <a:ext uri="{FF2B5EF4-FFF2-40B4-BE49-F238E27FC236}">
+                <a16:creationId xmlns:a16="http://schemas.microsoft.com/office/drawing/2014/main" id="{DF299BD7-7DEC-371B-4B94-4EA1B935C107}"/>
+              </a:ext>
+            </a:extLst>
+          </p:cNvPr>
+          <p:cNvPicPr>
+            <a:picLocks noChangeAspect="1"/>
+          </p:cNvPicPr>
+          <p:nvPr/>
+        </p:nvPicPr>
+        <p:blipFill>
+          <a:blip r:embed="rId8"/>
+          <a:stretch>
+            <a:fillRect/>
+          </a:stretch>
+        </p:blipFill>
+        <p:spPr>
+          <a:xfrm>
+            <a:off x="3806668" y="3176887"/>
+            <a:ext cx="403437" cy="416917"/>
+          </a:xfrm>
+          <a:prstGeom prst="rect">
+            <a:avLst/>
+          </a:prstGeom>
+        </p:spPr>
+      </p:pic>
+      <p:pic>
+        <p:nvPicPr>
+          <p:cNvPr id="26" name="Picture 25">
+            <a:extLst>
+              <a:ext uri="{FF2B5EF4-FFF2-40B4-BE49-F238E27FC236}">
+                <a16:creationId xmlns:a16="http://schemas.microsoft.com/office/drawing/2014/main" id="{8B39EE2E-06A8-90B4-FC26-A66D934B1718}"/>
+              </a:ext>
+            </a:extLst>
+          </p:cNvPr>
+          <p:cNvPicPr>
+            <a:picLocks noChangeAspect="1"/>
+          </p:cNvPicPr>
+          <p:nvPr/>
+        </p:nvPicPr>
+        <p:blipFill>
+          <a:blip r:embed="rId9"/>
+          <a:stretch>
+            <a:fillRect/>
+          </a:stretch>
+        </p:blipFill>
+        <p:spPr>
+          <a:xfrm>
+            <a:off x="817190" y="1507232"/>
+            <a:ext cx="2886478" cy="3391373"/>
+          </a:xfrm>
+          <a:prstGeom prst="rect">
+            <a:avLst/>
+          </a:prstGeom>
+        </p:spPr>
+      </p:pic>
+      <p:sp>
+        <p:nvSpPr>
+          <p:cNvPr id="27" name="Rectangle 26">
+            <a:extLst>
+              <a:ext uri="{FF2B5EF4-FFF2-40B4-BE49-F238E27FC236}">
+                <a16:creationId xmlns:a16="http://schemas.microsoft.com/office/drawing/2014/main" id="{A055B79C-4C58-B221-2E22-D295056FF405}"/>
+              </a:ext>
+            </a:extLst>
+          </p:cNvPr>
+          <p:cNvSpPr/>
+          <p:nvPr/>
+        </p:nvSpPr>
+        <p:spPr>
+          <a:xfrm>
+            <a:off x="4240603" y="2155793"/>
+            <a:ext cx="793653" cy="416917"/>
+          </a:xfrm>
+          <a:prstGeom prst="rect">
+            <a:avLst/>
+          </a:prstGeom>
+          <a:solidFill>
+            <a:schemeClr val="bg1"/>
+          </a:solidFill>
+          <a:ln w="12700"/>
+        </p:spPr>
+        <p:style>
+          <a:lnRef idx="2">
+            <a:schemeClr val="accent1">
+              <a:shade val="15000"/>
+            </a:schemeClr>
+          </a:lnRef>
+          <a:fillRef idx="1">
+            <a:schemeClr val="accent1"/>
+          </a:fillRef>
+          <a:effectRef idx="0">
+            <a:schemeClr val="accent1"/>
+          </a:effectRef>
+          <a:fontRef idx="minor">
+            <a:schemeClr val="lt1"/>
+          </a:fontRef>
+        </p:style>
+        <p:txBody>
+          <a:bodyPr rtlCol="0" anchor="ctr"/>
+          <a:lstStyle/>
+          <a:p>
+            <a:pPr algn="r"/>
+            <a:r>
+              <a:rPr lang="en-US" b="1" dirty="0">
+                <a:solidFill>
+                  <a:srgbClr val="7030A0"/>
+                </a:solidFill>
+                <a:latin typeface="Roboto" panose="02000000000000000000" pitchFamily="2" charset="0"/>
+                <a:ea typeface="Roboto" panose="02000000000000000000" pitchFamily="2" charset="0"/>
+              </a:rPr>
+              <a:t>2021</a:t>
+            </a:r>
+          </a:p>
+        </p:txBody>
+      </p:sp>
+      <p:sp>
+        <p:nvSpPr>
+          <p:cNvPr id="28" name="Rectangle 27">
+            <a:extLst>
+              <a:ext uri="{FF2B5EF4-FFF2-40B4-BE49-F238E27FC236}">
+                <a16:creationId xmlns:a16="http://schemas.microsoft.com/office/drawing/2014/main" id="{DA7A34F9-5104-069C-E990-E7E9A1E70951}"/>
+              </a:ext>
+            </a:extLst>
+          </p:cNvPr>
+          <p:cNvSpPr/>
+          <p:nvPr/>
+        </p:nvSpPr>
+        <p:spPr>
+          <a:xfrm>
+            <a:off x="4240603" y="2679393"/>
+            <a:ext cx="793653" cy="416917"/>
+          </a:xfrm>
+          <a:prstGeom prst="rect">
+            <a:avLst/>
+          </a:prstGeom>
+          <a:solidFill>
+            <a:schemeClr val="bg1"/>
+          </a:solidFill>
+          <a:ln w="12700"/>
+        </p:spPr>
+        <p:style>
+          <a:lnRef idx="2">
+            <a:schemeClr val="accent1">
+              <a:shade val="15000"/>
+            </a:schemeClr>
+          </a:lnRef>
+          <a:fillRef idx="1">
+            <a:schemeClr val="accent1"/>
+          </a:fillRef>
+          <a:effectRef idx="0">
+            <a:schemeClr val="accent1"/>
+          </a:effectRef>
+          <a:fontRef idx="minor">
+            <a:schemeClr val="lt1"/>
+          </a:fontRef>
+        </p:style>
+        <p:txBody>
+          <a:bodyPr rtlCol="0" anchor="ctr"/>
+          <a:lstStyle/>
+          <a:p>
+            <a:pPr algn="r"/>
+            <a:r>
+              <a:rPr lang="en-US" b="1" dirty="0">
+                <a:solidFill>
+                  <a:srgbClr val="0070C0"/>
+                </a:solidFill>
+                <a:latin typeface="Roboto" panose="02000000000000000000" pitchFamily="2" charset="0"/>
+                <a:ea typeface="Roboto" panose="02000000000000000000" pitchFamily="2" charset="0"/>
+              </a:rPr>
+              <a:t>06</a:t>
+            </a:r>
+          </a:p>
+        </p:txBody>
+      </p:sp>
+      <p:sp>
+        <p:nvSpPr>
+          <p:cNvPr id="29" name="Rectangle 28">
+            <a:extLst>
+              <a:ext uri="{FF2B5EF4-FFF2-40B4-BE49-F238E27FC236}">
+                <a16:creationId xmlns:a16="http://schemas.microsoft.com/office/drawing/2014/main" id="{45B43532-8ADD-2FB1-7BF3-A0FFF12CE2D0}"/>
+              </a:ext>
+            </a:extLst>
+          </p:cNvPr>
+          <p:cNvSpPr/>
+          <p:nvPr/>
+        </p:nvSpPr>
+        <p:spPr>
+          <a:xfrm>
+            <a:off x="4240603" y="3202918"/>
+            <a:ext cx="793653" cy="416917"/>
+          </a:xfrm>
+          <a:prstGeom prst="rect">
+            <a:avLst/>
+          </a:prstGeom>
+          <a:solidFill>
+            <a:schemeClr val="bg1"/>
+          </a:solidFill>
+          <a:ln w="12700"/>
+        </p:spPr>
+        <p:style>
+          <a:lnRef idx="2">
+            <a:schemeClr val="accent1">
+              <a:shade val="15000"/>
+            </a:schemeClr>
+          </a:lnRef>
+          <a:fillRef idx="1">
+            <a:schemeClr val="accent1"/>
+          </a:fillRef>
+          <a:effectRef idx="0">
+            <a:schemeClr val="accent1"/>
+          </a:effectRef>
+          <a:fontRef idx="minor">
+            <a:schemeClr val="lt1"/>
+          </a:fontRef>
+        </p:style>
+        <p:txBody>
+          <a:bodyPr rtlCol="0" anchor="ctr"/>
+          <a:lstStyle/>
+          <a:p>
+            <a:pPr algn="r"/>
+            <a:r>
+              <a:rPr lang="en-US" b="1" dirty="0">
+                <a:solidFill>
+                  <a:schemeClr val="accent6">
+                    <a:lumMod val="75000"/>
+                  </a:schemeClr>
+                </a:solidFill>
+                <a:latin typeface="Roboto" panose="02000000000000000000" pitchFamily="2" charset="0"/>
+                <a:ea typeface="Roboto" panose="02000000000000000000" pitchFamily="2" charset="0"/>
+              </a:rPr>
+              <a:t>22</a:t>
+            </a:r>
+          </a:p>
+        </p:txBody>
+      </p:sp>
+    </p:spTree>
+    <p:extLst>
+      <p:ext uri="{BB962C8B-B14F-4D97-AF65-F5344CB8AC3E}">
+        <p14:creationId xmlns:p14="http://schemas.microsoft.com/office/powerpoint/2010/main" val="1286558178"/>
       </p:ext>
     </p:extLst>
   </p:cSld>

--- a/docs/ui-design.pptx
+++ b/docs/ui-design.pptx
@@ -5,7 +5,7 @@
     <p:sldMasterId id="2147483648" r:id="rId1"/>
   </p:sldMasterIdLst>
   <p:notesMasterIdLst>
-    <p:notesMasterId r:id="rId24"/>
+    <p:notesMasterId r:id="rId25"/>
   </p:notesMasterIdLst>
   <p:sldIdLst>
     <p:sldId id="256" r:id="rId2"/>
@@ -26,10 +26,11 @@
     <p:sldId id="260" r:id="rId17"/>
     <p:sldId id="265" r:id="rId18"/>
     <p:sldId id="266" r:id="rId19"/>
-    <p:sldId id="261" r:id="rId20"/>
-    <p:sldId id="262" r:id="rId21"/>
-    <p:sldId id="267" r:id="rId22"/>
-    <p:sldId id="277" r:id="rId23"/>
+    <p:sldId id="278" r:id="rId20"/>
+    <p:sldId id="261" r:id="rId21"/>
+    <p:sldId id="262" r:id="rId22"/>
+    <p:sldId id="267" r:id="rId23"/>
+    <p:sldId id="277" r:id="rId24"/>
   </p:sldIdLst>
   <p:sldSz cx="12192000" cy="6858000"/>
   <p:notesSz cx="6858000" cy="9144000"/>
@@ -799,7 +800,7 @@
           <a:p>
             <a:fld id="{2B1BAFFC-2069-45AF-BA0A-0818E8870C46}" type="datetimeFigureOut">
               <a:rPr lang="en-US" smtClean="0"/>
-              <a:t>9/25/2026</a:t>
+              <a:t>9/26/2026</a:t>
             </a:fld>
             <a:endParaRPr lang="en-US"/>
           </a:p>
@@ -1215,7 +1216,7 @@
           <a:p>
             <a:fld id="{F1B2B32C-CE91-489F-AE52-446B2C4B8BEC}" type="slidenum">
               <a:rPr lang="en-US" smtClean="0"/>
-              <a:t>19</a:t>
+              <a:t>20</a:t>
             </a:fld>
             <a:endParaRPr lang="en-US"/>
           </a:p>
@@ -1379,9 +1380,9 @@
           <a:bodyPr/>
           <a:lstStyle/>
           <a:p>
-            <a:fld id="{F26C9A43-6345-44EF-9524-1C666F5DBCDD}" type="datetimeFigureOut">
+            <a:fld id="{B37A14FA-9D6C-44FC-A2BA-8A59CF3675A9}" type="datetime1">
               <a:rPr lang="en-US" smtClean="0"/>
-              <a:t>9/25/2026</a:t>
+              <a:t>9/26/2026</a:t>
             </a:fld>
             <a:endParaRPr lang="en-US"/>
           </a:p>
@@ -1632,10 +1633,9 @@
             </a:lvl1pPr>
           </a:lstStyle>
           <a:p>
-            <a:fld id="{F26C9A43-6345-44EF-9524-1C666F5DBCDD}" type="datetimeFigureOut">
+            <a:fld id="{976302DF-E35E-430C-BA6A-08FEAEA11BDF}" type="datetime1">
               <a:rPr lang="en-US" smtClean="0"/>
-              <a:pPr/>
-              <a:t>9/25/2026</a:t>
+              <a:t>9/26/2026</a:t>
             </a:fld>
             <a:endParaRPr lang="en-US" sz="800"/>
           </a:p>
@@ -1935,9 +1935,9 @@
           <a:bodyPr/>
           <a:lstStyle/>
           <a:p>
-            <a:fld id="{F26C9A43-6345-44EF-9524-1C666F5DBCDD}" type="datetimeFigureOut">
+            <a:fld id="{3ADAB557-C94E-499E-8504-0A86DD737A5A}" type="datetime1">
               <a:rPr lang="en-US" smtClean="0"/>
-              <a:t>9/25/2026</a:t>
+              <a:t>9/26/2026</a:t>
             </a:fld>
             <a:endParaRPr lang="en-US"/>
           </a:p>
@@ -2200,9 +2200,9 @@
           <a:bodyPr/>
           <a:lstStyle/>
           <a:p>
-            <a:fld id="{F26C9A43-6345-44EF-9524-1C666F5DBCDD}" type="datetimeFigureOut">
+            <a:fld id="{83569432-53AB-4F1C-8B9D-84DB173CB59A}" type="datetime1">
               <a:rPr lang="en-US" smtClean="0"/>
-              <a:t>9/25/2026</a:t>
+              <a:t>9/26/2026</a:t>
             </a:fld>
             <a:endParaRPr lang="en-US"/>
           </a:p>
@@ -2612,9 +2612,9 @@
           <a:bodyPr/>
           <a:lstStyle/>
           <a:p>
-            <a:fld id="{F26C9A43-6345-44EF-9524-1C666F5DBCDD}" type="datetimeFigureOut">
+            <a:fld id="{59BF2352-6222-43EF-8975-B4F7F16029A8}" type="datetime1">
               <a:rPr lang="en-US" smtClean="0"/>
-              <a:t>9/25/2026</a:t>
+              <a:t>9/26/2026</a:t>
             </a:fld>
             <a:endParaRPr lang="en-US"/>
           </a:p>
@@ -2753,9 +2753,9 @@
           <a:bodyPr/>
           <a:lstStyle/>
           <a:p>
-            <a:fld id="{F26C9A43-6345-44EF-9524-1C666F5DBCDD}" type="datetimeFigureOut">
+            <a:fld id="{33BC84D3-12CB-4D67-87F4-2898753F1265}" type="datetime1">
               <a:rPr lang="en-US" smtClean="0"/>
-              <a:t>9/25/2026</a:t>
+              <a:t>9/26/2026</a:t>
             </a:fld>
             <a:endParaRPr lang="en-US"/>
           </a:p>
@@ -2866,9 +2866,9 @@
           <a:bodyPr/>
           <a:lstStyle/>
           <a:p>
-            <a:fld id="{F26C9A43-6345-44EF-9524-1C666F5DBCDD}" type="datetimeFigureOut">
+            <a:fld id="{BF2D081C-9B2B-445B-B729-264E0CE1AAC8}" type="datetime1">
               <a:rPr lang="en-US" smtClean="0"/>
-              <a:t>9/25/2026</a:t>
+              <a:t>9/26/2026</a:t>
             </a:fld>
             <a:endParaRPr lang="en-US"/>
           </a:p>
@@ -3109,10 +3109,9 @@
             </a:lvl1pPr>
           </a:lstStyle>
           <a:p>
-            <a:fld id="{F26C9A43-6345-44EF-9524-1C666F5DBCDD}" type="datetimeFigureOut">
+            <a:fld id="{DB1980FB-7629-4F2E-9215-3CDD7ECFF04F}" type="datetime1">
               <a:rPr lang="en-US" smtClean="0"/>
-              <a:pPr/>
-              <a:t>9/25/2026</a:t>
+              <a:t>9/26/2026</a:t>
             </a:fld>
             <a:endParaRPr lang="en-US"/>
           </a:p>
@@ -3266,6 +3265,7 @@
     <p:sldLayoutId id="2147483654" r:id="rId6"/>
     <p:sldLayoutId id="2147483655" r:id="rId7"/>
   </p:sldLayoutIdLst>
+  <p:hf hdr="0" ftr="0" dt="0"/>
   <p:txStyles>
     <p:titleStyle>
       <a:lvl1pPr algn="l" defTabSz="914400" rtl="0" eaLnBrk="1" latinLnBrk="0" hangingPunct="1">
@@ -3622,6 +3622,35 @@
           </a:p>
         </p:txBody>
       </p:sp>
+      <p:sp>
+        <p:nvSpPr>
+          <p:cNvPr id="4" name="Slide Number Placeholder 3">
+            <a:extLst>
+              <a:ext uri="{FF2B5EF4-FFF2-40B4-BE49-F238E27FC236}">
+                <a16:creationId xmlns:a16="http://schemas.microsoft.com/office/drawing/2014/main" id="{EBBB3550-560E-8970-8715-055CD78DE02A}"/>
+              </a:ext>
+            </a:extLst>
+          </p:cNvPr>
+          <p:cNvSpPr>
+            <a:spLocks noGrp="1"/>
+          </p:cNvSpPr>
+          <p:nvPr>
+            <p:ph type="sldNum" sz="quarter" idx="12"/>
+          </p:nvPr>
+        </p:nvSpPr>
+        <p:spPr/>
+        <p:txBody>
+          <a:bodyPr/>
+          <a:lstStyle/>
+          <a:p>
+            <a:fld id="{2BA602F1-D8B6-4D7F-AE46-BA4CF4319B0F}" type="slidenum">
+              <a:rPr lang="en-US" smtClean="0"/>
+              <a:t>1</a:t>
+            </a:fld>
+            <a:endParaRPr lang="en-US"/>
+          </a:p>
+        </p:txBody>
+      </p:sp>
     </p:spTree>
     <p:extLst>
       <p:ext uri="{BB962C8B-B14F-4D97-AF65-F5344CB8AC3E}">
@@ -4386,6 +4415,35 @@
           </a:prstGeom>
         </p:spPr>
       </p:pic>
+      <p:sp>
+        <p:nvSpPr>
+          <p:cNvPr id="7" name="Slide Number Placeholder 6">
+            <a:extLst>
+              <a:ext uri="{FF2B5EF4-FFF2-40B4-BE49-F238E27FC236}">
+                <a16:creationId xmlns:a16="http://schemas.microsoft.com/office/drawing/2014/main" id="{DA9ECBD3-2937-93DA-298B-5C4B8F7E3798}"/>
+              </a:ext>
+            </a:extLst>
+          </p:cNvPr>
+          <p:cNvSpPr>
+            <a:spLocks noGrp="1"/>
+          </p:cNvSpPr>
+          <p:nvPr>
+            <p:ph type="sldNum" sz="quarter" idx="12"/>
+          </p:nvPr>
+        </p:nvSpPr>
+        <p:spPr/>
+        <p:txBody>
+          <a:bodyPr/>
+          <a:lstStyle/>
+          <a:p>
+            <a:fld id="{2BA602F1-D8B6-4D7F-AE46-BA4CF4319B0F}" type="slidenum">
+              <a:rPr lang="en-US" smtClean="0"/>
+              <a:t>10</a:t>
+            </a:fld>
+            <a:endParaRPr lang="en-US"/>
+          </a:p>
+        </p:txBody>
+      </p:sp>
     </p:spTree>
     <p:extLst>
       <p:ext uri="{BB962C8B-B14F-4D97-AF65-F5344CB8AC3E}">
@@ -5572,6 +5630,35 @@
           </p:spPr>
         </p:pic>
       </p:grpSp>
+      <p:sp>
+        <p:nvSpPr>
+          <p:cNvPr id="3" name="Slide Number Placeholder 2">
+            <a:extLst>
+              <a:ext uri="{FF2B5EF4-FFF2-40B4-BE49-F238E27FC236}">
+                <a16:creationId xmlns:a16="http://schemas.microsoft.com/office/drawing/2014/main" id="{E58D63C1-90A1-7644-8761-14780DEC076B}"/>
+              </a:ext>
+            </a:extLst>
+          </p:cNvPr>
+          <p:cNvSpPr>
+            <a:spLocks noGrp="1"/>
+          </p:cNvSpPr>
+          <p:nvPr>
+            <p:ph type="sldNum" sz="quarter" idx="12"/>
+          </p:nvPr>
+        </p:nvSpPr>
+        <p:spPr/>
+        <p:txBody>
+          <a:bodyPr/>
+          <a:lstStyle/>
+          <a:p>
+            <a:fld id="{2BA602F1-D8B6-4D7F-AE46-BA4CF4319B0F}" type="slidenum">
+              <a:rPr lang="en-US" smtClean="0"/>
+              <a:t>11</a:t>
+            </a:fld>
+            <a:endParaRPr lang="en-US"/>
+          </a:p>
+        </p:txBody>
+      </p:sp>
     </p:spTree>
     <p:extLst>
       <p:ext uri="{BB962C8B-B14F-4D97-AF65-F5344CB8AC3E}">
@@ -7933,6 +8020,35 @@
           </a:prstGeom>
         </p:spPr>
       </p:pic>
+      <p:sp>
+        <p:nvSpPr>
+          <p:cNvPr id="3" name="Slide Number Placeholder 2">
+            <a:extLst>
+              <a:ext uri="{FF2B5EF4-FFF2-40B4-BE49-F238E27FC236}">
+                <a16:creationId xmlns:a16="http://schemas.microsoft.com/office/drawing/2014/main" id="{B6650A0C-AA30-2032-5EBD-2BCB6904A2C3}"/>
+              </a:ext>
+            </a:extLst>
+          </p:cNvPr>
+          <p:cNvSpPr>
+            <a:spLocks noGrp="1"/>
+          </p:cNvSpPr>
+          <p:nvPr>
+            <p:ph type="sldNum" sz="quarter" idx="12"/>
+          </p:nvPr>
+        </p:nvSpPr>
+        <p:spPr/>
+        <p:txBody>
+          <a:bodyPr/>
+          <a:lstStyle/>
+          <a:p>
+            <a:fld id="{2BA602F1-D8B6-4D7F-AE46-BA4CF4319B0F}" type="slidenum">
+              <a:rPr lang="en-US" smtClean="0"/>
+              <a:t>12</a:t>
+            </a:fld>
+            <a:endParaRPr lang="en-US"/>
+          </a:p>
+        </p:txBody>
+      </p:sp>
     </p:spTree>
     <p:extLst>
       <p:ext uri="{BB962C8B-B14F-4D97-AF65-F5344CB8AC3E}">
@@ -8292,6 +8408,35 @@
               <a:rPr lang="en-US" dirty="0"/>
               <a:t>10</a:t>
             </a:r>
+          </a:p>
+        </p:txBody>
+      </p:sp>
+      <p:sp>
+        <p:nvSpPr>
+          <p:cNvPr id="7" name="Slide Number Placeholder 6">
+            <a:extLst>
+              <a:ext uri="{FF2B5EF4-FFF2-40B4-BE49-F238E27FC236}">
+                <a16:creationId xmlns:a16="http://schemas.microsoft.com/office/drawing/2014/main" id="{91D059EB-728C-BEA8-0A25-B15E13DE62D4}"/>
+              </a:ext>
+            </a:extLst>
+          </p:cNvPr>
+          <p:cNvSpPr>
+            <a:spLocks noGrp="1"/>
+          </p:cNvSpPr>
+          <p:nvPr>
+            <p:ph type="sldNum" sz="quarter" idx="12"/>
+          </p:nvPr>
+        </p:nvSpPr>
+        <p:spPr/>
+        <p:txBody>
+          <a:bodyPr/>
+          <a:lstStyle/>
+          <a:p>
+            <a:fld id="{2BA602F1-D8B6-4D7F-AE46-BA4CF4319B0F}" type="slidenum">
+              <a:rPr lang="en-US" smtClean="0"/>
+              <a:t>13</a:t>
+            </a:fld>
+            <a:endParaRPr lang="en-US"/>
           </a:p>
         </p:txBody>
       </p:sp>
@@ -9313,6 +9458,35 @@
           </a:p>
         </p:txBody>
       </p:sp>
+      <p:sp>
+        <p:nvSpPr>
+          <p:cNvPr id="3" name="Slide Number Placeholder 2">
+            <a:extLst>
+              <a:ext uri="{FF2B5EF4-FFF2-40B4-BE49-F238E27FC236}">
+                <a16:creationId xmlns:a16="http://schemas.microsoft.com/office/drawing/2014/main" id="{7AD253C4-13F1-DE0F-BA63-5EDFD88C7F9B}"/>
+              </a:ext>
+            </a:extLst>
+          </p:cNvPr>
+          <p:cNvSpPr>
+            <a:spLocks noGrp="1"/>
+          </p:cNvSpPr>
+          <p:nvPr>
+            <p:ph type="sldNum" sz="quarter" idx="12"/>
+          </p:nvPr>
+        </p:nvSpPr>
+        <p:spPr/>
+        <p:txBody>
+          <a:bodyPr/>
+          <a:lstStyle/>
+          <a:p>
+            <a:fld id="{2BA602F1-D8B6-4D7F-AE46-BA4CF4319B0F}" type="slidenum">
+              <a:rPr lang="en-US" smtClean="0"/>
+              <a:t>14</a:t>
+            </a:fld>
+            <a:endParaRPr lang="en-US"/>
+          </a:p>
+        </p:txBody>
+      </p:sp>
     </p:spTree>
     <p:extLst>
       <p:ext uri="{BB962C8B-B14F-4D97-AF65-F5344CB8AC3E}">
@@ -10334,6 +10508,35 @@
           </a:p>
         </p:txBody>
       </p:sp>
+      <p:sp>
+        <p:nvSpPr>
+          <p:cNvPr id="3" name="Slide Number Placeholder 2">
+            <a:extLst>
+              <a:ext uri="{FF2B5EF4-FFF2-40B4-BE49-F238E27FC236}">
+                <a16:creationId xmlns:a16="http://schemas.microsoft.com/office/drawing/2014/main" id="{957B7A28-DC50-9ABE-B91E-8DCF4F89503E}"/>
+              </a:ext>
+            </a:extLst>
+          </p:cNvPr>
+          <p:cNvSpPr>
+            <a:spLocks noGrp="1"/>
+          </p:cNvSpPr>
+          <p:nvPr>
+            <p:ph type="sldNum" sz="quarter" idx="12"/>
+          </p:nvPr>
+        </p:nvSpPr>
+        <p:spPr/>
+        <p:txBody>
+          <a:bodyPr/>
+          <a:lstStyle/>
+          <a:p>
+            <a:fld id="{2BA602F1-D8B6-4D7F-AE46-BA4CF4319B0F}" type="slidenum">
+              <a:rPr lang="en-US" smtClean="0"/>
+              <a:t>15</a:t>
+            </a:fld>
+            <a:endParaRPr lang="en-US"/>
+          </a:p>
+        </p:txBody>
+      </p:sp>
     </p:spTree>
     <p:extLst>
       <p:ext uri="{BB962C8B-B14F-4D97-AF65-F5344CB8AC3E}">
@@ -10905,6 +11108,35 @@
               </a:rPr>
               <a:t>22</a:t>
             </a:r>
+          </a:p>
+        </p:txBody>
+      </p:sp>
+      <p:sp>
+        <p:nvSpPr>
+          <p:cNvPr id="5" name="Slide Number Placeholder 4">
+            <a:extLst>
+              <a:ext uri="{FF2B5EF4-FFF2-40B4-BE49-F238E27FC236}">
+                <a16:creationId xmlns:a16="http://schemas.microsoft.com/office/drawing/2014/main" id="{DDAD2999-9C50-812C-D473-21703DA70760}"/>
+              </a:ext>
+            </a:extLst>
+          </p:cNvPr>
+          <p:cNvSpPr>
+            <a:spLocks noGrp="1"/>
+          </p:cNvSpPr>
+          <p:nvPr>
+            <p:ph type="sldNum" sz="quarter" idx="12"/>
+          </p:nvPr>
+        </p:nvSpPr>
+        <p:spPr/>
+        <p:txBody>
+          <a:bodyPr/>
+          <a:lstStyle/>
+          <a:p>
+            <a:fld id="{2BA602F1-D8B6-4D7F-AE46-BA4CF4319B0F}" type="slidenum">
+              <a:rPr lang="en-US" smtClean="0"/>
+              <a:t>16</a:t>
+            </a:fld>
+            <a:endParaRPr lang="en-US"/>
           </a:p>
         </p:txBody>
       </p:sp>
@@ -12609,6 +12841,35 @@
           </a:prstGeom>
         </p:spPr>
       </p:pic>
+      <p:sp>
+        <p:nvSpPr>
+          <p:cNvPr id="3" name="Slide Number Placeholder 2">
+            <a:extLst>
+              <a:ext uri="{FF2B5EF4-FFF2-40B4-BE49-F238E27FC236}">
+                <a16:creationId xmlns:a16="http://schemas.microsoft.com/office/drawing/2014/main" id="{3EAECA60-5A56-DDB6-348B-7B74A9837FE4}"/>
+              </a:ext>
+            </a:extLst>
+          </p:cNvPr>
+          <p:cNvSpPr>
+            <a:spLocks noGrp="1"/>
+          </p:cNvSpPr>
+          <p:nvPr>
+            <p:ph type="sldNum" sz="quarter" idx="12"/>
+          </p:nvPr>
+        </p:nvSpPr>
+        <p:spPr/>
+        <p:txBody>
+          <a:bodyPr/>
+          <a:lstStyle/>
+          <a:p>
+            <a:fld id="{2BA602F1-D8B6-4D7F-AE46-BA4CF4319B0F}" type="slidenum">
+              <a:rPr lang="en-US" smtClean="0"/>
+              <a:t>17</a:t>
+            </a:fld>
+            <a:endParaRPr lang="en-US"/>
+          </a:p>
+        </p:txBody>
+      </p:sp>
     </p:spTree>
     <p:extLst>
       <p:ext uri="{BB962C8B-B14F-4D97-AF65-F5344CB8AC3E}">
@@ -13567,6 +13828,35 @@
           </a:prstGeom>
         </p:spPr>
       </p:pic>
+      <p:sp>
+        <p:nvSpPr>
+          <p:cNvPr id="3" name="Slide Number Placeholder 2">
+            <a:extLst>
+              <a:ext uri="{FF2B5EF4-FFF2-40B4-BE49-F238E27FC236}">
+                <a16:creationId xmlns:a16="http://schemas.microsoft.com/office/drawing/2014/main" id="{2E46023E-2AAA-98C8-ECF8-44E78FFF04BA}"/>
+              </a:ext>
+            </a:extLst>
+          </p:cNvPr>
+          <p:cNvSpPr>
+            <a:spLocks noGrp="1"/>
+          </p:cNvSpPr>
+          <p:nvPr>
+            <p:ph type="sldNum" sz="quarter" idx="12"/>
+          </p:nvPr>
+        </p:nvSpPr>
+        <p:spPr/>
+        <p:txBody>
+          <a:bodyPr/>
+          <a:lstStyle/>
+          <a:p>
+            <a:fld id="{2BA602F1-D8B6-4D7F-AE46-BA4CF4319B0F}" type="slidenum">
+              <a:rPr lang="en-US" smtClean="0"/>
+              <a:t>18</a:t>
+            </a:fld>
+            <a:endParaRPr lang="en-US"/>
+          </a:p>
+        </p:txBody>
+      </p:sp>
     </p:spTree>
     <p:extLst>
       <p:ext uri="{BB962C8B-B14F-4D97-AF65-F5344CB8AC3E}">
@@ -13581,6 +13871,2793 @@
 </file>
 
 <file path=ppt/slides/slide19.xml><?xml version="1.0" encoding="utf-8"?>
+<p:sld xmlns:a="http://schemas.openxmlformats.org/drawingml/2006/main" xmlns:r="http://schemas.openxmlformats.org/officeDocument/2006/relationships" xmlns:p="http://schemas.openxmlformats.org/presentationml/2006/main">
+  <p:cSld>
+    <p:spTree>
+      <p:nvGrpSpPr>
+        <p:cNvPr id="1" name=""/>
+        <p:cNvGrpSpPr/>
+        <p:nvPr/>
+      </p:nvGrpSpPr>
+      <p:grpSpPr>
+        <a:xfrm>
+          <a:off x="0" y="0"/>
+          <a:ext cx="0" cy="0"/>
+          <a:chOff x="0" y="0"/>
+          <a:chExt cx="0" cy="0"/>
+        </a:xfrm>
+      </p:grpSpPr>
+      <p:sp>
+        <p:nvSpPr>
+          <p:cNvPr id="2" name="Title 1">
+            <a:extLst>
+              <a:ext uri="{FF2B5EF4-FFF2-40B4-BE49-F238E27FC236}">
+                <a16:creationId xmlns:a16="http://schemas.microsoft.com/office/drawing/2014/main" id="{BE9D3763-84D6-D42A-054A-877792C69D92}"/>
+              </a:ext>
+            </a:extLst>
+          </p:cNvPr>
+          <p:cNvSpPr>
+            <a:spLocks noGrp="1"/>
+          </p:cNvSpPr>
+          <p:nvPr>
+            <p:ph type="title"/>
+          </p:nvPr>
+        </p:nvSpPr>
+        <p:spPr/>
+        <p:txBody>
+          <a:bodyPr>
+            <a:normAutofit fontScale="90000"/>
+          </a:bodyPr>
+          <a:lstStyle/>
+          <a:p>
+            <a:r>
+              <a:rPr lang="en-US" dirty="0"/>
+              <a:t>Dialog: Reset Password</a:t>
+            </a:r>
+          </a:p>
+        </p:txBody>
+      </p:sp>
+      <p:sp>
+        <p:nvSpPr>
+          <p:cNvPr id="4" name="Rectangle 3">
+            <a:extLst>
+              <a:ext uri="{FF2B5EF4-FFF2-40B4-BE49-F238E27FC236}">
+                <a16:creationId xmlns:a16="http://schemas.microsoft.com/office/drawing/2014/main" id="{33D79DB7-379D-36AE-C55B-0A712FE54752}"/>
+              </a:ext>
+            </a:extLst>
+          </p:cNvPr>
+          <p:cNvSpPr/>
+          <p:nvPr/>
+        </p:nvSpPr>
+        <p:spPr>
+          <a:xfrm>
+            <a:off x="405035" y="1264203"/>
+            <a:ext cx="4148553" cy="2442492"/>
+          </a:xfrm>
+          <a:prstGeom prst="rect">
+            <a:avLst/>
+          </a:prstGeom>
+          <a:noFill/>
+        </p:spPr>
+        <p:style>
+          <a:lnRef idx="2">
+            <a:schemeClr val="accent1">
+              <a:shade val="15000"/>
+            </a:schemeClr>
+          </a:lnRef>
+          <a:fillRef idx="1">
+            <a:schemeClr val="accent1"/>
+          </a:fillRef>
+          <a:effectRef idx="0">
+            <a:schemeClr val="accent1"/>
+          </a:effectRef>
+          <a:fontRef idx="minor">
+            <a:schemeClr val="lt1"/>
+          </a:fontRef>
+        </p:style>
+        <p:txBody>
+          <a:bodyPr rtlCol="0" anchor="ctr"/>
+          <a:lstStyle/>
+          <a:p>
+            <a:pPr algn="ctr"/>
+            <a:endParaRPr lang="en-US"/>
+          </a:p>
+        </p:txBody>
+      </p:sp>
+      <p:sp>
+        <p:nvSpPr>
+          <p:cNvPr id="6" name="Rectangle 5">
+            <a:extLst>
+              <a:ext uri="{FF2B5EF4-FFF2-40B4-BE49-F238E27FC236}">
+                <a16:creationId xmlns:a16="http://schemas.microsoft.com/office/drawing/2014/main" id="{9742D190-BB97-49C2-730B-FC293F73502A}"/>
+              </a:ext>
+            </a:extLst>
+          </p:cNvPr>
+          <p:cNvSpPr/>
+          <p:nvPr/>
+        </p:nvSpPr>
+        <p:spPr>
+          <a:xfrm>
+            <a:off x="405035" y="949137"/>
+            <a:ext cx="4148553" cy="315067"/>
+          </a:xfrm>
+          <a:prstGeom prst="rect">
+            <a:avLst/>
+          </a:prstGeom>
+        </p:spPr>
+        <p:style>
+          <a:lnRef idx="2">
+            <a:schemeClr val="accent1">
+              <a:shade val="15000"/>
+            </a:schemeClr>
+          </a:lnRef>
+          <a:fillRef idx="1">
+            <a:schemeClr val="accent1"/>
+          </a:fillRef>
+          <a:effectRef idx="0">
+            <a:schemeClr val="accent1"/>
+          </a:effectRef>
+          <a:fontRef idx="minor">
+            <a:schemeClr val="lt1"/>
+          </a:fontRef>
+        </p:style>
+        <p:txBody>
+          <a:bodyPr rtlCol="0" anchor="ctr"/>
+          <a:lstStyle/>
+          <a:p>
+            <a:r>
+              <a:rPr lang="en-US" dirty="0"/>
+              <a:t>Reset-Password</a:t>
+            </a:r>
+          </a:p>
+        </p:txBody>
+      </p:sp>
+      <p:pic>
+        <p:nvPicPr>
+          <p:cNvPr id="8" name="Picture 7">
+            <a:extLst>
+              <a:ext uri="{FF2B5EF4-FFF2-40B4-BE49-F238E27FC236}">
+                <a16:creationId xmlns:a16="http://schemas.microsoft.com/office/drawing/2014/main" id="{A064AC4A-620F-3229-D4EF-F42820BC6A2D}"/>
+              </a:ext>
+            </a:extLst>
+          </p:cNvPr>
+          <p:cNvPicPr>
+            <a:picLocks noChangeAspect="1"/>
+          </p:cNvPicPr>
+          <p:nvPr/>
+        </p:nvPicPr>
+        <p:blipFill>
+          <a:blip r:embed="rId2"/>
+          <a:stretch>
+            <a:fillRect/>
+          </a:stretch>
+        </p:blipFill>
+        <p:spPr>
+          <a:xfrm>
+            <a:off x="525302" y="1515817"/>
+            <a:ext cx="892110" cy="315067"/>
+          </a:xfrm>
+          <a:prstGeom prst="rect">
+            <a:avLst/>
+          </a:prstGeom>
+        </p:spPr>
+      </p:pic>
+      <p:sp>
+        <p:nvSpPr>
+          <p:cNvPr id="10" name="Rectangle 9">
+            <a:extLst>
+              <a:ext uri="{FF2B5EF4-FFF2-40B4-BE49-F238E27FC236}">
+                <a16:creationId xmlns:a16="http://schemas.microsoft.com/office/drawing/2014/main" id="{1818504F-0552-6ABC-361E-65203A2D2F66}"/>
+              </a:ext>
+            </a:extLst>
+          </p:cNvPr>
+          <p:cNvSpPr/>
+          <p:nvPr/>
+        </p:nvSpPr>
+        <p:spPr>
+          <a:xfrm>
+            <a:off x="1587190" y="1491350"/>
+            <a:ext cx="2266374" cy="364000"/>
+          </a:xfrm>
+          <a:prstGeom prst="rect">
+            <a:avLst/>
+          </a:prstGeom>
+          <a:solidFill>
+            <a:schemeClr val="bg1"/>
+          </a:solidFill>
+        </p:spPr>
+        <p:style>
+          <a:lnRef idx="2">
+            <a:schemeClr val="accent1">
+              <a:shade val="15000"/>
+            </a:schemeClr>
+          </a:lnRef>
+          <a:fillRef idx="1">
+            <a:schemeClr val="accent1"/>
+          </a:fillRef>
+          <a:effectRef idx="0">
+            <a:schemeClr val="accent1"/>
+          </a:effectRef>
+          <a:fontRef idx="minor">
+            <a:schemeClr val="lt1"/>
+          </a:fontRef>
+        </p:style>
+        <p:txBody>
+          <a:bodyPr rtlCol="0" anchor="ctr"/>
+          <a:lstStyle/>
+          <a:p>
+            <a:r>
+              <a:rPr lang="en-US" sz="1400" dirty="0">
+                <a:solidFill>
+                  <a:schemeClr val="tx1"/>
+                </a:solidFill>
+                <a:latin typeface="Roboto" panose="02000000000000000000" pitchFamily="2" charset="0"/>
+                <a:ea typeface="Roboto" panose="02000000000000000000" pitchFamily="2" charset="0"/>
+              </a:rPr>
+              <a:t>ABC-123-6DC-HGF</a:t>
+            </a:r>
+          </a:p>
+        </p:txBody>
+      </p:sp>
+      <p:pic>
+        <p:nvPicPr>
+          <p:cNvPr id="12" name="Picture 11">
+            <a:extLst>
+              <a:ext uri="{FF2B5EF4-FFF2-40B4-BE49-F238E27FC236}">
+                <a16:creationId xmlns:a16="http://schemas.microsoft.com/office/drawing/2014/main" id="{49262BFC-A49F-323D-0925-FCDA5E810CD9}"/>
+              </a:ext>
+            </a:extLst>
+          </p:cNvPr>
+          <p:cNvPicPr>
+            <a:picLocks noChangeAspect="1"/>
+          </p:cNvPicPr>
+          <p:nvPr/>
+        </p:nvPicPr>
+        <p:blipFill>
+          <a:blip r:embed="rId3"/>
+          <a:stretch>
+            <a:fillRect/>
+          </a:stretch>
+        </p:blipFill>
+        <p:spPr>
+          <a:xfrm>
+            <a:off x="3996678" y="1466451"/>
+            <a:ext cx="413796" cy="413796"/>
+          </a:xfrm>
+          <a:prstGeom prst="rect">
+            <a:avLst/>
+          </a:prstGeom>
+          <a:solidFill>
+            <a:schemeClr val="accent6">
+              <a:lumMod val="60000"/>
+              <a:lumOff val="40000"/>
+            </a:schemeClr>
+          </a:solidFill>
+        </p:spPr>
+      </p:pic>
+      <p:pic>
+        <p:nvPicPr>
+          <p:cNvPr id="14" name="Picture 13">
+            <a:extLst>
+              <a:ext uri="{FF2B5EF4-FFF2-40B4-BE49-F238E27FC236}">
+                <a16:creationId xmlns:a16="http://schemas.microsoft.com/office/drawing/2014/main" id="{82137DD5-2A2B-926C-EA66-9A746009E392}"/>
+              </a:ext>
+            </a:extLst>
+          </p:cNvPr>
+          <p:cNvPicPr>
+            <a:picLocks noChangeAspect="1"/>
+          </p:cNvPicPr>
+          <p:nvPr/>
+        </p:nvPicPr>
+        <p:blipFill>
+          <a:blip r:embed="rId4"/>
+          <a:stretch>
+            <a:fillRect/>
+          </a:stretch>
+        </p:blipFill>
+        <p:spPr>
+          <a:xfrm>
+            <a:off x="3977171" y="3198228"/>
+            <a:ext cx="500742" cy="500742"/>
+          </a:xfrm>
+          <a:prstGeom prst="rect">
+            <a:avLst/>
+          </a:prstGeom>
+        </p:spPr>
+      </p:pic>
+      <p:pic>
+        <p:nvPicPr>
+          <p:cNvPr id="16" name="Picture 15">
+            <a:extLst>
+              <a:ext uri="{FF2B5EF4-FFF2-40B4-BE49-F238E27FC236}">
+                <a16:creationId xmlns:a16="http://schemas.microsoft.com/office/drawing/2014/main" id="{22F7C253-C4AE-BAC0-AF7C-8010AE626E44}"/>
+              </a:ext>
+            </a:extLst>
+          </p:cNvPr>
+          <p:cNvPicPr>
+            <a:picLocks noChangeAspect="1"/>
+          </p:cNvPicPr>
+          <p:nvPr/>
+        </p:nvPicPr>
+        <p:blipFill>
+          <a:blip r:embed="rId5"/>
+          <a:stretch>
+            <a:fillRect/>
+          </a:stretch>
+        </p:blipFill>
+        <p:spPr>
+          <a:xfrm>
+            <a:off x="3375043" y="3198228"/>
+            <a:ext cx="525779" cy="509087"/>
+          </a:xfrm>
+          <a:prstGeom prst="rect">
+            <a:avLst/>
+          </a:prstGeom>
+        </p:spPr>
+      </p:pic>
+      <p:sp>
+        <p:nvSpPr>
+          <p:cNvPr id="18" name="TextBox 17">
+            <a:extLst>
+              <a:ext uri="{FF2B5EF4-FFF2-40B4-BE49-F238E27FC236}">
+                <a16:creationId xmlns:a16="http://schemas.microsoft.com/office/drawing/2014/main" id="{099F6923-B005-3ADC-4DFF-A3972C116ECB}"/>
+              </a:ext>
+            </a:extLst>
+          </p:cNvPr>
+          <p:cNvSpPr txBox="1"/>
+          <p:nvPr/>
+        </p:nvSpPr>
+        <p:spPr>
+          <a:xfrm>
+            <a:off x="1192912" y="2069095"/>
+            <a:ext cx="2660653" cy="369332"/>
+          </a:xfrm>
+          <a:prstGeom prst="rect">
+            <a:avLst/>
+          </a:prstGeom>
+          <a:noFill/>
+          <a:ln>
+            <a:solidFill>
+              <a:schemeClr val="tx1"/>
+            </a:solidFill>
+          </a:ln>
+        </p:spPr>
+        <p:txBody>
+          <a:bodyPr wrap="square" rtlCol="0">
+            <a:spAutoFit/>
+          </a:bodyPr>
+          <a:lstStyle/>
+          <a:p>
+            <a:r>
+              <a:rPr lang="en-US" dirty="0">
+                <a:latin typeface="Fira Code" panose="020B0809050000020004" pitchFamily="49" charset="0"/>
+                <a:ea typeface="Fira Code" panose="020B0809050000020004" pitchFamily="49" charset="0"/>
+                <a:cs typeface="Fira Code" panose="020B0809050000020004" pitchFamily="49" charset="0"/>
+              </a:rPr>
+              <a:t>*************</a:t>
+            </a:r>
+          </a:p>
+        </p:txBody>
+      </p:sp>
+      <p:pic>
+        <p:nvPicPr>
+          <p:cNvPr id="20" name="Picture 19">
+            <a:extLst>
+              <a:ext uri="{FF2B5EF4-FFF2-40B4-BE49-F238E27FC236}">
+                <a16:creationId xmlns:a16="http://schemas.microsoft.com/office/drawing/2014/main" id="{AB089A5B-B22F-46E7-B995-0D99CEAEE38F}"/>
+              </a:ext>
+            </a:extLst>
+          </p:cNvPr>
+          <p:cNvPicPr>
+            <a:picLocks noChangeAspect="1"/>
+          </p:cNvPicPr>
+          <p:nvPr/>
+        </p:nvPicPr>
+        <p:blipFill>
+          <a:blip r:embed="rId6"/>
+          <a:stretch>
+            <a:fillRect/>
+          </a:stretch>
+        </p:blipFill>
+        <p:spPr>
+          <a:xfrm>
+            <a:off x="683502" y="2065752"/>
+            <a:ext cx="381843" cy="320131"/>
+          </a:xfrm>
+          <a:prstGeom prst="rect">
+            <a:avLst/>
+          </a:prstGeom>
+        </p:spPr>
+      </p:pic>
+      <p:pic>
+        <p:nvPicPr>
+          <p:cNvPr id="22" name="Picture 21">
+            <a:extLst>
+              <a:ext uri="{FF2B5EF4-FFF2-40B4-BE49-F238E27FC236}">
+                <a16:creationId xmlns:a16="http://schemas.microsoft.com/office/drawing/2014/main" id="{0783FA0C-0920-1FDC-CF2C-F4050BB3015D}"/>
+              </a:ext>
+            </a:extLst>
+          </p:cNvPr>
+          <p:cNvPicPr>
+            <a:picLocks noChangeAspect="1"/>
+          </p:cNvPicPr>
+          <p:nvPr/>
+        </p:nvPicPr>
+        <p:blipFill>
+          <a:blip r:embed="rId7"/>
+          <a:stretch>
+            <a:fillRect/>
+          </a:stretch>
+        </p:blipFill>
+        <p:spPr>
+          <a:xfrm>
+            <a:off x="4021073" y="2065752"/>
+            <a:ext cx="365007" cy="308228"/>
+          </a:xfrm>
+          <a:prstGeom prst="rect">
+            <a:avLst/>
+          </a:prstGeom>
+        </p:spPr>
+      </p:pic>
+      <p:sp>
+        <p:nvSpPr>
+          <p:cNvPr id="23" name="TextBox 22">
+            <a:extLst>
+              <a:ext uri="{FF2B5EF4-FFF2-40B4-BE49-F238E27FC236}">
+                <a16:creationId xmlns:a16="http://schemas.microsoft.com/office/drawing/2014/main" id="{607EDE8C-4F68-E088-B122-DBD94BC2B298}"/>
+              </a:ext>
+            </a:extLst>
+          </p:cNvPr>
+          <p:cNvSpPr txBox="1"/>
+          <p:nvPr/>
+        </p:nvSpPr>
+        <p:spPr>
+          <a:xfrm>
+            <a:off x="1192912" y="2559486"/>
+            <a:ext cx="2660653" cy="369332"/>
+          </a:xfrm>
+          <a:prstGeom prst="rect">
+            <a:avLst/>
+          </a:prstGeom>
+          <a:noFill/>
+          <a:ln>
+            <a:solidFill>
+              <a:schemeClr val="tx1"/>
+            </a:solidFill>
+          </a:ln>
+        </p:spPr>
+        <p:txBody>
+          <a:bodyPr wrap="square" rtlCol="0">
+            <a:spAutoFit/>
+          </a:bodyPr>
+          <a:lstStyle/>
+          <a:p>
+            <a:r>
+              <a:rPr lang="en-US" dirty="0">
+                <a:latin typeface="Fira Code" panose="020B0809050000020004" pitchFamily="49" charset="0"/>
+                <a:ea typeface="Fira Code" panose="020B0809050000020004" pitchFamily="49" charset="0"/>
+                <a:cs typeface="Fira Code" panose="020B0809050000020004" pitchFamily="49" charset="0"/>
+              </a:rPr>
+              <a:t>*************</a:t>
+            </a:r>
+          </a:p>
+        </p:txBody>
+      </p:sp>
+      <p:pic>
+        <p:nvPicPr>
+          <p:cNvPr id="24" name="Picture 23">
+            <a:extLst>
+              <a:ext uri="{FF2B5EF4-FFF2-40B4-BE49-F238E27FC236}">
+                <a16:creationId xmlns:a16="http://schemas.microsoft.com/office/drawing/2014/main" id="{24508DF3-B817-A918-C5D9-A92E44CD6AC1}"/>
+              </a:ext>
+            </a:extLst>
+          </p:cNvPr>
+          <p:cNvPicPr>
+            <a:picLocks noChangeAspect="1"/>
+          </p:cNvPicPr>
+          <p:nvPr/>
+        </p:nvPicPr>
+        <p:blipFill>
+          <a:blip r:embed="rId6"/>
+          <a:stretch>
+            <a:fillRect/>
+          </a:stretch>
+        </p:blipFill>
+        <p:spPr>
+          <a:xfrm>
+            <a:off x="683502" y="2556143"/>
+            <a:ext cx="381843" cy="320131"/>
+          </a:xfrm>
+          <a:prstGeom prst="rect">
+            <a:avLst/>
+          </a:prstGeom>
+        </p:spPr>
+      </p:pic>
+      <p:pic>
+        <p:nvPicPr>
+          <p:cNvPr id="25" name="Picture 24">
+            <a:extLst>
+              <a:ext uri="{FF2B5EF4-FFF2-40B4-BE49-F238E27FC236}">
+                <a16:creationId xmlns:a16="http://schemas.microsoft.com/office/drawing/2014/main" id="{8B60FEEA-15E4-20B0-91D1-33366A401824}"/>
+              </a:ext>
+            </a:extLst>
+          </p:cNvPr>
+          <p:cNvPicPr>
+            <a:picLocks noChangeAspect="1"/>
+          </p:cNvPicPr>
+          <p:nvPr/>
+        </p:nvPicPr>
+        <p:blipFill>
+          <a:blip r:embed="rId7"/>
+          <a:stretch>
+            <a:fillRect/>
+          </a:stretch>
+        </p:blipFill>
+        <p:spPr>
+          <a:xfrm>
+            <a:off x="4021073" y="2556143"/>
+            <a:ext cx="365007" cy="308228"/>
+          </a:xfrm>
+          <a:prstGeom prst="rect">
+            <a:avLst/>
+          </a:prstGeom>
+        </p:spPr>
+      </p:pic>
+      <p:sp>
+        <p:nvSpPr>
+          <p:cNvPr id="26" name="Slide Number Placeholder 25">
+            <a:extLst>
+              <a:ext uri="{FF2B5EF4-FFF2-40B4-BE49-F238E27FC236}">
+                <a16:creationId xmlns:a16="http://schemas.microsoft.com/office/drawing/2014/main" id="{A68C7952-3DE6-8205-63BE-677C64A42D9B}"/>
+              </a:ext>
+            </a:extLst>
+          </p:cNvPr>
+          <p:cNvSpPr>
+            <a:spLocks noGrp="1"/>
+          </p:cNvSpPr>
+          <p:nvPr>
+            <p:ph type="sldNum" sz="quarter" idx="12"/>
+          </p:nvPr>
+        </p:nvSpPr>
+        <p:spPr/>
+        <p:txBody>
+          <a:bodyPr/>
+          <a:lstStyle/>
+          <a:p>
+            <a:fld id="{2BA602F1-D8B6-4D7F-AE46-BA4CF4319B0F}" type="slidenum">
+              <a:rPr lang="en-US" smtClean="0"/>
+              <a:t>19</a:t>
+            </a:fld>
+            <a:endParaRPr lang="en-US"/>
+          </a:p>
+        </p:txBody>
+      </p:sp>
+      <p:sp>
+        <p:nvSpPr>
+          <p:cNvPr id="30" name="TextBox 29">
+            <a:extLst>
+              <a:ext uri="{FF2B5EF4-FFF2-40B4-BE49-F238E27FC236}">
+                <a16:creationId xmlns:a16="http://schemas.microsoft.com/office/drawing/2014/main" id="{30D7E3D7-C7AB-1BA4-5496-80F4A9E68CB7}"/>
+              </a:ext>
+            </a:extLst>
+          </p:cNvPr>
+          <p:cNvSpPr txBox="1"/>
+          <p:nvPr/>
+        </p:nvSpPr>
+        <p:spPr>
+          <a:xfrm>
+            <a:off x="782961" y="3339288"/>
+            <a:ext cx="2259182" cy="276999"/>
+          </a:xfrm>
+          <a:prstGeom prst="rect">
+            <a:avLst/>
+          </a:prstGeom>
+          <a:noFill/>
+          <a:ln>
+            <a:solidFill>
+              <a:schemeClr val="tx1"/>
+            </a:solidFill>
+            <a:prstDash val="lgDash"/>
+          </a:ln>
+        </p:spPr>
+        <p:txBody>
+          <a:bodyPr wrap="square">
+            <a:spAutoFit/>
+          </a:bodyPr>
+          <a:lstStyle/>
+          <a:p>
+            <a:r>
+              <a:rPr lang="en-US" sz="1200" dirty="0">
+                <a:latin typeface="Fira Code" panose="020B0809050000020004" pitchFamily="49" charset="0"/>
+                <a:ea typeface="Fira Code" panose="020B0809050000020004" pitchFamily="49" charset="0"/>
+                <a:cs typeface="Fira Code" panose="020B0809050000020004" pitchFamily="49" charset="0"/>
+              </a:rPr>
+              <a:t>^[a-z0-9!#$().-]{8,}$</a:t>
+            </a:r>
+            <a:endParaRPr lang="en-US" sz="1200" dirty="0">
+              <a:solidFill>
+                <a:schemeClr val="tx1"/>
+              </a:solidFill>
+              <a:latin typeface="Fira Code" panose="020B0809050000020004" pitchFamily="49" charset="0"/>
+              <a:ea typeface="Fira Code" panose="020B0809050000020004" pitchFamily="49" charset="0"/>
+              <a:cs typeface="Fira Code" panose="020B0809050000020004" pitchFamily="49" charset="0"/>
+            </a:endParaRPr>
+          </a:p>
+        </p:txBody>
+      </p:sp>
+      <p:pic>
+        <p:nvPicPr>
+          <p:cNvPr id="32" name="Picture 31">
+            <a:extLst>
+              <a:ext uri="{FF2B5EF4-FFF2-40B4-BE49-F238E27FC236}">
+                <a16:creationId xmlns:a16="http://schemas.microsoft.com/office/drawing/2014/main" id="{5E991ED4-2112-4342-4CE1-D80B2B90CDE1}"/>
+              </a:ext>
+            </a:extLst>
+          </p:cNvPr>
+          <p:cNvPicPr>
+            <a:picLocks noChangeAspect="1"/>
+          </p:cNvPicPr>
+          <p:nvPr/>
+        </p:nvPicPr>
+        <p:blipFill>
+          <a:blip r:embed="rId8"/>
+          <a:stretch>
+            <a:fillRect/>
+          </a:stretch>
+        </p:blipFill>
+        <p:spPr>
+          <a:xfrm>
+            <a:off x="423447" y="3300452"/>
+            <a:ext cx="329449" cy="315835"/>
+          </a:xfrm>
+          <a:prstGeom prst="rect">
+            <a:avLst/>
+          </a:prstGeom>
+        </p:spPr>
+      </p:pic>
+    </p:spTree>
+    <p:extLst>
+      <p:ext uri="{BB962C8B-B14F-4D97-AF65-F5344CB8AC3E}">
+        <p14:creationId xmlns:p14="http://schemas.microsoft.com/office/powerpoint/2010/main" val="337775981"/>
+      </p:ext>
+    </p:extLst>
+  </p:cSld>
+  <p:clrMapOvr>
+    <a:masterClrMapping/>
+  </p:clrMapOvr>
+</p:sld>
+</file>
+
+<file path=ppt/slides/slide2.xml><?xml version="1.0" encoding="utf-8"?>
+<p:sld xmlns:a="http://schemas.openxmlformats.org/drawingml/2006/main" xmlns:r="http://schemas.openxmlformats.org/officeDocument/2006/relationships" xmlns:p="http://schemas.openxmlformats.org/presentationml/2006/main">
+  <p:cSld>
+    <p:spTree>
+      <p:nvGrpSpPr>
+        <p:cNvPr id="1" name=""/>
+        <p:cNvGrpSpPr/>
+        <p:nvPr/>
+      </p:nvGrpSpPr>
+      <p:grpSpPr>
+        <a:xfrm>
+          <a:off x="0" y="0"/>
+          <a:ext cx="0" cy="0"/>
+          <a:chOff x="0" y="0"/>
+          <a:chExt cx="0" cy="0"/>
+        </a:xfrm>
+      </p:grpSpPr>
+      <p:sp>
+        <p:nvSpPr>
+          <p:cNvPr id="2" name="Title 1">
+            <a:extLst>
+              <a:ext uri="{FF2B5EF4-FFF2-40B4-BE49-F238E27FC236}">
+                <a16:creationId xmlns:a16="http://schemas.microsoft.com/office/drawing/2014/main" id="{37DB5E0B-1627-9AA4-0866-227B19EAB64B}"/>
+              </a:ext>
+            </a:extLst>
+          </p:cNvPr>
+          <p:cNvSpPr>
+            <a:spLocks noGrp="1"/>
+          </p:cNvSpPr>
+          <p:nvPr>
+            <p:ph type="title"/>
+          </p:nvPr>
+        </p:nvSpPr>
+        <p:spPr>
+          <a:xfrm>
+            <a:off x="158261" y="189280"/>
+            <a:ext cx="2947018" cy="508244"/>
+          </a:xfrm>
+        </p:spPr>
+        <p:txBody>
+          <a:bodyPr>
+            <a:normAutofit fontScale="90000"/>
+          </a:bodyPr>
+          <a:lstStyle/>
+          <a:p>
+            <a:r>
+              <a:rPr lang="en-US" dirty="0"/>
+              <a:t>UX Affordances</a:t>
+            </a:r>
+          </a:p>
+        </p:txBody>
+      </p:sp>
+      <p:pic>
+        <p:nvPicPr>
+          <p:cNvPr id="46" name="Picture 45">
+            <a:extLst>
+              <a:ext uri="{FF2B5EF4-FFF2-40B4-BE49-F238E27FC236}">
+                <a16:creationId xmlns:a16="http://schemas.microsoft.com/office/drawing/2014/main" id="{533E3045-B855-F6CF-8D21-70F515ECE0ED}"/>
+              </a:ext>
+            </a:extLst>
+          </p:cNvPr>
+          <p:cNvPicPr>
+            <a:picLocks noChangeAspect="1"/>
+          </p:cNvPicPr>
+          <p:nvPr/>
+        </p:nvPicPr>
+        <p:blipFill>
+          <a:blip r:embed="rId2">
+            <a:alphaModFix amt="40000"/>
+          </a:blip>
+          <a:stretch>
+            <a:fillRect/>
+          </a:stretch>
+        </p:blipFill>
+        <p:spPr>
+          <a:xfrm>
+            <a:off x="10334710" y="1174539"/>
+            <a:ext cx="1137899" cy="1110028"/>
+          </a:xfrm>
+          <a:prstGeom prst="rect">
+            <a:avLst/>
+          </a:prstGeom>
+        </p:spPr>
+      </p:pic>
+      <p:pic>
+        <p:nvPicPr>
+          <p:cNvPr id="4" name="Picture 3">
+            <a:extLst>
+              <a:ext uri="{FF2B5EF4-FFF2-40B4-BE49-F238E27FC236}">
+                <a16:creationId xmlns:a16="http://schemas.microsoft.com/office/drawing/2014/main" id="{07A4A583-C508-ADB4-F34D-57445D8C6213}"/>
+              </a:ext>
+            </a:extLst>
+          </p:cNvPr>
+          <p:cNvPicPr>
+            <a:picLocks noChangeAspect="1"/>
+          </p:cNvPicPr>
+          <p:nvPr/>
+        </p:nvPicPr>
+        <p:blipFill>
+          <a:blip r:embed="rId3"/>
+          <a:stretch>
+            <a:fillRect/>
+          </a:stretch>
+        </p:blipFill>
+        <p:spPr>
+          <a:xfrm>
+            <a:off x="10404553" y="1324329"/>
+            <a:ext cx="262174" cy="294503"/>
+          </a:xfrm>
+          <a:prstGeom prst="rect">
+            <a:avLst/>
+          </a:prstGeom>
+          <a:solidFill>
+            <a:schemeClr val="bg1"/>
+          </a:solidFill>
+        </p:spPr>
+      </p:pic>
+      <p:pic>
+        <p:nvPicPr>
+          <p:cNvPr id="6" name="Picture 5">
+            <a:extLst>
+              <a:ext uri="{FF2B5EF4-FFF2-40B4-BE49-F238E27FC236}">
+                <a16:creationId xmlns:a16="http://schemas.microsoft.com/office/drawing/2014/main" id="{59D2ABDD-6F7D-0CA2-C3E9-8CBB6A9A3EAD}"/>
+              </a:ext>
+            </a:extLst>
+          </p:cNvPr>
+          <p:cNvPicPr>
+            <a:picLocks noChangeAspect="1"/>
+          </p:cNvPicPr>
+          <p:nvPr/>
+        </p:nvPicPr>
+        <p:blipFill>
+          <a:blip r:embed="rId4"/>
+          <a:stretch>
+            <a:fillRect/>
+          </a:stretch>
+        </p:blipFill>
+        <p:spPr>
+          <a:xfrm>
+            <a:off x="10666727" y="1973501"/>
+            <a:ext cx="452846" cy="341003"/>
+          </a:xfrm>
+          <a:prstGeom prst="rect">
+            <a:avLst/>
+          </a:prstGeom>
+          <a:solidFill>
+            <a:schemeClr val="bg1"/>
+          </a:solidFill>
+        </p:spPr>
+      </p:pic>
+      <p:pic>
+        <p:nvPicPr>
+          <p:cNvPr id="8" name="Picture 7">
+            <a:extLst>
+              <a:ext uri="{FF2B5EF4-FFF2-40B4-BE49-F238E27FC236}">
+                <a16:creationId xmlns:a16="http://schemas.microsoft.com/office/drawing/2014/main" id="{D2E1E35B-061A-5097-2E7F-A646BAF70AC0}"/>
+              </a:ext>
+            </a:extLst>
+          </p:cNvPr>
+          <p:cNvPicPr>
+            <a:picLocks noChangeAspect="1"/>
+          </p:cNvPicPr>
+          <p:nvPr/>
+        </p:nvPicPr>
+        <p:blipFill>
+          <a:blip r:embed="rId5"/>
+          <a:stretch>
+            <a:fillRect/>
+          </a:stretch>
+        </p:blipFill>
+        <p:spPr>
+          <a:xfrm>
+            <a:off x="11109228" y="1361942"/>
+            <a:ext cx="436957" cy="333253"/>
+          </a:xfrm>
+          <a:prstGeom prst="rect">
+            <a:avLst/>
+          </a:prstGeom>
+          <a:solidFill>
+            <a:schemeClr val="bg1"/>
+          </a:solidFill>
+        </p:spPr>
+      </p:pic>
+      <p:sp>
+        <p:nvSpPr>
+          <p:cNvPr id="27" name="TextBox 26">
+            <a:extLst>
+              <a:ext uri="{FF2B5EF4-FFF2-40B4-BE49-F238E27FC236}">
+                <a16:creationId xmlns:a16="http://schemas.microsoft.com/office/drawing/2014/main" id="{241C90DF-3D6C-5B23-857E-662FD163E9EE}"/>
+              </a:ext>
+            </a:extLst>
+          </p:cNvPr>
+          <p:cNvSpPr txBox="1"/>
+          <p:nvPr/>
+        </p:nvSpPr>
+        <p:spPr>
+          <a:xfrm>
+            <a:off x="10903659" y="1657190"/>
+            <a:ext cx="705642" cy="230832"/>
+          </a:xfrm>
+          <a:prstGeom prst="rect">
+            <a:avLst/>
+          </a:prstGeom>
+          <a:noFill/>
+        </p:spPr>
+        <p:txBody>
+          <a:bodyPr wrap="none" rtlCol="0">
+            <a:spAutoFit/>
+          </a:bodyPr>
+          <a:lstStyle/>
+          <a:p>
+            <a:r>
+              <a:rPr lang="en-US" sz="900" dirty="0"/>
+              <a:t>Ascending</a:t>
+            </a:r>
+          </a:p>
+        </p:txBody>
+      </p:sp>
+      <p:sp>
+        <p:nvSpPr>
+          <p:cNvPr id="28" name="TextBox 27">
+            <a:extLst>
+              <a:ext uri="{FF2B5EF4-FFF2-40B4-BE49-F238E27FC236}">
+                <a16:creationId xmlns:a16="http://schemas.microsoft.com/office/drawing/2014/main" id="{41FE7BC5-04D2-D774-6F93-7EF7B6F09A7E}"/>
+              </a:ext>
+            </a:extLst>
+          </p:cNvPr>
+          <p:cNvSpPr txBox="1"/>
+          <p:nvPr/>
+        </p:nvSpPr>
+        <p:spPr>
+          <a:xfrm>
+            <a:off x="10535640" y="2284567"/>
+            <a:ext cx="777777" cy="230832"/>
+          </a:xfrm>
+          <a:prstGeom prst="rect">
+            <a:avLst/>
+          </a:prstGeom>
+          <a:noFill/>
+        </p:spPr>
+        <p:txBody>
+          <a:bodyPr wrap="none" rtlCol="0">
+            <a:spAutoFit/>
+          </a:bodyPr>
+          <a:lstStyle/>
+          <a:p>
+            <a:r>
+              <a:rPr lang="en-US" sz="900" dirty="0"/>
+              <a:t>Descending</a:t>
+            </a:r>
+          </a:p>
+        </p:txBody>
+      </p:sp>
+      <p:sp>
+        <p:nvSpPr>
+          <p:cNvPr id="29" name="TextBox 28">
+            <a:extLst>
+              <a:ext uri="{FF2B5EF4-FFF2-40B4-BE49-F238E27FC236}">
+                <a16:creationId xmlns:a16="http://schemas.microsoft.com/office/drawing/2014/main" id="{082798F8-568D-9827-CBE3-68FEACE3C079}"/>
+              </a:ext>
+            </a:extLst>
+          </p:cNvPr>
+          <p:cNvSpPr txBox="1"/>
+          <p:nvPr/>
+        </p:nvSpPr>
+        <p:spPr>
+          <a:xfrm>
+            <a:off x="10211673" y="1618934"/>
+            <a:ext cx="647934" cy="230832"/>
+          </a:xfrm>
+          <a:prstGeom prst="rect">
+            <a:avLst/>
+          </a:prstGeom>
+          <a:noFill/>
+        </p:spPr>
+        <p:txBody>
+          <a:bodyPr wrap="none" rtlCol="0">
+            <a:spAutoFit/>
+          </a:bodyPr>
+          <a:lstStyle/>
+          <a:p>
+            <a:r>
+              <a:rPr lang="en-US" sz="900" dirty="0"/>
+              <a:t>Unsorted</a:t>
+            </a:r>
+          </a:p>
+        </p:txBody>
+      </p:sp>
+      <p:sp>
+        <p:nvSpPr>
+          <p:cNvPr id="31" name="TextBox 30">
+            <a:extLst>
+              <a:ext uri="{FF2B5EF4-FFF2-40B4-BE49-F238E27FC236}">
+                <a16:creationId xmlns:a16="http://schemas.microsoft.com/office/drawing/2014/main" id="{9448A1F5-F891-C6B9-430B-5A437B1538A8}"/>
+              </a:ext>
+            </a:extLst>
+          </p:cNvPr>
+          <p:cNvSpPr txBox="1"/>
+          <p:nvPr/>
+        </p:nvSpPr>
+        <p:spPr>
+          <a:xfrm>
+            <a:off x="9683528" y="844986"/>
+            <a:ext cx="2419243" cy="369332"/>
+          </a:xfrm>
+          <a:prstGeom prst="rect">
+            <a:avLst/>
+          </a:prstGeom>
+          <a:noFill/>
+        </p:spPr>
+        <p:txBody>
+          <a:bodyPr wrap="square">
+            <a:spAutoFit/>
+          </a:bodyPr>
+          <a:lstStyle/>
+          <a:p>
+            <a:r>
+              <a:rPr lang="en-US" dirty="0">
+                <a:solidFill>
+                  <a:srgbClr val="7030A0"/>
+                </a:solidFill>
+                <a:latin typeface="Roboto" panose="02000000000000000000" pitchFamily="2" charset="0"/>
+                <a:ea typeface="Roboto" panose="02000000000000000000" pitchFamily="2" charset="0"/>
+              </a:rPr>
+              <a:t>Sort direction rotation</a:t>
+            </a:r>
+            <a:endParaRPr lang="en-US" sz="1100" dirty="0">
+              <a:solidFill>
+                <a:srgbClr val="7030A0"/>
+              </a:solidFill>
+              <a:latin typeface="Roboto" panose="02000000000000000000" pitchFamily="2" charset="0"/>
+              <a:ea typeface="Roboto" panose="02000000000000000000" pitchFamily="2" charset="0"/>
+            </a:endParaRPr>
+          </a:p>
+        </p:txBody>
+      </p:sp>
+      <p:pic>
+        <p:nvPicPr>
+          <p:cNvPr id="37" name="Picture 36">
+            <a:extLst>
+              <a:ext uri="{FF2B5EF4-FFF2-40B4-BE49-F238E27FC236}">
+                <a16:creationId xmlns:a16="http://schemas.microsoft.com/office/drawing/2014/main" id="{FBA8FE12-BBAE-6949-471B-96030C80A0BA}"/>
+              </a:ext>
+            </a:extLst>
+          </p:cNvPr>
+          <p:cNvPicPr>
+            <a:picLocks noChangeAspect="1"/>
+          </p:cNvPicPr>
+          <p:nvPr/>
+        </p:nvPicPr>
+        <p:blipFill>
+          <a:blip r:embed="rId6"/>
+          <a:stretch>
+            <a:fillRect/>
+          </a:stretch>
+        </p:blipFill>
+        <p:spPr>
+          <a:xfrm>
+            <a:off x="303310" y="804605"/>
+            <a:ext cx="452384" cy="671954"/>
+          </a:xfrm>
+          <a:prstGeom prst="rect">
+            <a:avLst/>
+          </a:prstGeom>
+        </p:spPr>
+      </p:pic>
+      <p:sp>
+        <p:nvSpPr>
+          <p:cNvPr id="38" name="TextBox 37">
+            <a:extLst>
+              <a:ext uri="{FF2B5EF4-FFF2-40B4-BE49-F238E27FC236}">
+                <a16:creationId xmlns:a16="http://schemas.microsoft.com/office/drawing/2014/main" id="{86F84C14-C329-73CD-B403-97F16E66518F}"/>
+              </a:ext>
+            </a:extLst>
+          </p:cNvPr>
+          <p:cNvSpPr txBox="1"/>
+          <p:nvPr/>
+        </p:nvSpPr>
+        <p:spPr>
+          <a:xfrm>
+            <a:off x="877581" y="955915"/>
+            <a:ext cx="2944672" cy="646331"/>
+          </a:xfrm>
+          <a:prstGeom prst="rect">
+            <a:avLst/>
+          </a:prstGeom>
+          <a:noFill/>
+        </p:spPr>
+        <p:txBody>
+          <a:bodyPr wrap="square" rtlCol="0">
+            <a:spAutoFit/>
+          </a:bodyPr>
+          <a:lstStyle/>
+          <a:p>
+            <a:r>
+              <a:rPr lang="en-US" dirty="0"/>
+              <a:t>Any, Nothing, Nada, Who-Cares? None-of-the-…, etc.</a:t>
+            </a:r>
+          </a:p>
+        </p:txBody>
+      </p:sp>
+      <p:pic>
+        <p:nvPicPr>
+          <p:cNvPr id="40" name="Picture 39">
+            <a:extLst>
+              <a:ext uri="{FF2B5EF4-FFF2-40B4-BE49-F238E27FC236}">
+                <a16:creationId xmlns:a16="http://schemas.microsoft.com/office/drawing/2014/main" id="{EAEE0DAA-FB23-F237-F2CF-1B57E4FFE4D4}"/>
+              </a:ext>
+            </a:extLst>
+          </p:cNvPr>
+          <p:cNvPicPr>
+            <a:picLocks noChangeAspect="1"/>
+          </p:cNvPicPr>
+          <p:nvPr/>
+        </p:nvPicPr>
+        <p:blipFill>
+          <a:blip r:embed="rId7"/>
+          <a:stretch>
+            <a:fillRect/>
+          </a:stretch>
+        </p:blipFill>
+        <p:spPr>
+          <a:xfrm>
+            <a:off x="325606" y="1641735"/>
+            <a:ext cx="430088" cy="537610"/>
+          </a:xfrm>
+          <a:prstGeom prst="rect">
+            <a:avLst/>
+          </a:prstGeom>
+        </p:spPr>
+      </p:pic>
+      <p:pic>
+        <p:nvPicPr>
+          <p:cNvPr id="42" name="Picture 41">
+            <a:extLst>
+              <a:ext uri="{FF2B5EF4-FFF2-40B4-BE49-F238E27FC236}">
+                <a16:creationId xmlns:a16="http://schemas.microsoft.com/office/drawing/2014/main" id="{54F7A852-5D14-7045-BA7F-EBA1B413DB69}"/>
+              </a:ext>
+            </a:extLst>
+          </p:cNvPr>
+          <p:cNvPicPr>
+            <a:picLocks noChangeAspect="1"/>
+          </p:cNvPicPr>
+          <p:nvPr/>
+        </p:nvPicPr>
+        <p:blipFill>
+          <a:blip r:embed="rId8"/>
+          <a:stretch>
+            <a:fillRect/>
+          </a:stretch>
+        </p:blipFill>
+        <p:spPr>
+          <a:xfrm>
+            <a:off x="327129" y="2376511"/>
+            <a:ext cx="430088" cy="418639"/>
+          </a:xfrm>
+          <a:prstGeom prst="rect">
+            <a:avLst/>
+          </a:prstGeom>
+        </p:spPr>
+      </p:pic>
+      <p:sp>
+        <p:nvSpPr>
+          <p:cNvPr id="43" name="TextBox 42">
+            <a:extLst>
+              <a:ext uri="{FF2B5EF4-FFF2-40B4-BE49-F238E27FC236}">
+                <a16:creationId xmlns:a16="http://schemas.microsoft.com/office/drawing/2014/main" id="{A33305A1-BABE-E96F-D13F-3C6B681848CE}"/>
+              </a:ext>
+            </a:extLst>
+          </p:cNvPr>
+          <p:cNvSpPr txBox="1"/>
+          <p:nvPr/>
+        </p:nvSpPr>
+        <p:spPr>
+          <a:xfrm>
+            <a:off x="853836" y="1711479"/>
+            <a:ext cx="2305246" cy="369332"/>
+          </a:xfrm>
+          <a:prstGeom prst="rect">
+            <a:avLst/>
+          </a:prstGeom>
+          <a:noFill/>
+        </p:spPr>
+        <p:txBody>
+          <a:bodyPr wrap="none" rtlCol="0">
+            <a:spAutoFit/>
+          </a:bodyPr>
+          <a:lstStyle/>
+          <a:p>
+            <a:r>
+              <a:rPr lang="en-US" dirty="0"/>
+              <a:t>Me, aka Current-User</a:t>
+            </a:r>
+          </a:p>
+        </p:txBody>
+      </p:sp>
+      <p:sp>
+        <p:nvSpPr>
+          <p:cNvPr id="44" name="TextBox 43">
+            <a:extLst>
+              <a:ext uri="{FF2B5EF4-FFF2-40B4-BE49-F238E27FC236}">
+                <a16:creationId xmlns:a16="http://schemas.microsoft.com/office/drawing/2014/main" id="{EBA089A5-5778-C98D-5B1B-31300A6CDF94}"/>
+              </a:ext>
+            </a:extLst>
+          </p:cNvPr>
+          <p:cNvSpPr txBox="1"/>
+          <p:nvPr/>
+        </p:nvSpPr>
+        <p:spPr>
+          <a:xfrm>
+            <a:off x="906250" y="2396025"/>
+            <a:ext cx="1314206" cy="369332"/>
+          </a:xfrm>
+          <a:prstGeom prst="rect">
+            <a:avLst/>
+          </a:prstGeom>
+          <a:noFill/>
+        </p:spPr>
+        <p:txBody>
+          <a:bodyPr wrap="none" rtlCol="0">
+            <a:spAutoFit/>
+          </a:bodyPr>
+          <a:lstStyle/>
+          <a:p>
+            <a:r>
+              <a:rPr lang="en-US" dirty="0"/>
+              <a:t>Now, Today</a:t>
+            </a:r>
+          </a:p>
+        </p:txBody>
+      </p:sp>
+      <p:pic>
+        <p:nvPicPr>
+          <p:cNvPr id="50" name="Picture 49">
+            <a:extLst>
+              <a:ext uri="{FF2B5EF4-FFF2-40B4-BE49-F238E27FC236}">
+                <a16:creationId xmlns:a16="http://schemas.microsoft.com/office/drawing/2014/main" id="{17C3E84A-CC7F-7FD2-273A-51478CA2ED01}"/>
+              </a:ext>
+            </a:extLst>
+          </p:cNvPr>
+          <p:cNvPicPr>
+            <a:picLocks noChangeAspect="1"/>
+          </p:cNvPicPr>
+          <p:nvPr/>
+        </p:nvPicPr>
+        <p:blipFill>
+          <a:blip r:embed="rId9"/>
+          <a:stretch>
+            <a:fillRect/>
+          </a:stretch>
+        </p:blipFill>
+        <p:spPr>
+          <a:xfrm>
+            <a:off x="3965524" y="955916"/>
+            <a:ext cx="365175" cy="431091"/>
+          </a:xfrm>
+          <a:prstGeom prst="rect">
+            <a:avLst/>
+          </a:prstGeom>
+        </p:spPr>
+      </p:pic>
+      <p:pic>
+        <p:nvPicPr>
+          <p:cNvPr id="52" name="Picture 51">
+            <a:extLst>
+              <a:ext uri="{FF2B5EF4-FFF2-40B4-BE49-F238E27FC236}">
+                <a16:creationId xmlns:a16="http://schemas.microsoft.com/office/drawing/2014/main" id="{E391FADB-711D-24A7-7873-0CD41F065511}"/>
+              </a:ext>
+            </a:extLst>
+          </p:cNvPr>
+          <p:cNvPicPr>
+            <a:picLocks noChangeAspect="1"/>
+          </p:cNvPicPr>
+          <p:nvPr/>
+        </p:nvPicPr>
+        <p:blipFill>
+          <a:blip r:embed="rId10"/>
+          <a:stretch>
+            <a:fillRect/>
+          </a:stretch>
+        </p:blipFill>
+        <p:spPr>
+          <a:xfrm>
+            <a:off x="3778126" y="1641735"/>
+            <a:ext cx="615234" cy="625487"/>
+          </a:xfrm>
+          <a:prstGeom prst="rect">
+            <a:avLst/>
+          </a:prstGeom>
+        </p:spPr>
+      </p:pic>
+      <p:pic>
+        <p:nvPicPr>
+          <p:cNvPr id="54" name="Picture 53">
+            <a:extLst>
+              <a:ext uri="{FF2B5EF4-FFF2-40B4-BE49-F238E27FC236}">
+                <a16:creationId xmlns:a16="http://schemas.microsoft.com/office/drawing/2014/main" id="{FB0615E4-2E70-1990-FD9D-8097B97F3429}"/>
+              </a:ext>
+            </a:extLst>
+          </p:cNvPr>
+          <p:cNvPicPr>
+            <a:picLocks noChangeAspect="1"/>
+          </p:cNvPicPr>
+          <p:nvPr/>
+        </p:nvPicPr>
+        <p:blipFill>
+          <a:blip r:embed="rId11"/>
+          <a:stretch>
+            <a:fillRect/>
+          </a:stretch>
+        </p:blipFill>
+        <p:spPr>
+          <a:xfrm>
+            <a:off x="3822252" y="2407911"/>
+            <a:ext cx="477872" cy="387239"/>
+          </a:xfrm>
+          <a:prstGeom prst="rect">
+            <a:avLst/>
+          </a:prstGeom>
+        </p:spPr>
+      </p:pic>
+      <p:sp>
+        <p:nvSpPr>
+          <p:cNvPr id="55" name="TextBox 54">
+            <a:extLst>
+              <a:ext uri="{FF2B5EF4-FFF2-40B4-BE49-F238E27FC236}">
+                <a16:creationId xmlns:a16="http://schemas.microsoft.com/office/drawing/2014/main" id="{F6F1889C-C8E7-DB7F-C3CC-5E15AB89BBE8}"/>
+              </a:ext>
+            </a:extLst>
+          </p:cNvPr>
+          <p:cNvSpPr txBox="1"/>
+          <p:nvPr/>
+        </p:nvSpPr>
+        <p:spPr>
+          <a:xfrm>
+            <a:off x="4393360" y="949815"/>
+            <a:ext cx="2075825" cy="369332"/>
+          </a:xfrm>
+          <a:prstGeom prst="rect">
+            <a:avLst/>
+          </a:prstGeom>
+          <a:noFill/>
+        </p:spPr>
+        <p:txBody>
+          <a:bodyPr wrap="none" rtlCol="0">
+            <a:spAutoFit/>
+          </a:bodyPr>
+          <a:lstStyle/>
+          <a:p>
+            <a:r>
+              <a:rPr lang="en-US" dirty="0"/>
+              <a:t>Validate Markdown</a:t>
+            </a:r>
+          </a:p>
+        </p:txBody>
+      </p:sp>
+      <p:sp>
+        <p:nvSpPr>
+          <p:cNvPr id="56" name="TextBox 55">
+            <a:extLst>
+              <a:ext uri="{FF2B5EF4-FFF2-40B4-BE49-F238E27FC236}">
+                <a16:creationId xmlns:a16="http://schemas.microsoft.com/office/drawing/2014/main" id="{BA2BF026-A322-D759-5E76-DB5E3B800E53}"/>
+              </a:ext>
+            </a:extLst>
+          </p:cNvPr>
+          <p:cNvSpPr txBox="1"/>
+          <p:nvPr/>
+        </p:nvSpPr>
+        <p:spPr>
+          <a:xfrm>
+            <a:off x="4393359" y="1711479"/>
+            <a:ext cx="2095125" cy="369332"/>
+          </a:xfrm>
+          <a:prstGeom prst="rect">
+            <a:avLst/>
+          </a:prstGeom>
+          <a:noFill/>
+        </p:spPr>
+        <p:txBody>
+          <a:bodyPr wrap="none" rtlCol="0">
+            <a:spAutoFit/>
+          </a:bodyPr>
+          <a:lstStyle/>
+          <a:p>
+            <a:r>
+              <a:rPr lang="en-US" dirty="0"/>
+              <a:t>Toggle Edit/Preview</a:t>
+            </a:r>
+          </a:p>
+        </p:txBody>
+      </p:sp>
+      <p:sp>
+        <p:nvSpPr>
+          <p:cNvPr id="57" name="TextBox 56">
+            <a:extLst>
+              <a:ext uri="{FF2B5EF4-FFF2-40B4-BE49-F238E27FC236}">
+                <a16:creationId xmlns:a16="http://schemas.microsoft.com/office/drawing/2014/main" id="{8FC9C166-C735-5C03-8CC6-21FE8F9FCB5E}"/>
+              </a:ext>
+            </a:extLst>
+          </p:cNvPr>
+          <p:cNvSpPr txBox="1"/>
+          <p:nvPr/>
+        </p:nvSpPr>
+        <p:spPr>
+          <a:xfrm>
+            <a:off x="4393359" y="2396025"/>
+            <a:ext cx="1289135" cy="369332"/>
+          </a:xfrm>
+          <a:prstGeom prst="rect">
+            <a:avLst/>
+          </a:prstGeom>
+          <a:noFill/>
+        </p:spPr>
+        <p:txBody>
+          <a:bodyPr wrap="none" rtlCol="0">
+            <a:spAutoFit/>
+          </a:bodyPr>
+          <a:lstStyle/>
+          <a:p>
+            <a:r>
+              <a:rPr lang="en-US" dirty="0"/>
+              <a:t>Spellcheck</a:t>
+            </a:r>
+          </a:p>
+        </p:txBody>
+      </p:sp>
+      <p:pic>
+        <p:nvPicPr>
+          <p:cNvPr id="59" name="Picture 58">
+            <a:extLst>
+              <a:ext uri="{FF2B5EF4-FFF2-40B4-BE49-F238E27FC236}">
+                <a16:creationId xmlns:a16="http://schemas.microsoft.com/office/drawing/2014/main" id="{B3000C5E-932A-B5B9-797F-CAADFD0E3709}"/>
+              </a:ext>
+            </a:extLst>
+          </p:cNvPr>
+          <p:cNvPicPr>
+            <a:picLocks noChangeAspect="1"/>
+          </p:cNvPicPr>
+          <p:nvPr/>
+        </p:nvPicPr>
+        <p:blipFill>
+          <a:blip r:embed="rId12"/>
+          <a:stretch>
+            <a:fillRect/>
+          </a:stretch>
+        </p:blipFill>
+        <p:spPr>
+          <a:xfrm>
+            <a:off x="311341" y="3878982"/>
+            <a:ext cx="291892" cy="369332"/>
+          </a:xfrm>
+          <a:prstGeom prst="rect">
+            <a:avLst/>
+          </a:prstGeom>
+        </p:spPr>
+      </p:pic>
+      <p:pic>
+        <p:nvPicPr>
+          <p:cNvPr id="61" name="Picture 60">
+            <a:extLst>
+              <a:ext uri="{FF2B5EF4-FFF2-40B4-BE49-F238E27FC236}">
+                <a16:creationId xmlns:a16="http://schemas.microsoft.com/office/drawing/2014/main" id="{33FA452A-C0AB-1390-76AF-5635D2E4414F}"/>
+              </a:ext>
+            </a:extLst>
+          </p:cNvPr>
+          <p:cNvPicPr>
+            <a:picLocks noChangeAspect="1"/>
+          </p:cNvPicPr>
+          <p:nvPr/>
+        </p:nvPicPr>
+        <p:blipFill>
+          <a:blip r:embed="rId13"/>
+          <a:stretch>
+            <a:fillRect/>
+          </a:stretch>
+        </p:blipFill>
+        <p:spPr>
+          <a:xfrm>
+            <a:off x="6086013" y="4785115"/>
+            <a:ext cx="321274" cy="438927"/>
+          </a:xfrm>
+          <a:prstGeom prst="rect">
+            <a:avLst/>
+          </a:prstGeom>
+        </p:spPr>
+      </p:pic>
+      <p:pic>
+        <p:nvPicPr>
+          <p:cNvPr id="63" name="Picture 62">
+            <a:extLst>
+              <a:ext uri="{FF2B5EF4-FFF2-40B4-BE49-F238E27FC236}">
+                <a16:creationId xmlns:a16="http://schemas.microsoft.com/office/drawing/2014/main" id="{E03637F9-863F-8127-C37D-212509A64259}"/>
+              </a:ext>
+            </a:extLst>
+          </p:cNvPr>
+          <p:cNvPicPr>
+            <a:picLocks noChangeAspect="1"/>
+          </p:cNvPicPr>
+          <p:nvPr/>
+        </p:nvPicPr>
+        <p:blipFill>
+          <a:blip r:embed="rId14"/>
+          <a:stretch>
+            <a:fillRect/>
+          </a:stretch>
+        </p:blipFill>
+        <p:spPr>
+          <a:xfrm>
+            <a:off x="296221" y="3459584"/>
+            <a:ext cx="322133" cy="339704"/>
+          </a:xfrm>
+          <a:prstGeom prst="rect">
+            <a:avLst/>
+          </a:prstGeom>
+        </p:spPr>
+      </p:pic>
+      <p:sp>
+        <p:nvSpPr>
+          <p:cNvPr id="64" name="TextBox 63">
+            <a:extLst>
+              <a:ext uri="{FF2B5EF4-FFF2-40B4-BE49-F238E27FC236}">
+                <a16:creationId xmlns:a16="http://schemas.microsoft.com/office/drawing/2014/main" id="{8FC20B5C-F178-C513-72D4-1DD6C23D9C66}"/>
+              </a:ext>
+            </a:extLst>
+          </p:cNvPr>
+          <p:cNvSpPr txBox="1"/>
+          <p:nvPr/>
+        </p:nvSpPr>
+        <p:spPr>
+          <a:xfrm>
+            <a:off x="223847" y="3075001"/>
+            <a:ext cx="1063694" cy="369332"/>
+          </a:xfrm>
+          <a:prstGeom prst="rect">
+            <a:avLst/>
+          </a:prstGeom>
+          <a:noFill/>
+        </p:spPr>
+        <p:txBody>
+          <a:bodyPr wrap="square">
+            <a:spAutoFit/>
+          </a:bodyPr>
+          <a:lstStyle/>
+          <a:p>
+            <a:r>
+              <a:rPr lang="en-US" dirty="0">
+                <a:solidFill>
+                  <a:srgbClr val="7030A0"/>
+                </a:solidFill>
+                <a:latin typeface="Roboto" panose="02000000000000000000" pitchFamily="2" charset="0"/>
+                <a:ea typeface="Roboto" panose="02000000000000000000" pitchFamily="2" charset="0"/>
+              </a:rPr>
+              <a:t>Entities</a:t>
+            </a:r>
+            <a:endParaRPr lang="en-US" sz="1100" dirty="0">
+              <a:solidFill>
+                <a:srgbClr val="7030A0"/>
+              </a:solidFill>
+              <a:latin typeface="Roboto" panose="02000000000000000000" pitchFamily="2" charset="0"/>
+              <a:ea typeface="Roboto" panose="02000000000000000000" pitchFamily="2" charset="0"/>
+            </a:endParaRPr>
+          </a:p>
+        </p:txBody>
+      </p:sp>
+      <p:pic>
+        <p:nvPicPr>
+          <p:cNvPr id="66" name="Picture 65">
+            <a:extLst>
+              <a:ext uri="{FF2B5EF4-FFF2-40B4-BE49-F238E27FC236}">
+                <a16:creationId xmlns:a16="http://schemas.microsoft.com/office/drawing/2014/main" id="{F8B89B66-BED9-17F1-CAA5-6A2765864CA2}"/>
+              </a:ext>
+            </a:extLst>
+          </p:cNvPr>
+          <p:cNvPicPr>
+            <a:picLocks noChangeAspect="1"/>
+          </p:cNvPicPr>
+          <p:nvPr/>
+        </p:nvPicPr>
+        <p:blipFill>
+          <a:blip r:embed="rId15"/>
+          <a:stretch>
+            <a:fillRect/>
+          </a:stretch>
+        </p:blipFill>
+        <p:spPr>
+          <a:xfrm>
+            <a:off x="6096000" y="3866972"/>
+            <a:ext cx="312760" cy="372959"/>
+          </a:xfrm>
+          <a:prstGeom prst="rect">
+            <a:avLst/>
+          </a:prstGeom>
+        </p:spPr>
+      </p:pic>
+      <p:pic>
+        <p:nvPicPr>
+          <p:cNvPr id="68" name="Picture 67">
+            <a:extLst>
+              <a:ext uri="{FF2B5EF4-FFF2-40B4-BE49-F238E27FC236}">
+                <a16:creationId xmlns:a16="http://schemas.microsoft.com/office/drawing/2014/main" id="{12DBDAE5-4D4E-830D-7A0E-01ACD5FCBFAB}"/>
+              </a:ext>
+            </a:extLst>
+          </p:cNvPr>
+          <p:cNvPicPr>
+            <a:picLocks noChangeAspect="1"/>
+          </p:cNvPicPr>
+          <p:nvPr/>
+        </p:nvPicPr>
+        <p:blipFill>
+          <a:blip r:embed="rId16"/>
+          <a:stretch>
+            <a:fillRect/>
+          </a:stretch>
+        </p:blipFill>
+        <p:spPr>
+          <a:xfrm>
+            <a:off x="6096000" y="3397061"/>
+            <a:ext cx="311287" cy="367319"/>
+          </a:xfrm>
+          <a:prstGeom prst="rect">
+            <a:avLst/>
+          </a:prstGeom>
+        </p:spPr>
+      </p:pic>
+      <p:pic>
+        <p:nvPicPr>
+          <p:cNvPr id="70" name="Picture 69">
+            <a:extLst>
+              <a:ext uri="{FF2B5EF4-FFF2-40B4-BE49-F238E27FC236}">
+                <a16:creationId xmlns:a16="http://schemas.microsoft.com/office/drawing/2014/main" id="{D0B6165D-F311-6DA1-4E9E-C3B399212D15}"/>
+              </a:ext>
+            </a:extLst>
+          </p:cNvPr>
+          <p:cNvPicPr>
+            <a:picLocks noChangeAspect="1"/>
+          </p:cNvPicPr>
+          <p:nvPr/>
+        </p:nvPicPr>
+        <p:blipFill>
+          <a:blip r:embed="rId17"/>
+          <a:stretch>
+            <a:fillRect/>
+          </a:stretch>
+        </p:blipFill>
+        <p:spPr>
+          <a:xfrm>
+            <a:off x="6096000" y="4333252"/>
+            <a:ext cx="311962" cy="386625"/>
+          </a:xfrm>
+          <a:prstGeom prst="rect">
+            <a:avLst/>
+          </a:prstGeom>
+        </p:spPr>
+      </p:pic>
+      <p:pic>
+        <p:nvPicPr>
+          <p:cNvPr id="72" name="Picture 71">
+            <a:extLst>
+              <a:ext uri="{FF2B5EF4-FFF2-40B4-BE49-F238E27FC236}">
+                <a16:creationId xmlns:a16="http://schemas.microsoft.com/office/drawing/2014/main" id="{EBD22B7A-49BE-6DF5-F457-7A8DD81C8EEF}"/>
+              </a:ext>
+            </a:extLst>
+          </p:cNvPr>
+          <p:cNvPicPr>
+            <a:picLocks noChangeAspect="1"/>
+          </p:cNvPicPr>
+          <p:nvPr/>
+        </p:nvPicPr>
+        <p:blipFill>
+          <a:blip r:embed="rId18"/>
+          <a:stretch>
+            <a:fillRect/>
+          </a:stretch>
+        </p:blipFill>
+        <p:spPr>
+          <a:xfrm>
+            <a:off x="6096000" y="5260666"/>
+            <a:ext cx="312759" cy="420157"/>
+          </a:xfrm>
+          <a:prstGeom prst="rect">
+            <a:avLst/>
+          </a:prstGeom>
+        </p:spPr>
+      </p:pic>
+      <p:pic>
+        <p:nvPicPr>
+          <p:cNvPr id="74" name="Picture 73">
+            <a:extLst>
+              <a:ext uri="{FF2B5EF4-FFF2-40B4-BE49-F238E27FC236}">
+                <a16:creationId xmlns:a16="http://schemas.microsoft.com/office/drawing/2014/main" id="{5CFE82B4-AD44-0500-3879-D48D4B7E2E6A}"/>
+              </a:ext>
+            </a:extLst>
+          </p:cNvPr>
+          <p:cNvPicPr>
+            <a:picLocks noChangeAspect="1"/>
+          </p:cNvPicPr>
+          <p:nvPr/>
+        </p:nvPicPr>
+        <p:blipFill>
+          <a:blip r:embed="rId19"/>
+          <a:stretch>
+            <a:fillRect/>
+          </a:stretch>
+        </p:blipFill>
+        <p:spPr>
+          <a:xfrm>
+            <a:off x="6079507" y="5740612"/>
+            <a:ext cx="334286" cy="386625"/>
+          </a:xfrm>
+          <a:prstGeom prst="rect">
+            <a:avLst/>
+          </a:prstGeom>
+        </p:spPr>
+      </p:pic>
+      <p:pic>
+        <p:nvPicPr>
+          <p:cNvPr id="76" name="Picture 75">
+            <a:extLst>
+              <a:ext uri="{FF2B5EF4-FFF2-40B4-BE49-F238E27FC236}">
+                <a16:creationId xmlns:a16="http://schemas.microsoft.com/office/drawing/2014/main" id="{7FE1C356-0378-36D3-E416-D621334DECF1}"/>
+              </a:ext>
+            </a:extLst>
+          </p:cNvPr>
+          <p:cNvPicPr>
+            <a:picLocks noChangeAspect="1"/>
+          </p:cNvPicPr>
+          <p:nvPr/>
+        </p:nvPicPr>
+        <p:blipFill>
+          <a:blip r:embed="rId20"/>
+          <a:stretch>
+            <a:fillRect/>
+          </a:stretch>
+        </p:blipFill>
+        <p:spPr>
+          <a:xfrm>
+            <a:off x="329685" y="4328008"/>
+            <a:ext cx="255204" cy="412297"/>
+          </a:xfrm>
+          <a:prstGeom prst="rect">
+            <a:avLst/>
+          </a:prstGeom>
+        </p:spPr>
+      </p:pic>
+      <p:pic>
+        <p:nvPicPr>
+          <p:cNvPr id="78" name="Picture 77">
+            <a:extLst>
+              <a:ext uri="{FF2B5EF4-FFF2-40B4-BE49-F238E27FC236}">
+                <a16:creationId xmlns:a16="http://schemas.microsoft.com/office/drawing/2014/main" id="{2A30ABF3-0C87-2A8F-E885-2018E1ACD0C4}"/>
+              </a:ext>
+            </a:extLst>
+          </p:cNvPr>
+          <p:cNvPicPr>
+            <a:picLocks noChangeAspect="1"/>
+          </p:cNvPicPr>
+          <p:nvPr/>
+        </p:nvPicPr>
+        <p:blipFill>
+          <a:blip r:embed="rId21"/>
+          <a:stretch>
+            <a:fillRect/>
+          </a:stretch>
+        </p:blipFill>
+        <p:spPr>
+          <a:xfrm>
+            <a:off x="354879" y="6237223"/>
+            <a:ext cx="204816" cy="428685"/>
+          </a:xfrm>
+          <a:prstGeom prst="rect">
+            <a:avLst/>
+          </a:prstGeom>
+        </p:spPr>
+      </p:pic>
+      <p:pic>
+        <p:nvPicPr>
+          <p:cNvPr id="80" name="Picture 79">
+            <a:extLst>
+              <a:ext uri="{FF2B5EF4-FFF2-40B4-BE49-F238E27FC236}">
+                <a16:creationId xmlns:a16="http://schemas.microsoft.com/office/drawing/2014/main" id="{90879784-A88F-793B-6761-E33D99A8ED6B}"/>
+              </a:ext>
+            </a:extLst>
+          </p:cNvPr>
+          <p:cNvPicPr>
+            <a:picLocks noChangeAspect="1"/>
+          </p:cNvPicPr>
+          <p:nvPr/>
+        </p:nvPicPr>
+        <p:blipFill>
+          <a:blip r:embed="rId22"/>
+          <a:stretch>
+            <a:fillRect/>
+          </a:stretch>
+        </p:blipFill>
+        <p:spPr>
+          <a:xfrm>
+            <a:off x="345252" y="4785115"/>
+            <a:ext cx="224071" cy="393546"/>
+          </a:xfrm>
+          <a:prstGeom prst="rect">
+            <a:avLst/>
+          </a:prstGeom>
+        </p:spPr>
+      </p:pic>
+      <p:pic>
+        <p:nvPicPr>
+          <p:cNvPr id="82" name="Picture 81">
+            <a:extLst>
+              <a:ext uri="{FF2B5EF4-FFF2-40B4-BE49-F238E27FC236}">
+                <a16:creationId xmlns:a16="http://schemas.microsoft.com/office/drawing/2014/main" id="{3C135A3E-D510-ACE1-6E4E-ECC1725A3877}"/>
+              </a:ext>
+            </a:extLst>
+          </p:cNvPr>
+          <p:cNvPicPr>
+            <a:picLocks noChangeAspect="1"/>
+          </p:cNvPicPr>
+          <p:nvPr/>
+        </p:nvPicPr>
+        <p:blipFill>
+          <a:blip r:embed="rId23"/>
+          <a:stretch>
+            <a:fillRect/>
+          </a:stretch>
+        </p:blipFill>
+        <p:spPr>
+          <a:xfrm>
+            <a:off x="391166" y="5253919"/>
+            <a:ext cx="132242" cy="412297"/>
+          </a:xfrm>
+          <a:prstGeom prst="rect">
+            <a:avLst/>
+          </a:prstGeom>
+        </p:spPr>
+      </p:pic>
+      <p:pic>
+        <p:nvPicPr>
+          <p:cNvPr id="84" name="Picture 83">
+            <a:extLst>
+              <a:ext uri="{FF2B5EF4-FFF2-40B4-BE49-F238E27FC236}">
+                <a16:creationId xmlns:a16="http://schemas.microsoft.com/office/drawing/2014/main" id="{F74807A4-2E2E-BE66-B9AD-0D428E6C7BDD}"/>
+              </a:ext>
+            </a:extLst>
+          </p:cNvPr>
+          <p:cNvPicPr>
+            <a:picLocks noChangeAspect="1"/>
+          </p:cNvPicPr>
+          <p:nvPr/>
+        </p:nvPicPr>
+        <p:blipFill>
+          <a:blip r:embed="rId24"/>
+          <a:stretch>
+            <a:fillRect/>
+          </a:stretch>
+        </p:blipFill>
+        <p:spPr>
+          <a:xfrm>
+            <a:off x="270402" y="5741474"/>
+            <a:ext cx="373770" cy="420492"/>
+          </a:xfrm>
+          <a:prstGeom prst="rect">
+            <a:avLst/>
+          </a:prstGeom>
+        </p:spPr>
+      </p:pic>
+      <p:sp>
+        <p:nvSpPr>
+          <p:cNvPr id="85" name="TextBox 84">
+            <a:extLst>
+              <a:ext uri="{FF2B5EF4-FFF2-40B4-BE49-F238E27FC236}">
+                <a16:creationId xmlns:a16="http://schemas.microsoft.com/office/drawing/2014/main" id="{3606A9E2-15A6-3536-E0ED-558FB9EC1D90}"/>
+              </a:ext>
+            </a:extLst>
+          </p:cNvPr>
+          <p:cNvSpPr txBox="1"/>
+          <p:nvPr/>
+        </p:nvSpPr>
+        <p:spPr>
+          <a:xfrm>
+            <a:off x="6053106" y="2997681"/>
+            <a:ext cx="1063694" cy="369332"/>
+          </a:xfrm>
+          <a:prstGeom prst="rect">
+            <a:avLst/>
+          </a:prstGeom>
+          <a:noFill/>
+        </p:spPr>
+        <p:txBody>
+          <a:bodyPr wrap="square">
+            <a:spAutoFit/>
+          </a:bodyPr>
+          <a:lstStyle/>
+          <a:p>
+            <a:r>
+              <a:rPr lang="en-US" dirty="0">
+                <a:solidFill>
+                  <a:srgbClr val="7030A0"/>
+                </a:solidFill>
+                <a:latin typeface="Roboto" panose="02000000000000000000" pitchFamily="2" charset="0"/>
+                <a:ea typeface="Roboto" panose="02000000000000000000" pitchFamily="2" charset="0"/>
+              </a:rPr>
+              <a:t>Fields</a:t>
+            </a:r>
+            <a:endParaRPr lang="en-US" sz="1100" dirty="0">
+              <a:solidFill>
+                <a:srgbClr val="7030A0"/>
+              </a:solidFill>
+              <a:latin typeface="Roboto" panose="02000000000000000000" pitchFamily="2" charset="0"/>
+              <a:ea typeface="Roboto" panose="02000000000000000000" pitchFamily="2" charset="0"/>
+            </a:endParaRPr>
+          </a:p>
+        </p:txBody>
+      </p:sp>
+      <p:cxnSp>
+        <p:nvCxnSpPr>
+          <p:cNvPr id="87" name="Straight Connector 86">
+            <a:extLst>
+              <a:ext uri="{FF2B5EF4-FFF2-40B4-BE49-F238E27FC236}">
+                <a16:creationId xmlns:a16="http://schemas.microsoft.com/office/drawing/2014/main" id="{AAF450A5-C114-DD33-F73D-1F02CA56E66B}"/>
+              </a:ext>
+            </a:extLst>
+          </p:cNvPr>
+          <p:cNvCxnSpPr>
+            <a:cxnSpLocks/>
+          </p:cNvCxnSpPr>
+          <p:nvPr/>
+        </p:nvCxnSpPr>
+        <p:spPr>
+          <a:xfrm flipV="1">
+            <a:off x="270402" y="2913130"/>
+            <a:ext cx="11284133" cy="76925"/>
+          </a:xfrm>
+          <a:prstGeom prst="line">
+            <a:avLst/>
+          </a:prstGeom>
+          <a:ln>
+            <a:solidFill>
+              <a:schemeClr val="bg1">
+                <a:lumMod val="50000"/>
+              </a:schemeClr>
+            </a:solidFill>
+          </a:ln>
+        </p:spPr>
+        <p:style>
+          <a:lnRef idx="2">
+            <a:schemeClr val="accent1"/>
+          </a:lnRef>
+          <a:fillRef idx="0">
+            <a:schemeClr val="accent1"/>
+          </a:fillRef>
+          <a:effectRef idx="1">
+            <a:schemeClr val="accent1"/>
+          </a:effectRef>
+          <a:fontRef idx="minor">
+            <a:schemeClr val="tx1"/>
+          </a:fontRef>
+        </p:style>
+      </p:cxnSp>
+      <p:sp>
+        <p:nvSpPr>
+          <p:cNvPr id="89" name="TextBox 88">
+            <a:extLst>
+              <a:ext uri="{FF2B5EF4-FFF2-40B4-BE49-F238E27FC236}">
+                <a16:creationId xmlns:a16="http://schemas.microsoft.com/office/drawing/2014/main" id="{6B0E3D2B-B47B-642B-926B-3896DFC254DF}"/>
+              </a:ext>
+            </a:extLst>
+          </p:cNvPr>
+          <p:cNvSpPr txBox="1"/>
+          <p:nvPr/>
+        </p:nvSpPr>
+        <p:spPr>
+          <a:xfrm>
+            <a:off x="644276" y="3432453"/>
+            <a:ext cx="997837" cy="369332"/>
+          </a:xfrm>
+          <a:prstGeom prst="rect">
+            <a:avLst/>
+          </a:prstGeom>
+          <a:noFill/>
+        </p:spPr>
+        <p:txBody>
+          <a:bodyPr wrap="none" rtlCol="0">
+            <a:spAutoFit/>
+          </a:bodyPr>
+          <a:lstStyle/>
+          <a:p>
+            <a:r>
+              <a:rPr lang="en-US" dirty="0"/>
+              <a:t>Item / Id</a:t>
+            </a:r>
+          </a:p>
+        </p:txBody>
+      </p:sp>
+      <p:sp>
+        <p:nvSpPr>
+          <p:cNvPr id="90" name="TextBox 89">
+            <a:extLst>
+              <a:ext uri="{FF2B5EF4-FFF2-40B4-BE49-F238E27FC236}">
+                <a16:creationId xmlns:a16="http://schemas.microsoft.com/office/drawing/2014/main" id="{AA19F944-695A-36B3-3735-B2956D57591D}"/>
+              </a:ext>
+            </a:extLst>
+          </p:cNvPr>
+          <p:cNvSpPr txBox="1"/>
+          <p:nvPr/>
+        </p:nvSpPr>
+        <p:spPr>
+          <a:xfrm>
+            <a:off x="644276" y="3842517"/>
+            <a:ext cx="1445332" cy="369332"/>
+          </a:xfrm>
+          <a:prstGeom prst="rect">
+            <a:avLst/>
+          </a:prstGeom>
+          <a:noFill/>
+        </p:spPr>
+        <p:txBody>
+          <a:bodyPr wrap="none" rtlCol="0">
+            <a:spAutoFit/>
+          </a:bodyPr>
+          <a:lstStyle/>
+          <a:p>
+            <a:r>
+              <a:rPr lang="en-US" dirty="0"/>
+              <a:t>Organization</a:t>
+            </a:r>
+          </a:p>
+        </p:txBody>
+      </p:sp>
+      <p:sp>
+        <p:nvSpPr>
+          <p:cNvPr id="91" name="TextBox 90">
+            <a:extLst>
+              <a:ext uri="{FF2B5EF4-FFF2-40B4-BE49-F238E27FC236}">
+                <a16:creationId xmlns:a16="http://schemas.microsoft.com/office/drawing/2014/main" id="{FBC220B9-E77B-CF3F-A35D-735CA248216A}"/>
+              </a:ext>
+            </a:extLst>
+          </p:cNvPr>
+          <p:cNvSpPr txBox="1"/>
+          <p:nvPr/>
+        </p:nvSpPr>
+        <p:spPr>
+          <a:xfrm>
+            <a:off x="644276" y="4324775"/>
+            <a:ext cx="625749" cy="369332"/>
+          </a:xfrm>
+          <a:prstGeom prst="rect">
+            <a:avLst/>
+          </a:prstGeom>
+          <a:noFill/>
+        </p:spPr>
+        <p:txBody>
+          <a:bodyPr wrap="none" rtlCol="0">
+            <a:spAutoFit/>
+          </a:bodyPr>
+          <a:lstStyle/>
+          <a:p>
+            <a:r>
+              <a:rPr lang="en-US" dirty="0"/>
+              <a:t>Tags</a:t>
+            </a:r>
+          </a:p>
+        </p:txBody>
+      </p:sp>
+      <p:sp>
+        <p:nvSpPr>
+          <p:cNvPr id="92" name="TextBox 91">
+            <a:extLst>
+              <a:ext uri="{FF2B5EF4-FFF2-40B4-BE49-F238E27FC236}">
+                <a16:creationId xmlns:a16="http://schemas.microsoft.com/office/drawing/2014/main" id="{811006FC-DF89-F3CE-6F95-971C12746AD1}"/>
+              </a:ext>
+            </a:extLst>
+          </p:cNvPr>
+          <p:cNvSpPr txBox="1"/>
+          <p:nvPr/>
+        </p:nvSpPr>
+        <p:spPr>
+          <a:xfrm>
+            <a:off x="661792" y="4785115"/>
+            <a:ext cx="898964" cy="369332"/>
+          </a:xfrm>
+          <a:prstGeom prst="rect">
+            <a:avLst/>
+          </a:prstGeom>
+          <a:noFill/>
+        </p:spPr>
+        <p:txBody>
+          <a:bodyPr wrap="none" rtlCol="0">
+            <a:spAutoFit/>
+          </a:bodyPr>
+          <a:lstStyle/>
+          <a:p>
+            <a:r>
+              <a:rPr lang="en-US" dirty="0"/>
+              <a:t>History</a:t>
+            </a:r>
+          </a:p>
+        </p:txBody>
+      </p:sp>
+      <p:sp>
+        <p:nvSpPr>
+          <p:cNvPr id="93" name="TextBox 92">
+            <a:extLst>
+              <a:ext uri="{FF2B5EF4-FFF2-40B4-BE49-F238E27FC236}">
+                <a16:creationId xmlns:a16="http://schemas.microsoft.com/office/drawing/2014/main" id="{7DDFA0F6-77DD-D4CB-273B-B378F029AAF4}"/>
+              </a:ext>
+            </a:extLst>
+          </p:cNvPr>
+          <p:cNvSpPr txBox="1"/>
+          <p:nvPr/>
+        </p:nvSpPr>
+        <p:spPr>
+          <a:xfrm>
+            <a:off x="679308" y="5245455"/>
+            <a:ext cx="1474634" cy="369332"/>
+          </a:xfrm>
+          <a:prstGeom prst="rect">
+            <a:avLst/>
+          </a:prstGeom>
+          <a:noFill/>
+        </p:spPr>
+        <p:txBody>
+          <a:bodyPr wrap="none" rtlCol="0">
+            <a:spAutoFit/>
+          </a:bodyPr>
+          <a:lstStyle/>
+          <a:p>
+            <a:r>
+              <a:rPr lang="en-US" dirty="0"/>
+              <a:t>Attachments</a:t>
+            </a:r>
+          </a:p>
+        </p:txBody>
+      </p:sp>
+      <p:sp>
+        <p:nvSpPr>
+          <p:cNvPr id="94" name="TextBox 93">
+            <a:extLst>
+              <a:ext uri="{FF2B5EF4-FFF2-40B4-BE49-F238E27FC236}">
+                <a16:creationId xmlns:a16="http://schemas.microsoft.com/office/drawing/2014/main" id="{E67357B1-1E0D-407C-3ABF-397DB39B935F}"/>
+              </a:ext>
+            </a:extLst>
+          </p:cNvPr>
+          <p:cNvSpPr txBox="1"/>
+          <p:nvPr/>
+        </p:nvSpPr>
+        <p:spPr>
+          <a:xfrm>
+            <a:off x="696824" y="5705795"/>
+            <a:ext cx="1545167" cy="369332"/>
+          </a:xfrm>
+          <a:prstGeom prst="rect">
+            <a:avLst/>
+          </a:prstGeom>
+          <a:noFill/>
+        </p:spPr>
+        <p:txBody>
+          <a:bodyPr wrap="none" rtlCol="0">
+            <a:spAutoFit/>
+          </a:bodyPr>
+          <a:lstStyle/>
+          <a:p>
+            <a:r>
+              <a:rPr lang="en-US" dirty="0"/>
+              <a:t>Relationships</a:t>
+            </a:r>
+          </a:p>
+        </p:txBody>
+      </p:sp>
+      <p:sp>
+        <p:nvSpPr>
+          <p:cNvPr id="95" name="TextBox 94">
+            <a:extLst>
+              <a:ext uri="{FF2B5EF4-FFF2-40B4-BE49-F238E27FC236}">
+                <a16:creationId xmlns:a16="http://schemas.microsoft.com/office/drawing/2014/main" id="{1DDC7D23-1F2F-405F-A18B-E1FE66212545}"/>
+              </a:ext>
+            </a:extLst>
+          </p:cNvPr>
+          <p:cNvSpPr txBox="1"/>
+          <p:nvPr/>
+        </p:nvSpPr>
+        <p:spPr>
+          <a:xfrm>
+            <a:off x="696513" y="6244777"/>
+            <a:ext cx="1961371" cy="369332"/>
+          </a:xfrm>
+          <a:prstGeom prst="rect">
+            <a:avLst/>
+          </a:prstGeom>
+          <a:noFill/>
+        </p:spPr>
+        <p:txBody>
+          <a:bodyPr wrap="none" rtlCol="0">
+            <a:spAutoFit/>
+          </a:bodyPr>
+          <a:lstStyle/>
+          <a:p>
+            <a:r>
+              <a:rPr lang="en-US" dirty="0"/>
+              <a:t>Name/Value Pairs</a:t>
+            </a:r>
+          </a:p>
+        </p:txBody>
+      </p:sp>
+      <p:sp>
+        <p:nvSpPr>
+          <p:cNvPr id="97" name="Rectangle 96">
+            <a:extLst>
+              <a:ext uri="{FF2B5EF4-FFF2-40B4-BE49-F238E27FC236}">
+                <a16:creationId xmlns:a16="http://schemas.microsoft.com/office/drawing/2014/main" id="{77B86C6B-3B84-8256-1E36-AA10EE862447}"/>
+              </a:ext>
+            </a:extLst>
+          </p:cNvPr>
+          <p:cNvSpPr/>
+          <p:nvPr/>
+        </p:nvSpPr>
+        <p:spPr>
+          <a:xfrm>
+            <a:off x="9364131" y="3420173"/>
+            <a:ext cx="430641" cy="386625"/>
+          </a:xfrm>
+          <a:prstGeom prst="rect">
+            <a:avLst/>
+          </a:prstGeom>
+          <a:solidFill>
+            <a:schemeClr val="bg1">
+              <a:lumMod val="95000"/>
+            </a:schemeClr>
+          </a:solidFill>
+          <a:ln w="9525">
+            <a:solidFill>
+              <a:srgbClr val="0070C0"/>
+            </a:solidFill>
+          </a:ln>
+        </p:spPr>
+        <p:style>
+          <a:lnRef idx="2">
+            <a:schemeClr val="accent1">
+              <a:shade val="15000"/>
+            </a:schemeClr>
+          </a:lnRef>
+          <a:fillRef idx="1">
+            <a:schemeClr val="accent1"/>
+          </a:fillRef>
+          <a:effectRef idx="0">
+            <a:schemeClr val="accent1"/>
+          </a:effectRef>
+          <a:fontRef idx="minor">
+            <a:schemeClr val="lt1"/>
+          </a:fontRef>
+        </p:style>
+        <p:txBody>
+          <a:bodyPr rtlCol="0" anchor="ctr"/>
+          <a:lstStyle/>
+          <a:p>
+            <a:r>
+              <a:rPr lang="en-US" sz="1400" b="1" dirty="0">
+                <a:solidFill>
+                  <a:schemeClr val="tx1"/>
+                </a:solidFill>
+                <a:latin typeface="Roboto" panose="02000000000000000000" pitchFamily="2" charset="0"/>
+                <a:ea typeface="Roboto" panose="02000000000000000000" pitchFamily="2" charset="0"/>
+              </a:rPr>
+              <a:t>p2</a:t>
+            </a:r>
+          </a:p>
+        </p:txBody>
+      </p:sp>
+      <p:sp>
+        <p:nvSpPr>
+          <p:cNvPr id="99" name="Rectangle 98">
+            <a:extLst>
+              <a:ext uri="{FF2B5EF4-FFF2-40B4-BE49-F238E27FC236}">
+                <a16:creationId xmlns:a16="http://schemas.microsoft.com/office/drawing/2014/main" id="{72593150-17B2-0653-55B3-B81F02699441}"/>
+              </a:ext>
+            </a:extLst>
+          </p:cNvPr>
+          <p:cNvSpPr/>
+          <p:nvPr/>
+        </p:nvSpPr>
+        <p:spPr>
+          <a:xfrm>
+            <a:off x="9358851" y="3915078"/>
+            <a:ext cx="564538" cy="386625"/>
+          </a:xfrm>
+          <a:prstGeom prst="rect">
+            <a:avLst/>
+          </a:prstGeom>
+          <a:solidFill>
+            <a:schemeClr val="bg1">
+              <a:lumMod val="95000"/>
+            </a:schemeClr>
+          </a:solidFill>
+          <a:ln w="12700">
+            <a:solidFill>
+              <a:schemeClr val="accent3">
+                <a:lumMod val="60000"/>
+                <a:lumOff val="40000"/>
+              </a:schemeClr>
+            </a:solidFill>
+          </a:ln>
+        </p:spPr>
+        <p:style>
+          <a:lnRef idx="2">
+            <a:schemeClr val="accent1">
+              <a:shade val="15000"/>
+            </a:schemeClr>
+          </a:lnRef>
+          <a:fillRef idx="1">
+            <a:schemeClr val="accent1"/>
+          </a:fillRef>
+          <a:effectRef idx="0">
+            <a:schemeClr val="accent1"/>
+          </a:effectRef>
+          <a:fontRef idx="minor">
+            <a:schemeClr val="lt1"/>
+          </a:fontRef>
+        </p:style>
+        <p:txBody>
+          <a:bodyPr rtlCol="0" anchor="ctr"/>
+          <a:lstStyle/>
+          <a:p>
+            <a:pPr algn="r"/>
+            <a:r>
+              <a:rPr lang="en-US" sz="1400" dirty="0">
+                <a:solidFill>
+                  <a:schemeClr val="tx1"/>
+                </a:solidFill>
+                <a:latin typeface="Roboto" panose="02000000000000000000" pitchFamily="2" charset="0"/>
+                <a:ea typeface="Roboto" panose="02000000000000000000" pitchFamily="2" charset="0"/>
+              </a:rPr>
+              <a:t>123</a:t>
+            </a:r>
+          </a:p>
+        </p:txBody>
+      </p:sp>
+      <p:sp>
+        <p:nvSpPr>
+          <p:cNvPr id="100" name="TextBox 99">
+            <a:extLst>
+              <a:ext uri="{FF2B5EF4-FFF2-40B4-BE49-F238E27FC236}">
+                <a16:creationId xmlns:a16="http://schemas.microsoft.com/office/drawing/2014/main" id="{E075D223-D2F8-8639-1032-56754F6D281C}"/>
+              </a:ext>
+            </a:extLst>
+          </p:cNvPr>
+          <p:cNvSpPr txBox="1"/>
+          <p:nvPr/>
+        </p:nvSpPr>
+        <p:spPr>
+          <a:xfrm>
+            <a:off x="6464667" y="3386451"/>
+            <a:ext cx="2259016" cy="369332"/>
+          </a:xfrm>
+          <a:prstGeom prst="rect">
+            <a:avLst/>
+          </a:prstGeom>
+          <a:noFill/>
+        </p:spPr>
+        <p:txBody>
+          <a:bodyPr wrap="none" rtlCol="0">
+            <a:spAutoFit/>
+          </a:bodyPr>
+          <a:lstStyle/>
+          <a:p>
+            <a:r>
+              <a:rPr lang="en-US" dirty="0"/>
+              <a:t>Kind (story, bug, etc.)</a:t>
+            </a:r>
+          </a:p>
+        </p:txBody>
+      </p:sp>
+      <p:sp>
+        <p:nvSpPr>
+          <p:cNvPr id="101" name="TextBox 100">
+            <a:extLst>
+              <a:ext uri="{FF2B5EF4-FFF2-40B4-BE49-F238E27FC236}">
+                <a16:creationId xmlns:a16="http://schemas.microsoft.com/office/drawing/2014/main" id="{5B93EE8B-D0C1-F221-139E-E61FC7F00403}"/>
+              </a:ext>
+            </a:extLst>
+          </p:cNvPr>
+          <p:cNvSpPr txBox="1"/>
+          <p:nvPr/>
+        </p:nvSpPr>
+        <p:spPr>
+          <a:xfrm>
+            <a:off x="6452867" y="3846474"/>
+            <a:ext cx="1509965" cy="369332"/>
+          </a:xfrm>
+          <a:prstGeom prst="rect">
+            <a:avLst/>
+          </a:prstGeom>
+          <a:noFill/>
+        </p:spPr>
+        <p:txBody>
+          <a:bodyPr wrap="none" rtlCol="0">
+            <a:spAutoFit/>
+          </a:bodyPr>
+          <a:lstStyle/>
+          <a:p>
+            <a:r>
+              <a:rPr lang="en-US" dirty="0"/>
+              <a:t>State (status)</a:t>
+            </a:r>
+          </a:p>
+        </p:txBody>
+      </p:sp>
+      <p:sp>
+        <p:nvSpPr>
+          <p:cNvPr id="102" name="TextBox 101">
+            <a:extLst>
+              <a:ext uri="{FF2B5EF4-FFF2-40B4-BE49-F238E27FC236}">
+                <a16:creationId xmlns:a16="http://schemas.microsoft.com/office/drawing/2014/main" id="{0D5C63B0-8E71-12FB-161F-7F0A644EBFAC}"/>
+              </a:ext>
+            </a:extLst>
+          </p:cNvPr>
+          <p:cNvSpPr txBox="1"/>
+          <p:nvPr/>
+        </p:nvSpPr>
+        <p:spPr>
+          <a:xfrm>
+            <a:off x="6488484" y="4324775"/>
+            <a:ext cx="1510157" cy="369332"/>
+          </a:xfrm>
+          <a:prstGeom prst="rect">
+            <a:avLst/>
+          </a:prstGeom>
+          <a:noFill/>
+        </p:spPr>
+        <p:txBody>
+          <a:bodyPr wrap="none" rtlCol="0">
+            <a:spAutoFit/>
+          </a:bodyPr>
+          <a:lstStyle/>
+          <a:p>
+            <a:r>
+              <a:rPr lang="en-US" dirty="0"/>
+              <a:t>Created Date</a:t>
+            </a:r>
+          </a:p>
+        </p:txBody>
+      </p:sp>
+      <p:sp>
+        <p:nvSpPr>
+          <p:cNvPr id="103" name="TextBox 102">
+            <a:extLst>
+              <a:ext uri="{FF2B5EF4-FFF2-40B4-BE49-F238E27FC236}">
+                <a16:creationId xmlns:a16="http://schemas.microsoft.com/office/drawing/2014/main" id="{86B583E7-07ED-018C-F568-9E8D77B53E2B}"/>
+              </a:ext>
+            </a:extLst>
+          </p:cNvPr>
+          <p:cNvSpPr txBox="1"/>
+          <p:nvPr/>
+        </p:nvSpPr>
+        <p:spPr>
+          <a:xfrm>
+            <a:off x="6524101" y="4803076"/>
+            <a:ext cx="1275734" cy="369332"/>
+          </a:xfrm>
+          <a:prstGeom prst="rect">
+            <a:avLst/>
+          </a:prstGeom>
+          <a:noFill/>
+        </p:spPr>
+        <p:txBody>
+          <a:bodyPr wrap="none" rtlCol="0">
+            <a:spAutoFit/>
+          </a:bodyPr>
+          <a:lstStyle/>
+          <a:p>
+            <a:r>
+              <a:rPr lang="en-US" dirty="0"/>
+              <a:t>Created By</a:t>
+            </a:r>
+          </a:p>
+        </p:txBody>
+      </p:sp>
+      <p:sp>
+        <p:nvSpPr>
+          <p:cNvPr id="104" name="TextBox 103">
+            <a:extLst>
+              <a:ext uri="{FF2B5EF4-FFF2-40B4-BE49-F238E27FC236}">
+                <a16:creationId xmlns:a16="http://schemas.microsoft.com/office/drawing/2014/main" id="{6847BBA3-CFDF-174F-A8D1-9E6CD9EA6151}"/>
+              </a:ext>
+            </a:extLst>
+          </p:cNvPr>
+          <p:cNvSpPr txBox="1"/>
+          <p:nvPr/>
+        </p:nvSpPr>
+        <p:spPr>
+          <a:xfrm>
+            <a:off x="6526213" y="5280922"/>
+            <a:ext cx="1571007" cy="369332"/>
+          </a:xfrm>
+          <a:prstGeom prst="rect">
+            <a:avLst/>
+          </a:prstGeom>
+          <a:noFill/>
+        </p:spPr>
+        <p:txBody>
+          <a:bodyPr wrap="none" rtlCol="0">
+            <a:spAutoFit/>
+          </a:bodyPr>
+          <a:lstStyle/>
+          <a:p>
+            <a:r>
+              <a:rPr lang="en-US" dirty="0"/>
+              <a:t>Updated Date</a:t>
+            </a:r>
+          </a:p>
+        </p:txBody>
+      </p:sp>
+      <p:sp>
+        <p:nvSpPr>
+          <p:cNvPr id="105" name="TextBox 104">
+            <a:extLst>
+              <a:ext uri="{FF2B5EF4-FFF2-40B4-BE49-F238E27FC236}">
+                <a16:creationId xmlns:a16="http://schemas.microsoft.com/office/drawing/2014/main" id="{66E57D5C-E364-33F5-A56E-466DC794A6D7}"/>
+              </a:ext>
+            </a:extLst>
+          </p:cNvPr>
+          <p:cNvSpPr txBox="1"/>
+          <p:nvPr/>
+        </p:nvSpPr>
+        <p:spPr>
+          <a:xfrm>
+            <a:off x="6569658" y="5740195"/>
+            <a:ext cx="1358770" cy="369332"/>
+          </a:xfrm>
+          <a:prstGeom prst="rect">
+            <a:avLst/>
+          </a:prstGeom>
+          <a:noFill/>
+        </p:spPr>
+        <p:txBody>
+          <a:bodyPr wrap="none" rtlCol="0">
+            <a:spAutoFit/>
+          </a:bodyPr>
+          <a:lstStyle/>
+          <a:p>
+            <a:r>
+              <a:rPr lang="en-US" dirty="0"/>
+              <a:t>Assigned To</a:t>
+            </a:r>
+          </a:p>
+        </p:txBody>
+      </p:sp>
+      <p:sp>
+        <p:nvSpPr>
+          <p:cNvPr id="106" name="TextBox 105">
+            <a:extLst>
+              <a:ext uri="{FF2B5EF4-FFF2-40B4-BE49-F238E27FC236}">
+                <a16:creationId xmlns:a16="http://schemas.microsoft.com/office/drawing/2014/main" id="{DE420852-41F2-5AD6-5C96-4A28EF841897}"/>
+              </a:ext>
+            </a:extLst>
+          </p:cNvPr>
+          <p:cNvSpPr txBox="1"/>
+          <p:nvPr/>
+        </p:nvSpPr>
+        <p:spPr>
+          <a:xfrm>
+            <a:off x="10091223" y="3397061"/>
+            <a:ext cx="1742400" cy="369332"/>
+          </a:xfrm>
+          <a:prstGeom prst="rect">
+            <a:avLst/>
+          </a:prstGeom>
+          <a:noFill/>
+        </p:spPr>
+        <p:txBody>
+          <a:bodyPr wrap="none" rtlCol="0">
+            <a:spAutoFit/>
+          </a:bodyPr>
+          <a:lstStyle/>
+          <a:p>
+            <a:r>
+              <a:rPr lang="en-US" dirty="0"/>
+              <a:t>Priority/Severity</a:t>
+            </a:r>
+          </a:p>
+        </p:txBody>
+      </p:sp>
+      <p:sp>
+        <p:nvSpPr>
+          <p:cNvPr id="107" name="TextBox 106">
+            <a:extLst>
+              <a:ext uri="{FF2B5EF4-FFF2-40B4-BE49-F238E27FC236}">
+                <a16:creationId xmlns:a16="http://schemas.microsoft.com/office/drawing/2014/main" id="{59F66419-84E1-22DC-991D-AB603C50F971}"/>
+              </a:ext>
+            </a:extLst>
+          </p:cNvPr>
+          <p:cNvSpPr txBox="1"/>
+          <p:nvPr/>
+        </p:nvSpPr>
+        <p:spPr>
+          <a:xfrm>
+            <a:off x="10091223" y="3878982"/>
+            <a:ext cx="1708866" cy="369332"/>
+          </a:xfrm>
+          <a:prstGeom prst="rect">
+            <a:avLst/>
+          </a:prstGeom>
+          <a:noFill/>
+        </p:spPr>
+        <p:txBody>
+          <a:bodyPr wrap="none" rtlCol="0">
+            <a:spAutoFit/>
+          </a:bodyPr>
+          <a:lstStyle/>
+          <a:p>
+            <a:r>
+              <a:rPr lang="en-US" dirty="0"/>
+              <a:t>Rank (sub-sort)</a:t>
+            </a:r>
+          </a:p>
+        </p:txBody>
+      </p:sp>
+      <p:sp>
+        <p:nvSpPr>
+          <p:cNvPr id="110" name="TextBox 109">
+            <a:extLst>
+              <a:ext uri="{FF2B5EF4-FFF2-40B4-BE49-F238E27FC236}">
+                <a16:creationId xmlns:a16="http://schemas.microsoft.com/office/drawing/2014/main" id="{52ADE8E0-2F51-A8B4-D334-B1784430F032}"/>
+              </a:ext>
+            </a:extLst>
+          </p:cNvPr>
+          <p:cNvSpPr txBox="1"/>
+          <p:nvPr/>
+        </p:nvSpPr>
+        <p:spPr>
+          <a:xfrm>
+            <a:off x="7158500" y="909748"/>
+            <a:ext cx="872098" cy="369332"/>
+          </a:xfrm>
+          <a:prstGeom prst="rect">
+            <a:avLst/>
+          </a:prstGeom>
+          <a:noFill/>
+        </p:spPr>
+        <p:txBody>
+          <a:bodyPr wrap="none" rtlCol="0">
+            <a:spAutoFit/>
+          </a:bodyPr>
+          <a:lstStyle/>
+          <a:p>
+            <a:r>
+              <a:rPr lang="en-US" dirty="0"/>
+              <a:t>My Org</a:t>
+            </a:r>
+          </a:p>
+        </p:txBody>
+      </p:sp>
+      <p:pic>
+        <p:nvPicPr>
+          <p:cNvPr id="112" name="Picture 111">
+            <a:extLst>
+              <a:ext uri="{FF2B5EF4-FFF2-40B4-BE49-F238E27FC236}">
+                <a16:creationId xmlns:a16="http://schemas.microsoft.com/office/drawing/2014/main" id="{6BD56911-196D-88A5-B6F8-34CD5FB2D581}"/>
+              </a:ext>
+            </a:extLst>
+          </p:cNvPr>
+          <p:cNvPicPr>
+            <a:picLocks noChangeAspect="1"/>
+          </p:cNvPicPr>
+          <p:nvPr/>
+        </p:nvPicPr>
+        <p:blipFill>
+          <a:blip r:embed="rId25"/>
+          <a:stretch>
+            <a:fillRect/>
+          </a:stretch>
+        </p:blipFill>
+        <p:spPr>
+          <a:xfrm>
+            <a:off x="8130590" y="2099691"/>
+            <a:ext cx="495369" cy="485843"/>
+          </a:xfrm>
+          <a:prstGeom prst="rect">
+            <a:avLst/>
+          </a:prstGeom>
+        </p:spPr>
+      </p:pic>
+      <p:pic>
+        <p:nvPicPr>
+          <p:cNvPr id="114" name="Picture 113">
+            <a:extLst>
+              <a:ext uri="{FF2B5EF4-FFF2-40B4-BE49-F238E27FC236}">
+                <a16:creationId xmlns:a16="http://schemas.microsoft.com/office/drawing/2014/main" id="{7EE802DD-E969-E618-1147-211424B72779}"/>
+              </a:ext>
+            </a:extLst>
+          </p:cNvPr>
+          <p:cNvPicPr>
+            <a:picLocks noChangeAspect="1"/>
+          </p:cNvPicPr>
+          <p:nvPr/>
+        </p:nvPicPr>
+        <p:blipFill>
+          <a:blip r:embed="rId26"/>
+          <a:stretch>
+            <a:fillRect/>
+          </a:stretch>
+        </p:blipFill>
+        <p:spPr>
+          <a:xfrm>
+            <a:off x="8757046" y="2101216"/>
+            <a:ext cx="495369" cy="485843"/>
+          </a:xfrm>
+          <a:prstGeom prst="rect">
+            <a:avLst/>
+          </a:prstGeom>
+        </p:spPr>
+      </p:pic>
+      <p:sp>
+        <p:nvSpPr>
+          <p:cNvPr id="115" name="TextBox 114">
+            <a:extLst>
+              <a:ext uri="{FF2B5EF4-FFF2-40B4-BE49-F238E27FC236}">
+                <a16:creationId xmlns:a16="http://schemas.microsoft.com/office/drawing/2014/main" id="{8EF1E57E-4512-00B8-BCF3-61091A634927}"/>
+              </a:ext>
+            </a:extLst>
+          </p:cNvPr>
+          <p:cNvSpPr txBox="1"/>
+          <p:nvPr/>
+        </p:nvSpPr>
+        <p:spPr>
+          <a:xfrm>
+            <a:off x="7992217" y="1739944"/>
+            <a:ext cx="1593906" cy="369332"/>
+          </a:xfrm>
+          <a:prstGeom prst="rect">
+            <a:avLst/>
+          </a:prstGeom>
+          <a:noFill/>
+        </p:spPr>
+        <p:txBody>
+          <a:bodyPr wrap="square">
+            <a:spAutoFit/>
+          </a:bodyPr>
+          <a:lstStyle/>
+          <a:p>
+            <a:r>
+              <a:rPr lang="en-US" dirty="0">
+                <a:solidFill>
+                  <a:srgbClr val="7030A0"/>
+                </a:solidFill>
+                <a:latin typeface="Roboto" panose="02000000000000000000" pitchFamily="2" charset="0"/>
+                <a:ea typeface="Roboto" panose="02000000000000000000" pitchFamily="2" charset="0"/>
+              </a:rPr>
+              <a:t>Check Toggle</a:t>
+            </a:r>
+            <a:endParaRPr lang="en-US" sz="1100" dirty="0">
+              <a:solidFill>
+                <a:srgbClr val="7030A0"/>
+              </a:solidFill>
+              <a:latin typeface="Roboto" panose="02000000000000000000" pitchFamily="2" charset="0"/>
+              <a:ea typeface="Roboto" panose="02000000000000000000" pitchFamily="2" charset="0"/>
+            </a:endParaRPr>
+          </a:p>
+        </p:txBody>
+      </p:sp>
+      <p:pic>
+        <p:nvPicPr>
+          <p:cNvPr id="117" name="Picture 116">
+            <a:extLst>
+              <a:ext uri="{FF2B5EF4-FFF2-40B4-BE49-F238E27FC236}">
+                <a16:creationId xmlns:a16="http://schemas.microsoft.com/office/drawing/2014/main" id="{9E1C0412-2001-6160-B0D0-21071B5D2341}"/>
+              </a:ext>
+            </a:extLst>
+          </p:cNvPr>
+          <p:cNvPicPr>
+            <a:picLocks noChangeAspect="1"/>
+          </p:cNvPicPr>
+          <p:nvPr/>
+        </p:nvPicPr>
+        <p:blipFill>
+          <a:blip r:embed="rId27"/>
+          <a:stretch>
+            <a:fillRect/>
+          </a:stretch>
+        </p:blipFill>
+        <p:spPr>
+          <a:xfrm>
+            <a:off x="6757181" y="861200"/>
+            <a:ext cx="450668" cy="500742"/>
+          </a:xfrm>
+          <a:prstGeom prst="rect">
+            <a:avLst/>
+          </a:prstGeom>
+        </p:spPr>
+      </p:pic>
+      <p:sp>
+        <p:nvSpPr>
+          <p:cNvPr id="3" name="Slide Number Placeholder 2">
+            <a:extLst>
+              <a:ext uri="{FF2B5EF4-FFF2-40B4-BE49-F238E27FC236}">
+                <a16:creationId xmlns:a16="http://schemas.microsoft.com/office/drawing/2014/main" id="{8A9E0057-79D8-30FD-2627-00AA20012467}"/>
+              </a:ext>
+            </a:extLst>
+          </p:cNvPr>
+          <p:cNvSpPr>
+            <a:spLocks noGrp="1"/>
+          </p:cNvSpPr>
+          <p:nvPr>
+            <p:ph type="sldNum" sz="quarter" idx="12"/>
+          </p:nvPr>
+        </p:nvSpPr>
+        <p:spPr/>
+        <p:txBody>
+          <a:bodyPr/>
+          <a:lstStyle/>
+          <a:p>
+            <a:fld id="{2BA602F1-D8B6-4D7F-AE46-BA4CF4319B0F}" type="slidenum">
+              <a:rPr lang="en-US" smtClean="0"/>
+              <a:t>2</a:t>
+            </a:fld>
+            <a:endParaRPr lang="en-US"/>
+          </a:p>
+        </p:txBody>
+      </p:sp>
+    </p:spTree>
+    <p:extLst>
+      <p:ext uri="{BB962C8B-B14F-4D97-AF65-F5344CB8AC3E}">
+        <p14:creationId xmlns:p14="http://schemas.microsoft.com/office/powerpoint/2010/main" val="3719551562"/>
+      </p:ext>
+    </p:extLst>
+  </p:cSld>
+  <p:clrMapOvr>
+    <a:masterClrMapping/>
+  </p:clrMapOvr>
+</p:sld>
+</file>
+
+<file path=ppt/slides/slide20.xml><?xml version="1.0" encoding="utf-8"?>
 <p:sld xmlns:a="http://schemas.openxmlformats.org/drawingml/2006/main" xmlns:r="http://schemas.openxmlformats.org/officeDocument/2006/relationships" xmlns:p="http://schemas.openxmlformats.org/presentationml/2006/main">
   <p:cSld>
     <p:spTree>
@@ -15723,6 +18800,35 @@
           </a:p>
         </p:txBody>
       </p:sp>
+      <p:sp>
+        <p:nvSpPr>
+          <p:cNvPr id="5" name="Slide Number Placeholder 4">
+            <a:extLst>
+              <a:ext uri="{FF2B5EF4-FFF2-40B4-BE49-F238E27FC236}">
+                <a16:creationId xmlns:a16="http://schemas.microsoft.com/office/drawing/2014/main" id="{FA3CFF79-2005-B723-29AD-2B19FC223A11}"/>
+              </a:ext>
+            </a:extLst>
+          </p:cNvPr>
+          <p:cNvSpPr>
+            <a:spLocks noGrp="1"/>
+          </p:cNvSpPr>
+          <p:nvPr>
+            <p:ph type="sldNum" sz="quarter" idx="12"/>
+          </p:nvPr>
+        </p:nvSpPr>
+        <p:spPr/>
+        <p:txBody>
+          <a:bodyPr/>
+          <a:lstStyle/>
+          <a:p>
+            <a:fld id="{2BA602F1-D8B6-4D7F-AE46-BA4CF4319B0F}" type="slidenum">
+              <a:rPr lang="en-US" smtClean="0"/>
+              <a:t>20</a:t>
+            </a:fld>
+            <a:endParaRPr lang="en-US"/>
+          </a:p>
+        </p:txBody>
+      </p:sp>
     </p:spTree>
     <p:extLst>
       <p:ext uri="{BB962C8B-B14F-4D97-AF65-F5344CB8AC3E}">
@@ -15741,7 +18847,7 @@
 </p:sld>
 </file>
 
-<file path=ppt/slides/slide2.xml><?xml version="1.0" encoding="utf-8"?>
+<file path=ppt/slides/slide21.xml><?xml version="1.0" encoding="utf-8"?>
 <p:sld xmlns:a="http://schemas.openxmlformats.org/drawingml/2006/main" xmlns:r="http://schemas.openxmlformats.org/officeDocument/2006/relationships" xmlns:p="http://schemas.openxmlformats.org/presentationml/2006/main">
   <p:cSld>
     <p:spTree>
@@ -15763,2106 +18869,6 @@
           <p:cNvPr id="2" name="Title 1">
             <a:extLst>
               <a:ext uri="{FF2B5EF4-FFF2-40B4-BE49-F238E27FC236}">
-                <a16:creationId xmlns:a16="http://schemas.microsoft.com/office/drawing/2014/main" id="{37DB5E0B-1627-9AA4-0866-227B19EAB64B}"/>
-              </a:ext>
-            </a:extLst>
-          </p:cNvPr>
-          <p:cNvSpPr>
-            <a:spLocks noGrp="1"/>
-          </p:cNvSpPr>
-          <p:nvPr>
-            <p:ph type="title"/>
-          </p:nvPr>
-        </p:nvSpPr>
-        <p:spPr>
-          <a:xfrm>
-            <a:off x="158261" y="189280"/>
-            <a:ext cx="2947018" cy="508244"/>
-          </a:xfrm>
-        </p:spPr>
-        <p:txBody>
-          <a:bodyPr>
-            <a:normAutofit fontScale="90000"/>
-          </a:bodyPr>
-          <a:lstStyle/>
-          <a:p>
-            <a:r>
-              <a:rPr lang="en-US" dirty="0"/>
-              <a:t>UX Affordances</a:t>
-            </a:r>
-          </a:p>
-        </p:txBody>
-      </p:sp>
-      <p:pic>
-        <p:nvPicPr>
-          <p:cNvPr id="46" name="Picture 45">
-            <a:extLst>
-              <a:ext uri="{FF2B5EF4-FFF2-40B4-BE49-F238E27FC236}">
-                <a16:creationId xmlns:a16="http://schemas.microsoft.com/office/drawing/2014/main" id="{533E3045-B855-F6CF-8D21-70F515ECE0ED}"/>
-              </a:ext>
-            </a:extLst>
-          </p:cNvPr>
-          <p:cNvPicPr>
-            <a:picLocks noChangeAspect="1"/>
-          </p:cNvPicPr>
-          <p:nvPr/>
-        </p:nvPicPr>
-        <p:blipFill>
-          <a:blip r:embed="rId2">
-            <a:alphaModFix amt="40000"/>
-          </a:blip>
-          <a:stretch>
-            <a:fillRect/>
-          </a:stretch>
-        </p:blipFill>
-        <p:spPr>
-          <a:xfrm>
-            <a:off x="10334710" y="1174539"/>
-            <a:ext cx="1137899" cy="1110028"/>
-          </a:xfrm>
-          <a:prstGeom prst="rect">
-            <a:avLst/>
-          </a:prstGeom>
-        </p:spPr>
-      </p:pic>
-      <p:pic>
-        <p:nvPicPr>
-          <p:cNvPr id="4" name="Picture 3">
-            <a:extLst>
-              <a:ext uri="{FF2B5EF4-FFF2-40B4-BE49-F238E27FC236}">
-                <a16:creationId xmlns:a16="http://schemas.microsoft.com/office/drawing/2014/main" id="{07A4A583-C508-ADB4-F34D-57445D8C6213}"/>
-              </a:ext>
-            </a:extLst>
-          </p:cNvPr>
-          <p:cNvPicPr>
-            <a:picLocks noChangeAspect="1"/>
-          </p:cNvPicPr>
-          <p:nvPr/>
-        </p:nvPicPr>
-        <p:blipFill>
-          <a:blip r:embed="rId3"/>
-          <a:stretch>
-            <a:fillRect/>
-          </a:stretch>
-        </p:blipFill>
-        <p:spPr>
-          <a:xfrm>
-            <a:off x="10404553" y="1324329"/>
-            <a:ext cx="262174" cy="294503"/>
-          </a:xfrm>
-          <a:prstGeom prst="rect">
-            <a:avLst/>
-          </a:prstGeom>
-          <a:solidFill>
-            <a:schemeClr val="bg1"/>
-          </a:solidFill>
-        </p:spPr>
-      </p:pic>
-      <p:pic>
-        <p:nvPicPr>
-          <p:cNvPr id="6" name="Picture 5">
-            <a:extLst>
-              <a:ext uri="{FF2B5EF4-FFF2-40B4-BE49-F238E27FC236}">
-                <a16:creationId xmlns:a16="http://schemas.microsoft.com/office/drawing/2014/main" id="{59D2ABDD-6F7D-0CA2-C3E9-8CBB6A9A3EAD}"/>
-              </a:ext>
-            </a:extLst>
-          </p:cNvPr>
-          <p:cNvPicPr>
-            <a:picLocks noChangeAspect="1"/>
-          </p:cNvPicPr>
-          <p:nvPr/>
-        </p:nvPicPr>
-        <p:blipFill>
-          <a:blip r:embed="rId4"/>
-          <a:stretch>
-            <a:fillRect/>
-          </a:stretch>
-        </p:blipFill>
-        <p:spPr>
-          <a:xfrm>
-            <a:off x="10666727" y="1973501"/>
-            <a:ext cx="452846" cy="341003"/>
-          </a:xfrm>
-          <a:prstGeom prst="rect">
-            <a:avLst/>
-          </a:prstGeom>
-          <a:solidFill>
-            <a:schemeClr val="bg1"/>
-          </a:solidFill>
-        </p:spPr>
-      </p:pic>
-      <p:pic>
-        <p:nvPicPr>
-          <p:cNvPr id="8" name="Picture 7">
-            <a:extLst>
-              <a:ext uri="{FF2B5EF4-FFF2-40B4-BE49-F238E27FC236}">
-                <a16:creationId xmlns:a16="http://schemas.microsoft.com/office/drawing/2014/main" id="{D2E1E35B-061A-5097-2E7F-A646BAF70AC0}"/>
-              </a:ext>
-            </a:extLst>
-          </p:cNvPr>
-          <p:cNvPicPr>
-            <a:picLocks noChangeAspect="1"/>
-          </p:cNvPicPr>
-          <p:nvPr/>
-        </p:nvPicPr>
-        <p:blipFill>
-          <a:blip r:embed="rId5"/>
-          <a:stretch>
-            <a:fillRect/>
-          </a:stretch>
-        </p:blipFill>
-        <p:spPr>
-          <a:xfrm>
-            <a:off x="11109228" y="1361942"/>
-            <a:ext cx="436957" cy="333253"/>
-          </a:xfrm>
-          <a:prstGeom prst="rect">
-            <a:avLst/>
-          </a:prstGeom>
-          <a:solidFill>
-            <a:schemeClr val="bg1"/>
-          </a:solidFill>
-        </p:spPr>
-      </p:pic>
-      <p:sp>
-        <p:nvSpPr>
-          <p:cNvPr id="27" name="TextBox 26">
-            <a:extLst>
-              <a:ext uri="{FF2B5EF4-FFF2-40B4-BE49-F238E27FC236}">
-                <a16:creationId xmlns:a16="http://schemas.microsoft.com/office/drawing/2014/main" id="{241C90DF-3D6C-5B23-857E-662FD163E9EE}"/>
-              </a:ext>
-            </a:extLst>
-          </p:cNvPr>
-          <p:cNvSpPr txBox="1"/>
-          <p:nvPr/>
-        </p:nvSpPr>
-        <p:spPr>
-          <a:xfrm>
-            <a:off x="10903659" y="1657190"/>
-            <a:ext cx="705642" cy="230832"/>
-          </a:xfrm>
-          <a:prstGeom prst="rect">
-            <a:avLst/>
-          </a:prstGeom>
-          <a:noFill/>
-        </p:spPr>
-        <p:txBody>
-          <a:bodyPr wrap="none" rtlCol="0">
-            <a:spAutoFit/>
-          </a:bodyPr>
-          <a:lstStyle/>
-          <a:p>
-            <a:r>
-              <a:rPr lang="en-US" sz="900" dirty="0"/>
-              <a:t>Ascending</a:t>
-            </a:r>
-          </a:p>
-        </p:txBody>
-      </p:sp>
-      <p:sp>
-        <p:nvSpPr>
-          <p:cNvPr id="28" name="TextBox 27">
-            <a:extLst>
-              <a:ext uri="{FF2B5EF4-FFF2-40B4-BE49-F238E27FC236}">
-                <a16:creationId xmlns:a16="http://schemas.microsoft.com/office/drawing/2014/main" id="{41FE7BC5-04D2-D774-6F93-7EF7B6F09A7E}"/>
-              </a:ext>
-            </a:extLst>
-          </p:cNvPr>
-          <p:cNvSpPr txBox="1"/>
-          <p:nvPr/>
-        </p:nvSpPr>
-        <p:spPr>
-          <a:xfrm>
-            <a:off x="10535640" y="2284567"/>
-            <a:ext cx="777777" cy="230832"/>
-          </a:xfrm>
-          <a:prstGeom prst="rect">
-            <a:avLst/>
-          </a:prstGeom>
-          <a:noFill/>
-        </p:spPr>
-        <p:txBody>
-          <a:bodyPr wrap="none" rtlCol="0">
-            <a:spAutoFit/>
-          </a:bodyPr>
-          <a:lstStyle/>
-          <a:p>
-            <a:r>
-              <a:rPr lang="en-US" sz="900" dirty="0"/>
-              <a:t>Descending</a:t>
-            </a:r>
-          </a:p>
-        </p:txBody>
-      </p:sp>
-      <p:sp>
-        <p:nvSpPr>
-          <p:cNvPr id="29" name="TextBox 28">
-            <a:extLst>
-              <a:ext uri="{FF2B5EF4-FFF2-40B4-BE49-F238E27FC236}">
-                <a16:creationId xmlns:a16="http://schemas.microsoft.com/office/drawing/2014/main" id="{082798F8-568D-9827-CBE3-68FEACE3C079}"/>
-              </a:ext>
-            </a:extLst>
-          </p:cNvPr>
-          <p:cNvSpPr txBox="1"/>
-          <p:nvPr/>
-        </p:nvSpPr>
-        <p:spPr>
-          <a:xfrm>
-            <a:off x="10211673" y="1618934"/>
-            <a:ext cx="647934" cy="230832"/>
-          </a:xfrm>
-          <a:prstGeom prst="rect">
-            <a:avLst/>
-          </a:prstGeom>
-          <a:noFill/>
-        </p:spPr>
-        <p:txBody>
-          <a:bodyPr wrap="none" rtlCol="0">
-            <a:spAutoFit/>
-          </a:bodyPr>
-          <a:lstStyle/>
-          <a:p>
-            <a:r>
-              <a:rPr lang="en-US" sz="900" dirty="0"/>
-              <a:t>Unsorted</a:t>
-            </a:r>
-          </a:p>
-        </p:txBody>
-      </p:sp>
-      <p:sp>
-        <p:nvSpPr>
-          <p:cNvPr id="31" name="TextBox 30">
-            <a:extLst>
-              <a:ext uri="{FF2B5EF4-FFF2-40B4-BE49-F238E27FC236}">
-                <a16:creationId xmlns:a16="http://schemas.microsoft.com/office/drawing/2014/main" id="{9448A1F5-F891-C6B9-430B-5A437B1538A8}"/>
-              </a:ext>
-            </a:extLst>
-          </p:cNvPr>
-          <p:cNvSpPr txBox="1"/>
-          <p:nvPr/>
-        </p:nvSpPr>
-        <p:spPr>
-          <a:xfrm>
-            <a:off x="9683528" y="844986"/>
-            <a:ext cx="2419243" cy="369332"/>
-          </a:xfrm>
-          <a:prstGeom prst="rect">
-            <a:avLst/>
-          </a:prstGeom>
-          <a:noFill/>
-        </p:spPr>
-        <p:txBody>
-          <a:bodyPr wrap="square">
-            <a:spAutoFit/>
-          </a:bodyPr>
-          <a:lstStyle/>
-          <a:p>
-            <a:r>
-              <a:rPr lang="en-US" dirty="0">
-                <a:solidFill>
-                  <a:srgbClr val="7030A0"/>
-                </a:solidFill>
-                <a:latin typeface="Roboto" panose="02000000000000000000" pitchFamily="2" charset="0"/>
-                <a:ea typeface="Roboto" panose="02000000000000000000" pitchFamily="2" charset="0"/>
-              </a:rPr>
-              <a:t>Sort direction rotation</a:t>
-            </a:r>
-            <a:endParaRPr lang="en-US" sz="1100" dirty="0">
-              <a:solidFill>
-                <a:srgbClr val="7030A0"/>
-              </a:solidFill>
-              <a:latin typeface="Roboto" panose="02000000000000000000" pitchFamily="2" charset="0"/>
-              <a:ea typeface="Roboto" panose="02000000000000000000" pitchFamily="2" charset="0"/>
-            </a:endParaRPr>
-          </a:p>
-        </p:txBody>
-      </p:sp>
-      <p:pic>
-        <p:nvPicPr>
-          <p:cNvPr id="37" name="Picture 36">
-            <a:extLst>
-              <a:ext uri="{FF2B5EF4-FFF2-40B4-BE49-F238E27FC236}">
-                <a16:creationId xmlns:a16="http://schemas.microsoft.com/office/drawing/2014/main" id="{FBA8FE12-BBAE-6949-471B-96030C80A0BA}"/>
-              </a:ext>
-            </a:extLst>
-          </p:cNvPr>
-          <p:cNvPicPr>
-            <a:picLocks noChangeAspect="1"/>
-          </p:cNvPicPr>
-          <p:nvPr/>
-        </p:nvPicPr>
-        <p:blipFill>
-          <a:blip r:embed="rId6"/>
-          <a:stretch>
-            <a:fillRect/>
-          </a:stretch>
-        </p:blipFill>
-        <p:spPr>
-          <a:xfrm>
-            <a:off x="303310" y="804605"/>
-            <a:ext cx="452384" cy="671954"/>
-          </a:xfrm>
-          <a:prstGeom prst="rect">
-            <a:avLst/>
-          </a:prstGeom>
-        </p:spPr>
-      </p:pic>
-      <p:sp>
-        <p:nvSpPr>
-          <p:cNvPr id="38" name="TextBox 37">
-            <a:extLst>
-              <a:ext uri="{FF2B5EF4-FFF2-40B4-BE49-F238E27FC236}">
-                <a16:creationId xmlns:a16="http://schemas.microsoft.com/office/drawing/2014/main" id="{86F84C14-C329-73CD-B403-97F16E66518F}"/>
-              </a:ext>
-            </a:extLst>
-          </p:cNvPr>
-          <p:cNvSpPr txBox="1"/>
-          <p:nvPr/>
-        </p:nvSpPr>
-        <p:spPr>
-          <a:xfrm>
-            <a:off x="877581" y="955915"/>
-            <a:ext cx="2944672" cy="646331"/>
-          </a:xfrm>
-          <a:prstGeom prst="rect">
-            <a:avLst/>
-          </a:prstGeom>
-          <a:noFill/>
-        </p:spPr>
-        <p:txBody>
-          <a:bodyPr wrap="square" rtlCol="0">
-            <a:spAutoFit/>
-          </a:bodyPr>
-          <a:lstStyle/>
-          <a:p>
-            <a:r>
-              <a:rPr lang="en-US" dirty="0"/>
-              <a:t>Any, Nothing, Nada, Who-Cares? None-of-the-…, etc.</a:t>
-            </a:r>
-          </a:p>
-        </p:txBody>
-      </p:sp>
-      <p:pic>
-        <p:nvPicPr>
-          <p:cNvPr id="40" name="Picture 39">
-            <a:extLst>
-              <a:ext uri="{FF2B5EF4-FFF2-40B4-BE49-F238E27FC236}">
-                <a16:creationId xmlns:a16="http://schemas.microsoft.com/office/drawing/2014/main" id="{EAEE0DAA-FB23-F237-F2CF-1B57E4FFE4D4}"/>
-              </a:ext>
-            </a:extLst>
-          </p:cNvPr>
-          <p:cNvPicPr>
-            <a:picLocks noChangeAspect="1"/>
-          </p:cNvPicPr>
-          <p:nvPr/>
-        </p:nvPicPr>
-        <p:blipFill>
-          <a:blip r:embed="rId7"/>
-          <a:stretch>
-            <a:fillRect/>
-          </a:stretch>
-        </p:blipFill>
-        <p:spPr>
-          <a:xfrm>
-            <a:off x="325606" y="1641735"/>
-            <a:ext cx="430088" cy="537610"/>
-          </a:xfrm>
-          <a:prstGeom prst="rect">
-            <a:avLst/>
-          </a:prstGeom>
-        </p:spPr>
-      </p:pic>
-      <p:pic>
-        <p:nvPicPr>
-          <p:cNvPr id="42" name="Picture 41">
-            <a:extLst>
-              <a:ext uri="{FF2B5EF4-FFF2-40B4-BE49-F238E27FC236}">
-                <a16:creationId xmlns:a16="http://schemas.microsoft.com/office/drawing/2014/main" id="{54F7A852-5D14-7045-BA7F-EBA1B413DB69}"/>
-              </a:ext>
-            </a:extLst>
-          </p:cNvPr>
-          <p:cNvPicPr>
-            <a:picLocks noChangeAspect="1"/>
-          </p:cNvPicPr>
-          <p:nvPr/>
-        </p:nvPicPr>
-        <p:blipFill>
-          <a:blip r:embed="rId8"/>
-          <a:stretch>
-            <a:fillRect/>
-          </a:stretch>
-        </p:blipFill>
-        <p:spPr>
-          <a:xfrm>
-            <a:off x="327129" y="2376511"/>
-            <a:ext cx="430088" cy="418639"/>
-          </a:xfrm>
-          <a:prstGeom prst="rect">
-            <a:avLst/>
-          </a:prstGeom>
-        </p:spPr>
-      </p:pic>
-      <p:sp>
-        <p:nvSpPr>
-          <p:cNvPr id="43" name="TextBox 42">
-            <a:extLst>
-              <a:ext uri="{FF2B5EF4-FFF2-40B4-BE49-F238E27FC236}">
-                <a16:creationId xmlns:a16="http://schemas.microsoft.com/office/drawing/2014/main" id="{A33305A1-BABE-E96F-D13F-3C6B681848CE}"/>
-              </a:ext>
-            </a:extLst>
-          </p:cNvPr>
-          <p:cNvSpPr txBox="1"/>
-          <p:nvPr/>
-        </p:nvSpPr>
-        <p:spPr>
-          <a:xfrm>
-            <a:off x="853836" y="1711479"/>
-            <a:ext cx="2305246" cy="369332"/>
-          </a:xfrm>
-          <a:prstGeom prst="rect">
-            <a:avLst/>
-          </a:prstGeom>
-          <a:noFill/>
-        </p:spPr>
-        <p:txBody>
-          <a:bodyPr wrap="none" rtlCol="0">
-            <a:spAutoFit/>
-          </a:bodyPr>
-          <a:lstStyle/>
-          <a:p>
-            <a:r>
-              <a:rPr lang="en-US" dirty="0"/>
-              <a:t>Me, aka Current-User</a:t>
-            </a:r>
-          </a:p>
-        </p:txBody>
-      </p:sp>
-      <p:sp>
-        <p:nvSpPr>
-          <p:cNvPr id="44" name="TextBox 43">
-            <a:extLst>
-              <a:ext uri="{FF2B5EF4-FFF2-40B4-BE49-F238E27FC236}">
-                <a16:creationId xmlns:a16="http://schemas.microsoft.com/office/drawing/2014/main" id="{EBA089A5-5778-C98D-5B1B-31300A6CDF94}"/>
-              </a:ext>
-            </a:extLst>
-          </p:cNvPr>
-          <p:cNvSpPr txBox="1"/>
-          <p:nvPr/>
-        </p:nvSpPr>
-        <p:spPr>
-          <a:xfrm>
-            <a:off x="906250" y="2396025"/>
-            <a:ext cx="1314206" cy="369332"/>
-          </a:xfrm>
-          <a:prstGeom prst="rect">
-            <a:avLst/>
-          </a:prstGeom>
-          <a:noFill/>
-        </p:spPr>
-        <p:txBody>
-          <a:bodyPr wrap="none" rtlCol="0">
-            <a:spAutoFit/>
-          </a:bodyPr>
-          <a:lstStyle/>
-          <a:p>
-            <a:r>
-              <a:rPr lang="en-US" dirty="0"/>
-              <a:t>Now, Today</a:t>
-            </a:r>
-          </a:p>
-        </p:txBody>
-      </p:sp>
-      <p:pic>
-        <p:nvPicPr>
-          <p:cNvPr id="50" name="Picture 49">
-            <a:extLst>
-              <a:ext uri="{FF2B5EF4-FFF2-40B4-BE49-F238E27FC236}">
-                <a16:creationId xmlns:a16="http://schemas.microsoft.com/office/drawing/2014/main" id="{17C3E84A-CC7F-7FD2-273A-51478CA2ED01}"/>
-              </a:ext>
-            </a:extLst>
-          </p:cNvPr>
-          <p:cNvPicPr>
-            <a:picLocks noChangeAspect="1"/>
-          </p:cNvPicPr>
-          <p:nvPr/>
-        </p:nvPicPr>
-        <p:blipFill>
-          <a:blip r:embed="rId9"/>
-          <a:stretch>
-            <a:fillRect/>
-          </a:stretch>
-        </p:blipFill>
-        <p:spPr>
-          <a:xfrm>
-            <a:off x="3965524" y="955916"/>
-            <a:ext cx="365175" cy="431091"/>
-          </a:xfrm>
-          <a:prstGeom prst="rect">
-            <a:avLst/>
-          </a:prstGeom>
-        </p:spPr>
-      </p:pic>
-      <p:pic>
-        <p:nvPicPr>
-          <p:cNvPr id="52" name="Picture 51">
-            <a:extLst>
-              <a:ext uri="{FF2B5EF4-FFF2-40B4-BE49-F238E27FC236}">
-                <a16:creationId xmlns:a16="http://schemas.microsoft.com/office/drawing/2014/main" id="{E391FADB-711D-24A7-7873-0CD41F065511}"/>
-              </a:ext>
-            </a:extLst>
-          </p:cNvPr>
-          <p:cNvPicPr>
-            <a:picLocks noChangeAspect="1"/>
-          </p:cNvPicPr>
-          <p:nvPr/>
-        </p:nvPicPr>
-        <p:blipFill>
-          <a:blip r:embed="rId10"/>
-          <a:stretch>
-            <a:fillRect/>
-          </a:stretch>
-        </p:blipFill>
-        <p:spPr>
-          <a:xfrm>
-            <a:off x="3778126" y="1641735"/>
-            <a:ext cx="615234" cy="625487"/>
-          </a:xfrm>
-          <a:prstGeom prst="rect">
-            <a:avLst/>
-          </a:prstGeom>
-        </p:spPr>
-      </p:pic>
-      <p:pic>
-        <p:nvPicPr>
-          <p:cNvPr id="54" name="Picture 53">
-            <a:extLst>
-              <a:ext uri="{FF2B5EF4-FFF2-40B4-BE49-F238E27FC236}">
-                <a16:creationId xmlns:a16="http://schemas.microsoft.com/office/drawing/2014/main" id="{FB0615E4-2E70-1990-FD9D-8097B97F3429}"/>
-              </a:ext>
-            </a:extLst>
-          </p:cNvPr>
-          <p:cNvPicPr>
-            <a:picLocks noChangeAspect="1"/>
-          </p:cNvPicPr>
-          <p:nvPr/>
-        </p:nvPicPr>
-        <p:blipFill>
-          <a:blip r:embed="rId11"/>
-          <a:stretch>
-            <a:fillRect/>
-          </a:stretch>
-        </p:blipFill>
-        <p:spPr>
-          <a:xfrm>
-            <a:off x="3822252" y="2407911"/>
-            <a:ext cx="477872" cy="387239"/>
-          </a:xfrm>
-          <a:prstGeom prst="rect">
-            <a:avLst/>
-          </a:prstGeom>
-        </p:spPr>
-      </p:pic>
-      <p:sp>
-        <p:nvSpPr>
-          <p:cNvPr id="55" name="TextBox 54">
-            <a:extLst>
-              <a:ext uri="{FF2B5EF4-FFF2-40B4-BE49-F238E27FC236}">
-                <a16:creationId xmlns:a16="http://schemas.microsoft.com/office/drawing/2014/main" id="{F6F1889C-C8E7-DB7F-C3CC-5E15AB89BBE8}"/>
-              </a:ext>
-            </a:extLst>
-          </p:cNvPr>
-          <p:cNvSpPr txBox="1"/>
-          <p:nvPr/>
-        </p:nvSpPr>
-        <p:spPr>
-          <a:xfrm>
-            <a:off x="4393360" y="949815"/>
-            <a:ext cx="2075825" cy="369332"/>
-          </a:xfrm>
-          <a:prstGeom prst="rect">
-            <a:avLst/>
-          </a:prstGeom>
-          <a:noFill/>
-        </p:spPr>
-        <p:txBody>
-          <a:bodyPr wrap="none" rtlCol="0">
-            <a:spAutoFit/>
-          </a:bodyPr>
-          <a:lstStyle/>
-          <a:p>
-            <a:r>
-              <a:rPr lang="en-US" dirty="0"/>
-              <a:t>Validate Markdown</a:t>
-            </a:r>
-          </a:p>
-        </p:txBody>
-      </p:sp>
-      <p:sp>
-        <p:nvSpPr>
-          <p:cNvPr id="56" name="TextBox 55">
-            <a:extLst>
-              <a:ext uri="{FF2B5EF4-FFF2-40B4-BE49-F238E27FC236}">
-                <a16:creationId xmlns:a16="http://schemas.microsoft.com/office/drawing/2014/main" id="{BA2BF026-A322-D759-5E76-DB5E3B800E53}"/>
-              </a:ext>
-            </a:extLst>
-          </p:cNvPr>
-          <p:cNvSpPr txBox="1"/>
-          <p:nvPr/>
-        </p:nvSpPr>
-        <p:spPr>
-          <a:xfrm>
-            <a:off x="4393359" y="1711479"/>
-            <a:ext cx="2095125" cy="369332"/>
-          </a:xfrm>
-          <a:prstGeom prst="rect">
-            <a:avLst/>
-          </a:prstGeom>
-          <a:noFill/>
-        </p:spPr>
-        <p:txBody>
-          <a:bodyPr wrap="none" rtlCol="0">
-            <a:spAutoFit/>
-          </a:bodyPr>
-          <a:lstStyle/>
-          <a:p>
-            <a:r>
-              <a:rPr lang="en-US" dirty="0"/>
-              <a:t>Toggle Edit/Preview</a:t>
-            </a:r>
-          </a:p>
-        </p:txBody>
-      </p:sp>
-      <p:sp>
-        <p:nvSpPr>
-          <p:cNvPr id="57" name="TextBox 56">
-            <a:extLst>
-              <a:ext uri="{FF2B5EF4-FFF2-40B4-BE49-F238E27FC236}">
-                <a16:creationId xmlns:a16="http://schemas.microsoft.com/office/drawing/2014/main" id="{8FC9C166-C735-5C03-8CC6-21FE8F9FCB5E}"/>
-              </a:ext>
-            </a:extLst>
-          </p:cNvPr>
-          <p:cNvSpPr txBox="1"/>
-          <p:nvPr/>
-        </p:nvSpPr>
-        <p:spPr>
-          <a:xfrm>
-            <a:off x="4393359" y="2396025"/>
-            <a:ext cx="1289135" cy="369332"/>
-          </a:xfrm>
-          <a:prstGeom prst="rect">
-            <a:avLst/>
-          </a:prstGeom>
-          <a:noFill/>
-        </p:spPr>
-        <p:txBody>
-          <a:bodyPr wrap="none" rtlCol="0">
-            <a:spAutoFit/>
-          </a:bodyPr>
-          <a:lstStyle/>
-          <a:p>
-            <a:r>
-              <a:rPr lang="en-US" dirty="0"/>
-              <a:t>Spellcheck</a:t>
-            </a:r>
-          </a:p>
-        </p:txBody>
-      </p:sp>
-      <p:pic>
-        <p:nvPicPr>
-          <p:cNvPr id="59" name="Picture 58">
-            <a:extLst>
-              <a:ext uri="{FF2B5EF4-FFF2-40B4-BE49-F238E27FC236}">
-                <a16:creationId xmlns:a16="http://schemas.microsoft.com/office/drawing/2014/main" id="{B3000C5E-932A-B5B9-797F-CAADFD0E3709}"/>
-              </a:ext>
-            </a:extLst>
-          </p:cNvPr>
-          <p:cNvPicPr>
-            <a:picLocks noChangeAspect="1"/>
-          </p:cNvPicPr>
-          <p:nvPr/>
-        </p:nvPicPr>
-        <p:blipFill>
-          <a:blip r:embed="rId12"/>
-          <a:stretch>
-            <a:fillRect/>
-          </a:stretch>
-        </p:blipFill>
-        <p:spPr>
-          <a:xfrm>
-            <a:off x="311341" y="3878982"/>
-            <a:ext cx="291892" cy="369332"/>
-          </a:xfrm>
-          <a:prstGeom prst="rect">
-            <a:avLst/>
-          </a:prstGeom>
-        </p:spPr>
-      </p:pic>
-      <p:pic>
-        <p:nvPicPr>
-          <p:cNvPr id="61" name="Picture 60">
-            <a:extLst>
-              <a:ext uri="{FF2B5EF4-FFF2-40B4-BE49-F238E27FC236}">
-                <a16:creationId xmlns:a16="http://schemas.microsoft.com/office/drawing/2014/main" id="{33FA452A-C0AB-1390-76AF-5635D2E4414F}"/>
-              </a:ext>
-            </a:extLst>
-          </p:cNvPr>
-          <p:cNvPicPr>
-            <a:picLocks noChangeAspect="1"/>
-          </p:cNvPicPr>
-          <p:nvPr/>
-        </p:nvPicPr>
-        <p:blipFill>
-          <a:blip r:embed="rId13"/>
-          <a:stretch>
-            <a:fillRect/>
-          </a:stretch>
-        </p:blipFill>
-        <p:spPr>
-          <a:xfrm>
-            <a:off x="6086013" y="4785115"/>
-            <a:ext cx="321274" cy="438927"/>
-          </a:xfrm>
-          <a:prstGeom prst="rect">
-            <a:avLst/>
-          </a:prstGeom>
-        </p:spPr>
-      </p:pic>
-      <p:pic>
-        <p:nvPicPr>
-          <p:cNvPr id="63" name="Picture 62">
-            <a:extLst>
-              <a:ext uri="{FF2B5EF4-FFF2-40B4-BE49-F238E27FC236}">
-                <a16:creationId xmlns:a16="http://schemas.microsoft.com/office/drawing/2014/main" id="{E03637F9-863F-8127-C37D-212509A64259}"/>
-              </a:ext>
-            </a:extLst>
-          </p:cNvPr>
-          <p:cNvPicPr>
-            <a:picLocks noChangeAspect="1"/>
-          </p:cNvPicPr>
-          <p:nvPr/>
-        </p:nvPicPr>
-        <p:blipFill>
-          <a:blip r:embed="rId14"/>
-          <a:stretch>
-            <a:fillRect/>
-          </a:stretch>
-        </p:blipFill>
-        <p:spPr>
-          <a:xfrm>
-            <a:off x="296221" y="3459584"/>
-            <a:ext cx="322133" cy="339704"/>
-          </a:xfrm>
-          <a:prstGeom prst="rect">
-            <a:avLst/>
-          </a:prstGeom>
-        </p:spPr>
-      </p:pic>
-      <p:sp>
-        <p:nvSpPr>
-          <p:cNvPr id="64" name="TextBox 63">
-            <a:extLst>
-              <a:ext uri="{FF2B5EF4-FFF2-40B4-BE49-F238E27FC236}">
-                <a16:creationId xmlns:a16="http://schemas.microsoft.com/office/drawing/2014/main" id="{8FC20B5C-F178-C513-72D4-1DD6C23D9C66}"/>
-              </a:ext>
-            </a:extLst>
-          </p:cNvPr>
-          <p:cNvSpPr txBox="1"/>
-          <p:nvPr/>
-        </p:nvSpPr>
-        <p:spPr>
-          <a:xfrm>
-            <a:off x="223847" y="3075001"/>
-            <a:ext cx="1063694" cy="369332"/>
-          </a:xfrm>
-          <a:prstGeom prst="rect">
-            <a:avLst/>
-          </a:prstGeom>
-          <a:noFill/>
-        </p:spPr>
-        <p:txBody>
-          <a:bodyPr wrap="square">
-            <a:spAutoFit/>
-          </a:bodyPr>
-          <a:lstStyle/>
-          <a:p>
-            <a:r>
-              <a:rPr lang="en-US" dirty="0">
-                <a:solidFill>
-                  <a:srgbClr val="7030A0"/>
-                </a:solidFill>
-                <a:latin typeface="Roboto" panose="02000000000000000000" pitchFamily="2" charset="0"/>
-                <a:ea typeface="Roboto" panose="02000000000000000000" pitchFamily="2" charset="0"/>
-              </a:rPr>
-              <a:t>Entities</a:t>
-            </a:r>
-            <a:endParaRPr lang="en-US" sz="1100" dirty="0">
-              <a:solidFill>
-                <a:srgbClr val="7030A0"/>
-              </a:solidFill>
-              <a:latin typeface="Roboto" panose="02000000000000000000" pitchFamily="2" charset="0"/>
-              <a:ea typeface="Roboto" panose="02000000000000000000" pitchFamily="2" charset="0"/>
-            </a:endParaRPr>
-          </a:p>
-        </p:txBody>
-      </p:sp>
-      <p:pic>
-        <p:nvPicPr>
-          <p:cNvPr id="66" name="Picture 65">
-            <a:extLst>
-              <a:ext uri="{FF2B5EF4-FFF2-40B4-BE49-F238E27FC236}">
-                <a16:creationId xmlns:a16="http://schemas.microsoft.com/office/drawing/2014/main" id="{F8B89B66-BED9-17F1-CAA5-6A2765864CA2}"/>
-              </a:ext>
-            </a:extLst>
-          </p:cNvPr>
-          <p:cNvPicPr>
-            <a:picLocks noChangeAspect="1"/>
-          </p:cNvPicPr>
-          <p:nvPr/>
-        </p:nvPicPr>
-        <p:blipFill>
-          <a:blip r:embed="rId15"/>
-          <a:stretch>
-            <a:fillRect/>
-          </a:stretch>
-        </p:blipFill>
-        <p:spPr>
-          <a:xfrm>
-            <a:off x="6096000" y="3866972"/>
-            <a:ext cx="312760" cy="372959"/>
-          </a:xfrm>
-          <a:prstGeom prst="rect">
-            <a:avLst/>
-          </a:prstGeom>
-        </p:spPr>
-      </p:pic>
-      <p:pic>
-        <p:nvPicPr>
-          <p:cNvPr id="68" name="Picture 67">
-            <a:extLst>
-              <a:ext uri="{FF2B5EF4-FFF2-40B4-BE49-F238E27FC236}">
-                <a16:creationId xmlns:a16="http://schemas.microsoft.com/office/drawing/2014/main" id="{12DBDAE5-4D4E-830D-7A0E-01ACD5FCBFAB}"/>
-              </a:ext>
-            </a:extLst>
-          </p:cNvPr>
-          <p:cNvPicPr>
-            <a:picLocks noChangeAspect="1"/>
-          </p:cNvPicPr>
-          <p:nvPr/>
-        </p:nvPicPr>
-        <p:blipFill>
-          <a:blip r:embed="rId16"/>
-          <a:stretch>
-            <a:fillRect/>
-          </a:stretch>
-        </p:blipFill>
-        <p:spPr>
-          <a:xfrm>
-            <a:off x="6096000" y="3397061"/>
-            <a:ext cx="311287" cy="367319"/>
-          </a:xfrm>
-          <a:prstGeom prst="rect">
-            <a:avLst/>
-          </a:prstGeom>
-        </p:spPr>
-      </p:pic>
-      <p:pic>
-        <p:nvPicPr>
-          <p:cNvPr id="70" name="Picture 69">
-            <a:extLst>
-              <a:ext uri="{FF2B5EF4-FFF2-40B4-BE49-F238E27FC236}">
-                <a16:creationId xmlns:a16="http://schemas.microsoft.com/office/drawing/2014/main" id="{D0B6165D-F311-6DA1-4E9E-C3B399212D15}"/>
-              </a:ext>
-            </a:extLst>
-          </p:cNvPr>
-          <p:cNvPicPr>
-            <a:picLocks noChangeAspect="1"/>
-          </p:cNvPicPr>
-          <p:nvPr/>
-        </p:nvPicPr>
-        <p:blipFill>
-          <a:blip r:embed="rId17"/>
-          <a:stretch>
-            <a:fillRect/>
-          </a:stretch>
-        </p:blipFill>
-        <p:spPr>
-          <a:xfrm>
-            <a:off x="6096000" y="4333252"/>
-            <a:ext cx="311962" cy="386625"/>
-          </a:xfrm>
-          <a:prstGeom prst="rect">
-            <a:avLst/>
-          </a:prstGeom>
-        </p:spPr>
-      </p:pic>
-      <p:pic>
-        <p:nvPicPr>
-          <p:cNvPr id="72" name="Picture 71">
-            <a:extLst>
-              <a:ext uri="{FF2B5EF4-FFF2-40B4-BE49-F238E27FC236}">
-                <a16:creationId xmlns:a16="http://schemas.microsoft.com/office/drawing/2014/main" id="{EBD22B7A-49BE-6DF5-F457-7A8DD81C8EEF}"/>
-              </a:ext>
-            </a:extLst>
-          </p:cNvPr>
-          <p:cNvPicPr>
-            <a:picLocks noChangeAspect="1"/>
-          </p:cNvPicPr>
-          <p:nvPr/>
-        </p:nvPicPr>
-        <p:blipFill>
-          <a:blip r:embed="rId18"/>
-          <a:stretch>
-            <a:fillRect/>
-          </a:stretch>
-        </p:blipFill>
-        <p:spPr>
-          <a:xfrm>
-            <a:off x="6096000" y="5260666"/>
-            <a:ext cx="312759" cy="420157"/>
-          </a:xfrm>
-          <a:prstGeom prst="rect">
-            <a:avLst/>
-          </a:prstGeom>
-        </p:spPr>
-      </p:pic>
-      <p:pic>
-        <p:nvPicPr>
-          <p:cNvPr id="74" name="Picture 73">
-            <a:extLst>
-              <a:ext uri="{FF2B5EF4-FFF2-40B4-BE49-F238E27FC236}">
-                <a16:creationId xmlns:a16="http://schemas.microsoft.com/office/drawing/2014/main" id="{5CFE82B4-AD44-0500-3879-D48D4B7E2E6A}"/>
-              </a:ext>
-            </a:extLst>
-          </p:cNvPr>
-          <p:cNvPicPr>
-            <a:picLocks noChangeAspect="1"/>
-          </p:cNvPicPr>
-          <p:nvPr/>
-        </p:nvPicPr>
-        <p:blipFill>
-          <a:blip r:embed="rId19"/>
-          <a:stretch>
-            <a:fillRect/>
-          </a:stretch>
-        </p:blipFill>
-        <p:spPr>
-          <a:xfrm>
-            <a:off x="6079507" y="5740612"/>
-            <a:ext cx="334286" cy="386625"/>
-          </a:xfrm>
-          <a:prstGeom prst="rect">
-            <a:avLst/>
-          </a:prstGeom>
-        </p:spPr>
-      </p:pic>
-      <p:pic>
-        <p:nvPicPr>
-          <p:cNvPr id="76" name="Picture 75">
-            <a:extLst>
-              <a:ext uri="{FF2B5EF4-FFF2-40B4-BE49-F238E27FC236}">
-                <a16:creationId xmlns:a16="http://schemas.microsoft.com/office/drawing/2014/main" id="{7FE1C356-0378-36D3-E416-D621334DECF1}"/>
-              </a:ext>
-            </a:extLst>
-          </p:cNvPr>
-          <p:cNvPicPr>
-            <a:picLocks noChangeAspect="1"/>
-          </p:cNvPicPr>
-          <p:nvPr/>
-        </p:nvPicPr>
-        <p:blipFill>
-          <a:blip r:embed="rId20"/>
-          <a:stretch>
-            <a:fillRect/>
-          </a:stretch>
-        </p:blipFill>
-        <p:spPr>
-          <a:xfrm>
-            <a:off x="329685" y="4328008"/>
-            <a:ext cx="255204" cy="412297"/>
-          </a:xfrm>
-          <a:prstGeom prst="rect">
-            <a:avLst/>
-          </a:prstGeom>
-        </p:spPr>
-      </p:pic>
-      <p:pic>
-        <p:nvPicPr>
-          <p:cNvPr id="78" name="Picture 77">
-            <a:extLst>
-              <a:ext uri="{FF2B5EF4-FFF2-40B4-BE49-F238E27FC236}">
-                <a16:creationId xmlns:a16="http://schemas.microsoft.com/office/drawing/2014/main" id="{2A30ABF3-0C87-2A8F-E885-2018E1ACD0C4}"/>
-              </a:ext>
-            </a:extLst>
-          </p:cNvPr>
-          <p:cNvPicPr>
-            <a:picLocks noChangeAspect="1"/>
-          </p:cNvPicPr>
-          <p:nvPr/>
-        </p:nvPicPr>
-        <p:blipFill>
-          <a:blip r:embed="rId21"/>
-          <a:stretch>
-            <a:fillRect/>
-          </a:stretch>
-        </p:blipFill>
-        <p:spPr>
-          <a:xfrm>
-            <a:off x="354879" y="6237223"/>
-            <a:ext cx="204816" cy="428685"/>
-          </a:xfrm>
-          <a:prstGeom prst="rect">
-            <a:avLst/>
-          </a:prstGeom>
-        </p:spPr>
-      </p:pic>
-      <p:pic>
-        <p:nvPicPr>
-          <p:cNvPr id="80" name="Picture 79">
-            <a:extLst>
-              <a:ext uri="{FF2B5EF4-FFF2-40B4-BE49-F238E27FC236}">
-                <a16:creationId xmlns:a16="http://schemas.microsoft.com/office/drawing/2014/main" id="{90879784-A88F-793B-6761-E33D99A8ED6B}"/>
-              </a:ext>
-            </a:extLst>
-          </p:cNvPr>
-          <p:cNvPicPr>
-            <a:picLocks noChangeAspect="1"/>
-          </p:cNvPicPr>
-          <p:nvPr/>
-        </p:nvPicPr>
-        <p:blipFill>
-          <a:blip r:embed="rId22"/>
-          <a:stretch>
-            <a:fillRect/>
-          </a:stretch>
-        </p:blipFill>
-        <p:spPr>
-          <a:xfrm>
-            <a:off x="345252" y="4785115"/>
-            <a:ext cx="224071" cy="393546"/>
-          </a:xfrm>
-          <a:prstGeom prst="rect">
-            <a:avLst/>
-          </a:prstGeom>
-        </p:spPr>
-      </p:pic>
-      <p:pic>
-        <p:nvPicPr>
-          <p:cNvPr id="82" name="Picture 81">
-            <a:extLst>
-              <a:ext uri="{FF2B5EF4-FFF2-40B4-BE49-F238E27FC236}">
-                <a16:creationId xmlns:a16="http://schemas.microsoft.com/office/drawing/2014/main" id="{3C135A3E-D510-ACE1-6E4E-ECC1725A3877}"/>
-              </a:ext>
-            </a:extLst>
-          </p:cNvPr>
-          <p:cNvPicPr>
-            <a:picLocks noChangeAspect="1"/>
-          </p:cNvPicPr>
-          <p:nvPr/>
-        </p:nvPicPr>
-        <p:blipFill>
-          <a:blip r:embed="rId23"/>
-          <a:stretch>
-            <a:fillRect/>
-          </a:stretch>
-        </p:blipFill>
-        <p:spPr>
-          <a:xfrm>
-            <a:off x="391166" y="5253919"/>
-            <a:ext cx="132242" cy="412297"/>
-          </a:xfrm>
-          <a:prstGeom prst="rect">
-            <a:avLst/>
-          </a:prstGeom>
-        </p:spPr>
-      </p:pic>
-      <p:pic>
-        <p:nvPicPr>
-          <p:cNvPr id="84" name="Picture 83">
-            <a:extLst>
-              <a:ext uri="{FF2B5EF4-FFF2-40B4-BE49-F238E27FC236}">
-                <a16:creationId xmlns:a16="http://schemas.microsoft.com/office/drawing/2014/main" id="{F74807A4-2E2E-BE66-B9AD-0D428E6C7BDD}"/>
-              </a:ext>
-            </a:extLst>
-          </p:cNvPr>
-          <p:cNvPicPr>
-            <a:picLocks noChangeAspect="1"/>
-          </p:cNvPicPr>
-          <p:nvPr/>
-        </p:nvPicPr>
-        <p:blipFill>
-          <a:blip r:embed="rId24"/>
-          <a:stretch>
-            <a:fillRect/>
-          </a:stretch>
-        </p:blipFill>
-        <p:spPr>
-          <a:xfrm>
-            <a:off x="270402" y="5741474"/>
-            <a:ext cx="373770" cy="420492"/>
-          </a:xfrm>
-          <a:prstGeom prst="rect">
-            <a:avLst/>
-          </a:prstGeom>
-        </p:spPr>
-      </p:pic>
-      <p:sp>
-        <p:nvSpPr>
-          <p:cNvPr id="85" name="TextBox 84">
-            <a:extLst>
-              <a:ext uri="{FF2B5EF4-FFF2-40B4-BE49-F238E27FC236}">
-                <a16:creationId xmlns:a16="http://schemas.microsoft.com/office/drawing/2014/main" id="{3606A9E2-15A6-3536-E0ED-558FB9EC1D90}"/>
-              </a:ext>
-            </a:extLst>
-          </p:cNvPr>
-          <p:cNvSpPr txBox="1"/>
-          <p:nvPr/>
-        </p:nvSpPr>
-        <p:spPr>
-          <a:xfrm>
-            <a:off x="6053106" y="2997681"/>
-            <a:ext cx="1063694" cy="369332"/>
-          </a:xfrm>
-          <a:prstGeom prst="rect">
-            <a:avLst/>
-          </a:prstGeom>
-          <a:noFill/>
-        </p:spPr>
-        <p:txBody>
-          <a:bodyPr wrap="square">
-            <a:spAutoFit/>
-          </a:bodyPr>
-          <a:lstStyle/>
-          <a:p>
-            <a:r>
-              <a:rPr lang="en-US" dirty="0">
-                <a:solidFill>
-                  <a:srgbClr val="7030A0"/>
-                </a:solidFill>
-                <a:latin typeface="Roboto" panose="02000000000000000000" pitchFamily="2" charset="0"/>
-                <a:ea typeface="Roboto" panose="02000000000000000000" pitchFamily="2" charset="0"/>
-              </a:rPr>
-              <a:t>Fields</a:t>
-            </a:r>
-            <a:endParaRPr lang="en-US" sz="1100" dirty="0">
-              <a:solidFill>
-                <a:srgbClr val="7030A0"/>
-              </a:solidFill>
-              <a:latin typeface="Roboto" panose="02000000000000000000" pitchFamily="2" charset="0"/>
-              <a:ea typeface="Roboto" panose="02000000000000000000" pitchFamily="2" charset="0"/>
-            </a:endParaRPr>
-          </a:p>
-        </p:txBody>
-      </p:sp>
-      <p:cxnSp>
-        <p:nvCxnSpPr>
-          <p:cNvPr id="87" name="Straight Connector 86">
-            <a:extLst>
-              <a:ext uri="{FF2B5EF4-FFF2-40B4-BE49-F238E27FC236}">
-                <a16:creationId xmlns:a16="http://schemas.microsoft.com/office/drawing/2014/main" id="{AAF450A5-C114-DD33-F73D-1F02CA56E66B}"/>
-              </a:ext>
-            </a:extLst>
-          </p:cNvPr>
-          <p:cNvCxnSpPr>
-            <a:cxnSpLocks/>
-          </p:cNvCxnSpPr>
-          <p:nvPr/>
-        </p:nvCxnSpPr>
-        <p:spPr>
-          <a:xfrm flipV="1">
-            <a:off x="270402" y="2913130"/>
-            <a:ext cx="11284133" cy="76925"/>
-          </a:xfrm>
-          <a:prstGeom prst="line">
-            <a:avLst/>
-          </a:prstGeom>
-          <a:ln>
-            <a:solidFill>
-              <a:schemeClr val="bg1">
-                <a:lumMod val="50000"/>
-              </a:schemeClr>
-            </a:solidFill>
-          </a:ln>
-        </p:spPr>
-        <p:style>
-          <a:lnRef idx="2">
-            <a:schemeClr val="accent1"/>
-          </a:lnRef>
-          <a:fillRef idx="0">
-            <a:schemeClr val="accent1"/>
-          </a:fillRef>
-          <a:effectRef idx="1">
-            <a:schemeClr val="accent1"/>
-          </a:effectRef>
-          <a:fontRef idx="minor">
-            <a:schemeClr val="tx1"/>
-          </a:fontRef>
-        </p:style>
-      </p:cxnSp>
-      <p:sp>
-        <p:nvSpPr>
-          <p:cNvPr id="89" name="TextBox 88">
-            <a:extLst>
-              <a:ext uri="{FF2B5EF4-FFF2-40B4-BE49-F238E27FC236}">
-                <a16:creationId xmlns:a16="http://schemas.microsoft.com/office/drawing/2014/main" id="{6B0E3D2B-B47B-642B-926B-3896DFC254DF}"/>
-              </a:ext>
-            </a:extLst>
-          </p:cNvPr>
-          <p:cNvSpPr txBox="1"/>
-          <p:nvPr/>
-        </p:nvSpPr>
-        <p:spPr>
-          <a:xfrm>
-            <a:off x="644276" y="3432453"/>
-            <a:ext cx="997837" cy="369332"/>
-          </a:xfrm>
-          <a:prstGeom prst="rect">
-            <a:avLst/>
-          </a:prstGeom>
-          <a:noFill/>
-        </p:spPr>
-        <p:txBody>
-          <a:bodyPr wrap="none" rtlCol="0">
-            <a:spAutoFit/>
-          </a:bodyPr>
-          <a:lstStyle/>
-          <a:p>
-            <a:r>
-              <a:rPr lang="en-US" dirty="0"/>
-              <a:t>Item / Id</a:t>
-            </a:r>
-          </a:p>
-        </p:txBody>
-      </p:sp>
-      <p:sp>
-        <p:nvSpPr>
-          <p:cNvPr id="90" name="TextBox 89">
-            <a:extLst>
-              <a:ext uri="{FF2B5EF4-FFF2-40B4-BE49-F238E27FC236}">
-                <a16:creationId xmlns:a16="http://schemas.microsoft.com/office/drawing/2014/main" id="{AA19F944-695A-36B3-3735-B2956D57591D}"/>
-              </a:ext>
-            </a:extLst>
-          </p:cNvPr>
-          <p:cNvSpPr txBox="1"/>
-          <p:nvPr/>
-        </p:nvSpPr>
-        <p:spPr>
-          <a:xfrm>
-            <a:off x="644276" y="3842517"/>
-            <a:ext cx="1445332" cy="369332"/>
-          </a:xfrm>
-          <a:prstGeom prst="rect">
-            <a:avLst/>
-          </a:prstGeom>
-          <a:noFill/>
-        </p:spPr>
-        <p:txBody>
-          <a:bodyPr wrap="none" rtlCol="0">
-            <a:spAutoFit/>
-          </a:bodyPr>
-          <a:lstStyle/>
-          <a:p>
-            <a:r>
-              <a:rPr lang="en-US" dirty="0"/>
-              <a:t>Organization</a:t>
-            </a:r>
-          </a:p>
-        </p:txBody>
-      </p:sp>
-      <p:sp>
-        <p:nvSpPr>
-          <p:cNvPr id="91" name="TextBox 90">
-            <a:extLst>
-              <a:ext uri="{FF2B5EF4-FFF2-40B4-BE49-F238E27FC236}">
-                <a16:creationId xmlns:a16="http://schemas.microsoft.com/office/drawing/2014/main" id="{FBC220B9-E77B-CF3F-A35D-735CA248216A}"/>
-              </a:ext>
-            </a:extLst>
-          </p:cNvPr>
-          <p:cNvSpPr txBox="1"/>
-          <p:nvPr/>
-        </p:nvSpPr>
-        <p:spPr>
-          <a:xfrm>
-            <a:off x="644276" y="4324775"/>
-            <a:ext cx="625749" cy="369332"/>
-          </a:xfrm>
-          <a:prstGeom prst="rect">
-            <a:avLst/>
-          </a:prstGeom>
-          <a:noFill/>
-        </p:spPr>
-        <p:txBody>
-          <a:bodyPr wrap="none" rtlCol="0">
-            <a:spAutoFit/>
-          </a:bodyPr>
-          <a:lstStyle/>
-          <a:p>
-            <a:r>
-              <a:rPr lang="en-US" dirty="0"/>
-              <a:t>Tags</a:t>
-            </a:r>
-          </a:p>
-        </p:txBody>
-      </p:sp>
-      <p:sp>
-        <p:nvSpPr>
-          <p:cNvPr id="92" name="TextBox 91">
-            <a:extLst>
-              <a:ext uri="{FF2B5EF4-FFF2-40B4-BE49-F238E27FC236}">
-                <a16:creationId xmlns:a16="http://schemas.microsoft.com/office/drawing/2014/main" id="{811006FC-DF89-F3CE-6F95-971C12746AD1}"/>
-              </a:ext>
-            </a:extLst>
-          </p:cNvPr>
-          <p:cNvSpPr txBox="1"/>
-          <p:nvPr/>
-        </p:nvSpPr>
-        <p:spPr>
-          <a:xfrm>
-            <a:off x="661792" y="4785115"/>
-            <a:ext cx="898964" cy="369332"/>
-          </a:xfrm>
-          <a:prstGeom prst="rect">
-            <a:avLst/>
-          </a:prstGeom>
-          <a:noFill/>
-        </p:spPr>
-        <p:txBody>
-          <a:bodyPr wrap="none" rtlCol="0">
-            <a:spAutoFit/>
-          </a:bodyPr>
-          <a:lstStyle/>
-          <a:p>
-            <a:r>
-              <a:rPr lang="en-US" dirty="0"/>
-              <a:t>History</a:t>
-            </a:r>
-          </a:p>
-        </p:txBody>
-      </p:sp>
-      <p:sp>
-        <p:nvSpPr>
-          <p:cNvPr id="93" name="TextBox 92">
-            <a:extLst>
-              <a:ext uri="{FF2B5EF4-FFF2-40B4-BE49-F238E27FC236}">
-                <a16:creationId xmlns:a16="http://schemas.microsoft.com/office/drawing/2014/main" id="{7DDFA0F6-77DD-D4CB-273B-B378F029AAF4}"/>
-              </a:ext>
-            </a:extLst>
-          </p:cNvPr>
-          <p:cNvSpPr txBox="1"/>
-          <p:nvPr/>
-        </p:nvSpPr>
-        <p:spPr>
-          <a:xfrm>
-            <a:off x="679308" y="5245455"/>
-            <a:ext cx="1474634" cy="369332"/>
-          </a:xfrm>
-          <a:prstGeom prst="rect">
-            <a:avLst/>
-          </a:prstGeom>
-          <a:noFill/>
-        </p:spPr>
-        <p:txBody>
-          <a:bodyPr wrap="none" rtlCol="0">
-            <a:spAutoFit/>
-          </a:bodyPr>
-          <a:lstStyle/>
-          <a:p>
-            <a:r>
-              <a:rPr lang="en-US" dirty="0"/>
-              <a:t>Attachments</a:t>
-            </a:r>
-          </a:p>
-        </p:txBody>
-      </p:sp>
-      <p:sp>
-        <p:nvSpPr>
-          <p:cNvPr id="94" name="TextBox 93">
-            <a:extLst>
-              <a:ext uri="{FF2B5EF4-FFF2-40B4-BE49-F238E27FC236}">
-                <a16:creationId xmlns:a16="http://schemas.microsoft.com/office/drawing/2014/main" id="{E67357B1-1E0D-407C-3ABF-397DB39B935F}"/>
-              </a:ext>
-            </a:extLst>
-          </p:cNvPr>
-          <p:cNvSpPr txBox="1"/>
-          <p:nvPr/>
-        </p:nvSpPr>
-        <p:spPr>
-          <a:xfrm>
-            <a:off x="696824" y="5705795"/>
-            <a:ext cx="1545167" cy="369332"/>
-          </a:xfrm>
-          <a:prstGeom prst="rect">
-            <a:avLst/>
-          </a:prstGeom>
-          <a:noFill/>
-        </p:spPr>
-        <p:txBody>
-          <a:bodyPr wrap="none" rtlCol="0">
-            <a:spAutoFit/>
-          </a:bodyPr>
-          <a:lstStyle/>
-          <a:p>
-            <a:r>
-              <a:rPr lang="en-US" dirty="0"/>
-              <a:t>Relationships</a:t>
-            </a:r>
-          </a:p>
-        </p:txBody>
-      </p:sp>
-      <p:sp>
-        <p:nvSpPr>
-          <p:cNvPr id="95" name="TextBox 94">
-            <a:extLst>
-              <a:ext uri="{FF2B5EF4-FFF2-40B4-BE49-F238E27FC236}">
-                <a16:creationId xmlns:a16="http://schemas.microsoft.com/office/drawing/2014/main" id="{1DDC7D23-1F2F-405F-A18B-E1FE66212545}"/>
-              </a:ext>
-            </a:extLst>
-          </p:cNvPr>
-          <p:cNvSpPr txBox="1"/>
-          <p:nvPr/>
-        </p:nvSpPr>
-        <p:spPr>
-          <a:xfrm>
-            <a:off x="696513" y="6244777"/>
-            <a:ext cx="1961371" cy="369332"/>
-          </a:xfrm>
-          <a:prstGeom prst="rect">
-            <a:avLst/>
-          </a:prstGeom>
-          <a:noFill/>
-        </p:spPr>
-        <p:txBody>
-          <a:bodyPr wrap="none" rtlCol="0">
-            <a:spAutoFit/>
-          </a:bodyPr>
-          <a:lstStyle/>
-          <a:p>
-            <a:r>
-              <a:rPr lang="en-US" dirty="0"/>
-              <a:t>Name/Value Pairs</a:t>
-            </a:r>
-          </a:p>
-        </p:txBody>
-      </p:sp>
-      <p:sp>
-        <p:nvSpPr>
-          <p:cNvPr id="97" name="Rectangle 96">
-            <a:extLst>
-              <a:ext uri="{FF2B5EF4-FFF2-40B4-BE49-F238E27FC236}">
-                <a16:creationId xmlns:a16="http://schemas.microsoft.com/office/drawing/2014/main" id="{77B86C6B-3B84-8256-1E36-AA10EE862447}"/>
-              </a:ext>
-            </a:extLst>
-          </p:cNvPr>
-          <p:cNvSpPr/>
-          <p:nvPr/>
-        </p:nvSpPr>
-        <p:spPr>
-          <a:xfrm>
-            <a:off x="9364131" y="3420173"/>
-            <a:ext cx="430641" cy="386625"/>
-          </a:xfrm>
-          <a:prstGeom prst="rect">
-            <a:avLst/>
-          </a:prstGeom>
-          <a:solidFill>
-            <a:schemeClr val="bg1">
-              <a:lumMod val="95000"/>
-            </a:schemeClr>
-          </a:solidFill>
-          <a:ln w="9525">
-            <a:solidFill>
-              <a:srgbClr val="0070C0"/>
-            </a:solidFill>
-          </a:ln>
-        </p:spPr>
-        <p:style>
-          <a:lnRef idx="2">
-            <a:schemeClr val="accent1">
-              <a:shade val="15000"/>
-            </a:schemeClr>
-          </a:lnRef>
-          <a:fillRef idx="1">
-            <a:schemeClr val="accent1"/>
-          </a:fillRef>
-          <a:effectRef idx="0">
-            <a:schemeClr val="accent1"/>
-          </a:effectRef>
-          <a:fontRef idx="minor">
-            <a:schemeClr val="lt1"/>
-          </a:fontRef>
-        </p:style>
-        <p:txBody>
-          <a:bodyPr rtlCol="0" anchor="ctr"/>
-          <a:lstStyle/>
-          <a:p>
-            <a:r>
-              <a:rPr lang="en-US" sz="1400" b="1" dirty="0">
-                <a:solidFill>
-                  <a:schemeClr val="tx1"/>
-                </a:solidFill>
-                <a:latin typeface="Roboto" panose="02000000000000000000" pitchFamily="2" charset="0"/>
-                <a:ea typeface="Roboto" panose="02000000000000000000" pitchFamily="2" charset="0"/>
-              </a:rPr>
-              <a:t>p2</a:t>
-            </a:r>
-          </a:p>
-        </p:txBody>
-      </p:sp>
-      <p:sp>
-        <p:nvSpPr>
-          <p:cNvPr id="99" name="Rectangle 98">
-            <a:extLst>
-              <a:ext uri="{FF2B5EF4-FFF2-40B4-BE49-F238E27FC236}">
-                <a16:creationId xmlns:a16="http://schemas.microsoft.com/office/drawing/2014/main" id="{72593150-17B2-0653-55B3-B81F02699441}"/>
-              </a:ext>
-            </a:extLst>
-          </p:cNvPr>
-          <p:cNvSpPr/>
-          <p:nvPr/>
-        </p:nvSpPr>
-        <p:spPr>
-          <a:xfrm>
-            <a:off x="9358851" y="3915078"/>
-            <a:ext cx="564538" cy="386625"/>
-          </a:xfrm>
-          <a:prstGeom prst="rect">
-            <a:avLst/>
-          </a:prstGeom>
-          <a:solidFill>
-            <a:schemeClr val="bg1">
-              <a:lumMod val="95000"/>
-            </a:schemeClr>
-          </a:solidFill>
-          <a:ln w="12700">
-            <a:solidFill>
-              <a:schemeClr val="accent3">
-                <a:lumMod val="60000"/>
-                <a:lumOff val="40000"/>
-              </a:schemeClr>
-            </a:solidFill>
-          </a:ln>
-        </p:spPr>
-        <p:style>
-          <a:lnRef idx="2">
-            <a:schemeClr val="accent1">
-              <a:shade val="15000"/>
-            </a:schemeClr>
-          </a:lnRef>
-          <a:fillRef idx="1">
-            <a:schemeClr val="accent1"/>
-          </a:fillRef>
-          <a:effectRef idx="0">
-            <a:schemeClr val="accent1"/>
-          </a:effectRef>
-          <a:fontRef idx="minor">
-            <a:schemeClr val="lt1"/>
-          </a:fontRef>
-        </p:style>
-        <p:txBody>
-          <a:bodyPr rtlCol="0" anchor="ctr"/>
-          <a:lstStyle/>
-          <a:p>
-            <a:pPr algn="r"/>
-            <a:r>
-              <a:rPr lang="en-US" sz="1400" dirty="0">
-                <a:solidFill>
-                  <a:schemeClr val="tx1"/>
-                </a:solidFill>
-                <a:latin typeface="Roboto" panose="02000000000000000000" pitchFamily="2" charset="0"/>
-                <a:ea typeface="Roboto" panose="02000000000000000000" pitchFamily="2" charset="0"/>
-              </a:rPr>
-              <a:t>123</a:t>
-            </a:r>
-          </a:p>
-        </p:txBody>
-      </p:sp>
-      <p:sp>
-        <p:nvSpPr>
-          <p:cNvPr id="100" name="TextBox 99">
-            <a:extLst>
-              <a:ext uri="{FF2B5EF4-FFF2-40B4-BE49-F238E27FC236}">
-                <a16:creationId xmlns:a16="http://schemas.microsoft.com/office/drawing/2014/main" id="{E075D223-D2F8-8639-1032-56754F6D281C}"/>
-              </a:ext>
-            </a:extLst>
-          </p:cNvPr>
-          <p:cNvSpPr txBox="1"/>
-          <p:nvPr/>
-        </p:nvSpPr>
-        <p:spPr>
-          <a:xfrm>
-            <a:off x="6464667" y="3386451"/>
-            <a:ext cx="2259016" cy="369332"/>
-          </a:xfrm>
-          <a:prstGeom prst="rect">
-            <a:avLst/>
-          </a:prstGeom>
-          <a:noFill/>
-        </p:spPr>
-        <p:txBody>
-          <a:bodyPr wrap="none" rtlCol="0">
-            <a:spAutoFit/>
-          </a:bodyPr>
-          <a:lstStyle/>
-          <a:p>
-            <a:r>
-              <a:rPr lang="en-US" dirty="0"/>
-              <a:t>Kind (story, bug, etc.)</a:t>
-            </a:r>
-          </a:p>
-        </p:txBody>
-      </p:sp>
-      <p:sp>
-        <p:nvSpPr>
-          <p:cNvPr id="101" name="TextBox 100">
-            <a:extLst>
-              <a:ext uri="{FF2B5EF4-FFF2-40B4-BE49-F238E27FC236}">
-                <a16:creationId xmlns:a16="http://schemas.microsoft.com/office/drawing/2014/main" id="{5B93EE8B-D0C1-F221-139E-E61FC7F00403}"/>
-              </a:ext>
-            </a:extLst>
-          </p:cNvPr>
-          <p:cNvSpPr txBox="1"/>
-          <p:nvPr/>
-        </p:nvSpPr>
-        <p:spPr>
-          <a:xfrm>
-            <a:off x="6452867" y="3846474"/>
-            <a:ext cx="1509965" cy="369332"/>
-          </a:xfrm>
-          <a:prstGeom prst="rect">
-            <a:avLst/>
-          </a:prstGeom>
-          <a:noFill/>
-        </p:spPr>
-        <p:txBody>
-          <a:bodyPr wrap="none" rtlCol="0">
-            <a:spAutoFit/>
-          </a:bodyPr>
-          <a:lstStyle/>
-          <a:p>
-            <a:r>
-              <a:rPr lang="en-US" dirty="0"/>
-              <a:t>State (status)</a:t>
-            </a:r>
-          </a:p>
-        </p:txBody>
-      </p:sp>
-      <p:sp>
-        <p:nvSpPr>
-          <p:cNvPr id="102" name="TextBox 101">
-            <a:extLst>
-              <a:ext uri="{FF2B5EF4-FFF2-40B4-BE49-F238E27FC236}">
-                <a16:creationId xmlns:a16="http://schemas.microsoft.com/office/drawing/2014/main" id="{0D5C63B0-8E71-12FB-161F-7F0A644EBFAC}"/>
-              </a:ext>
-            </a:extLst>
-          </p:cNvPr>
-          <p:cNvSpPr txBox="1"/>
-          <p:nvPr/>
-        </p:nvSpPr>
-        <p:spPr>
-          <a:xfrm>
-            <a:off x="6488484" y="4324775"/>
-            <a:ext cx="1510157" cy="369332"/>
-          </a:xfrm>
-          <a:prstGeom prst="rect">
-            <a:avLst/>
-          </a:prstGeom>
-          <a:noFill/>
-        </p:spPr>
-        <p:txBody>
-          <a:bodyPr wrap="none" rtlCol="0">
-            <a:spAutoFit/>
-          </a:bodyPr>
-          <a:lstStyle/>
-          <a:p>
-            <a:r>
-              <a:rPr lang="en-US" dirty="0"/>
-              <a:t>Created Date</a:t>
-            </a:r>
-          </a:p>
-        </p:txBody>
-      </p:sp>
-      <p:sp>
-        <p:nvSpPr>
-          <p:cNvPr id="103" name="TextBox 102">
-            <a:extLst>
-              <a:ext uri="{FF2B5EF4-FFF2-40B4-BE49-F238E27FC236}">
-                <a16:creationId xmlns:a16="http://schemas.microsoft.com/office/drawing/2014/main" id="{86B583E7-07ED-018C-F568-9E8D77B53E2B}"/>
-              </a:ext>
-            </a:extLst>
-          </p:cNvPr>
-          <p:cNvSpPr txBox="1"/>
-          <p:nvPr/>
-        </p:nvSpPr>
-        <p:spPr>
-          <a:xfrm>
-            <a:off x="6524101" y="4803076"/>
-            <a:ext cx="1275734" cy="369332"/>
-          </a:xfrm>
-          <a:prstGeom prst="rect">
-            <a:avLst/>
-          </a:prstGeom>
-          <a:noFill/>
-        </p:spPr>
-        <p:txBody>
-          <a:bodyPr wrap="none" rtlCol="0">
-            <a:spAutoFit/>
-          </a:bodyPr>
-          <a:lstStyle/>
-          <a:p>
-            <a:r>
-              <a:rPr lang="en-US" dirty="0"/>
-              <a:t>Created By</a:t>
-            </a:r>
-          </a:p>
-        </p:txBody>
-      </p:sp>
-      <p:sp>
-        <p:nvSpPr>
-          <p:cNvPr id="104" name="TextBox 103">
-            <a:extLst>
-              <a:ext uri="{FF2B5EF4-FFF2-40B4-BE49-F238E27FC236}">
-                <a16:creationId xmlns:a16="http://schemas.microsoft.com/office/drawing/2014/main" id="{6847BBA3-CFDF-174F-A8D1-9E6CD9EA6151}"/>
-              </a:ext>
-            </a:extLst>
-          </p:cNvPr>
-          <p:cNvSpPr txBox="1"/>
-          <p:nvPr/>
-        </p:nvSpPr>
-        <p:spPr>
-          <a:xfrm>
-            <a:off x="6526213" y="5280922"/>
-            <a:ext cx="1571007" cy="369332"/>
-          </a:xfrm>
-          <a:prstGeom prst="rect">
-            <a:avLst/>
-          </a:prstGeom>
-          <a:noFill/>
-        </p:spPr>
-        <p:txBody>
-          <a:bodyPr wrap="none" rtlCol="0">
-            <a:spAutoFit/>
-          </a:bodyPr>
-          <a:lstStyle/>
-          <a:p>
-            <a:r>
-              <a:rPr lang="en-US" dirty="0"/>
-              <a:t>Updated Date</a:t>
-            </a:r>
-          </a:p>
-        </p:txBody>
-      </p:sp>
-      <p:sp>
-        <p:nvSpPr>
-          <p:cNvPr id="105" name="TextBox 104">
-            <a:extLst>
-              <a:ext uri="{FF2B5EF4-FFF2-40B4-BE49-F238E27FC236}">
-                <a16:creationId xmlns:a16="http://schemas.microsoft.com/office/drawing/2014/main" id="{66E57D5C-E364-33F5-A56E-466DC794A6D7}"/>
-              </a:ext>
-            </a:extLst>
-          </p:cNvPr>
-          <p:cNvSpPr txBox="1"/>
-          <p:nvPr/>
-        </p:nvSpPr>
-        <p:spPr>
-          <a:xfrm>
-            <a:off x="6569658" y="5740195"/>
-            <a:ext cx="1358770" cy="369332"/>
-          </a:xfrm>
-          <a:prstGeom prst="rect">
-            <a:avLst/>
-          </a:prstGeom>
-          <a:noFill/>
-        </p:spPr>
-        <p:txBody>
-          <a:bodyPr wrap="none" rtlCol="0">
-            <a:spAutoFit/>
-          </a:bodyPr>
-          <a:lstStyle/>
-          <a:p>
-            <a:r>
-              <a:rPr lang="en-US" dirty="0"/>
-              <a:t>Assigned To</a:t>
-            </a:r>
-          </a:p>
-        </p:txBody>
-      </p:sp>
-      <p:sp>
-        <p:nvSpPr>
-          <p:cNvPr id="106" name="TextBox 105">
-            <a:extLst>
-              <a:ext uri="{FF2B5EF4-FFF2-40B4-BE49-F238E27FC236}">
-                <a16:creationId xmlns:a16="http://schemas.microsoft.com/office/drawing/2014/main" id="{DE420852-41F2-5AD6-5C96-4A28EF841897}"/>
-              </a:ext>
-            </a:extLst>
-          </p:cNvPr>
-          <p:cNvSpPr txBox="1"/>
-          <p:nvPr/>
-        </p:nvSpPr>
-        <p:spPr>
-          <a:xfrm>
-            <a:off x="10091223" y="3397061"/>
-            <a:ext cx="1742400" cy="369332"/>
-          </a:xfrm>
-          <a:prstGeom prst="rect">
-            <a:avLst/>
-          </a:prstGeom>
-          <a:noFill/>
-        </p:spPr>
-        <p:txBody>
-          <a:bodyPr wrap="none" rtlCol="0">
-            <a:spAutoFit/>
-          </a:bodyPr>
-          <a:lstStyle/>
-          <a:p>
-            <a:r>
-              <a:rPr lang="en-US" dirty="0"/>
-              <a:t>Priority/Severity</a:t>
-            </a:r>
-          </a:p>
-        </p:txBody>
-      </p:sp>
-      <p:sp>
-        <p:nvSpPr>
-          <p:cNvPr id="107" name="TextBox 106">
-            <a:extLst>
-              <a:ext uri="{FF2B5EF4-FFF2-40B4-BE49-F238E27FC236}">
-                <a16:creationId xmlns:a16="http://schemas.microsoft.com/office/drawing/2014/main" id="{59F66419-84E1-22DC-991D-AB603C50F971}"/>
-              </a:ext>
-            </a:extLst>
-          </p:cNvPr>
-          <p:cNvSpPr txBox="1"/>
-          <p:nvPr/>
-        </p:nvSpPr>
-        <p:spPr>
-          <a:xfrm>
-            <a:off x="10091223" y="3878982"/>
-            <a:ext cx="1708866" cy="369332"/>
-          </a:xfrm>
-          <a:prstGeom prst="rect">
-            <a:avLst/>
-          </a:prstGeom>
-          <a:noFill/>
-        </p:spPr>
-        <p:txBody>
-          <a:bodyPr wrap="none" rtlCol="0">
-            <a:spAutoFit/>
-          </a:bodyPr>
-          <a:lstStyle/>
-          <a:p>
-            <a:r>
-              <a:rPr lang="en-US" dirty="0"/>
-              <a:t>Rank (sub-sort)</a:t>
-            </a:r>
-          </a:p>
-        </p:txBody>
-      </p:sp>
-      <p:sp>
-        <p:nvSpPr>
-          <p:cNvPr id="110" name="TextBox 109">
-            <a:extLst>
-              <a:ext uri="{FF2B5EF4-FFF2-40B4-BE49-F238E27FC236}">
-                <a16:creationId xmlns:a16="http://schemas.microsoft.com/office/drawing/2014/main" id="{52ADE8E0-2F51-A8B4-D334-B1784430F032}"/>
-              </a:ext>
-            </a:extLst>
-          </p:cNvPr>
-          <p:cNvSpPr txBox="1"/>
-          <p:nvPr/>
-        </p:nvSpPr>
-        <p:spPr>
-          <a:xfrm>
-            <a:off x="7158500" y="909748"/>
-            <a:ext cx="872098" cy="369332"/>
-          </a:xfrm>
-          <a:prstGeom prst="rect">
-            <a:avLst/>
-          </a:prstGeom>
-          <a:noFill/>
-        </p:spPr>
-        <p:txBody>
-          <a:bodyPr wrap="none" rtlCol="0">
-            <a:spAutoFit/>
-          </a:bodyPr>
-          <a:lstStyle/>
-          <a:p>
-            <a:r>
-              <a:rPr lang="en-US" dirty="0"/>
-              <a:t>My Org</a:t>
-            </a:r>
-          </a:p>
-        </p:txBody>
-      </p:sp>
-      <p:pic>
-        <p:nvPicPr>
-          <p:cNvPr id="112" name="Picture 111">
-            <a:extLst>
-              <a:ext uri="{FF2B5EF4-FFF2-40B4-BE49-F238E27FC236}">
-                <a16:creationId xmlns:a16="http://schemas.microsoft.com/office/drawing/2014/main" id="{6BD56911-196D-88A5-B6F8-34CD5FB2D581}"/>
-              </a:ext>
-            </a:extLst>
-          </p:cNvPr>
-          <p:cNvPicPr>
-            <a:picLocks noChangeAspect="1"/>
-          </p:cNvPicPr>
-          <p:nvPr/>
-        </p:nvPicPr>
-        <p:blipFill>
-          <a:blip r:embed="rId25"/>
-          <a:stretch>
-            <a:fillRect/>
-          </a:stretch>
-        </p:blipFill>
-        <p:spPr>
-          <a:xfrm>
-            <a:off x="8130590" y="2099691"/>
-            <a:ext cx="495369" cy="485843"/>
-          </a:xfrm>
-          <a:prstGeom prst="rect">
-            <a:avLst/>
-          </a:prstGeom>
-        </p:spPr>
-      </p:pic>
-      <p:pic>
-        <p:nvPicPr>
-          <p:cNvPr id="114" name="Picture 113">
-            <a:extLst>
-              <a:ext uri="{FF2B5EF4-FFF2-40B4-BE49-F238E27FC236}">
-                <a16:creationId xmlns:a16="http://schemas.microsoft.com/office/drawing/2014/main" id="{7EE802DD-E969-E618-1147-211424B72779}"/>
-              </a:ext>
-            </a:extLst>
-          </p:cNvPr>
-          <p:cNvPicPr>
-            <a:picLocks noChangeAspect="1"/>
-          </p:cNvPicPr>
-          <p:nvPr/>
-        </p:nvPicPr>
-        <p:blipFill>
-          <a:blip r:embed="rId26"/>
-          <a:stretch>
-            <a:fillRect/>
-          </a:stretch>
-        </p:blipFill>
-        <p:spPr>
-          <a:xfrm>
-            <a:off x="8757046" y="2101216"/>
-            <a:ext cx="495369" cy="485843"/>
-          </a:xfrm>
-          <a:prstGeom prst="rect">
-            <a:avLst/>
-          </a:prstGeom>
-        </p:spPr>
-      </p:pic>
-      <p:sp>
-        <p:nvSpPr>
-          <p:cNvPr id="115" name="TextBox 114">
-            <a:extLst>
-              <a:ext uri="{FF2B5EF4-FFF2-40B4-BE49-F238E27FC236}">
-                <a16:creationId xmlns:a16="http://schemas.microsoft.com/office/drawing/2014/main" id="{8EF1E57E-4512-00B8-BCF3-61091A634927}"/>
-              </a:ext>
-            </a:extLst>
-          </p:cNvPr>
-          <p:cNvSpPr txBox="1"/>
-          <p:nvPr/>
-        </p:nvSpPr>
-        <p:spPr>
-          <a:xfrm>
-            <a:off x="7992217" y="1739944"/>
-            <a:ext cx="1593906" cy="369332"/>
-          </a:xfrm>
-          <a:prstGeom prst="rect">
-            <a:avLst/>
-          </a:prstGeom>
-          <a:noFill/>
-        </p:spPr>
-        <p:txBody>
-          <a:bodyPr wrap="square">
-            <a:spAutoFit/>
-          </a:bodyPr>
-          <a:lstStyle/>
-          <a:p>
-            <a:r>
-              <a:rPr lang="en-US" dirty="0">
-                <a:solidFill>
-                  <a:srgbClr val="7030A0"/>
-                </a:solidFill>
-                <a:latin typeface="Roboto" panose="02000000000000000000" pitchFamily="2" charset="0"/>
-                <a:ea typeface="Roboto" panose="02000000000000000000" pitchFamily="2" charset="0"/>
-              </a:rPr>
-              <a:t>Check Toggle</a:t>
-            </a:r>
-            <a:endParaRPr lang="en-US" sz="1100" dirty="0">
-              <a:solidFill>
-                <a:srgbClr val="7030A0"/>
-              </a:solidFill>
-              <a:latin typeface="Roboto" panose="02000000000000000000" pitchFamily="2" charset="0"/>
-              <a:ea typeface="Roboto" panose="02000000000000000000" pitchFamily="2" charset="0"/>
-            </a:endParaRPr>
-          </a:p>
-        </p:txBody>
-      </p:sp>
-      <p:pic>
-        <p:nvPicPr>
-          <p:cNvPr id="117" name="Picture 116">
-            <a:extLst>
-              <a:ext uri="{FF2B5EF4-FFF2-40B4-BE49-F238E27FC236}">
-                <a16:creationId xmlns:a16="http://schemas.microsoft.com/office/drawing/2014/main" id="{9E1C0412-2001-6160-B0D0-21071B5D2341}"/>
-              </a:ext>
-            </a:extLst>
-          </p:cNvPr>
-          <p:cNvPicPr>
-            <a:picLocks noChangeAspect="1"/>
-          </p:cNvPicPr>
-          <p:nvPr/>
-        </p:nvPicPr>
-        <p:blipFill>
-          <a:blip r:embed="rId27"/>
-          <a:stretch>
-            <a:fillRect/>
-          </a:stretch>
-        </p:blipFill>
-        <p:spPr>
-          <a:xfrm>
-            <a:off x="6757181" y="861200"/>
-            <a:ext cx="450668" cy="500742"/>
-          </a:xfrm>
-          <a:prstGeom prst="rect">
-            <a:avLst/>
-          </a:prstGeom>
-        </p:spPr>
-      </p:pic>
-    </p:spTree>
-    <p:extLst>
-      <p:ext uri="{BB962C8B-B14F-4D97-AF65-F5344CB8AC3E}">
-        <p14:creationId xmlns:p14="http://schemas.microsoft.com/office/powerpoint/2010/main" val="3719551562"/>
-      </p:ext>
-    </p:extLst>
-  </p:cSld>
-  <p:clrMapOvr>
-    <a:masterClrMapping/>
-  </p:clrMapOvr>
-</p:sld>
-</file>
-
-<file path=ppt/slides/slide20.xml><?xml version="1.0" encoding="utf-8"?>
-<p:sld xmlns:a="http://schemas.openxmlformats.org/drawingml/2006/main" xmlns:r="http://schemas.openxmlformats.org/officeDocument/2006/relationships" xmlns:p="http://schemas.openxmlformats.org/presentationml/2006/main">
-  <p:cSld>
-    <p:spTree>
-      <p:nvGrpSpPr>
-        <p:cNvPr id="1" name=""/>
-        <p:cNvGrpSpPr/>
-        <p:nvPr/>
-      </p:nvGrpSpPr>
-      <p:grpSpPr>
-        <a:xfrm>
-          <a:off x="0" y="0"/>
-          <a:ext cx="0" cy="0"/>
-          <a:chOff x="0" y="0"/>
-          <a:chExt cx="0" cy="0"/>
-        </a:xfrm>
-      </p:grpSpPr>
-      <p:sp>
-        <p:nvSpPr>
-          <p:cNvPr id="2" name="Title 1">
-            <a:extLst>
-              <a:ext uri="{FF2B5EF4-FFF2-40B4-BE49-F238E27FC236}">
                 <a16:creationId xmlns:a16="http://schemas.microsoft.com/office/drawing/2014/main" id="{FF04ECDB-D629-C300-A796-57DC1C685598}"/>
               </a:ext>
             </a:extLst>
@@ -18491,6 +19497,35 @@
           </a:prstGeom>
         </p:spPr>
       </p:pic>
+      <p:sp>
+        <p:nvSpPr>
+          <p:cNvPr id="3" name="Slide Number Placeholder 2">
+            <a:extLst>
+              <a:ext uri="{FF2B5EF4-FFF2-40B4-BE49-F238E27FC236}">
+                <a16:creationId xmlns:a16="http://schemas.microsoft.com/office/drawing/2014/main" id="{93413CFD-0D56-AD97-99AB-934ECBC4D14B}"/>
+              </a:ext>
+            </a:extLst>
+          </p:cNvPr>
+          <p:cNvSpPr>
+            <a:spLocks noGrp="1"/>
+          </p:cNvSpPr>
+          <p:nvPr>
+            <p:ph type="sldNum" sz="quarter" idx="12"/>
+          </p:nvPr>
+        </p:nvSpPr>
+        <p:spPr/>
+        <p:txBody>
+          <a:bodyPr/>
+          <a:lstStyle/>
+          <a:p>
+            <a:fld id="{2BA602F1-D8B6-4D7F-AE46-BA4CF4319B0F}" type="slidenum">
+              <a:rPr lang="en-US" smtClean="0"/>
+              <a:t>21</a:t>
+            </a:fld>
+            <a:endParaRPr lang="en-US"/>
+          </a:p>
+        </p:txBody>
+      </p:sp>
     </p:spTree>
     <p:extLst>
       <p:ext uri="{BB962C8B-B14F-4D97-AF65-F5344CB8AC3E}">
@@ -18504,7 +19539,7 @@
 </p:sld>
 </file>
 
-<file path=ppt/slides/slide21.xml><?xml version="1.0" encoding="utf-8"?>
+<file path=ppt/slides/slide22.xml><?xml version="1.0" encoding="utf-8"?>
 <p:sld xmlns:a="http://schemas.openxmlformats.org/drawingml/2006/main" xmlns:r="http://schemas.openxmlformats.org/officeDocument/2006/relationships" xmlns:p="http://schemas.openxmlformats.org/presentationml/2006/main">
   <p:cSld>
     <p:spTree>
@@ -20598,6 +21633,35 @@
           </p:spPr>
         </p:pic>
       </p:grpSp>
+      <p:sp>
+        <p:nvSpPr>
+          <p:cNvPr id="14" name="Slide Number Placeholder 13">
+            <a:extLst>
+              <a:ext uri="{FF2B5EF4-FFF2-40B4-BE49-F238E27FC236}">
+                <a16:creationId xmlns:a16="http://schemas.microsoft.com/office/drawing/2014/main" id="{4D71FD77-BA32-E2D1-F8EB-E133505C8A3D}"/>
+              </a:ext>
+            </a:extLst>
+          </p:cNvPr>
+          <p:cNvSpPr>
+            <a:spLocks noGrp="1"/>
+          </p:cNvSpPr>
+          <p:nvPr>
+            <p:ph type="sldNum" sz="quarter" idx="12"/>
+          </p:nvPr>
+        </p:nvSpPr>
+        <p:spPr/>
+        <p:txBody>
+          <a:bodyPr/>
+          <a:lstStyle/>
+          <a:p>
+            <a:fld id="{2BA602F1-D8B6-4D7F-AE46-BA4CF4319B0F}" type="slidenum">
+              <a:rPr lang="en-US" smtClean="0"/>
+              <a:t>22</a:t>
+            </a:fld>
+            <a:endParaRPr lang="en-US"/>
+          </a:p>
+        </p:txBody>
+      </p:sp>
     </p:spTree>
     <p:extLst>
       <p:ext uri="{BB962C8B-B14F-4D97-AF65-F5344CB8AC3E}">
@@ -20611,7 +21675,7 @@
 </p:sld>
 </file>
 
-<file path=ppt/slides/slide22.xml><?xml version="1.0" encoding="utf-8"?>
+<file path=ppt/slides/slide23.xml><?xml version="1.0" encoding="utf-8"?>
 <p:sld xmlns:a="http://schemas.openxmlformats.org/drawingml/2006/main" xmlns:r="http://schemas.openxmlformats.org/officeDocument/2006/relationships" xmlns:p="http://schemas.openxmlformats.org/presentationml/2006/main">
   <p:cSld>
     <p:spTree>
@@ -20813,6 +21877,35 @@
           </a:prstGeom>
         </p:spPr>
       </p:pic>
+      <p:sp>
+        <p:nvSpPr>
+          <p:cNvPr id="3" name="Slide Number Placeholder 2">
+            <a:extLst>
+              <a:ext uri="{FF2B5EF4-FFF2-40B4-BE49-F238E27FC236}">
+                <a16:creationId xmlns:a16="http://schemas.microsoft.com/office/drawing/2014/main" id="{A1E7F0AB-626C-3CD6-CA20-81831F98DBF4}"/>
+              </a:ext>
+            </a:extLst>
+          </p:cNvPr>
+          <p:cNvSpPr>
+            <a:spLocks noGrp="1"/>
+          </p:cNvSpPr>
+          <p:nvPr>
+            <p:ph type="sldNum" sz="quarter" idx="12"/>
+          </p:nvPr>
+        </p:nvSpPr>
+        <p:spPr/>
+        <p:txBody>
+          <a:bodyPr/>
+          <a:lstStyle/>
+          <a:p>
+            <a:fld id="{2BA602F1-D8B6-4D7F-AE46-BA4CF4319B0F}" type="slidenum">
+              <a:rPr lang="en-US" smtClean="0"/>
+              <a:t>23</a:t>
+            </a:fld>
+            <a:endParaRPr lang="en-US"/>
+          </a:p>
+        </p:txBody>
+      </p:sp>
     </p:spTree>
     <p:extLst>
       <p:ext uri="{BB962C8B-B14F-4D97-AF65-F5344CB8AC3E}">
@@ -21253,6 +22346,35 @@
           </a:p>
         </p:txBody>
       </p:sp>
+      <p:sp>
+        <p:nvSpPr>
+          <p:cNvPr id="3" name="Slide Number Placeholder 2">
+            <a:extLst>
+              <a:ext uri="{FF2B5EF4-FFF2-40B4-BE49-F238E27FC236}">
+                <a16:creationId xmlns:a16="http://schemas.microsoft.com/office/drawing/2014/main" id="{D5E2C740-9891-DE3E-3BE4-B98654610B15}"/>
+              </a:ext>
+            </a:extLst>
+          </p:cNvPr>
+          <p:cNvSpPr>
+            <a:spLocks noGrp="1"/>
+          </p:cNvSpPr>
+          <p:nvPr>
+            <p:ph type="sldNum" sz="quarter" idx="12"/>
+          </p:nvPr>
+        </p:nvSpPr>
+        <p:spPr/>
+        <p:txBody>
+          <a:bodyPr/>
+          <a:lstStyle/>
+          <a:p>
+            <a:fld id="{2BA602F1-D8B6-4D7F-AE46-BA4CF4319B0F}" type="slidenum">
+              <a:rPr lang="en-US" smtClean="0"/>
+              <a:t>3</a:t>
+            </a:fld>
+            <a:endParaRPr lang="en-US"/>
+          </a:p>
+        </p:txBody>
+      </p:sp>
     </p:spTree>
     <p:extLst>
       <p:ext uri="{BB962C8B-B14F-4D97-AF65-F5344CB8AC3E}">
@@ -21668,6 +22790,35 @@
           </a:prstGeom>
         </p:spPr>
       </p:pic>
+      <p:sp>
+        <p:nvSpPr>
+          <p:cNvPr id="3" name="Slide Number Placeholder 2">
+            <a:extLst>
+              <a:ext uri="{FF2B5EF4-FFF2-40B4-BE49-F238E27FC236}">
+                <a16:creationId xmlns:a16="http://schemas.microsoft.com/office/drawing/2014/main" id="{39105842-7E51-A962-EA8D-7C70E991D28D}"/>
+              </a:ext>
+            </a:extLst>
+          </p:cNvPr>
+          <p:cNvSpPr>
+            <a:spLocks noGrp="1"/>
+          </p:cNvSpPr>
+          <p:nvPr>
+            <p:ph type="sldNum" sz="quarter" idx="12"/>
+          </p:nvPr>
+        </p:nvSpPr>
+        <p:spPr/>
+        <p:txBody>
+          <a:bodyPr/>
+          <a:lstStyle/>
+          <a:p>
+            <a:fld id="{2BA602F1-D8B6-4D7F-AE46-BA4CF4319B0F}" type="slidenum">
+              <a:rPr lang="en-US" smtClean="0"/>
+              <a:t>4</a:t>
+            </a:fld>
+            <a:endParaRPr lang="en-US"/>
+          </a:p>
+        </p:txBody>
+      </p:sp>
     </p:spTree>
     <p:extLst>
       <p:ext uri="{BB962C8B-B14F-4D97-AF65-F5344CB8AC3E}">
@@ -23908,6 +25059,35 @@
           </a:prstGeom>
         </p:spPr>
       </p:pic>
+      <p:sp>
+        <p:nvSpPr>
+          <p:cNvPr id="2" name="Slide Number Placeholder 1">
+            <a:extLst>
+              <a:ext uri="{FF2B5EF4-FFF2-40B4-BE49-F238E27FC236}">
+                <a16:creationId xmlns:a16="http://schemas.microsoft.com/office/drawing/2014/main" id="{17DA2209-08F6-E826-C9B3-E6CA5B4C9007}"/>
+              </a:ext>
+            </a:extLst>
+          </p:cNvPr>
+          <p:cNvSpPr>
+            <a:spLocks noGrp="1"/>
+          </p:cNvSpPr>
+          <p:nvPr>
+            <p:ph type="sldNum" sz="quarter" idx="12"/>
+          </p:nvPr>
+        </p:nvSpPr>
+        <p:spPr/>
+        <p:txBody>
+          <a:bodyPr/>
+          <a:lstStyle/>
+          <a:p>
+            <a:fld id="{2BA602F1-D8B6-4D7F-AE46-BA4CF4319B0F}" type="slidenum">
+              <a:rPr lang="en-US" smtClean="0"/>
+              <a:t>5</a:t>
+            </a:fld>
+            <a:endParaRPr lang="en-US"/>
+          </a:p>
+        </p:txBody>
+      </p:sp>
     </p:spTree>
     <p:extLst>
       <p:ext uri="{BB962C8B-B14F-4D97-AF65-F5344CB8AC3E}">
@@ -26105,6 +27285,35 @@
           </a:prstGeom>
         </p:spPr>
       </p:pic>
+      <p:sp>
+        <p:nvSpPr>
+          <p:cNvPr id="3" name="Slide Number Placeholder 2">
+            <a:extLst>
+              <a:ext uri="{FF2B5EF4-FFF2-40B4-BE49-F238E27FC236}">
+                <a16:creationId xmlns:a16="http://schemas.microsoft.com/office/drawing/2014/main" id="{5637920E-1462-5016-C491-605FAE3D2E9C}"/>
+              </a:ext>
+            </a:extLst>
+          </p:cNvPr>
+          <p:cNvSpPr>
+            <a:spLocks noGrp="1"/>
+          </p:cNvSpPr>
+          <p:nvPr>
+            <p:ph type="sldNum" sz="quarter" idx="12"/>
+          </p:nvPr>
+        </p:nvSpPr>
+        <p:spPr/>
+        <p:txBody>
+          <a:bodyPr/>
+          <a:lstStyle/>
+          <a:p>
+            <a:fld id="{2BA602F1-D8B6-4D7F-AE46-BA4CF4319B0F}" type="slidenum">
+              <a:rPr lang="en-US" smtClean="0"/>
+              <a:t>6</a:t>
+            </a:fld>
+            <a:endParaRPr lang="en-US"/>
+          </a:p>
+        </p:txBody>
+      </p:sp>
     </p:spTree>
     <p:extLst>
       <p:ext uri="{BB962C8B-B14F-4D97-AF65-F5344CB8AC3E}">
@@ -27140,6 +28349,35 @@
           </a:prstGeom>
         </p:spPr>
       </p:pic>
+      <p:sp>
+        <p:nvSpPr>
+          <p:cNvPr id="3" name="Slide Number Placeholder 2">
+            <a:extLst>
+              <a:ext uri="{FF2B5EF4-FFF2-40B4-BE49-F238E27FC236}">
+                <a16:creationId xmlns:a16="http://schemas.microsoft.com/office/drawing/2014/main" id="{8E9F14E2-276C-2275-77DC-2D3B4D6CA74F}"/>
+              </a:ext>
+            </a:extLst>
+          </p:cNvPr>
+          <p:cNvSpPr>
+            <a:spLocks noGrp="1"/>
+          </p:cNvSpPr>
+          <p:nvPr>
+            <p:ph type="sldNum" sz="quarter" idx="12"/>
+          </p:nvPr>
+        </p:nvSpPr>
+        <p:spPr/>
+        <p:txBody>
+          <a:bodyPr/>
+          <a:lstStyle/>
+          <a:p>
+            <a:fld id="{2BA602F1-D8B6-4D7F-AE46-BA4CF4319B0F}" type="slidenum">
+              <a:rPr lang="en-US" smtClean="0"/>
+              <a:t>7</a:t>
+            </a:fld>
+            <a:endParaRPr lang="en-US"/>
+          </a:p>
+        </p:txBody>
+      </p:sp>
     </p:spTree>
     <p:extLst>
       <p:ext uri="{BB962C8B-B14F-4D97-AF65-F5344CB8AC3E}">
@@ -29706,6 +30944,35 @@
           </p:spPr>
         </p:pic>
       </p:grpSp>
+      <p:sp>
+        <p:nvSpPr>
+          <p:cNvPr id="3" name="Slide Number Placeholder 2">
+            <a:extLst>
+              <a:ext uri="{FF2B5EF4-FFF2-40B4-BE49-F238E27FC236}">
+                <a16:creationId xmlns:a16="http://schemas.microsoft.com/office/drawing/2014/main" id="{2A784150-AE0D-C670-FF1C-CE9374A71A78}"/>
+              </a:ext>
+            </a:extLst>
+          </p:cNvPr>
+          <p:cNvSpPr>
+            <a:spLocks noGrp="1"/>
+          </p:cNvSpPr>
+          <p:nvPr>
+            <p:ph type="sldNum" sz="quarter" idx="12"/>
+          </p:nvPr>
+        </p:nvSpPr>
+        <p:spPr/>
+        <p:txBody>
+          <a:bodyPr/>
+          <a:lstStyle/>
+          <a:p>
+            <a:fld id="{2BA602F1-D8B6-4D7F-AE46-BA4CF4319B0F}" type="slidenum">
+              <a:rPr lang="en-US" smtClean="0"/>
+              <a:t>8</a:t>
+            </a:fld>
+            <a:endParaRPr lang="en-US"/>
+          </a:p>
+        </p:txBody>
+      </p:sp>
     </p:spTree>
     <p:extLst>
       <p:ext uri="{BB962C8B-B14F-4D97-AF65-F5344CB8AC3E}">
@@ -31284,6 +32551,35 @@
               </a:rPr>
               <a:t>Do some other thing</a:t>
             </a:r>
+          </a:p>
+        </p:txBody>
+      </p:sp>
+      <p:sp>
+        <p:nvSpPr>
+          <p:cNvPr id="3" name="Slide Number Placeholder 2">
+            <a:extLst>
+              <a:ext uri="{FF2B5EF4-FFF2-40B4-BE49-F238E27FC236}">
+                <a16:creationId xmlns:a16="http://schemas.microsoft.com/office/drawing/2014/main" id="{F2645111-F262-EE9E-3560-A5DA8B8A443E}"/>
+              </a:ext>
+            </a:extLst>
+          </p:cNvPr>
+          <p:cNvSpPr>
+            <a:spLocks noGrp="1"/>
+          </p:cNvSpPr>
+          <p:nvPr>
+            <p:ph type="sldNum" sz="quarter" idx="12"/>
+          </p:nvPr>
+        </p:nvSpPr>
+        <p:spPr/>
+        <p:txBody>
+          <a:bodyPr/>
+          <a:lstStyle/>
+          <a:p>
+            <a:fld id="{2BA602F1-D8B6-4D7F-AE46-BA4CF4319B0F}" type="slidenum">
+              <a:rPr lang="en-US" smtClean="0"/>
+              <a:t>9</a:t>
+            </a:fld>
+            <a:endParaRPr lang="en-US"/>
           </a:p>
         </p:txBody>
       </p:sp>
